--- a/docs/CodeOrigin_presentation.pptx
+++ b/docs/CodeOrigin_presentation.pptx
@@ -18,9 +18,10 @@
     <p:sldId id="266" r:id="rId12"/>
     <p:sldId id="267" r:id="rId13"/>
     <p:sldId id="268" r:id="rId14"/>
+    <p:sldId id="269" r:id="rId15"/>
   </p:sldIdLst>
   <p:notesMasterIdLst>
-    <p:notesMasterId r:id="rId15"/>
+    <p:notesMasterId r:id="rId16"/>
   </p:notesMasterIdLst>
   <p:sldSz cx="12192000" cy="6858000"/>
   <p:notesSz cx="6858000" cy="12192000"/>
@@ -1147,7 +1148,7 @@
           <a:p>
             <a:r>
               <a:rPr lang="en-US" dirty="0"/>
-              <a:t>Each failure was found in real output and traced to a cause. (1) Retrieval missed an unusual phrasing: for "why was 1.0.0 removed from PyPI" it fetched unrelated issues and both models invented a reason. (2) History can distract on code-only questions: llama2 said the key derivation is hmac and cited an unrelated commit. (3) The refusal gate G2 did not fire for on-topic unanswerable questions; codellama invented a customer name. (4) Models rarely cite the gold source. (5) The automatic score is generous: DeepSeek rated 42 of 143 full-credit answers as only partly right or wrong; agreement kappa 0.75. Human check: I graded 18 factual rows by hand and agreed 18 of 18; the 16 technical rows are LLM-judged only.</a:t>
+              <a:t>Each task maps to a question category on the real repository. Numbers are correctness in the RAG mode (code_history), automatic score then DeepSeek judge in brackets. With 2 to 10 questions per task a gap under 0.10 is a tie. Explanation, bug analysis and dependency links: llama2 and codellama tie, starcoder2 far behind. Code retrieval: codellama leads (4 questions). RAG overall: llama2 and codellama tie on accuracy; llama2 is twice as fast, codellama hallucinated less. Code generation and refactoring were not evaluated because the system answers questions and does not write code, so there is also no test-pass rate; do not invent numbers.</a:t>
             </a:r>
             <a:endParaRPr lang="en-US" dirty="0"/>
           </a:p>
@@ -1235,7 +1236,7 @@
           <a:p>
             <a:r>
               <a:rPr lang="en-US" dirty="0"/>
-              <a:t>Open the website. Show: Ask (a real question with citations, the evidence chain and the guardrail trace), Repositories (the indexed repos), Evaluation (the held-out run and the which-model-for-what panel), and the slides. Suggested demo question on itsdangerous: "Why does itsdangerous keep SHA-1 as its default digest?"</a:t>
+              <a:t>Each failure was found in real output and traced to a cause. (1) Retrieval missed an unusual phrasing: for "why was 1.0.0 removed from PyPI" it fetched unrelated issues and both models invented a reason. (2) History can distract on code-only questions: llama2 said the key derivation is hmac and cited an unrelated commit. (3) The refusal gate G2 did not fire for on-topic unanswerable questions; codellama invented a customer name. (4) Models rarely cite the gold source. (5) The automatic score is generous: DeepSeek rated 42 of 143 full-credit answers as only partly right or wrong; agreement kappa 0.75. Human check: I graded 18 factual rows by hand and agreed 18 of 18; the 16 technical rows are LLM-judged only.</a:t>
             </a:r>
             <a:endParaRPr lang="en-US" dirty="0"/>
           </a:p>
@@ -1323,7 +1324,7 @@
           <a:p>
             <a:r>
               <a:rPr lang="en-US" dirty="0"/>
-              <a:t>Be ready to explain: the research question, the four modes and why oracle exists, the decision rule, why starcoder2 is inconclusive (it cannot use evidence even when given it), what went wrong (retrieval misses, refusal gate, history distracting on code questions), and what is not validated (human grading covers factual rows only).</a:t>
+              <a:t>Open the website. Show: Ask (a real question with citations, the evidence chain and the guardrail trace), Repositories (the indexed repos), Evaluation (the held-out run and the which-model-for-what panel), and the slides. Suggested demo question on itsdangerous: "Why does itsdangerous keep SHA-1 as its default digest?"</a:t>
             </a:r>
             <a:endParaRPr lang="en-US" dirty="0"/>
           </a:p>
@@ -1347,6 +1348,94 @@
             <a:fld id="{F7021451-1387-4CA6-816F-3879F97B5CBC}" type="slidenum">
               <a:rPr lang="en-US"/>
               <a:t>13</a:t>
+            </a:fld>
+            <a:endParaRPr lang="en-US"/>
+          </a:p>
+        </p:txBody>
+      </p:sp>
+    </p:spTree>
+    <p:extLst>
+      <p:ext uri="{BB962C8B-B14F-4D97-AF65-F5344CB8AC3E}">
+        <p14:creationId xmlns:p14="http://schemas.microsoft.com/office/powerpoint/2010/main" val="1024086991"/>
+      </p:ext>
+    </p:extLst>
+  </p:cSld>
+  <p:clrMapOvr>
+    <a:masterClrMapping/>
+  </p:clrMapOvr>
+</p:notes>
+</file>
+
+<file path=ppt/notesSlides/notesSlide14.xml><?xml version="1.0" encoding="utf-8"?>
+<p:notes xmlns:a="http://schemas.openxmlformats.org/drawingml/2006/main" xmlns:r="http://schemas.openxmlformats.org/officeDocument/2006/relationships" xmlns:p="http://schemas.openxmlformats.org/presentationml/2006/main">
+  <p:cSld>
+    <p:spTree>
+      <p:nvGrpSpPr>
+        <p:cNvPr id="1" name=""/>
+        <p:cNvGrpSpPr/>
+        <p:nvPr/>
+      </p:nvGrpSpPr>
+      <p:grpSpPr>
+        <a:xfrm>
+          <a:off x="0" y="0"/>
+          <a:ext cx="0" cy="0"/>
+          <a:chOff x="0" y="0"/>
+          <a:chExt cx="0" cy="0"/>
+        </a:xfrm>
+      </p:grpSpPr>
+      <p:sp>
+        <p:nvSpPr>
+          <p:cNvPr id="2" name="Slide Image Placeholder 1"/>
+          <p:cNvSpPr>
+            <a:spLocks noGrp="1" noRot="1" noChangeAspect="1"/>
+          </p:cNvSpPr>
+          <p:nvPr>
+            <p:ph type="sldImg"/>
+          </p:nvPr>
+        </p:nvSpPr>
+        <p:spPr/>
+      </p:sp>
+      <p:sp>
+        <p:nvSpPr>
+          <p:cNvPr id="3" name="Notes Placeholder 2"/>
+          <p:cNvSpPr>
+            <a:spLocks noGrp="1"/>
+          </p:cNvSpPr>
+          <p:nvPr>
+            <p:ph type="body" idx="1"/>
+          </p:nvPr>
+        </p:nvSpPr>
+        <p:spPr/>
+        <p:txBody>
+          <a:bodyPr/>
+          <a:lstStyle/>
+          <a:p>
+            <a:r>
+              <a:rPr lang="en-US" dirty="0"/>
+              <a:t>Be ready to explain: the research question, the four modes and why oracle exists, the decision rule, why starcoder2 is inconclusive (it cannot use evidence even when given it), what went wrong (retrieval misses, refusal gate, history distracting on code questions), and what is not validated (human grading covers factual rows only).</a:t>
+            </a:r>
+            <a:endParaRPr lang="en-US" dirty="0"/>
+          </a:p>
+        </p:txBody>
+      </p:sp>
+      <p:sp>
+        <p:nvSpPr>
+          <p:cNvPr id="4" name="Slide Number Placeholder 3"/>
+          <p:cNvSpPr>
+            <a:spLocks noGrp="1"/>
+          </p:cNvSpPr>
+          <p:nvPr>
+            <p:ph type="sldNum" sz="quarter" idx="10"/>
+          </p:nvPr>
+        </p:nvSpPr>
+        <p:spPr/>
+        <p:txBody>
+          <a:bodyPr/>
+          <a:lstStyle/>
+          <a:p>
+            <a:fld id="{F7021451-1387-4CA6-816F-3879F97B5CBC}" type="slidenum">
+              <a:rPr lang="en-US"/>
+              <a:t>14</a:t>
             </a:fld>
             <a:endParaRPr lang="en-US"/>
           </a:p>
@@ -6589,7 +6678,7 @@
                   <a:srgbClr val="0071E3"/>
                 </a:solidFill>
               </a:rPr>
-              <a:t>FAILURE ANALYSIS</a:t>
+              <a:t>WHICH MODEL FOR WHICH TASK</a:t>
             </a:r>
             <a:endParaRPr lang="en-US" sz="1200" dirty="0"/>
           </a:p>
@@ -6625,7 +6714,7 @@
                   <a:srgbClr val="1D1D1F"/>
                 </a:solidFill>
               </a:rPr>
-              <a:t>Where it goes wrong</a:t>
+              <a:t>Which model is best for what?</a:t>
             </a:r>
             <a:endParaRPr lang="en-US" sz="3600" dirty="0"/>
           </a:p>
@@ -6634,6 +6723,3677 @@
       <p:graphicFrame>
         <p:nvGraphicFramePr>
           <p:cNvPr id="12" name="Table 0"/>
+          <p:cNvGraphicFramePr>
+            <a:graphicFrameLocks noGrp="1"/>
+          </p:cNvGraphicFramePr>
+          <p:nvPr>
+            <p:extLst>
+              <p:ext uri="{D42A27DB-BD31-4B8C-83A1-F6EECF244321}">
+                <p14:modId xmlns:p14="http://schemas.microsoft.com/office/powerpoint/2010/main" val="1579011935"/>
+              </p:ext>
+            </p:extLst>
+          </p:nvPr>
+        </p:nvGraphicFramePr>
+        <p:xfrm>
+          <a:off x="548640" y="1371600"/>
+          <a:ext cx="11091672" cy="914400"/>
+        </p:xfrm>
+        <a:graphic>
+          <a:graphicData uri="http://schemas.openxmlformats.org/drawingml/2006/table">
+            <a:tbl>
+              <a:tblPr/>
+              <a:tblGrid>
+                <a:gridCol w="3657600"/>
+                <a:gridCol w="502920"/>
+                <a:gridCol w="1737360"/>
+                <a:gridCol w="1737360"/>
+                <a:gridCol w="1600200"/>
+                <a:gridCol w="1856232"/>
+              </a:tblGrid>
+              <a:tr h="347472">
+                <a:tc>
+                  <a:txBody>
+                    <a:bodyPr/>
+                    <a:lstStyle/>
+                    <a:p>
+                      <a:pPr indent="0" marL="0">
+                        <a:buNone/>
+                      </a:pPr>
+                      <a:r>
+                        <a:rPr lang="en-US" sz="1200" b="1" dirty="0">
+                          <a:solidFill>
+                            <a:srgbClr val="55555B"/>
+                          </a:solidFill>
+                          <a:latin typeface="Calibri" pitchFamily="34" charset="0"/>
+                          <a:ea typeface="Calibri" pitchFamily="34" charset="-122"/>
+                          <a:cs typeface="Calibri" pitchFamily="34" charset="-120"/>
+                        </a:rPr>
+                        <a:t>Task</a:t>
+                      </a:r>
+                      <a:endParaRPr lang="en-US" sz="1200" dirty="0">
+                        <a:latin typeface="Calibri" charset="0"/>
+                        <a:ea typeface="Calibri" charset="0"/>
+                        <a:cs typeface="Calibri" charset="0"/>
+                      </a:endParaRPr>
+                    </a:p>
+                  </a:txBody>
+                  <a:tcPr marL="91440" marR="91440" marT="45720" marB="45720" anchor="ctr">
+                    <a:lnL w="9525" cap="flat" cmpd="sng" algn="ctr">
+                      <a:solidFill>
+                        <a:srgbClr val="D9D9DE"/>
+                      </a:solidFill>
+                      <a:prstDash val="solid"/>
+                      <a:round/>
+                      <a:headEnd type="none" w="med" len="med"/>
+                      <a:tailEnd type="none" w="med" len="med"/>
+                    </a:lnL>
+                    <a:lnR w="9525" cap="flat" cmpd="sng" algn="ctr">
+                      <a:solidFill>
+                        <a:srgbClr val="D9D9DE"/>
+                      </a:solidFill>
+                      <a:prstDash val="solid"/>
+                      <a:round/>
+                      <a:headEnd type="none" w="med" len="med"/>
+                      <a:tailEnd type="none" w="med" len="med"/>
+                    </a:lnR>
+                    <a:lnT w="9525" cap="flat" cmpd="sng" algn="ctr">
+                      <a:solidFill>
+                        <a:srgbClr val="D9D9DE"/>
+                      </a:solidFill>
+                      <a:prstDash val="solid"/>
+                      <a:round/>
+                      <a:headEnd type="none" w="med" len="med"/>
+                      <a:tailEnd type="none" w="med" len="med"/>
+                    </a:lnT>
+                    <a:lnB w="9525" cap="flat" cmpd="sng" algn="ctr">
+                      <a:solidFill>
+                        <a:srgbClr val="D9D9DE"/>
+                      </a:solidFill>
+                      <a:prstDash val="solid"/>
+                      <a:round/>
+                      <a:headEnd type="none" w="med" len="med"/>
+                      <a:tailEnd type="none" w="med" len="med"/>
+                    </a:lnB>
+                    <a:solidFill>
+                      <a:srgbClr val="F5F5F7"/>
+                    </a:solidFill>
+                  </a:tcPr>
+                </a:tc>
+                <a:tc>
+                  <a:txBody>
+                    <a:bodyPr/>
+                    <a:lstStyle/>
+                    <a:p>
+                      <a:pPr indent="0" marL="0">
+                        <a:buNone/>
+                      </a:pPr>
+                      <a:r>
+                        <a:rPr lang="en-US" sz="1200" b="1" dirty="0">
+                          <a:solidFill>
+                            <a:srgbClr val="55555B"/>
+                          </a:solidFill>
+                          <a:latin typeface="Calibri" pitchFamily="34" charset="0"/>
+                          <a:ea typeface="Calibri" pitchFamily="34" charset="-122"/>
+                          <a:cs typeface="Calibri" pitchFamily="34" charset="-120"/>
+                        </a:rPr>
+                        <a:t>n</a:t>
+                      </a:r>
+                      <a:endParaRPr lang="en-US" sz="1200" dirty="0">
+                        <a:latin typeface="Calibri" charset="0"/>
+                        <a:ea typeface="Calibri" charset="0"/>
+                        <a:cs typeface="Calibri" charset="0"/>
+                      </a:endParaRPr>
+                    </a:p>
+                  </a:txBody>
+                  <a:tcPr marL="91440" marR="91440" marT="45720" marB="45720" anchor="ctr">
+                    <a:lnL w="9525" cap="flat" cmpd="sng" algn="ctr">
+                      <a:solidFill>
+                        <a:srgbClr val="D9D9DE"/>
+                      </a:solidFill>
+                      <a:prstDash val="solid"/>
+                      <a:round/>
+                      <a:headEnd type="none" w="med" len="med"/>
+                      <a:tailEnd type="none" w="med" len="med"/>
+                    </a:lnL>
+                    <a:lnR w="9525" cap="flat" cmpd="sng" algn="ctr">
+                      <a:solidFill>
+                        <a:srgbClr val="D9D9DE"/>
+                      </a:solidFill>
+                      <a:prstDash val="solid"/>
+                      <a:round/>
+                      <a:headEnd type="none" w="med" len="med"/>
+                      <a:tailEnd type="none" w="med" len="med"/>
+                    </a:lnR>
+                    <a:lnT w="9525" cap="flat" cmpd="sng" algn="ctr">
+                      <a:solidFill>
+                        <a:srgbClr val="D9D9DE"/>
+                      </a:solidFill>
+                      <a:prstDash val="solid"/>
+                      <a:round/>
+                      <a:headEnd type="none" w="med" len="med"/>
+                      <a:tailEnd type="none" w="med" len="med"/>
+                    </a:lnT>
+                    <a:lnB w="9525" cap="flat" cmpd="sng" algn="ctr">
+                      <a:solidFill>
+                        <a:srgbClr val="D9D9DE"/>
+                      </a:solidFill>
+                      <a:prstDash val="solid"/>
+                      <a:round/>
+                      <a:headEnd type="none" w="med" len="med"/>
+                      <a:tailEnd type="none" w="med" len="med"/>
+                    </a:lnB>
+                    <a:solidFill>
+                      <a:srgbClr val="F5F5F7"/>
+                    </a:solidFill>
+                  </a:tcPr>
+                </a:tc>
+                <a:tc>
+                  <a:txBody>
+                    <a:bodyPr/>
+                    <a:lstStyle/>
+                    <a:p>
+                      <a:pPr indent="0" marL="0">
+                        <a:buNone/>
+                      </a:pPr>
+                      <a:r>
+                        <a:rPr lang="en-US" sz="1200" b="1" dirty="0">
+                          <a:solidFill>
+                            <a:srgbClr val="55555B"/>
+                          </a:solidFill>
+                          <a:latin typeface="Calibri" pitchFamily="34" charset="0"/>
+                          <a:ea typeface="Calibri" pitchFamily="34" charset="-122"/>
+                          <a:cs typeface="Calibri" pitchFamily="34" charset="-120"/>
+                        </a:rPr>
+                        <a:t>llama2</a:t>
+                      </a:r>
+                      <a:endParaRPr lang="en-US" sz="1200" dirty="0">
+                        <a:latin typeface="Calibri" charset="0"/>
+                        <a:ea typeface="Calibri" charset="0"/>
+                        <a:cs typeface="Calibri" charset="0"/>
+                      </a:endParaRPr>
+                    </a:p>
+                  </a:txBody>
+                  <a:tcPr marL="91440" marR="91440" marT="45720" marB="45720" anchor="ctr">
+                    <a:lnL w="9525" cap="flat" cmpd="sng" algn="ctr">
+                      <a:solidFill>
+                        <a:srgbClr val="D9D9DE"/>
+                      </a:solidFill>
+                      <a:prstDash val="solid"/>
+                      <a:round/>
+                      <a:headEnd type="none" w="med" len="med"/>
+                      <a:tailEnd type="none" w="med" len="med"/>
+                    </a:lnL>
+                    <a:lnR w="9525" cap="flat" cmpd="sng" algn="ctr">
+                      <a:solidFill>
+                        <a:srgbClr val="D9D9DE"/>
+                      </a:solidFill>
+                      <a:prstDash val="solid"/>
+                      <a:round/>
+                      <a:headEnd type="none" w="med" len="med"/>
+                      <a:tailEnd type="none" w="med" len="med"/>
+                    </a:lnR>
+                    <a:lnT w="9525" cap="flat" cmpd="sng" algn="ctr">
+                      <a:solidFill>
+                        <a:srgbClr val="D9D9DE"/>
+                      </a:solidFill>
+                      <a:prstDash val="solid"/>
+                      <a:round/>
+                      <a:headEnd type="none" w="med" len="med"/>
+                      <a:tailEnd type="none" w="med" len="med"/>
+                    </a:lnT>
+                    <a:lnB w="9525" cap="flat" cmpd="sng" algn="ctr">
+                      <a:solidFill>
+                        <a:srgbClr val="D9D9DE"/>
+                      </a:solidFill>
+                      <a:prstDash val="solid"/>
+                      <a:round/>
+                      <a:headEnd type="none" w="med" len="med"/>
+                      <a:tailEnd type="none" w="med" len="med"/>
+                    </a:lnB>
+                    <a:solidFill>
+                      <a:srgbClr val="F5F5F7"/>
+                    </a:solidFill>
+                  </a:tcPr>
+                </a:tc>
+                <a:tc>
+                  <a:txBody>
+                    <a:bodyPr/>
+                    <a:lstStyle/>
+                    <a:p>
+                      <a:pPr indent="0" marL="0">
+                        <a:buNone/>
+                      </a:pPr>
+                      <a:r>
+                        <a:rPr lang="en-US" sz="1200" b="1" dirty="0">
+                          <a:solidFill>
+                            <a:srgbClr val="55555B"/>
+                          </a:solidFill>
+                          <a:latin typeface="Calibri" pitchFamily="34" charset="0"/>
+                          <a:ea typeface="Calibri" pitchFamily="34" charset="-122"/>
+                          <a:cs typeface="Calibri" pitchFamily="34" charset="-120"/>
+                        </a:rPr>
+                        <a:t>codellama:7b</a:t>
+                      </a:r>
+                      <a:endParaRPr lang="en-US" sz="1200" dirty="0">
+                        <a:latin typeface="Calibri" charset="0"/>
+                        <a:ea typeface="Calibri" charset="0"/>
+                        <a:cs typeface="Calibri" charset="0"/>
+                      </a:endParaRPr>
+                    </a:p>
+                  </a:txBody>
+                  <a:tcPr marL="91440" marR="91440" marT="45720" marB="45720" anchor="ctr">
+                    <a:lnL w="9525" cap="flat" cmpd="sng" algn="ctr">
+                      <a:solidFill>
+                        <a:srgbClr val="D9D9DE"/>
+                      </a:solidFill>
+                      <a:prstDash val="solid"/>
+                      <a:round/>
+                      <a:headEnd type="none" w="med" len="med"/>
+                      <a:tailEnd type="none" w="med" len="med"/>
+                    </a:lnL>
+                    <a:lnR w="9525" cap="flat" cmpd="sng" algn="ctr">
+                      <a:solidFill>
+                        <a:srgbClr val="D9D9DE"/>
+                      </a:solidFill>
+                      <a:prstDash val="solid"/>
+                      <a:round/>
+                      <a:headEnd type="none" w="med" len="med"/>
+                      <a:tailEnd type="none" w="med" len="med"/>
+                    </a:lnR>
+                    <a:lnT w="9525" cap="flat" cmpd="sng" algn="ctr">
+                      <a:solidFill>
+                        <a:srgbClr val="D9D9DE"/>
+                      </a:solidFill>
+                      <a:prstDash val="solid"/>
+                      <a:round/>
+                      <a:headEnd type="none" w="med" len="med"/>
+                      <a:tailEnd type="none" w="med" len="med"/>
+                    </a:lnT>
+                    <a:lnB w="9525" cap="flat" cmpd="sng" algn="ctr">
+                      <a:solidFill>
+                        <a:srgbClr val="D9D9DE"/>
+                      </a:solidFill>
+                      <a:prstDash val="solid"/>
+                      <a:round/>
+                      <a:headEnd type="none" w="med" len="med"/>
+                      <a:tailEnd type="none" w="med" len="med"/>
+                    </a:lnB>
+                    <a:solidFill>
+                      <a:srgbClr val="F5F5F7"/>
+                    </a:solidFill>
+                  </a:tcPr>
+                </a:tc>
+                <a:tc>
+                  <a:txBody>
+                    <a:bodyPr/>
+                    <a:lstStyle/>
+                    <a:p>
+                      <a:pPr indent="0" marL="0">
+                        <a:buNone/>
+                      </a:pPr>
+                      <a:r>
+                        <a:rPr lang="en-US" sz="1200" b="1" dirty="0">
+                          <a:solidFill>
+                            <a:srgbClr val="55555B"/>
+                          </a:solidFill>
+                          <a:latin typeface="Calibri" pitchFamily="34" charset="0"/>
+                          <a:ea typeface="Calibri" pitchFamily="34" charset="-122"/>
+                          <a:cs typeface="Calibri" pitchFamily="34" charset="-120"/>
+                        </a:rPr>
+                        <a:t>starcoder2:3b</a:t>
+                      </a:r>
+                      <a:endParaRPr lang="en-US" sz="1200" dirty="0">
+                        <a:latin typeface="Calibri" charset="0"/>
+                        <a:ea typeface="Calibri" charset="0"/>
+                        <a:cs typeface="Calibri" charset="0"/>
+                      </a:endParaRPr>
+                    </a:p>
+                  </a:txBody>
+                  <a:tcPr marL="91440" marR="91440" marT="45720" marB="45720" anchor="ctr">
+                    <a:lnL w="9525" cap="flat" cmpd="sng" algn="ctr">
+                      <a:solidFill>
+                        <a:srgbClr val="D9D9DE"/>
+                      </a:solidFill>
+                      <a:prstDash val="solid"/>
+                      <a:round/>
+                      <a:headEnd type="none" w="med" len="med"/>
+                      <a:tailEnd type="none" w="med" len="med"/>
+                    </a:lnL>
+                    <a:lnR w="9525" cap="flat" cmpd="sng" algn="ctr">
+                      <a:solidFill>
+                        <a:srgbClr val="D9D9DE"/>
+                      </a:solidFill>
+                      <a:prstDash val="solid"/>
+                      <a:round/>
+                      <a:headEnd type="none" w="med" len="med"/>
+                      <a:tailEnd type="none" w="med" len="med"/>
+                    </a:lnR>
+                    <a:lnT w="9525" cap="flat" cmpd="sng" algn="ctr">
+                      <a:solidFill>
+                        <a:srgbClr val="D9D9DE"/>
+                      </a:solidFill>
+                      <a:prstDash val="solid"/>
+                      <a:round/>
+                      <a:headEnd type="none" w="med" len="med"/>
+                      <a:tailEnd type="none" w="med" len="med"/>
+                    </a:lnT>
+                    <a:lnB w="9525" cap="flat" cmpd="sng" algn="ctr">
+                      <a:solidFill>
+                        <a:srgbClr val="D9D9DE"/>
+                      </a:solidFill>
+                      <a:prstDash val="solid"/>
+                      <a:round/>
+                      <a:headEnd type="none" w="med" len="med"/>
+                      <a:tailEnd type="none" w="med" len="med"/>
+                    </a:lnB>
+                    <a:solidFill>
+                      <a:srgbClr val="F5F5F7"/>
+                    </a:solidFill>
+                  </a:tcPr>
+                </a:tc>
+                <a:tc>
+                  <a:txBody>
+                    <a:bodyPr/>
+                    <a:lstStyle/>
+                    <a:p>
+                      <a:pPr indent="0" marL="0">
+                        <a:buNone/>
+                      </a:pPr>
+                      <a:r>
+                        <a:rPr lang="en-US" sz="1200" b="1" dirty="0">
+                          <a:solidFill>
+                            <a:srgbClr val="55555B"/>
+                          </a:solidFill>
+                          <a:latin typeface="Calibri" pitchFamily="34" charset="0"/>
+                          <a:ea typeface="Calibri" pitchFamily="34" charset="-122"/>
+                          <a:cs typeface="Calibri" pitchFamily="34" charset="-120"/>
+                        </a:rPr>
+                        <a:t>Best</a:t>
+                      </a:r>
+                      <a:endParaRPr lang="en-US" sz="1200" dirty="0">
+                        <a:latin typeface="Calibri" charset="0"/>
+                        <a:ea typeface="Calibri" charset="0"/>
+                        <a:cs typeface="Calibri" charset="0"/>
+                      </a:endParaRPr>
+                    </a:p>
+                  </a:txBody>
+                  <a:tcPr marL="91440" marR="91440" marT="45720" marB="45720" anchor="ctr">
+                    <a:lnL w="9525" cap="flat" cmpd="sng" algn="ctr">
+                      <a:solidFill>
+                        <a:srgbClr val="D9D9DE"/>
+                      </a:solidFill>
+                      <a:prstDash val="solid"/>
+                      <a:round/>
+                      <a:headEnd type="none" w="med" len="med"/>
+                      <a:tailEnd type="none" w="med" len="med"/>
+                    </a:lnL>
+                    <a:lnR w="9525" cap="flat" cmpd="sng" algn="ctr">
+                      <a:solidFill>
+                        <a:srgbClr val="D9D9DE"/>
+                      </a:solidFill>
+                      <a:prstDash val="solid"/>
+                      <a:round/>
+                      <a:headEnd type="none" w="med" len="med"/>
+                      <a:tailEnd type="none" w="med" len="med"/>
+                    </a:lnR>
+                    <a:lnT w="9525" cap="flat" cmpd="sng" algn="ctr">
+                      <a:solidFill>
+                        <a:srgbClr val="D9D9DE"/>
+                      </a:solidFill>
+                      <a:prstDash val="solid"/>
+                      <a:round/>
+                      <a:headEnd type="none" w="med" len="med"/>
+                      <a:tailEnd type="none" w="med" len="med"/>
+                    </a:lnT>
+                    <a:lnB w="9525" cap="flat" cmpd="sng" algn="ctr">
+                      <a:solidFill>
+                        <a:srgbClr val="D9D9DE"/>
+                      </a:solidFill>
+                      <a:prstDash val="solid"/>
+                      <a:round/>
+                      <a:headEnd type="none" w="med" len="med"/>
+                      <a:tailEnd type="none" w="med" len="med"/>
+                    </a:lnB>
+                    <a:solidFill>
+                      <a:srgbClr val="F5F5F7"/>
+                    </a:solidFill>
+                  </a:tcPr>
+                </a:tc>
+              </a:tr>
+              <a:tr h="457200">
+                <a:tc>
+                  <a:txBody>
+                    <a:bodyPr/>
+                    <a:lstStyle/>
+                    <a:p>
+                      <a:pPr indent="0" marL="0">
+                        <a:buNone/>
+                      </a:pPr>
+                      <a:r>
+                        <a:rPr lang="en-US" sz="1200" dirty="0">
+                          <a:solidFill>
+                            <a:srgbClr val="1D1D1F"/>
+                          </a:solidFill>
+                          <a:latin typeface="Calibri" pitchFamily="34" charset="0"/>
+                          <a:ea typeface="Calibri" pitchFamily="34" charset="-122"/>
+                          <a:cs typeface="Calibri" pitchFamily="34" charset="-120"/>
+                        </a:rPr>
+                        <a:t>Explanation (why was it built this way)</a:t>
+                      </a:r>
+                      <a:endParaRPr lang="en-US" sz="1200" dirty="0">
+                        <a:latin typeface="Calibri" charset="0"/>
+                        <a:ea typeface="Calibri" charset="0"/>
+                        <a:cs typeface="Calibri" charset="0"/>
+                      </a:endParaRPr>
+                    </a:p>
+                  </a:txBody>
+                  <a:tcPr marL="91440" marR="91440" marT="45720" marB="45720" anchor="ctr">
+                    <a:lnL w="9525" cap="flat" cmpd="sng" algn="ctr">
+                      <a:solidFill>
+                        <a:srgbClr val="D9D9DE"/>
+                      </a:solidFill>
+                      <a:prstDash val="solid"/>
+                      <a:round/>
+                      <a:headEnd type="none" w="med" len="med"/>
+                      <a:tailEnd type="none" w="med" len="med"/>
+                    </a:lnL>
+                    <a:lnR w="9525" cap="flat" cmpd="sng" algn="ctr">
+                      <a:solidFill>
+                        <a:srgbClr val="D9D9DE"/>
+                      </a:solidFill>
+                      <a:prstDash val="solid"/>
+                      <a:round/>
+                      <a:headEnd type="none" w="med" len="med"/>
+                      <a:tailEnd type="none" w="med" len="med"/>
+                    </a:lnR>
+                    <a:lnT w="9525" cap="flat" cmpd="sng" algn="ctr">
+                      <a:solidFill>
+                        <a:srgbClr val="D9D9DE"/>
+                      </a:solidFill>
+                      <a:prstDash val="solid"/>
+                      <a:round/>
+                      <a:headEnd type="none" w="med" len="med"/>
+                      <a:tailEnd type="none" w="med" len="med"/>
+                    </a:lnT>
+                    <a:lnB w="9525" cap="flat" cmpd="sng" algn="ctr">
+                      <a:solidFill>
+                        <a:srgbClr val="D9D9DE"/>
+                      </a:solidFill>
+                      <a:prstDash val="solid"/>
+                      <a:round/>
+                      <a:headEnd type="none" w="med" len="med"/>
+                      <a:tailEnd type="none" w="med" len="med"/>
+                    </a:lnB>
+                    <a:solidFill>
+                      <a:srgbClr val="FFFFFF"/>
+                    </a:solidFill>
+                  </a:tcPr>
+                </a:tc>
+                <a:tc>
+                  <a:txBody>
+                    <a:bodyPr/>
+                    <a:lstStyle/>
+                    <a:p>
+                      <a:pPr indent="0" marL="0">
+                        <a:buNone/>
+                      </a:pPr>
+                      <a:r>
+                        <a:rPr lang="en-US" sz="1200" dirty="0">
+                          <a:solidFill>
+                            <a:srgbClr val="1D1D1F"/>
+                          </a:solidFill>
+                          <a:latin typeface="Calibri" pitchFamily="34" charset="0"/>
+                          <a:ea typeface="Calibri" pitchFamily="34" charset="-122"/>
+                          <a:cs typeface="Calibri" pitchFamily="34" charset="-120"/>
+                        </a:rPr>
+                        <a:t>10</a:t>
+                      </a:r>
+                      <a:endParaRPr lang="en-US" sz="1200" dirty="0">
+                        <a:latin typeface="Calibri" charset="0"/>
+                        <a:ea typeface="Calibri" charset="0"/>
+                        <a:cs typeface="Calibri" charset="0"/>
+                      </a:endParaRPr>
+                    </a:p>
+                  </a:txBody>
+                  <a:tcPr marL="91440" marR="91440" marT="45720" marB="45720" anchor="ctr">
+                    <a:lnL w="9525" cap="flat" cmpd="sng" algn="ctr">
+                      <a:solidFill>
+                        <a:srgbClr val="D9D9DE"/>
+                      </a:solidFill>
+                      <a:prstDash val="solid"/>
+                      <a:round/>
+                      <a:headEnd type="none" w="med" len="med"/>
+                      <a:tailEnd type="none" w="med" len="med"/>
+                    </a:lnL>
+                    <a:lnR w="9525" cap="flat" cmpd="sng" algn="ctr">
+                      <a:solidFill>
+                        <a:srgbClr val="D9D9DE"/>
+                      </a:solidFill>
+                      <a:prstDash val="solid"/>
+                      <a:round/>
+                      <a:headEnd type="none" w="med" len="med"/>
+                      <a:tailEnd type="none" w="med" len="med"/>
+                    </a:lnR>
+                    <a:lnT w="9525" cap="flat" cmpd="sng" algn="ctr">
+                      <a:solidFill>
+                        <a:srgbClr val="D9D9DE"/>
+                      </a:solidFill>
+                      <a:prstDash val="solid"/>
+                      <a:round/>
+                      <a:headEnd type="none" w="med" len="med"/>
+                      <a:tailEnd type="none" w="med" len="med"/>
+                    </a:lnT>
+                    <a:lnB w="9525" cap="flat" cmpd="sng" algn="ctr">
+                      <a:solidFill>
+                        <a:srgbClr val="D9D9DE"/>
+                      </a:solidFill>
+                      <a:prstDash val="solid"/>
+                      <a:round/>
+                      <a:headEnd type="none" w="med" len="med"/>
+                      <a:tailEnd type="none" w="med" len="med"/>
+                    </a:lnB>
+                    <a:solidFill>
+                      <a:srgbClr val="FFFFFF"/>
+                    </a:solidFill>
+                  </a:tcPr>
+                </a:tc>
+                <a:tc>
+                  <a:txBody>
+                    <a:bodyPr/>
+                    <a:lstStyle/>
+                    <a:p>
+                      <a:pPr indent="0" marL="0">
+                        <a:buNone/>
+                      </a:pPr>
+                      <a:r>
+                        <a:rPr lang="en-US" sz="1200" dirty="0">
+                          <a:solidFill>
+                            <a:srgbClr val="1D1D1F"/>
+                          </a:solidFill>
+                          <a:latin typeface="Calibri" pitchFamily="34" charset="0"/>
+                          <a:ea typeface="Calibri" pitchFamily="34" charset="-122"/>
+                          <a:cs typeface="Calibri" pitchFamily="34" charset="-120"/>
+                        </a:rPr>
+                        <a:t>0.75 (0.50)</a:t>
+                      </a:r>
+                      <a:endParaRPr lang="en-US" sz="1200" dirty="0">
+                        <a:latin typeface="Calibri" charset="0"/>
+                        <a:ea typeface="Calibri" charset="0"/>
+                        <a:cs typeface="Calibri" charset="0"/>
+                      </a:endParaRPr>
+                    </a:p>
+                  </a:txBody>
+                  <a:tcPr marL="91440" marR="91440" marT="45720" marB="45720" anchor="ctr">
+                    <a:lnL w="9525" cap="flat" cmpd="sng" algn="ctr">
+                      <a:solidFill>
+                        <a:srgbClr val="D9D9DE"/>
+                      </a:solidFill>
+                      <a:prstDash val="solid"/>
+                      <a:round/>
+                      <a:headEnd type="none" w="med" len="med"/>
+                      <a:tailEnd type="none" w="med" len="med"/>
+                    </a:lnL>
+                    <a:lnR w="9525" cap="flat" cmpd="sng" algn="ctr">
+                      <a:solidFill>
+                        <a:srgbClr val="D9D9DE"/>
+                      </a:solidFill>
+                      <a:prstDash val="solid"/>
+                      <a:round/>
+                      <a:headEnd type="none" w="med" len="med"/>
+                      <a:tailEnd type="none" w="med" len="med"/>
+                    </a:lnR>
+                    <a:lnT w="9525" cap="flat" cmpd="sng" algn="ctr">
+                      <a:solidFill>
+                        <a:srgbClr val="D9D9DE"/>
+                      </a:solidFill>
+                      <a:prstDash val="solid"/>
+                      <a:round/>
+                      <a:headEnd type="none" w="med" len="med"/>
+                      <a:tailEnd type="none" w="med" len="med"/>
+                    </a:lnT>
+                    <a:lnB w="9525" cap="flat" cmpd="sng" algn="ctr">
+                      <a:solidFill>
+                        <a:srgbClr val="D9D9DE"/>
+                      </a:solidFill>
+                      <a:prstDash val="solid"/>
+                      <a:round/>
+                      <a:headEnd type="none" w="med" len="med"/>
+                      <a:tailEnd type="none" w="med" len="med"/>
+                    </a:lnB>
+                    <a:solidFill>
+                      <a:srgbClr val="FFFFFF"/>
+                    </a:solidFill>
+                  </a:tcPr>
+                </a:tc>
+                <a:tc>
+                  <a:txBody>
+                    <a:bodyPr/>
+                    <a:lstStyle/>
+                    <a:p>
+                      <a:pPr indent="0" marL="0">
+                        <a:buNone/>
+                      </a:pPr>
+                      <a:r>
+                        <a:rPr lang="en-US" sz="1200" dirty="0">
+                          <a:solidFill>
+                            <a:srgbClr val="1D1D1F"/>
+                          </a:solidFill>
+                          <a:latin typeface="Calibri" pitchFamily="34" charset="0"/>
+                          <a:ea typeface="Calibri" pitchFamily="34" charset="-122"/>
+                          <a:cs typeface="Calibri" pitchFamily="34" charset="-120"/>
+                        </a:rPr>
+                        <a:t>0.70 (0.45)</a:t>
+                      </a:r>
+                      <a:endParaRPr lang="en-US" sz="1200" dirty="0">
+                        <a:latin typeface="Calibri" charset="0"/>
+                        <a:ea typeface="Calibri" charset="0"/>
+                        <a:cs typeface="Calibri" charset="0"/>
+                      </a:endParaRPr>
+                    </a:p>
+                  </a:txBody>
+                  <a:tcPr marL="91440" marR="91440" marT="45720" marB="45720" anchor="ctr">
+                    <a:lnL w="9525" cap="flat" cmpd="sng" algn="ctr">
+                      <a:solidFill>
+                        <a:srgbClr val="D9D9DE"/>
+                      </a:solidFill>
+                      <a:prstDash val="solid"/>
+                      <a:round/>
+                      <a:headEnd type="none" w="med" len="med"/>
+                      <a:tailEnd type="none" w="med" len="med"/>
+                    </a:lnL>
+                    <a:lnR w="9525" cap="flat" cmpd="sng" algn="ctr">
+                      <a:solidFill>
+                        <a:srgbClr val="D9D9DE"/>
+                      </a:solidFill>
+                      <a:prstDash val="solid"/>
+                      <a:round/>
+                      <a:headEnd type="none" w="med" len="med"/>
+                      <a:tailEnd type="none" w="med" len="med"/>
+                    </a:lnR>
+                    <a:lnT w="9525" cap="flat" cmpd="sng" algn="ctr">
+                      <a:solidFill>
+                        <a:srgbClr val="D9D9DE"/>
+                      </a:solidFill>
+                      <a:prstDash val="solid"/>
+                      <a:round/>
+                      <a:headEnd type="none" w="med" len="med"/>
+                      <a:tailEnd type="none" w="med" len="med"/>
+                    </a:lnT>
+                    <a:lnB w="9525" cap="flat" cmpd="sng" algn="ctr">
+                      <a:solidFill>
+                        <a:srgbClr val="D9D9DE"/>
+                      </a:solidFill>
+                      <a:prstDash val="solid"/>
+                      <a:round/>
+                      <a:headEnd type="none" w="med" len="med"/>
+                      <a:tailEnd type="none" w="med" len="med"/>
+                    </a:lnB>
+                    <a:solidFill>
+                      <a:srgbClr val="FFFFFF"/>
+                    </a:solidFill>
+                  </a:tcPr>
+                </a:tc>
+                <a:tc>
+                  <a:txBody>
+                    <a:bodyPr/>
+                    <a:lstStyle/>
+                    <a:p>
+                      <a:pPr indent="0" marL="0">
+                        <a:buNone/>
+                      </a:pPr>
+                      <a:r>
+                        <a:rPr lang="en-US" sz="1200" dirty="0">
+                          <a:solidFill>
+                            <a:srgbClr val="1D1D1F"/>
+                          </a:solidFill>
+                          <a:latin typeface="Calibri" pitchFamily="34" charset="0"/>
+                          <a:ea typeface="Calibri" pitchFamily="34" charset="-122"/>
+                          <a:cs typeface="Calibri" pitchFamily="34" charset="-120"/>
+                        </a:rPr>
+                        <a:t>0.15 (0.25)</a:t>
+                      </a:r>
+                      <a:endParaRPr lang="en-US" sz="1200" dirty="0">
+                        <a:latin typeface="Calibri" charset="0"/>
+                        <a:ea typeface="Calibri" charset="0"/>
+                        <a:cs typeface="Calibri" charset="0"/>
+                      </a:endParaRPr>
+                    </a:p>
+                  </a:txBody>
+                  <a:tcPr marL="91440" marR="91440" marT="45720" marB="45720" anchor="ctr">
+                    <a:lnL w="9525" cap="flat" cmpd="sng" algn="ctr">
+                      <a:solidFill>
+                        <a:srgbClr val="D9D9DE"/>
+                      </a:solidFill>
+                      <a:prstDash val="solid"/>
+                      <a:round/>
+                      <a:headEnd type="none" w="med" len="med"/>
+                      <a:tailEnd type="none" w="med" len="med"/>
+                    </a:lnL>
+                    <a:lnR w="9525" cap="flat" cmpd="sng" algn="ctr">
+                      <a:solidFill>
+                        <a:srgbClr val="D9D9DE"/>
+                      </a:solidFill>
+                      <a:prstDash val="solid"/>
+                      <a:round/>
+                      <a:headEnd type="none" w="med" len="med"/>
+                      <a:tailEnd type="none" w="med" len="med"/>
+                    </a:lnR>
+                    <a:lnT w="9525" cap="flat" cmpd="sng" algn="ctr">
+                      <a:solidFill>
+                        <a:srgbClr val="D9D9DE"/>
+                      </a:solidFill>
+                      <a:prstDash val="solid"/>
+                      <a:round/>
+                      <a:headEnd type="none" w="med" len="med"/>
+                      <a:tailEnd type="none" w="med" len="med"/>
+                    </a:lnT>
+                    <a:lnB w="9525" cap="flat" cmpd="sng" algn="ctr">
+                      <a:solidFill>
+                        <a:srgbClr val="D9D9DE"/>
+                      </a:solidFill>
+                      <a:prstDash val="solid"/>
+                      <a:round/>
+                      <a:headEnd type="none" w="med" len="med"/>
+                      <a:tailEnd type="none" w="med" len="med"/>
+                    </a:lnB>
+                    <a:solidFill>
+                      <a:srgbClr val="FFFFFF"/>
+                    </a:solidFill>
+                  </a:tcPr>
+                </a:tc>
+                <a:tc>
+                  <a:txBody>
+                    <a:bodyPr/>
+                    <a:lstStyle/>
+                    <a:p>
+                      <a:pPr indent="0" marL="0">
+                        <a:buNone/>
+                      </a:pPr>
+                      <a:r>
+                        <a:rPr lang="en-US" sz="1200" b="1" dirty="0">
+                          <a:solidFill>
+                            <a:srgbClr val="1E9E6A"/>
+                          </a:solidFill>
+                          <a:latin typeface="Calibri" pitchFamily="34" charset="0"/>
+                          <a:ea typeface="Calibri" pitchFamily="34" charset="-122"/>
+                          <a:cs typeface="Calibri" pitchFamily="34" charset="-120"/>
+                        </a:rPr>
+                        <a:t>llama2 = codellama (tie)</a:t>
+                      </a:r>
+                      <a:endParaRPr lang="en-US" sz="1200" dirty="0">
+                        <a:latin typeface="Calibri" charset="0"/>
+                        <a:ea typeface="Calibri" charset="0"/>
+                        <a:cs typeface="Calibri" charset="0"/>
+                      </a:endParaRPr>
+                    </a:p>
+                  </a:txBody>
+                  <a:tcPr marL="91440" marR="91440" marT="45720" marB="45720" anchor="ctr">
+                    <a:lnL w="9525" cap="flat" cmpd="sng" algn="ctr">
+                      <a:solidFill>
+                        <a:srgbClr val="D9D9DE"/>
+                      </a:solidFill>
+                      <a:prstDash val="solid"/>
+                      <a:round/>
+                      <a:headEnd type="none" w="med" len="med"/>
+                      <a:tailEnd type="none" w="med" len="med"/>
+                    </a:lnL>
+                    <a:lnR w="9525" cap="flat" cmpd="sng" algn="ctr">
+                      <a:solidFill>
+                        <a:srgbClr val="D9D9DE"/>
+                      </a:solidFill>
+                      <a:prstDash val="solid"/>
+                      <a:round/>
+                      <a:headEnd type="none" w="med" len="med"/>
+                      <a:tailEnd type="none" w="med" len="med"/>
+                    </a:lnR>
+                    <a:lnT w="9525" cap="flat" cmpd="sng" algn="ctr">
+                      <a:solidFill>
+                        <a:srgbClr val="D9D9DE"/>
+                      </a:solidFill>
+                      <a:prstDash val="solid"/>
+                      <a:round/>
+                      <a:headEnd type="none" w="med" len="med"/>
+                      <a:tailEnd type="none" w="med" len="med"/>
+                    </a:lnT>
+                    <a:lnB w="9525" cap="flat" cmpd="sng" algn="ctr">
+                      <a:solidFill>
+                        <a:srgbClr val="D9D9DE"/>
+                      </a:solidFill>
+                      <a:prstDash val="solid"/>
+                      <a:round/>
+                      <a:headEnd type="none" w="med" len="med"/>
+                      <a:tailEnd type="none" w="med" len="med"/>
+                    </a:lnB>
+                    <a:solidFill>
+                      <a:srgbClr val="FFFFFF"/>
+                    </a:solidFill>
+                  </a:tcPr>
+                </a:tc>
+              </a:tr>
+              <a:tr h="457200">
+                <a:tc>
+                  <a:txBody>
+                    <a:bodyPr/>
+                    <a:lstStyle/>
+                    <a:p>
+                      <a:pPr indent="0" marL="0">
+                        <a:buNone/>
+                      </a:pPr>
+                      <a:r>
+                        <a:rPr lang="en-US" sz="1200" dirty="0">
+                          <a:solidFill>
+                            <a:srgbClr val="1D1D1F"/>
+                          </a:solidFill>
+                          <a:latin typeface="Calibri" pitchFamily="34" charset="0"/>
+                          <a:ea typeface="Calibri" pitchFamily="34" charset="-122"/>
+                          <a:cs typeface="Calibri" pitchFamily="34" charset="-120"/>
+                        </a:rPr>
+                        <a:t>Bug analysis</a:t>
+                      </a:r>
+                      <a:endParaRPr lang="en-US" sz="1200" dirty="0">
+                        <a:latin typeface="Calibri" charset="0"/>
+                        <a:ea typeface="Calibri" charset="0"/>
+                        <a:cs typeface="Calibri" charset="0"/>
+                      </a:endParaRPr>
+                    </a:p>
+                  </a:txBody>
+                  <a:tcPr marL="91440" marR="91440" marT="45720" marB="45720" anchor="ctr">
+                    <a:lnL w="9525" cap="flat" cmpd="sng" algn="ctr">
+                      <a:solidFill>
+                        <a:srgbClr val="D9D9DE"/>
+                      </a:solidFill>
+                      <a:prstDash val="solid"/>
+                      <a:round/>
+                      <a:headEnd type="none" w="med" len="med"/>
+                      <a:tailEnd type="none" w="med" len="med"/>
+                    </a:lnL>
+                    <a:lnR w="9525" cap="flat" cmpd="sng" algn="ctr">
+                      <a:solidFill>
+                        <a:srgbClr val="D9D9DE"/>
+                      </a:solidFill>
+                      <a:prstDash val="solid"/>
+                      <a:round/>
+                      <a:headEnd type="none" w="med" len="med"/>
+                      <a:tailEnd type="none" w="med" len="med"/>
+                    </a:lnR>
+                    <a:lnT w="9525" cap="flat" cmpd="sng" algn="ctr">
+                      <a:solidFill>
+                        <a:srgbClr val="D9D9DE"/>
+                      </a:solidFill>
+                      <a:prstDash val="solid"/>
+                      <a:round/>
+                      <a:headEnd type="none" w="med" len="med"/>
+                      <a:tailEnd type="none" w="med" len="med"/>
+                    </a:lnT>
+                    <a:lnB w="9525" cap="flat" cmpd="sng" algn="ctr">
+                      <a:solidFill>
+                        <a:srgbClr val="D9D9DE"/>
+                      </a:solidFill>
+                      <a:prstDash val="solid"/>
+                      <a:round/>
+                      <a:headEnd type="none" w="med" len="med"/>
+                      <a:tailEnd type="none" w="med" len="med"/>
+                    </a:lnB>
+                    <a:solidFill>
+                      <a:srgbClr val="FFFFFF"/>
+                    </a:solidFill>
+                  </a:tcPr>
+                </a:tc>
+                <a:tc>
+                  <a:txBody>
+                    <a:bodyPr/>
+                    <a:lstStyle/>
+                    <a:p>
+                      <a:pPr indent="0" marL="0">
+                        <a:buNone/>
+                      </a:pPr>
+                      <a:r>
+                        <a:rPr lang="en-US" sz="1200" dirty="0">
+                          <a:solidFill>
+                            <a:srgbClr val="1D1D1F"/>
+                          </a:solidFill>
+                          <a:latin typeface="Calibri" pitchFamily="34" charset="0"/>
+                          <a:ea typeface="Calibri" pitchFamily="34" charset="-122"/>
+                          <a:cs typeface="Calibri" pitchFamily="34" charset="-120"/>
+                        </a:rPr>
+                        <a:t>6</a:t>
+                      </a:r>
+                      <a:endParaRPr lang="en-US" sz="1200" dirty="0">
+                        <a:latin typeface="Calibri" charset="0"/>
+                        <a:ea typeface="Calibri" charset="0"/>
+                        <a:cs typeface="Calibri" charset="0"/>
+                      </a:endParaRPr>
+                    </a:p>
+                  </a:txBody>
+                  <a:tcPr marL="91440" marR="91440" marT="45720" marB="45720" anchor="ctr">
+                    <a:lnL w="9525" cap="flat" cmpd="sng" algn="ctr">
+                      <a:solidFill>
+                        <a:srgbClr val="D9D9DE"/>
+                      </a:solidFill>
+                      <a:prstDash val="solid"/>
+                      <a:round/>
+                      <a:headEnd type="none" w="med" len="med"/>
+                      <a:tailEnd type="none" w="med" len="med"/>
+                    </a:lnL>
+                    <a:lnR w="9525" cap="flat" cmpd="sng" algn="ctr">
+                      <a:solidFill>
+                        <a:srgbClr val="D9D9DE"/>
+                      </a:solidFill>
+                      <a:prstDash val="solid"/>
+                      <a:round/>
+                      <a:headEnd type="none" w="med" len="med"/>
+                      <a:tailEnd type="none" w="med" len="med"/>
+                    </a:lnR>
+                    <a:lnT w="9525" cap="flat" cmpd="sng" algn="ctr">
+                      <a:solidFill>
+                        <a:srgbClr val="D9D9DE"/>
+                      </a:solidFill>
+                      <a:prstDash val="solid"/>
+                      <a:round/>
+                      <a:headEnd type="none" w="med" len="med"/>
+                      <a:tailEnd type="none" w="med" len="med"/>
+                    </a:lnT>
+                    <a:lnB w="9525" cap="flat" cmpd="sng" algn="ctr">
+                      <a:solidFill>
+                        <a:srgbClr val="D9D9DE"/>
+                      </a:solidFill>
+                      <a:prstDash val="solid"/>
+                      <a:round/>
+                      <a:headEnd type="none" w="med" len="med"/>
+                      <a:tailEnd type="none" w="med" len="med"/>
+                    </a:lnB>
+                    <a:solidFill>
+                      <a:srgbClr val="FFFFFF"/>
+                    </a:solidFill>
+                  </a:tcPr>
+                </a:tc>
+                <a:tc>
+                  <a:txBody>
+                    <a:bodyPr/>
+                    <a:lstStyle/>
+                    <a:p>
+                      <a:pPr indent="0" marL="0">
+                        <a:buNone/>
+                      </a:pPr>
+                      <a:r>
+                        <a:rPr lang="en-US" sz="1200" dirty="0">
+                          <a:solidFill>
+                            <a:srgbClr val="1D1D1F"/>
+                          </a:solidFill>
+                          <a:latin typeface="Calibri" pitchFamily="34" charset="0"/>
+                          <a:ea typeface="Calibri" pitchFamily="34" charset="-122"/>
+                          <a:cs typeface="Calibri" pitchFamily="34" charset="-120"/>
+                        </a:rPr>
+                        <a:t>0.69 (0.58)</a:t>
+                      </a:r>
+                      <a:endParaRPr lang="en-US" sz="1200" dirty="0">
+                        <a:latin typeface="Calibri" charset="0"/>
+                        <a:ea typeface="Calibri" charset="0"/>
+                        <a:cs typeface="Calibri" charset="0"/>
+                      </a:endParaRPr>
+                    </a:p>
+                  </a:txBody>
+                  <a:tcPr marL="91440" marR="91440" marT="45720" marB="45720" anchor="ctr">
+                    <a:lnL w="9525" cap="flat" cmpd="sng" algn="ctr">
+                      <a:solidFill>
+                        <a:srgbClr val="D9D9DE"/>
+                      </a:solidFill>
+                      <a:prstDash val="solid"/>
+                      <a:round/>
+                      <a:headEnd type="none" w="med" len="med"/>
+                      <a:tailEnd type="none" w="med" len="med"/>
+                    </a:lnL>
+                    <a:lnR w="9525" cap="flat" cmpd="sng" algn="ctr">
+                      <a:solidFill>
+                        <a:srgbClr val="D9D9DE"/>
+                      </a:solidFill>
+                      <a:prstDash val="solid"/>
+                      <a:round/>
+                      <a:headEnd type="none" w="med" len="med"/>
+                      <a:tailEnd type="none" w="med" len="med"/>
+                    </a:lnR>
+                    <a:lnT w="9525" cap="flat" cmpd="sng" algn="ctr">
+                      <a:solidFill>
+                        <a:srgbClr val="D9D9DE"/>
+                      </a:solidFill>
+                      <a:prstDash val="solid"/>
+                      <a:round/>
+                      <a:headEnd type="none" w="med" len="med"/>
+                      <a:tailEnd type="none" w="med" len="med"/>
+                    </a:lnT>
+                    <a:lnB w="9525" cap="flat" cmpd="sng" algn="ctr">
+                      <a:solidFill>
+                        <a:srgbClr val="D9D9DE"/>
+                      </a:solidFill>
+                      <a:prstDash val="solid"/>
+                      <a:round/>
+                      <a:headEnd type="none" w="med" len="med"/>
+                      <a:tailEnd type="none" w="med" len="med"/>
+                    </a:lnB>
+                    <a:solidFill>
+                      <a:srgbClr val="FFFFFF"/>
+                    </a:solidFill>
+                  </a:tcPr>
+                </a:tc>
+                <a:tc>
+                  <a:txBody>
+                    <a:bodyPr/>
+                    <a:lstStyle/>
+                    <a:p>
+                      <a:pPr indent="0" marL="0">
+                        <a:buNone/>
+                      </a:pPr>
+                      <a:r>
+                        <a:rPr lang="en-US" sz="1200" dirty="0">
+                          <a:solidFill>
+                            <a:srgbClr val="1D1D1F"/>
+                          </a:solidFill>
+                          <a:latin typeface="Calibri" pitchFamily="34" charset="0"/>
+                          <a:ea typeface="Calibri" pitchFamily="34" charset="-122"/>
+                          <a:cs typeface="Calibri" pitchFamily="34" charset="-120"/>
+                        </a:rPr>
+                        <a:t>0.61 (0.58)</a:t>
+                      </a:r>
+                      <a:endParaRPr lang="en-US" sz="1200" dirty="0">
+                        <a:latin typeface="Calibri" charset="0"/>
+                        <a:ea typeface="Calibri" charset="0"/>
+                        <a:cs typeface="Calibri" charset="0"/>
+                      </a:endParaRPr>
+                    </a:p>
+                  </a:txBody>
+                  <a:tcPr marL="91440" marR="91440" marT="45720" marB="45720" anchor="ctr">
+                    <a:lnL w="9525" cap="flat" cmpd="sng" algn="ctr">
+                      <a:solidFill>
+                        <a:srgbClr val="D9D9DE"/>
+                      </a:solidFill>
+                      <a:prstDash val="solid"/>
+                      <a:round/>
+                      <a:headEnd type="none" w="med" len="med"/>
+                      <a:tailEnd type="none" w="med" len="med"/>
+                    </a:lnL>
+                    <a:lnR w="9525" cap="flat" cmpd="sng" algn="ctr">
+                      <a:solidFill>
+                        <a:srgbClr val="D9D9DE"/>
+                      </a:solidFill>
+                      <a:prstDash val="solid"/>
+                      <a:round/>
+                      <a:headEnd type="none" w="med" len="med"/>
+                      <a:tailEnd type="none" w="med" len="med"/>
+                    </a:lnR>
+                    <a:lnT w="9525" cap="flat" cmpd="sng" algn="ctr">
+                      <a:solidFill>
+                        <a:srgbClr val="D9D9DE"/>
+                      </a:solidFill>
+                      <a:prstDash val="solid"/>
+                      <a:round/>
+                      <a:headEnd type="none" w="med" len="med"/>
+                      <a:tailEnd type="none" w="med" len="med"/>
+                    </a:lnT>
+                    <a:lnB w="9525" cap="flat" cmpd="sng" algn="ctr">
+                      <a:solidFill>
+                        <a:srgbClr val="D9D9DE"/>
+                      </a:solidFill>
+                      <a:prstDash val="solid"/>
+                      <a:round/>
+                      <a:headEnd type="none" w="med" len="med"/>
+                      <a:tailEnd type="none" w="med" len="med"/>
+                    </a:lnB>
+                    <a:solidFill>
+                      <a:srgbClr val="FFFFFF"/>
+                    </a:solidFill>
+                  </a:tcPr>
+                </a:tc>
+                <a:tc>
+                  <a:txBody>
+                    <a:bodyPr/>
+                    <a:lstStyle/>
+                    <a:p>
+                      <a:pPr indent="0" marL="0">
+                        <a:buNone/>
+                      </a:pPr>
+                      <a:r>
+                        <a:rPr lang="en-US" sz="1200" dirty="0">
+                          <a:solidFill>
+                            <a:srgbClr val="1D1D1F"/>
+                          </a:solidFill>
+                          <a:latin typeface="Calibri" pitchFamily="34" charset="0"/>
+                          <a:ea typeface="Calibri" pitchFamily="34" charset="-122"/>
+                          <a:cs typeface="Calibri" pitchFamily="34" charset="-120"/>
+                        </a:rPr>
+                        <a:t>0.17 (0.00)</a:t>
+                      </a:r>
+                      <a:endParaRPr lang="en-US" sz="1200" dirty="0">
+                        <a:latin typeface="Calibri" charset="0"/>
+                        <a:ea typeface="Calibri" charset="0"/>
+                        <a:cs typeface="Calibri" charset="0"/>
+                      </a:endParaRPr>
+                    </a:p>
+                  </a:txBody>
+                  <a:tcPr marL="91440" marR="91440" marT="45720" marB="45720" anchor="ctr">
+                    <a:lnL w="9525" cap="flat" cmpd="sng" algn="ctr">
+                      <a:solidFill>
+                        <a:srgbClr val="D9D9DE"/>
+                      </a:solidFill>
+                      <a:prstDash val="solid"/>
+                      <a:round/>
+                      <a:headEnd type="none" w="med" len="med"/>
+                      <a:tailEnd type="none" w="med" len="med"/>
+                    </a:lnL>
+                    <a:lnR w="9525" cap="flat" cmpd="sng" algn="ctr">
+                      <a:solidFill>
+                        <a:srgbClr val="D9D9DE"/>
+                      </a:solidFill>
+                      <a:prstDash val="solid"/>
+                      <a:round/>
+                      <a:headEnd type="none" w="med" len="med"/>
+                      <a:tailEnd type="none" w="med" len="med"/>
+                    </a:lnR>
+                    <a:lnT w="9525" cap="flat" cmpd="sng" algn="ctr">
+                      <a:solidFill>
+                        <a:srgbClr val="D9D9DE"/>
+                      </a:solidFill>
+                      <a:prstDash val="solid"/>
+                      <a:round/>
+                      <a:headEnd type="none" w="med" len="med"/>
+                      <a:tailEnd type="none" w="med" len="med"/>
+                    </a:lnT>
+                    <a:lnB w="9525" cap="flat" cmpd="sng" algn="ctr">
+                      <a:solidFill>
+                        <a:srgbClr val="D9D9DE"/>
+                      </a:solidFill>
+                      <a:prstDash val="solid"/>
+                      <a:round/>
+                      <a:headEnd type="none" w="med" len="med"/>
+                      <a:tailEnd type="none" w="med" len="med"/>
+                    </a:lnB>
+                    <a:solidFill>
+                      <a:srgbClr val="FFFFFF"/>
+                    </a:solidFill>
+                  </a:tcPr>
+                </a:tc>
+                <a:tc>
+                  <a:txBody>
+                    <a:bodyPr/>
+                    <a:lstStyle/>
+                    <a:p>
+                      <a:pPr indent="0" marL="0">
+                        <a:buNone/>
+                      </a:pPr>
+                      <a:r>
+                        <a:rPr lang="en-US" sz="1200" b="1" dirty="0">
+                          <a:solidFill>
+                            <a:srgbClr val="1E9E6A"/>
+                          </a:solidFill>
+                          <a:latin typeface="Calibri" pitchFamily="34" charset="0"/>
+                          <a:ea typeface="Calibri" pitchFamily="34" charset="-122"/>
+                          <a:cs typeface="Calibri" pitchFamily="34" charset="-120"/>
+                        </a:rPr>
+                        <a:t>tie of the 7B models</a:t>
+                      </a:r>
+                      <a:endParaRPr lang="en-US" sz="1200" dirty="0">
+                        <a:latin typeface="Calibri" charset="0"/>
+                        <a:ea typeface="Calibri" charset="0"/>
+                        <a:cs typeface="Calibri" charset="0"/>
+                      </a:endParaRPr>
+                    </a:p>
+                  </a:txBody>
+                  <a:tcPr marL="91440" marR="91440" marT="45720" marB="45720" anchor="ctr">
+                    <a:lnL w="9525" cap="flat" cmpd="sng" algn="ctr">
+                      <a:solidFill>
+                        <a:srgbClr val="D9D9DE"/>
+                      </a:solidFill>
+                      <a:prstDash val="solid"/>
+                      <a:round/>
+                      <a:headEnd type="none" w="med" len="med"/>
+                      <a:tailEnd type="none" w="med" len="med"/>
+                    </a:lnL>
+                    <a:lnR w="9525" cap="flat" cmpd="sng" algn="ctr">
+                      <a:solidFill>
+                        <a:srgbClr val="D9D9DE"/>
+                      </a:solidFill>
+                      <a:prstDash val="solid"/>
+                      <a:round/>
+                      <a:headEnd type="none" w="med" len="med"/>
+                      <a:tailEnd type="none" w="med" len="med"/>
+                    </a:lnR>
+                    <a:lnT w="9525" cap="flat" cmpd="sng" algn="ctr">
+                      <a:solidFill>
+                        <a:srgbClr val="D9D9DE"/>
+                      </a:solidFill>
+                      <a:prstDash val="solid"/>
+                      <a:round/>
+                      <a:headEnd type="none" w="med" len="med"/>
+                      <a:tailEnd type="none" w="med" len="med"/>
+                    </a:lnT>
+                    <a:lnB w="9525" cap="flat" cmpd="sng" algn="ctr">
+                      <a:solidFill>
+                        <a:srgbClr val="D9D9DE"/>
+                      </a:solidFill>
+                      <a:prstDash val="solid"/>
+                      <a:round/>
+                      <a:headEnd type="none" w="med" len="med"/>
+                      <a:tailEnd type="none" w="med" len="med"/>
+                    </a:lnB>
+                    <a:solidFill>
+                      <a:srgbClr val="FFFFFF"/>
+                    </a:solidFill>
+                  </a:tcPr>
+                </a:tc>
+              </a:tr>
+              <a:tr h="457200">
+                <a:tc>
+                  <a:txBody>
+                    <a:bodyPr/>
+                    <a:lstStyle/>
+                    <a:p>
+                      <a:pPr indent="0" marL="0">
+                        <a:buNone/>
+                      </a:pPr>
+                      <a:r>
+                        <a:rPr lang="en-US" sz="1200" dirty="0">
+                          <a:solidFill>
+                            <a:srgbClr val="1D1D1F"/>
+                          </a:solidFill>
+                          <a:latin typeface="Calibri" pitchFamily="34" charset="0"/>
+                          <a:ea typeface="Calibri" pitchFamily="34" charset="-122"/>
+                          <a:cs typeface="Calibri" pitchFamily="34" charset="-120"/>
+                        </a:rPr>
+                        <a:t>Dependency understanding (issue / PR / commit links)</a:t>
+                      </a:r>
+                      <a:endParaRPr lang="en-US" sz="1200" dirty="0">
+                        <a:latin typeface="Calibri" charset="0"/>
+                        <a:ea typeface="Calibri" charset="0"/>
+                        <a:cs typeface="Calibri" charset="0"/>
+                      </a:endParaRPr>
+                    </a:p>
+                  </a:txBody>
+                  <a:tcPr marL="91440" marR="91440" marT="45720" marB="45720" anchor="ctr">
+                    <a:lnL w="9525" cap="flat" cmpd="sng" algn="ctr">
+                      <a:solidFill>
+                        <a:srgbClr val="D9D9DE"/>
+                      </a:solidFill>
+                      <a:prstDash val="solid"/>
+                      <a:round/>
+                      <a:headEnd type="none" w="med" len="med"/>
+                      <a:tailEnd type="none" w="med" len="med"/>
+                    </a:lnL>
+                    <a:lnR w="9525" cap="flat" cmpd="sng" algn="ctr">
+                      <a:solidFill>
+                        <a:srgbClr val="D9D9DE"/>
+                      </a:solidFill>
+                      <a:prstDash val="solid"/>
+                      <a:round/>
+                      <a:headEnd type="none" w="med" len="med"/>
+                      <a:tailEnd type="none" w="med" len="med"/>
+                    </a:lnR>
+                    <a:lnT w="9525" cap="flat" cmpd="sng" algn="ctr">
+                      <a:solidFill>
+                        <a:srgbClr val="D9D9DE"/>
+                      </a:solidFill>
+                      <a:prstDash val="solid"/>
+                      <a:round/>
+                      <a:headEnd type="none" w="med" len="med"/>
+                      <a:tailEnd type="none" w="med" len="med"/>
+                    </a:lnT>
+                    <a:lnB w="9525" cap="flat" cmpd="sng" algn="ctr">
+                      <a:solidFill>
+                        <a:srgbClr val="D9D9DE"/>
+                      </a:solidFill>
+                      <a:prstDash val="solid"/>
+                      <a:round/>
+                      <a:headEnd type="none" w="med" len="med"/>
+                      <a:tailEnd type="none" w="med" len="med"/>
+                    </a:lnB>
+                    <a:solidFill>
+                      <a:srgbClr val="FFFFFF"/>
+                    </a:solidFill>
+                  </a:tcPr>
+                </a:tc>
+                <a:tc>
+                  <a:txBody>
+                    <a:bodyPr/>
+                    <a:lstStyle/>
+                    <a:p>
+                      <a:pPr indent="0" marL="0">
+                        <a:buNone/>
+                      </a:pPr>
+                      <a:r>
+                        <a:rPr lang="en-US" sz="1200" dirty="0">
+                          <a:solidFill>
+                            <a:srgbClr val="1D1D1F"/>
+                          </a:solidFill>
+                          <a:latin typeface="Calibri" pitchFamily="34" charset="0"/>
+                          <a:ea typeface="Calibri" pitchFamily="34" charset="-122"/>
+                          <a:cs typeface="Calibri" pitchFamily="34" charset="-120"/>
+                        </a:rPr>
+                        <a:t>4</a:t>
+                      </a:r>
+                      <a:endParaRPr lang="en-US" sz="1200" dirty="0">
+                        <a:latin typeface="Calibri" charset="0"/>
+                        <a:ea typeface="Calibri" charset="0"/>
+                        <a:cs typeface="Calibri" charset="0"/>
+                      </a:endParaRPr>
+                    </a:p>
+                  </a:txBody>
+                  <a:tcPr marL="91440" marR="91440" marT="45720" marB="45720" anchor="ctr">
+                    <a:lnL w="9525" cap="flat" cmpd="sng" algn="ctr">
+                      <a:solidFill>
+                        <a:srgbClr val="D9D9DE"/>
+                      </a:solidFill>
+                      <a:prstDash val="solid"/>
+                      <a:round/>
+                      <a:headEnd type="none" w="med" len="med"/>
+                      <a:tailEnd type="none" w="med" len="med"/>
+                    </a:lnL>
+                    <a:lnR w="9525" cap="flat" cmpd="sng" algn="ctr">
+                      <a:solidFill>
+                        <a:srgbClr val="D9D9DE"/>
+                      </a:solidFill>
+                      <a:prstDash val="solid"/>
+                      <a:round/>
+                      <a:headEnd type="none" w="med" len="med"/>
+                      <a:tailEnd type="none" w="med" len="med"/>
+                    </a:lnR>
+                    <a:lnT w="9525" cap="flat" cmpd="sng" algn="ctr">
+                      <a:solidFill>
+                        <a:srgbClr val="D9D9DE"/>
+                      </a:solidFill>
+                      <a:prstDash val="solid"/>
+                      <a:round/>
+                      <a:headEnd type="none" w="med" len="med"/>
+                      <a:tailEnd type="none" w="med" len="med"/>
+                    </a:lnT>
+                    <a:lnB w="9525" cap="flat" cmpd="sng" algn="ctr">
+                      <a:solidFill>
+                        <a:srgbClr val="D9D9DE"/>
+                      </a:solidFill>
+                      <a:prstDash val="solid"/>
+                      <a:round/>
+                      <a:headEnd type="none" w="med" len="med"/>
+                      <a:tailEnd type="none" w="med" len="med"/>
+                    </a:lnB>
+                    <a:solidFill>
+                      <a:srgbClr val="FFFFFF"/>
+                    </a:solidFill>
+                  </a:tcPr>
+                </a:tc>
+                <a:tc>
+                  <a:txBody>
+                    <a:bodyPr/>
+                    <a:lstStyle/>
+                    <a:p>
+                      <a:pPr indent="0" marL="0">
+                        <a:buNone/>
+                      </a:pPr>
+                      <a:r>
+                        <a:rPr lang="en-US" sz="1200" dirty="0">
+                          <a:solidFill>
+                            <a:srgbClr val="1D1D1F"/>
+                          </a:solidFill>
+                          <a:latin typeface="Calibri" pitchFamily="34" charset="0"/>
+                          <a:ea typeface="Calibri" pitchFamily="34" charset="-122"/>
+                          <a:cs typeface="Calibri" pitchFamily="34" charset="-120"/>
+                        </a:rPr>
+                        <a:t>1.00 (1.00)</a:t>
+                      </a:r>
+                      <a:endParaRPr lang="en-US" sz="1200" dirty="0">
+                        <a:latin typeface="Calibri" charset="0"/>
+                        <a:ea typeface="Calibri" charset="0"/>
+                        <a:cs typeface="Calibri" charset="0"/>
+                      </a:endParaRPr>
+                    </a:p>
+                  </a:txBody>
+                  <a:tcPr marL="91440" marR="91440" marT="45720" marB="45720" anchor="ctr">
+                    <a:lnL w="9525" cap="flat" cmpd="sng" algn="ctr">
+                      <a:solidFill>
+                        <a:srgbClr val="D9D9DE"/>
+                      </a:solidFill>
+                      <a:prstDash val="solid"/>
+                      <a:round/>
+                      <a:headEnd type="none" w="med" len="med"/>
+                      <a:tailEnd type="none" w="med" len="med"/>
+                    </a:lnL>
+                    <a:lnR w="9525" cap="flat" cmpd="sng" algn="ctr">
+                      <a:solidFill>
+                        <a:srgbClr val="D9D9DE"/>
+                      </a:solidFill>
+                      <a:prstDash val="solid"/>
+                      <a:round/>
+                      <a:headEnd type="none" w="med" len="med"/>
+                      <a:tailEnd type="none" w="med" len="med"/>
+                    </a:lnR>
+                    <a:lnT w="9525" cap="flat" cmpd="sng" algn="ctr">
+                      <a:solidFill>
+                        <a:srgbClr val="D9D9DE"/>
+                      </a:solidFill>
+                      <a:prstDash val="solid"/>
+                      <a:round/>
+                      <a:headEnd type="none" w="med" len="med"/>
+                      <a:tailEnd type="none" w="med" len="med"/>
+                    </a:lnT>
+                    <a:lnB w="9525" cap="flat" cmpd="sng" algn="ctr">
+                      <a:solidFill>
+                        <a:srgbClr val="D9D9DE"/>
+                      </a:solidFill>
+                      <a:prstDash val="solid"/>
+                      <a:round/>
+                      <a:headEnd type="none" w="med" len="med"/>
+                      <a:tailEnd type="none" w="med" len="med"/>
+                    </a:lnB>
+                    <a:solidFill>
+                      <a:srgbClr val="FFFFFF"/>
+                    </a:solidFill>
+                  </a:tcPr>
+                </a:tc>
+                <a:tc>
+                  <a:txBody>
+                    <a:bodyPr/>
+                    <a:lstStyle/>
+                    <a:p>
+                      <a:pPr indent="0" marL="0">
+                        <a:buNone/>
+                      </a:pPr>
+                      <a:r>
+                        <a:rPr lang="en-US" sz="1200" dirty="0">
+                          <a:solidFill>
+                            <a:srgbClr val="1D1D1F"/>
+                          </a:solidFill>
+                          <a:latin typeface="Calibri" pitchFamily="34" charset="0"/>
+                          <a:ea typeface="Calibri" pitchFamily="34" charset="-122"/>
+                          <a:cs typeface="Calibri" pitchFamily="34" charset="-120"/>
+                        </a:rPr>
+                        <a:t>1.00 (1.00)</a:t>
+                      </a:r>
+                      <a:endParaRPr lang="en-US" sz="1200" dirty="0">
+                        <a:latin typeface="Calibri" charset="0"/>
+                        <a:ea typeface="Calibri" charset="0"/>
+                        <a:cs typeface="Calibri" charset="0"/>
+                      </a:endParaRPr>
+                    </a:p>
+                  </a:txBody>
+                  <a:tcPr marL="91440" marR="91440" marT="45720" marB="45720" anchor="ctr">
+                    <a:lnL w="9525" cap="flat" cmpd="sng" algn="ctr">
+                      <a:solidFill>
+                        <a:srgbClr val="D9D9DE"/>
+                      </a:solidFill>
+                      <a:prstDash val="solid"/>
+                      <a:round/>
+                      <a:headEnd type="none" w="med" len="med"/>
+                      <a:tailEnd type="none" w="med" len="med"/>
+                    </a:lnL>
+                    <a:lnR w="9525" cap="flat" cmpd="sng" algn="ctr">
+                      <a:solidFill>
+                        <a:srgbClr val="D9D9DE"/>
+                      </a:solidFill>
+                      <a:prstDash val="solid"/>
+                      <a:round/>
+                      <a:headEnd type="none" w="med" len="med"/>
+                      <a:tailEnd type="none" w="med" len="med"/>
+                    </a:lnR>
+                    <a:lnT w="9525" cap="flat" cmpd="sng" algn="ctr">
+                      <a:solidFill>
+                        <a:srgbClr val="D9D9DE"/>
+                      </a:solidFill>
+                      <a:prstDash val="solid"/>
+                      <a:round/>
+                      <a:headEnd type="none" w="med" len="med"/>
+                      <a:tailEnd type="none" w="med" len="med"/>
+                    </a:lnT>
+                    <a:lnB w="9525" cap="flat" cmpd="sng" algn="ctr">
+                      <a:solidFill>
+                        <a:srgbClr val="D9D9DE"/>
+                      </a:solidFill>
+                      <a:prstDash val="solid"/>
+                      <a:round/>
+                      <a:headEnd type="none" w="med" len="med"/>
+                      <a:tailEnd type="none" w="med" len="med"/>
+                    </a:lnB>
+                    <a:solidFill>
+                      <a:srgbClr val="FFFFFF"/>
+                    </a:solidFill>
+                  </a:tcPr>
+                </a:tc>
+                <a:tc>
+                  <a:txBody>
+                    <a:bodyPr/>
+                    <a:lstStyle/>
+                    <a:p>
+                      <a:pPr indent="0" marL="0">
+                        <a:buNone/>
+                      </a:pPr>
+                      <a:r>
+                        <a:rPr lang="en-US" sz="1200" dirty="0">
+                          <a:solidFill>
+                            <a:srgbClr val="1D1D1F"/>
+                          </a:solidFill>
+                          <a:latin typeface="Calibri" pitchFamily="34" charset="0"/>
+                          <a:ea typeface="Calibri" pitchFamily="34" charset="-122"/>
+                          <a:cs typeface="Calibri" pitchFamily="34" charset="-120"/>
+                        </a:rPr>
+                        <a:t>0.50 (0.25)</a:t>
+                      </a:r>
+                      <a:endParaRPr lang="en-US" sz="1200" dirty="0">
+                        <a:latin typeface="Calibri" charset="0"/>
+                        <a:ea typeface="Calibri" charset="0"/>
+                        <a:cs typeface="Calibri" charset="0"/>
+                      </a:endParaRPr>
+                    </a:p>
+                  </a:txBody>
+                  <a:tcPr marL="91440" marR="91440" marT="45720" marB="45720" anchor="ctr">
+                    <a:lnL w="9525" cap="flat" cmpd="sng" algn="ctr">
+                      <a:solidFill>
+                        <a:srgbClr val="D9D9DE"/>
+                      </a:solidFill>
+                      <a:prstDash val="solid"/>
+                      <a:round/>
+                      <a:headEnd type="none" w="med" len="med"/>
+                      <a:tailEnd type="none" w="med" len="med"/>
+                    </a:lnL>
+                    <a:lnR w="9525" cap="flat" cmpd="sng" algn="ctr">
+                      <a:solidFill>
+                        <a:srgbClr val="D9D9DE"/>
+                      </a:solidFill>
+                      <a:prstDash val="solid"/>
+                      <a:round/>
+                      <a:headEnd type="none" w="med" len="med"/>
+                      <a:tailEnd type="none" w="med" len="med"/>
+                    </a:lnR>
+                    <a:lnT w="9525" cap="flat" cmpd="sng" algn="ctr">
+                      <a:solidFill>
+                        <a:srgbClr val="D9D9DE"/>
+                      </a:solidFill>
+                      <a:prstDash val="solid"/>
+                      <a:round/>
+                      <a:headEnd type="none" w="med" len="med"/>
+                      <a:tailEnd type="none" w="med" len="med"/>
+                    </a:lnT>
+                    <a:lnB w="9525" cap="flat" cmpd="sng" algn="ctr">
+                      <a:solidFill>
+                        <a:srgbClr val="D9D9DE"/>
+                      </a:solidFill>
+                      <a:prstDash val="solid"/>
+                      <a:round/>
+                      <a:headEnd type="none" w="med" len="med"/>
+                      <a:tailEnd type="none" w="med" len="med"/>
+                    </a:lnB>
+                    <a:solidFill>
+                      <a:srgbClr val="FFFFFF"/>
+                    </a:solidFill>
+                  </a:tcPr>
+                </a:tc>
+                <a:tc>
+                  <a:txBody>
+                    <a:bodyPr/>
+                    <a:lstStyle/>
+                    <a:p>
+                      <a:pPr indent="0" marL="0">
+                        <a:buNone/>
+                      </a:pPr>
+                      <a:r>
+                        <a:rPr lang="en-US" sz="1200" b="1" dirty="0">
+                          <a:solidFill>
+                            <a:srgbClr val="1E9E6A"/>
+                          </a:solidFill>
+                          <a:latin typeface="Calibri" pitchFamily="34" charset="0"/>
+                          <a:ea typeface="Calibri" pitchFamily="34" charset="-122"/>
+                          <a:cs typeface="Calibri" pitchFamily="34" charset="-120"/>
+                        </a:rPr>
+                        <a:t>tie of the 7B models</a:t>
+                      </a:r>
+                      <a:endParaRPr lang="en-US" sz="1200" dirty="0">
+                        <a:latin typeface="Calibri" charset="0"/>
+                        <a:ea typeface="Calibri" charset="0"/>
+                        <a:cs typeface="Calibri" charset="0"/>
+                      </a:endParaRPr>
+                    </a:p>
+                  </a:txBody>
+                  <a:tcPr marL="91440" marR="91440" marT="45720" marB="45720" anchor="ctr">
+                    <a:lnL w="9525" cap="flat" cmpd="sng" algn="ctr">
+                      <a:solidFill>
+                        <a:srgbClr val="D9D9DE"/>
+                      </a:solidFill>
+                      <a:prstDash val="solid"/>
+                      <a:round/>
+                      <a:headEnd type="none" w="med" len="med"/>
+                      <a:tailEnd type="none" w="med" len="med"/>
+                    </a:lnL>
+                    <a:lnR w="9525" cap="flat" cmpd="sng" algn="ctr">
+                      <a:solidFill>
+                        <a:srgbClr val="D9D9DE"/>
+                      </a:solidFill>
+                      <a:prstDash val="solid"/>
+                      <a:round/>
+                      <a:headEnd type="none" w="med" len="med"/>
+                      <a:tailEnd type="none" w="med" len="med"/>
+                    </a:lnR>
+                    <a:lnT w="9525" cap="flat" cmpd="sng" algn="ctr">
+                      <a:solidFill>
+                        <a:srgbClr val="D9D9DE"/>
+                      </a:solidFill>
+                      <a:prstDash val="solid"/>
+                      <a:round/>
+                      <a:headEnd type="none" w="med" len="med"/>
+                      <a:tailEnd type="none" w="med" len="med"/>
+                    </a:lnT>
+                    <a:lnB w="9525" cap="flat" cmpd="sng" algn="ctr">
+                      <a:solidFill>
+                        <a:srgbClr val="D9D9DE"/>
+                      </a:solidFill>
+                      <a:prstDash val="solid"/>
+                      <a:round/>
+                      <a:headEnd type="none" w="med" len="med"/>
+                      <a:tailEnd type="none" w="med" len="med"/>
+                    </a:lnB>
+                    <a:solidFill>
+                      <a:srgbClr val="FFFFFF"/>
+                    </a:solidFill>
+                  </a:tcPr>
+                </a:tc>
+              </a:tr>
+              <a:tr h="457200">
+                <a:tc>
+                  <a:txBody>
+                    <a:bodyPr/>
+                    <a:lstStyle/>
+                    <a:p>
+                      <a:pPr indent="0" marL="0">
+                        <a:buNone/>
+                      </a:pPr>
+                      <a:r>
+                        <a:rPr lang="en-US" sz="1200" dirty="0">
+                          <a:solidFill>
+                            <a:srgbClr val="1D1D1F"/>
+                          </a:solidFill>
+                          <a:latin typeface="Calibri" pitchFamily="34" charset="0"/>
+                          <a:ea typeface="Calibri" pitchFamily="34" charset="-122"/>
+                          <a:cs typeface="Calibri" pitchFamily="34" charset="-120"/>
+                        </a:rPr>
+                        <a:t>Code retrieval (look up a fact in current code)</a:t>
+                      </a:r>
+                      <a:endParaRPr lang="en-US" sz="1200" dirty="0">
+                        <a:latin typeface="Calibri" charset="0"/>
+                        <a:ea typeface="Calibri" charset="0"/>
+                        <a:cs typeface="Calibri" charset="0"/>
+                      </a:endParaRPr>
+                    </a:p>
+                  </a:txBody>
+                  <a:tcPr marL="91440" marR="91440" marT="45720" marB="45720" anchor="ctr">
+                    <a:lnL w="9525" cap="flat" cmpd="sng" algn="ctr">
+                      <a:solidFill>
+                        <a:srgbClr val="D9D9DE"/>
+                      </a:solidFill>
+                      <a:prstDash val="solid"/>
+                      <a:round/>
+                      <a:headEnd type="none" w="med" len="med"/>
+                      <a:tailEnd type="none" w="med" len="med"/>
+                    </a:lnL>
+                    <a:lnR w="9525" cap="flat" cmpd="sng" algn="ctr">
+                      <a:solidFill>
+                        <a:srgbClr val="D9D9DE"/>
+                      </a:solidFill>
+                      <a:prstDash val="solid"/>
+                      <a:round/>
+                      <a:headEnd type="none" w="med" len="med"/>
+                      <a:tailEnd type="none" w="med" len="med"/>
+                    </a:lnR>
+                    <a:lnT w="9525" cap="flat" cmpd="sng" algn="ctr">
+                      <a:solidFill>
+                        <a:srgbClr val="D9D9DE"/>
+                      </a:solidFill>
+                      <a:prstDash val="solid"/>
+                      <a:round/>
+                      <a:headEnd type="none" w="med" len="med"/>
+                      <a:tailEnd type="none" w="med" len="med"/>
+                    </a:lnT>
+                    <a:lnB w="9525" cap="flat" cmpd="sng" algn="ctr">
+                      <a:solidFill>
+                        <a:srgbClr val="D9D9DE"/>
+                      </a:solidFill>
+                      <a:prstDash val="solid"/>
+                      <a:round/>
+                      <a:headEnd type="none" w="med" len="med"/>
+                      <a:tailEnd type="none" w="med" len="med"/>
+                    </a:lnB>
+                    <a:solidFill>
+                      <a:srgbClr val="FFFFFF"/>
+                    </a:solidFill>
+                  </a:tcPr>
+                </a:tc>
+                <a:tc>
+                  <a:txBody>
+                    <a:bodyPr/>
+                    <a:lstStyle/>
+                    <a:p>
+                      <a:pPr indent="0" marL="0">
+                        <a:buNone/>
+                      </a:pPr>
+                      <a:r>
+                        <a:rPr lang="en-US" sz="1200" dirty="0">
+                          <a:solidFill>
+                            <a:srgbClr val="1D1D1F"/>
+                          </a:solidFill>
+                          <a:latin typeface="Calibri" pitchFamily="34" charset="0"/>
+                          <a:ea typeface="Calibri" pitchFamily="34" charset="-122"/>
+                          <a:cs typeface="Calibri" pitchFamily="34" charset="-120"/>
+                        </a:rPr>
+                        <a:t>4</a:t>
+                      </a:r>
+                      <a:endParaRPr lang="en-US" sz="1200" dirty="0">
+                        <a:latin typeface="Calibri" charset="0"/>
+                        <a:ea typeface="Calibri" charset="0"/>
+                        <a:cs typeface="Calibri" charset="0"/>
+                      </a:endParaRPr>
+                    </a:p>
+                  </a:txBody>
+                  <a:tcPr marL="91440" marR="91440" marT="45720" marB="45720" anchor="ctr">
+                    <a:lnL w="9525" cap="flat" cmpd="sng" algn="ctr">
+                      <a:solidFill>
+                        <a:srgbClr val="D9D9DE"/>
+                      </a:solidFill>
+                      <a:prstDash val="solid"/>
+                      <a:round/>
+                      <a:headEnd type="none" w="med" len="med"/>
+                      <a:tailEnd type="none" w="med" len="med"/>
+                    </a:lnL>
+                    <a:lnR w="9525" cap="flat" cmpd="sng" algn="ctr">
+                      <a:solidFill>
+                        <a:srgbClr val="D9D9DE"/>
+                      </a:solidFill>
+                      <a:prstDash val="solid"/>
+                      <a:round/>
+                      <a:headEnd type="none" w="med" len="med"/>
+                      <a:tailEnd type="none" w="med" len="med"/>
+                    </a:lnR>
+                    <a:lnT w="9525" cap="flat" cmpd="sng" algn="ctr">
+                      <a:solidFill>
+                        <a:srgbClr val="D9D9DE"/>
+                      </a:solidFill>
+                      <a:prstDash val="solid"/>
+                      <a:round/>
+                      <a:headEnd type="none" w="med" len="med"/>
+                      <a:tailEnd type="none" w="med" len="med"/>
+                    </a:lnT>
+                    <a:lnB w="9525" cap="flat" cmpd="sng" algn="ctr">
+                      <a:solidFill>
+                        <a:srgbClr val="D9D9DE"/>
+                      </a:solidFill>
+                      <a:prstDash val="solid"/>
+                      <a:round/>
+                      <a:headEnd type="none" w="med" len="med"/>
+                      <a:tailEnd type="none" w="med" len="med"/>
+                    </a:lnB>
+                    <a:solidFill>
+                      <a:srgbClr val="FFFFFF"/>
+                    </a:solidFill>
+                  </a:tcPr>
+                </a:tc>
+                <a:tc>
+                  <a:txBody>
+                    <a:bodyPr/>
+                    <a:lstStyle/>
+                    <a:p>
+                      <a:pPr indent="0" marL="0">
+                        <a:buNone/>
+                      </a:pPr>
+                      <a:r>
+                        <a:rPr lang="en-US" sz="1200" dirty="0">
+                          <a:solidFill>
+                            <a:srgbClr val="1D1D1F"/>
+                          </a:solidFill>
+                          <a:latin typeface="Calibri" pitchFamily="34" charset="0"/>
+                          <a:ea typeface="Calibri" pitchFamily="34" charset="-122"/>
+                          <a:cs typeface="Calibri" pitchFamily="34" charset="-120"/>
+                        </a:rPr>
+                        <a:t>0.75 (0.38)</a:t>
+                      </a:r>
+                      <a:endParaRPr lang="en-US" sz="1200" dirty="0">
+                        <a:latin typeface="Calibri" charset="0"/>
+                        <a:ea typeface="Calibri" charset="0"/>
+                        <a:cs typeface="Calibri" charset="0"/>
+                      </a:endParaRPr>
+                    </a:p>
+                  </a:txBody>
+                  <a:tcPr marL="91440" marR="91440" marT="45720" marB="45720" anchor="ctr">
+                    <a:lnL w="9525" cap="flat" cmpd="sng" algn="ctr">
+                      <a:solidFill>
+                        <a:srgbClr val="D9D9DE"/>
+                      </a:solidFill>
+                      <a:prstDash val="solid"/>
+                      <a:round/>
+                      <a:headEnd type="none" w="med" len="med"/>
+                      <a:tailEnd type="none" w="med" len="med"/>
+                    </a:lnL>
+                    <a:lnR w="9525" cap="flat" cmpd="sng" algn="ctr">
+                      <a:solidFill>
+                        <a:srgbClr val="D9D9DE"/>
+                      </a:solidFill>
+                      <a:prstDash val="solid"/>
+                      <a:round/>
+                      <a:headEnd type="none" w="med" len="med"/>
+                      <a:tailEnd type="none" w="med" len="med"/>
+                    </a:lnR>
+                    <a:lnT w="9525" cap="flat" cmpd="sng" algn="ctr">
+                      <a:solidFill>
+                        <a:srgbClr val="D9D9DE"/>
+                      </a:solidFill>
+                      <a:prstDash val="solid"/>
+                      <a:round/>
+                      <a:headEnd type="none" w="med" len="med"/>
+                      <a:tailEnd type="none" w="med" len="med"/>
+                    </a:lnT>
+                    <a:lnB w="9525" cap="flat" cmpd="sng" algn="ctr">
+                      <a:solidFill>
+                        <a:srgbClr val="D9D9DE"/>
+                      </a:solidFill>
+                      <a:prstDash val="solid"/>
+                      <a:round/>
+                      <a:headEnd type="none" w="med" len="med"/>
+                      <a:tailEnd type="none" w="med" len="med"/>
+                    </a:lnB>
+                    <a:solidFill>
+                      <a:srgbClr val="FFFFFF"/>
+                    </a:solidFill>
+                  </a:tcPr>
+                </a:tc>
+                <a:tc>
+                  <a:txBody>
+                    <a:bodyPr/>
+                    <a:lstStyle/>
+                    <a:p>
+                      <a:pPr indent="0" marL="0">
+                        <a:buNone/>
+                      </a:pPr>
+                      <a:r>
+                        <a:rPr lang="en-US" sz="1200" dirty="0">
+                          <a:solidFill>
+                            <a:srgbClr val="1D1D1F"/>
+                          </a:solidFill>
+                          <a:latin typeface="Calibri" pitchFamily="34" charset="0"/>
+                          <a:ea typeface="Calibri" pitchFamily="34" charset="-122"/>
+                          <a:cs typeface="Calibri" pitchFamily="34" charset="-120"/>
+                        </a:rPr>
+                        <a:t>1.00 (0.88)</a:t>
+                      </a:r>
+                      <a:endParaRPr lang="en-US" sz="1200" dirty="0">
+                        <a:latin typeface="Calibri" charset="0"/>
+                        <a:ea typeface="Calibri" charset="0"/>
+                        <a:cs typeface="Calibri" charset="0"/>
+                      </a:endParaRPr>
+                    </a:p>
+                  </a:txBody>
+                  <a:tcPr marL="91440" marR="91440" marT="45720" marB="45720" anchor="ctr">
+                    <a:lnL w="9525" cap="flat" cmpd="sng" algn="ctr">
+                      <a:solidFill>
+                        <a:srgbClr val="D9D9DE"/>
+                      </a:solidFill>
+                      <a:prstDash val="solid"/>
+                      <a:round/>
+                      <a:headEnd type="none" w="med" len="med"/>
+                      <a:tailEnd type="none" w="med" len="med"/>
+                    </a:lnL>
+                    <a:lnR w="9525" cap="flat" cmpd="sng" algn="ctr">
+                      <a:solidFill>
+                        <a:srgbClr val="D9D9DE"/>
+                      </a:solidFill>
+                      <a:prstDash val="solid"/>
+                      <a:round/>
+                      <a:headEnd type="none" w="med" len="med"/>
+                      <a:tailEnd type="none" w="med" len="med"/>
+                    </a:lnR>
+                    <a:lnT w="9525" cap="flat" cmpd="sng" algn="ctr">
+                      <a:solidFill>
+                        <a:srgbClr val="D9D9DE"/>
+                      </a:solidFill>
+                      <a:prstDash val="solid"/>
+                      <a:round/>
+                      <a:headEnd type="none" w="med" len="med"/>
+                      <a:tailEnd type="none" w="med" len="med"/>
+                    </a:lnT>
+                    <a:lnB w="9525" cap="flat" cmpd="sng" algn="ctr">
+                      <a:solidFill>
+                        <a:srgbClr val="D9D9DE"/>
+                      </a:solidFill>
+                      <a:prstDash val="solid"/>
+                      <a:round/>
+                      <a:headEnd type="none" w="med" len="med"/>
+                      <a:tailEnd type="none" w="med" len="med"/>
+                    </a:lnB>
+                    <a:solidFill>
+                      <a:srgbClr val="FFFFFF"/>
+                    </a:solidFill>
+                  </a:tcPr>
+                </a:tc>
+                <a:tc>
+                  <a:txBody>
+                    <a:bodyPr/>
+                    <a:lstStyle/>
+                    <a:p>
+                      <a:pPr indent="0" marL="0">
+                        <a:buNone/>
+                      </a:pPr>
+                      <a:r>
+                        <a:rPr lang="en-US" sz="1200" dirty="0">
+                          <a:solidFill>
+                            <a:srgbClr val="1D1D1F"/>
+                          </a:solidFill>
+                          <a:latin typeface="Calibri" pitchFamily="34" charset="0"/>
+                          <a:ea typeface="Calibri" pitchFamily="34" charset="-122"/>
+                          <a:cs typeface="Calibri" pitchFamily="34" charset="-120"/>
+                        </a:rPr>
+                        <a:t>0.25 (0.25)</a:t>
+                      </a:r>
+                      <a:endParaRPr lang="en-US" sz="1200" dirty="0">
+                        <a:latin typeface="Calibri" charset="0"/>
+                        <a:ea typeface="Calibri" charset="0"/>
+                        <a:cs typeface="Calibri" charset="0"/>
+                      </a:endParaRPr>
+                    </a:p>
+                  </a:txBody>
+                  <a:tcPr marL="91440" marR="91440" marT="45720" marB="45720" anchor="ctr">
+                    <a:lnL w="9525" cap="flat" cmpd="sng" algn="ctr">
+                      <a:solidFill>
+                        <a:srgbClr val="D9D9DE"/>
+                      </a:solidFill>
+                      <a:prstDash val="solid"/>
+                      <a:round/>
+                      <a:headEnd type="none" w="med" len="med"/>
+                      <a:tailEnd type="none" w="med" len="med"/>
+                    </a:lnL>
+                    <a:lnR w="9525" cap="flat" cmpd="sng" algn="ctr">
+                      <a:solidFill>
+                        <a:srgbClr val="D9D9DE"/>
+                      </a:solidFill>
+                      <a:prstDash val="solid"/>
+                      <a:round/>
+                      <a:headEnd type="none" w="med" len="med"/>
+                      <a:tailEnd type="none" w="med" len="med"/>
+                    </a:lnR>
+                    <a:lnT w="9525" cap="flat" cmpd="sng" algn="ctr">
+                      <a:solidFill>
+                        <a:srgbClr val="D9D9DE"/>
+                      </a:solidFill>
+                      <a:prstDash val="solid"/>
+                      <a:round/>
+                      <a:headEnd type="none" w="med" len="med"/>
+                      <a:tailEnd type="none" w="med" len="med"/>
+                    </a:lnT>
+                    <a:lnB w="9525" cap="flat" cmpd="sng" algn="ctr">
+                      <a:solidFill>
+                        <a:srgbClr val="D9D9DE"/>
+                      </a:solidFill>
+                      <a:prstDash val="solid"/>
+                      <a:round/>
+                      <a:headEnd type="none" w="med" len="med"/>
+                      <a:tailEnd type="none" w="med" len="med"/>
+                    </a:lnB>
+                    <a:solidFill>
+                      <a:srgbClr val="FFFFFF"/>
+                    </a:solidFill>
+                  </a:tcPr>
+                </a:tc>
+                <a:tc>
+                  <a:txBody>
+                    <a:bodyPr/>
+                    <a:lstStyle/>
+                    <a:p>
+                      <a:pPr indent="0" marL="0">
+                        <a:buNone/>
+                      </a:pPr>
+                      <a:r>
+                        <a:rPr lang="en-US" sz="1200" b="1" dirty="0">
+                          <a:solidFill>
+                            <a:srgbClr val="1E9E6A"/>
+                          </a:solidFill>
+                          <a:latin typeface="Calibri" pitchFamily="34" charset="0"/>
+                          <a:ea typeface="Calibri" pitchFamily="34" charset="-122"/>
+                          <a:cs typeface="Calibri" pitchFamily="34" charset="-120"/>
+                        </a:rPr>
+                        <a:t>codellama:7b</a:t>
+                      </a:r>
+                      <a:endParaRPr lang="en-US" sz="1200" dirty="0">
+                        <a:latin typeface="Calibri" charset="0"/>
+                        <a:ea typeface="Calibri" charset="0"/>
+                        <a:cs typeface="Calibri" charset="0"/>
+                      </a:endParaRPr>
+                    </a:p>
+                  </a:txBody>
+                  <a:tcPr marL="91440" marR="91440" marT="45720" marB="45720" anchor="ctr">
+                    <a:lnL w="9525" cap="flat" cmpd="sng" algn="ctr">
+                      <a:solidFill>
+                        <a:srgbClr val="D9D9DE"/>
+                      </a:solidFill>
+                      <a:prstDash val="solid"/>
+                      <a:round/>
+                      <a:headEnd type="none" w="med" len="med"/>
+                      <a:tailEnd type="none" w="med" len="med"/>
+                    </a:lnL>
+                    <a:lnR w="9525" cap="flat" cmpd="sng" algn="ctr">
+                      <a:solidFill>
+                        <a:srgbClr val="D9D9DE"/>
+                      </a:solidFill>
+                      <a:prstDash val="solid"/>
+                      <a:round/>
+                      <a:headEnd type="none" w="med" len="med"/>
+                      <a:tailEnd type="none" w="med" len="med"/>
+                    </a:lnR>
+                    <a:lnT w="9525" cap="flat" cmpd="sng" algn="ctr">
+                      <a:solidFill>
+                        <a:srgbClr val="D9D9DE"/>
+                      </a:solidFill>
+                      <a:prstDash val="solid"/>
+                      <a:round/>
+                      <a:headEnd type="none" w="med" len="med"/>
+                      <a:tailEnd type="none" w="med" len="med"/>
+                    </a:lnT>
+                    <a:lnB w="9525" cap="flat" cmpd="sng" algn="ctr">
+                      <a:solidFill>
+                        <a:srgbClr val="D9D9DE"/>
+                      </a:solidFill>
+                      <a:prstDash val="solid"/>
+                      <a:round/>
+                      <a:headEnd type="none" w="med" len="med"/>
+                      <a:tailEnd type="none" w="med" len="med"/>
+                    </a:lnB>
+                    <a:solidFill>
+                      <a:srgbClr val="FFFFFF"/>
+                    </a:solidFill>
+                  </a:tcPr>
+                </a:tc>
+              </a:tr>
+              <a:tr h="457200">
+                <a:tc>
+                  <a:txBody>
+                    <a:bodyPr/>
+                    <a:lstStyle/>
+                    <a:p>
+                      <a:pPr indent="0" marL="0">
+                        <a:buNone/>
+                      </a:pPr>
+                      <a:r>
+                        <a:rPr lang="en-US" sz="1200" dirty="0">
+                          <a:solidFill>
+                            <a:srgbClr val="1D1D1F"/>
+                          </a:solidFill>
+                          <a:latin typeface="Calibri" pitchFamily="34" charset="0"/>
+                          <a:ea typeface="Calibri" pitchFamily="34" charset="-122"/>
+                          <a:cs typeface="Calibri" pitchFamily="34" charset="-120"/>
+                        </a:rPr>
+                        <a:t>RAG, whole pipeline (no ctx / code only / code + history)</a:t>
+                      </a:r>
+                      <a:endParaRPr lang="en-US" sz="1200" dirty="0">
+                        <a:latin typeface="Calibri" charset="0"/>
+                        <a:ea typeface="Calibri" charset="0"/>
+                        <a:cs typeface="Calibri" charset="0"/>
+                      </a:endParaRPr>
+                    </a:p>
+                  </a:txBody>
+                  <a:tcPr marL="91440" marR="91440" marT="45720" marB="45720" anchor="ctr">
+                    <a:lnL w="9525" cap="flat" cmpd="sng" algn="ctr">
+                      <a:solidFill>
+                        <a:srgbClr val="D9D9DE"/>
+                      </a:solidFill>
+                      <a:prstDash val="solid"/>
+                      <a:round/>
+                      <a:headEnd type="none" w="med" len="med"/>
+                      <a:tailEnd type="none" w="med" len="med"/>
+                    </a:lnL>
+                    <a:lnR w="9525" cap="flat" cmpd="sng" algn="ctr">
+                      <a:solidFill>
+                        <a:srgbClr val="D9D9DE"/>
+                      </a:solidFill>
+                      <a:prstDash val="solid"/>
+                      <a:round/>
+                      <a:headEnd type="none" w="med" len="med"/>
+                      <a:tailEnd type="none" w="med" len="med"/>
+                    </a:lnR>
+                    <a:lnT w="9525" cap="flat" cmpd="sng" algn="ctr">
+                      <a:solidFill>
+                        <a:srgbClr val="D9D9DE"/>
+                      </a:solidFill>
+                      <a:prstDash val="solid"/>
+                      <a:round/>
+                      <a:headEnd type="none" w="med" len="med"/>
+                      <a:tailEnd type="none" w="med" len="med"/>
+                    </a:lnT>
+                    <a:lnB w="9525" cap="flat" cmpd="sng" algn="ctr">
+                      <a:solidFill>
+                        <a:srgbClr val="D9D9DE"/>
+                      </a:solidFill>
+                      <a:prstDash val="solid"/>
+                      <a:round/>
+                      <a:headEnd type="none" w="med" len="med"/>
+                      <a:tailEnd type="none" w="med" len="med"/>
+                    </a:lnB>
+                    <a:solidFill>
+                      <a:srgbClr val="FFFFFF"/>
+                    </a:solidFill>
+                  </a:tcPr>
+                </a:tc>
+                <a:tc>
+                  <a:txBody>
+                    <a:bodyPr/>
+                    <a:lstStyle/>
+                    <a:p>
+                      <a:pPr indent="0" marL="0">
+                        <a:buNone/>
+                      </a:pPr>
+                      <a:r>
+                        <a:rPr lang="en-US" sz="1200" dirty="0">
+                          <a:solidFill>
+                            <a:srgbClr val="1D1D1F"/>
+                          </a:solidFill>
+                          <a:latin typeface="Calibri" pitchFamily="34" charset="0"/>
+                          <a:ea typeface="Calibri" pitchFamily="34" charset="-122"/>
+                          <a:cs typeface="Calibri" pitchFamily="34" charset="-120"/>
+                        </a:rPr>
+                        <a:t>28</a:t>
+                      </a:r>
+                      <a:endParaRPr lang="en-US" sz="1200" dirty="0">
+                        <a:latin typeface="Calibri" charset="0"/>
+                        <a:ea typeface="Calibri" charset="0"/>
+                        <a:cs typeface="Calibri" charset="0"/>
+                      </a:endParaRPr>
+                    </a:p>
+                  </a:txBody>
+                  <a:tcPr marL="91440" marR="91440" marT="45720" marB="45720" anchor="ctr">
+                    <a:lnL w="9525" cap="flat" cmpd="sng" algn="ctr">
+                      <a:solidFill>
+                        <a:srgbClr val="D9D9DE"/>
+                      </a:solidFill>
+                      <a:prstDash val="solid"/>
+                      <a:round/>
+                      <a:headEnd type="none" w="med" len="med"/>
+                      <a:tailEnd type="none" w="med" len="med"/>
+                    </a:lnL>
+                    <a:lnR w="9525" cap="flat" cmpd="sng" algn="ctr">
+                      <a:solidFill>
+                        <a:srgbClr val="D9D9DE"/>
+                      </a:solidFill>
+                      <a:prstDash val="solid"/>
+                      <a:round/>
+                      <a:headEnd type="none" w="med" len="med"/>
+                      <a:tailEnd type="none" w="med" len="med"/>
+                    </a:lnR>
+                    <a:lnT w="9525" cap="flat" cmpd="sng" algn="ctr">
+                      <a:solidFill>
+                        <a:srgbClr val="D9D9DE"/>
+                      </a:solidFill>
+                      <a:prstDash val="solid"/>
+                      <a:round/>
+                      <a:headEnd type="none" w="med" len="med"/>
+                      <a:tailEnd type="none" w="med" len="med"/>
+                    </a:lnT>
+                    <a:lnB w="9525" cap="flat" cmpd="sng" algn="ctr">
+                      <a:solidFill>
+                        <a:srgbClr val="D9D9DE"/>
+                      </a:solidFill>
+                      <a:prstDash val="solid"/>
+                      <a:round/>
+                      <a:headEnd type="none" w="med" len="med"/>
+                      <a:tailEnd type="none" w="med" len="med"/>
+                    </a:lnB>
+                    <a:solidFill>
+                      <a:srgbClr val="FFFFFF"/>
+                    </a:solidFill>
+                  </a:tcPr>
+                </a:tc>
+                <a:tc>
+                  <a:txBody>
+                    <a:bodyPr/>
+                    <a:lstStyle/>
+                    <a:p>
+                      <a:pPr indent="0" marL="0">
+                        <a:buNone/>
+                      </a:pPr>
+                      <a:r>
+                        <a:rPr lang="en-US" sz="1200" dirty="0">
+                          <a:solidFill>
+                            <a:srgbClr val="1D1D1F"/>
+                          </a:solidFill>
+                          <a:latin typeface="Calibri" pitchFamily="34" charset="0"/>
+                          <a:ea typeface="Calibri" pitchFamily="34" charset="-122"/>
+                          <a:cs typeface="Calibri" pitchFamily="34" charset="-120"/>
+                        </a:rPr>
+                        <a:t>0.21 / 0.50 / 0.77</a:t>
+                      </a:r>
+                      <a:endParaRPr lang="en-US" sz="1200" dirty="0">
+                        <a:latin typeface="Calibri" charset="0"/>
+                        <a:ea typeface="Calibri" charset="0"/>
+                        <a:cs typeface="Calibri" charset="0"/>
+                      </a:endParaRPr>
+                    </a:p>
+                  </a:txBody>
+                  <a:tcPr marL="91440" marR="91440" marT="45720" marB="45720" anchor="ctr">
+                    <a:lnL w="9525" cap="flat" cmpd="sng" algn="ctr">
+                      <a:solidFill>
+                        <a:srgbClr val="D9D9DE"/>
+                      </a:solidFill>
+                      <a:prstDash val="solid"/>
+                      <a:round/>
+                      <a:headEnd type="none" w="med" len="med"/>
+                      <a:tailEnd type="none" w="med" len="med"/>
+                    </a:lnL>
+                    <a:lnR w="9525" cap="flat" cmpd="sng" algn="ctr">
+                      <a:solidFill>
+                        <a:srgbClr val="D9D9DE"/>
+                      </a:solidFill>
+                      <a:prstDash val="solid"/>
+                      <a:round/>
+                      <a:headEnd type="none" w="med" len="med"/>
+                      <a:tailEnd type="none" w="med" len="med"/>
+                    </a:lnR>
+                    <a:lnT w="9525" cap="flat" cmpd="sng" algn="ctr">
+                      <a:solidFill>
+                        <a:srgbClr val="D9D9DE"/>
+                      </a:solidFill>
+                      <a:prstDash val="solid"/>
+                      <a:round/>
+                      <a:headEnd type="none" w="med" len="med"/>
+                      <a:tailEnd type="none" w="med" len="med"/>
+                    </a:lnT>
+                    <a:lnB w="9525" cap="flat" cmpd="sng" algn="ctr">
+                      <a:solidFill>
+                        <a:srgbClr val="D9D9DE"/>
+                      </a:solidFill>
+                      <a:prstDash val="solid"/>
+                      <a:round/>
+                      <a:headEnd type="none" w="med" len="med"/>
+                      <a:tailEnd type="none" w="med" len="med"/>
+                    </a:lnB>
+                    <a:solidFill>
+                      <a:srgbClr val="FFFFFF"/>
+                    </a:solidFill>
+                  </a:tcPr>
+                </a:tc>
+                <a:tc>
+                  <a:txBody>
+                    <a:bodyPr/>
+                    <a:lstStyle/>
+                    <a:p>
+                      <a:pPr indent="0" marL="0">
+                        <a:buNone/>
+                      </a:pPr>
+                      <a:r>
+                        <a:rPr lang="en-US" sz="1200" dirty="0">
+                          <a:solidFill>
+                            <a:srgbClr val="1D1D1F"/>
+                          </a:solidFill>
+                          <a:latin typeface="Calibri" pitchFamily="34" charset="0"/>
+                          <a:ea typeface="Calibri" pitchFamily="34" charset="-122"/>
+                          <a:cs typeface="Calibri" pitchFamily="34" charset="-120"/>
+                        </a:rPr>
+                        <a:t>0.12 / 0.50 / 0.74</a:t>
+                      </a:r>
+                      <a:endParaRPr lang="en-US" sz="1200" dirty="0">
+                        <a:latin typeface="Calibri" charset="0"/>
+                        <a:ea typeface="Calibri" charset="0"/>
+                        <a:cs typeface="Calibri" charset="0"/>
+                      </a:endParaRPr>
+                    </a:p>
+                  </a:txBody>
+                  <a:tcPr marL="91440" marR="91440" marT="45720" marB="45720" anchor="ctr">
+                    <a:lnL w="9525" cap="flat" cmpd="sng" algn="ctr">
+                      <a:solidFill>
+                        <a:srgbClr val="D9D9DE"/>
+                      </a:solidFill>
+                      <a:prstDash val="solid"/>
+                      <a:round/>
+                      <a:headEnd type="none" w="med" len="med"/>
+                      <a:tailEnd type="none" w="med" len="med"/>
+                    </a:lnL>
+                    <a:lnR w="9525" cap="flat" cmpd="sng" algn="ctr">
+                      <a:solidFill>
+                        <a:srgbClr val="D9D9DE"/>
+                      </a:solidFill>
+                      <a:prstDash val="solid"/>
+                      <a:round/>
+                      <a:headEnd type="none" w="med" len="med"/>
+                      <a:tailEnd type="none" w="med" len="med"/>
+                    </a:lnR>
+                    <a:lnT w="9525" cap="flat" cmpd="sng" algn="ctr">
+                      <a:solidFill>
+                        <a:srgbClr val="D9D9DE"/>
+                      </a:solidFill>
+                      <a:prstDash val="solid"/>
+                      <a:round/>
+                      <a:headEnd type="none" w="med" len="med"/>
+                      <a:tailEnd type="none" w="med" len="med"/>
+                    </a:lnT>
+                    <a:lnB w="9525" cap="flat" cmpd="sng" algn="ctr">
+                      <a:solidFill>
+                        <a:srgbClr val="D9D9DE"/>
+                      </a:solidFill>
+                      <a:prstDash val="solid"/>
+                      <a:round/>
+                      <a:headEnd type="none" w="med" len="med"/>
+                      <a:tailEnd type="none" w="med" len="med"/>
+                    </a:lnB>
+                    <a:solidFill>
+                      <a:srgbClr val="FFFFFF"/>
+                    </a:solidFill>
+                  </a:tcPr>
+                </a:tc>
+                <a:tc>
+                  <a:txBody>
+                    <a:bodyPr/>
+                    <a:lstStyle/>
+                    <a:p>
+                      <a:pPr indent="0" marL="0">
+                        <a:buNone/>
+                      </a:pPr>
+                      <a:r>
+                        <a:rPr lang="en-US" sz="1200" dirty="0">
+                          <a:solidFill>
+                            <a:srgbClr val="1D1D1F"/>
+                          </a:solidFill>
+                          <a:latin typeface="Calibri" pitchFamily="34" charset="0"/>
+                          <a:ea typeface="Calibri" pitchFamily="34" charset="-122"/>
+                          <a:cs typeface="Calibri" pitchFamily="34" charset="-120"/>
+                        </a:rPr>
+                        <a:t>0.14 / 0.25 / 0.20</a:t>
+                      </a:r>
+                      <a:endParaRPr lang="en-US" sz="1200" dirty="0">
+                        <a:latin typeface="Calibri" charset="0"/>
+                        <a:ea typeface="Calibri" charset="0"/>
+                        <a:cs typeface="Calibri" charset="0"/>
+                      </a:endParaRPr>
+                    </a:p>
+                  </a:txBody>
+                  <a:tcPr marL="91440" marR="91440" marT="45720" marB="45720" anchor="ctr">
+                    <a:lnL w="9525" cap="flat" cmpd="sng" algn="ctr">
+                      <a:solidFill>
+                        <a:srgbClr val="D9D9DE"/>
+                      </a:solidFill>
+                      <a:prstDash val="solid"/>
+                      <a:round/>
+                      <a:headEnd type="none" w="med" len="med"/>
+                      <a:tailEnd type="none" w="med" len="med"/>
+                    </a:lnL>
+                    <a:lnR w="9525" cap="flat" cmpd="sng" algn="ctr">
+                      <a:solidFill>
+                        <a:srgbClr val="D9D9DE"/>
+                      </a:solidFill>
+                      <a:prstDash val="solid"/>
+                      <a:round/>
+                      <a:headEnd type="none" w="med" len="med"/>
+                      <a:tailEnd type="none" w="med" len="med"/>
+                    </a:lnR>
+                    <a:lnT w="9525" cap="flat" cmpd="sng" algn="ctr">
+                      <a:solidFill>
+                        <a:srgbClr val="D9D9DE"/>
+                      </a:solidFill>
+                      <a:prstDash val="solid"/>
+                      <a:round/>
+                      <a:headEnd type="none" w="med" len="med"/>
+                      <a:tailEnd type="none" w="med" len="med"/>
+                    </a:lnT>
+                    <a:lnB w="9525" cap="flat" cmpd="sng" algn="ctr">
+                      <a:solidFill>
+                        <a:srgbClr val="D9D9DE"/>
+                      </a:solidFill>
+                      <a:prstDash val="solid"/>
+                      <a:round/>
+                      <a:headEnd type="none" w="med" len="med"/>
+                      <a:tailEnd type="none" w="med" len="med"/>
+                    </a:lnB>
+                    <a:solidFill>
+                      <a:srgbClr val="FFFFFF"/>
+                    </a:solidFill>
+                  </a:tcPr>
+                </a:tc>
+                <a:tc>
+                  <a:txBody>
+                    <a:bodyPr/>
+                    <a:lstStyle/>
+                    <a:p>
+                      <a:pPr indent="0" marL="0">
+                        <a:buNone/>
+                      </a:pPr>
+                      <a:r>
+                        <a:rPr lang="en-US" sz="1200" b="1" dirty="0">
+                          <a:solidFill>
+                            <a:srgbClr val="1E9E6A"/>
+                          </a:solidFill>
+                          <a:latin typeface="Calibri" pitchFamily="34" charset="0"/>
+                          <a:ea typeface="Calibri" pitchFamily="34" charset="-122"/>
+                          <a:cs typeface="Calibri" pitchFamily="34" charset="-120"/>
+                        </a:rPr>
+                        <a:t>llama2 = codellama</a:t>
+                      </a:r>
+                      <a:endParaRPr lang="en-US" sz="1200" dirty="0">
+                        <a:latin typeface="Calibri" charset="0"/>
+                        <a:ea typeface="Calibri" charset="0"/>
+                        <a:cs typeface="Calibri" charset="0"/>
+                      </a:endParaRPr>
+                    </a:p>
+                  </a:txBody>
+                  <a:tcPr marL="91440" marR="91440" marT="45720" marB="45720" anchor="ctr">
+                    <a:lnL w="9525" cap="flat" cmpd="sng" algn="ctr">
+                      <a:solidFill>
+                        <a:srgbClr val="D9D9DE"/>
+                      </a:solidFill>
+                      <a:prstDash val="solid"/>
+                      <a:round/>
+                      <a:headEnd type="none" w="med" len="med"/>
+                      <a:tailEnd type="none" w="med" len="med"/>
+                    </a:lnL>
+                    <a:lnR w="9525" cap="flat" cmpd="sng" algn="ctr">
+                      <a:solidFill>
+                        <a:srgbClr val="D9D9DE"/>
+                      </a:solidFill>
+                      <a:prstDash val="solid"/>
+                      <a:round/>
+                      <a:headEnd type="none" w="med" len="med"/>
+                      <a:tailEnd type="none" w="med" len="med"/>
+                    </a:lnR>
+                    <a:lnT w="9525" cap="flat" cmpd="sng" algn="ctr">
+                      <a:solidFill>
+                        <a:srgbClr val="D9D9DE"/>
+                      </a:solidFill>
+                      <a:prstDash val="solid"/>
+                      <a:round/>
+                      <a:headEnd type="none" w="med" len="med"/>
+                      <a:tailEnd type="none" w="med" len="med"/>
+                    </a:lnT>
+                    <a:lnB w="9525" cap="flat" cmpd="sng" algn="ctr">
+                      <a:solidFill>
+                        <a:srgbClr val="D9D9DE"/>
+                      </a:solidFill>
+                      <a:prstDash val="solid"/>
+                      <a:round/>
+                      <a:headEnd type="none" w="med" len="med"/>
+                      <a:tailEnd type="none" w="med" len="med"/>
+                    </a:lnB>
+                    <a:solidFill>
+                      <a:srgbClr val="FFFFFF"/>
+                    </a:solidFill>
+                  </a:tcPr>
+                </a:tc>
+              </a:tr>
+              <a:tr h="384048">
+                <a:tc>
+                  <a:txBody>
+                    <a:bodyPr/>
+                    <a:lstStyle/>
+                    <a:p>
+                      <a:pPr indent="0" marL="0">
+                        <a:buNone/>
+                      </a:pPr>
+                      <a:r>
+                        <a:rPr lang="en-US" sz="1200" i="1" dirty="0">
+                          <a:solidFill>
+                            <a:srgbClr val="55555B"/>
+                          </a:solidFill>
+                          <a:latin typeface="Calibri" pitchFamily="34" charset="0"/>
+                          <a:ea typeface="Calibri" pitchFamily="34" charset="-122"/>
+                          <a:cs typeface="Calibri" pitchFamily="34" charset="-120"/>
+                        </a:rPr>
+                        <a:t>Code generation</a:t>
+                      </a:r>
+                      <a:endParaRPr lang="en-US" sz="1200" dirty="0">
+                        <a:latin typeface="Calibri" charset="0"/>
+                        <a:ea typeface="Calibri" charset="0"/>
+                        <a:cs typeface="Calibri" charset="0"/>
+                      </a:endParaRPr>
+                    </a:p>
+                  </a:txBody>
+                  <a:tcPr marL="91440" marR="91440" marT="45720" marB="45720" anchor="ctr">
+                    <a:lnL w="9525" cap="flat" cmpd="sng" algn="ctr">
+                      <a:solidFill>
+                        <a:srgbClr val="D9D9DE"/>
+                      </a:solidFill>
+                      <a:prstDash val="solid"/>
+                      <a:round/>
+                      <a:headEnd type="none" w="med" len="med"/>
+                      <a:tailEnd type="none" w="med" len="med"/>
+                    </a:lnL>
+                    <a:lnR w="9525" cap="flat" cmpd="sng" algn="ctr">
+                      <a:solidFill>
+                        <a:srgbClr val="D9D9DE"/>
+                      </a:solidFill>
+                      <a:prstDash val="solid"/>
+                      <a:round/>
+                      <a:headEnd type="none" w="med" len="med"/>
+                      <a:tailEnd type="none" w="med" len="med"/>
+                    </a:lnR>
+                    <a:lnT w="9525" cap="flat" cmpd="sng" algn="ctr">
+                      <a:solidFill>
+                        <a:srgbClr val="D9D9DE"/>
+                      </a:solidFill>
+                      <a:prstDash val="solid"/>
+                      <a:round/>
+                      <a:headEnd type="none" w="med" len="med"/>
+                      <a:tailEnd type="none" w="med" len="med"/>
+                    </a:lnT>
+                    <a:lnB w="9525" cap="flat" cmpd="sng" algn="ctr">
+                      <a:solidFill>
+                        <a:srgbClr val="D9D9DE"/>
+                      </a:solidFill>
+                      <a:prstDash val="solid"/>
+                      <a:round/>
+                      <a:headEnd type="none" w="med" len="med"/>
+                      <a:tailEnd type="none" w="med" len="med"/>
+                    </a:lnB>
+                    <a:solidFill>
+                      <a:srgbClr val="FFFFFF"/>
+                    </a:solidFill>
+                  </a:tcPr>
+                </a:tc>
+                <a:tc>
+                  <a:txBody>
+                    <a:bodyPr/>
+                    <a:lstStyle/>
+                    <a:p>
+                      <a:pPr indent="0" marL="0">
+                        <a:buNone/>
+                      </a:pPr>
+                      <a:r>
+                        <a:rPr lang="en-US" sz="1200" i="1" dirty="0">
+                          <a:solidFill>
+                            <a:srgbClr val="55555B"/>
+                          </a:solidFill>
+                          <a:latin typeface="Calibri" pitchFamily="34" charset="0"/>
+                          <a:ea typeface="Calibri" pitchFamily="34" charset="-122"/>
+                          <a:cs typeface="Calibri" pitchFamily="34" charset="-120"/>
+                        </a:rPr>
+                        <a:t>-</a:t>
+                      </a:r>
+                      <a:endParaRPr lang="en-US" sz="1200" dirty="0">
+                        <a:latin typeface="Calibri" charset="0"/>
+                        <a:ea typeface="Calibri" charset="0"/>
+                        <a:cs typeface="Calibri" charset="0"/>
+                      </a:endParaRPr>
+                    </a:p>
+                  </a:txBody>
+                  <a:tcPr marL="91440" marR="91440" marT="45720" marB="45720" anchor="ctr">
+                    <a:lnL w="9525" cap="flat" cmpd="sng" algn="ctr">
+                      <a:solidFill>
+                        <a:srgbClr val="D9D9DE"/>
+                      </a:solidFill>
+                      <a:prstDash val="solid"/>
+                      <a:round/>
+                      <a:headEnd type="none" w="med" len="med"/>
+                      <a:tailEnd type="none" w="med" len="med"/>
+                    </a:lnL>
+                    <a:lnR w="9525" cap="flat" cmpd="sng" algn="ctr">
+                      <a:solidFill>
+                        <a:srgbClr val="D9D9DE"/>
+                      </a:solidFill>
+                      <a:prstDash val="solid"/>
+                      <a:round/>
+                      <a:headEnd type="none" w="med" len="med"/>
+                      <a:tailEnd type="none" w="med" len="med"/>
+                    </a:lnR>
+                    <a:lnT w="9525" cap="flat" cmpd="sng" algn="ctr">
+                      <a:solidFill>
+                        <a:srgbClr val="D9D9DE"/>
+                      </a:solidFill>
+                      <a:prstDash val="solid"/>
+                      <a:round/>
+                      <a:headEnd type="none" w="med" len="med"/>
+                      <a:tailEnd type="none" w="med" len="med"/>
+                    </a:lnT>
+                    <a:lnB w="9525" cap="flat" cmpd="sng" algn="ctr">
+                      <a:solidFill>
+                        <a:srgbClr val="D9D9DE"/>
+                      </a:solidFill>
+                      <a:prstDash val="solid"/>
+                      <a:round/>
+                      <a:headEnd type="none" w="med" len="med"/>
+                      <a:tailEnd type="none" w="med" len="med"/>
+                    </a:lnB>
+                    <a:solidFill>
+                      <a:srgbClr val="FFFFFF"/>
+                    </a:solidFill>
+                  </a:tcPr>
+                </a:tc>
+                <a:tc>
+                  <a:txBody>
+                    <a:bodyPr/>
+                    <a:lstStyle/>
+                    <a:p>
+                      <a:pPr indent="0" marL="0">
+                        <a:buNone/>
+                      </a:pPr>
+                      <a:r>
+                        <a:rPr lang="en-US" sz="1200" i="1" dirty="0">
+                          <a:solidFill>
+                            <a:srgbClr val="55555B"/>
+                          </a:solidFill>
+                          <a:latin typeface="Calibri" pitchFamily="34" charset="0"/>
+                          <a:ea typeface="Calibri" pitchFamily="34" charset="-122"/>
+                          <a:cs typeface="Calibri" pitchFamily="34" charset="-120"/>
+                        </a:rPr>
+                        <a:t>not evaluated</a:t>
+                      </a:r>
+                      <a:endParaRPr lang="en-US" sz="1200" dirty="0">
+                        <a:latin typeface="Calibri" charset="0"/>
+                        <a:ea typeface="Calibri" charset="0"/>
+                        <a:cs typeface="Calibri" charset="0"/>
+                      </a:endParaRPr>
+                    </a:p>
+                  </a:txBody>
+                  <a:tcPr marL="91440" marR="91440" marT="45720" marB="45720" anchor="ctr">
+                    <a:lnL w="9525" cap="flat" cmpd="sng" algn="ctr">
+                      <a:solidFill>
+                        <a:srgbClr val="D9D9DE"/>
+                      </a:solidFill>
+                      <a:prstDash val="solid"/>
+                      <a:round/>
+                      <a:headEnd type="none" w="med" len="med"/>
+                      <a:tailEnd type="none" w="med" len="med"/>
+                    </a:lnL>
+                    <a:lnR w="9525" cap="flat" cmpd="sng" algn="ctr">
+                      <a:solidFill>
+                        <a:srgbClr val="D9D9DE"/>
+                      </a:solidFill>
+                      <a:prstDash val="solid"/>
+                      <a:round/>
+                      <a:headEnd type="none" w="med" len="med"/>
+                      <a:tailEnd type="none" w="med" len="med"/>
+                    </a:lnR>
+                    <a:lnT w="9525" cap="flat" cmpd="sng" algn="ctr">
+                      <a:solidFill>
+                        <a:srgbClr val="D9D9DE"/>
+                      </a:solidFill>
+                      <a:prstDash val="solid"/>
+                      <a:round/>
+                      <a:headEnd type="none" w="med" len="med"/>
+                      <a:tailEnd type="none" w="med" len="med"/>
+                    </a:lnT>
+                    <a:lnB w="9525" cap="flat" cmpd="sng" algn="ctr">
+                      <a:solidFill>
+                        <a:srgbClr val="D9D9DE"/>
+                      </a:solidFill>
+                      <a:prstDash val="solid"/>
+                      <a:round/>
+                      <a:headEnd type="none" w="med" len="med"/>
+                      <a:tailEnd type="none" w="med" len="med"/>
+                    </a:lnB>
+                    <a:solidFill>
+                      <a:srgbClr val="FFFFFF"/>
+                    </a:solidFill>
+                  </a:tcPr>
+                </a:tc>
+                <a:tc>
+                  <a:txBody>
+                    <a:bodyPr/>
+                    <a:lstStyle/>
+                    <a:p>
+                      <a:pPr indent="0" marL="0">
+                        <a:buNone/>
+                      </a:pPr>
+                      <a:r>
+                        <a:rPr lang="en-US" sz="1200" i="1" dirty="0">
+                          <a:solidFill>
+                            <a:srgbClr val="55555B"/>
+                          </a:solidFill>
+                          <a:latin typeface="Calibri" pitchFamily="34" charset="0"/>
+                          <a:ea typeface="Calibri" pitchFamily="34" charset="-122"/>
+                          <a:cs typeface="Calibri" pitchFamily="34" charset="-120"/>
+                        </a:rPr>
+                        <a:t>not evaluated</a:t>
+                      </a:r>
+                      <a:endParaRPr lang="en-US" sz="1200" dirty="0">
+                        <a:latin typeface="Calibri" charset="0"/>
+                        <a:ea typeface="Calibri" charset="0"/>
+                        <a:cs typeface="Calibri" charset="0"/>
+                      </a:endParaRPr>
+                    </a:p>
+                  </a:txBody>
+                  <a:tcPr marL="91440" marR="91440" marT="45720" marB="45720" anchor="ctr">
+                    <a:lnL w="9525" cap="flat" cmpd="sng" algn="ctr">
+                      <a:solidFill>
+                        <a:srgbClr val="D9D9DE"/>
+                      </a:solidFill>
+                      <a:prstDash val="solid"/>
+                      <a:round/>
+                      <a:headEnd type="none" w="med" len="med"/>
+                      <a:tailEnd type="none" w="med" len="med"/>
+                    </a:lnL>
+                    <a:lnR w="9525" cap="flat" cmpd="sng" algn="ctr">
+                      <a:solidFill>
+                        <a:srgbClr val="D9D9DE"/>
+                      </a:solidFill>
+                      <a:prstDash val="solid"/>
+                      <a:round/>
+                      <a:headEnd type="none" w="med" len="med"/>
+                      <a:tailEnd type="none" w="med" len="med"/>
+                    </a:lnR>
+                    <a:lnT w="9525" cap="flat" cmpd="sng" algn="ctr">
+                      <a:solidFill>
+                        <a:srgbClr val="D9D9DE"/>
+                      </a:solidFill>
+                      <a:prstDash val="solid"/>
+                      <a:round/>
+                      <a:headEnd type="none" w="med" len="med"/>
+                      <a:tailEnd type="none" w="med" len="med"/>
+                    </a:lnT>
+                    <a:lnB w="9525" cap="flat" cmpd="sng" algn="ctr">
+                      <a:solidFill>
+                        <a:srgbClr val="D9D9DE"/>
+                      </a:solidFill>
+                      <a:prstDash val="solid"/>
+                      <a:round/>
+                      <a:headEnd type="none" w="med" len="med"/>
+                      <a:tailEnd type="none" w="med" len="med"/>
+                    </a:lnB>
+                    <a:solidFill>
+                      <a:srgbClr val="FFFFFF"/>
+                    </a:solidFill>
+                  </a:tcPr>
+                </a:tc>
+                <a:tc>
+                  <a:txBody>
+                    <a:bodyPr/>
+                    <a:lstStyle/>
+                    <a:p>
+                      <a:pPr indent="0" marL="0">
+                        <a:buNone/>
+                      </a:pPr>
+                      <a:r>
+                        <a:rPr lang="en-US" sz="1200" i="1" dirty="0">
+                          <a:solidFill>
+                            <a:srgbClr val="55555B"/>
+                          </a:solidFill>
+                          <a:latin typeface="Calibri" pitchFamily="34" charset="0"/>
+                          <a:ea typeface="Calibri" pitchFamily="34" charset="-122"/>
+                          <a:cs typeface="Calibri" pitchFamily="34" charset="-120"/>
+                        </a:rPr>
+                        <a:t>not evaluated</a:t>
+                      </a:r>
+                      <a:endParaRPr lang="en-US" sz="1200" dirty="0">
+                        <a:latin typeface="Calibri" charset="0"/>
+                        <a:ea typeface="Calibri" charset="0"/>
+                        <a:cs typeface="Calibri" charset="0"/>
+                      </a:endParaRPr>
+                    </a:p>
+                  </a:txBody>
+                  <a:tcPr marL="91440" marR="91440" marT="45720" marB="45720" anchor="ctr">
+                    <a:lnL w="9525" cap="flat" cmpd="sng" algn="ctr">
+                      <a:solidFill>
+                        <a:srgbClr val="D9D9DE"/>
+                      </a:solidFill>
+                      <a:prstDash val="solid"/>
+                      <a:round/>
+                      <a:headEnd type="none" w="med" len="med"/>
+                      <a:tailEnd type="none" w="med" len="med"/>
+                    </a:lnL>
+                    <a:lnR w="9525" cap="flat" cmpd="sng" algn="ctr">
+                      <a:solidFill>
+                        <a:srgbClr val="D9D9DE"/>
+                      </a:solidFill>
+                      <a:prstDash val="solid"/>
+                      <a:round/>
+                      <a:headEnd type="none" w="med" len="med"/>
+                      <a:tailEnd type="none" w="med" len="med"/>
+                    </a:lnR>
+                    <a:lnT w="9525" cap="flat" cmpd="sng" algn="ctr">
+                      <a:solidFill>
+                        <a:srgbClr val="D9D9DE"/>
+                      </a:solidFill>
+                      <a:prstDash val="solid"/>
+                      <a:round/>
+                      <a:headEnd type="none" w="med" len="med"/>
+                      <a:tailEnd type="none" w="med" len="med"/>
+                    </a:lnT>
+                    <a:lnB w="9525" cap="flat" cmpd="sng" algn="ctr">
+                      <a:solidFill>
+                        <a:srgbClr val="D9D9DE"/>
+                      </a:solidFill>
+                      <a:prstDash val="solid"/>
+                      <a:round/>
+                      <a:headEnd type="none" w="med" len="med"/>
+                      <a:tailEnd type="none" w="med" len="med"/>
+                    </a:lnB>
+                    <a:solidFill>
+                      <a:srgbClr val="FFFFFF"/>
+                    </a:solidFill>
+                  </a:tcPr>
+                </a:tc>
+                <a:tc>
+                  <a:txBody>
+                    <a:bodyPr/>
+                    <a:lstStyle/>
+                    <a:p>
+                      <a:pPr indent="0" marL="0">
+                        <a:buNone/>
+                      </a:pPr>
+                      <a:r>
+                        <a:rPr lang="en-US" sz="1200" i="1" dirty="0">
+                          <a:solidFill>
+                            <a:srgbClr val="55555B"/>
+                          </a:solidFill>
+                          <a:latin typeface="Calibri" pitchFamily="34" charset="0"/>
+                          <a:ea typeface="Calibri" pitchFamily="34" charset="-122"/>
+                          <a:cs typeface="Calibri" pitchFamily="34" charset="-120"/>
+                        </a:rPr>
+                        <a:t>-</a:t>
+                      </a:r>
+                      <a:endParaRPr lang="en-US" sz="1200" dirty="0">
+                        <a:latin typeface="Calibri" charset="0"/>
+                        <a:ea typeface="Calibri" charset="0"/>
+                        <a:cs typeface="Calibri" charset="0"/>
+                      </a:endParaRPr>
+                    </a:p>
+                  </a:txBody>
+                  <a:tcPr marL="91440" marR="91440" marT="45720" marB="45720" anchor="ctr">
+                    <a:lnL w="9525" cap="flat" cmpd="sng" algn="ctr">
+                      <a:solidFill>
+                        <a:srgbClr val="D9D9DE"/>
+                      </a:solidFill>
+                      <a:prstDash val="solid"/>
+                      <a:round/>
+                      <a:headEnd type="none" w="med" len="med"/>
+                      <a:tailEnd type="none" w="med" len="med"/>
+                    </a:lnL>
+                    <a:lnR w="9525" cap="flat" cmpd="sng" algn="ctr">
+                      <a:solidFill>
+                        <a:srgbClr val="D9D9DE"/>
+                      </a:solidFill>
+                      <a:prstDash val="solid"/>
+                      <a:round/>
+                      <a:headEnd type="none" w="med" len="med"/>
+                      <a:tailEnd type="none" w="med" len="med"/>
+                    </a:lnR>
+                    <a:lnT w="9525" cap="flat" cmpd="sng" algn="ctr">
+                      <a:solidFill>
+                        <a:srgbClr val="D9D9DE"/>
+                      </a:solidFill>
+                      <a:prstDash val="solid"/>
+                      <a:round/>
+                      <a:headEnd type="none" w="med" len="med"/>
+                      <a:tailEnd type="none" w="med" len="med"/>
+                    </a:lnT>
+                    <a:lnB w="9525" cap="flat" cmpd="sng" algn="ctr">
+                      <a:solidFill>
+                        <a:srgbClr val="D9D9DE"/>
+                      </a:solidFill>
+                      <a:prstDash val="solid"/>
+                      <a:round/>
+                      <a:headEnd type="none" w="med" len="med"/>
+                      <a:tailEnd type="none" w="med" len="med"/>
+                    </a:lnB>
+                    <a:solidFill>
+                      <a:srgbClr val="FFFFFF"/>
+                    </a:solidFill>
+                  </a:tcPr>
+                </a:tc>
+              </a:tr>
+              <a:tr h="384048">
+                <a:tc>
+                  <a:txBody>
+                    <a:bodyPr/>
+                    <a:lstStyle/>
+                    <a:p>
+                      <a:pPr indent="0" marL="0">
+                        <a:buNone/>
+                      </a:pPr>
+                      <a:r>
+                        <a:rPr lang="en-US" sz="1200" i="1" dirty="0">
+                          <a:solidFill>
+                            <a:srgbClr val="55555B"/>
+                          </a:solidFill>
+                          <a:latin typeface="Calibri" pitchFamily="34" charset="0"/>
+                          <a:ea typeface="Calibri" pitchFamily="34" charset="-122"/>
+                          <a:cs typeface="Calibri" pitchFamily="34" charset="-120"/>
+                        </a:rPr>
+                        <a:t>Refactoring</a:t>
+                      </a:r>
+                      <a:endParaRPr lang="en-US" sz="1200" dirty="0">
+                        <a:latin typeface="Calibri" charset="0"/>
+                        <a:ea typeface="Calibri" charset="0"/>
+                        <a:cs typeface="Calibri" charset="0"/>
+                      </a:endParaRPr>
+                    </a:p>
+                  </a:txBody>
+                  <a:tcPr marL="91440" marR="91440" marT="45720" marB="45720" anchor="ctr">
+                    <a:lnL w="9525" cap="flat" cmpd="sng" algn="ctr">
+                      <a:solidFill>
+                        <a:srgbClr val="D9D9DE"/>
+                      </a:solidFill>
+                      <a:prstDash val="solid"/>
+                      <a:round/>
+                      <a:headEnd type="none" w="med" len="med"/>
+                      <a:tailEnd type="none" w="med" len="med"/>
+                    </a:lnL>
+                    <a:lnR w="9525" cap="flat" cmpd="sng" algn="ctr">
+                      <a:solidFill>
+                        <a:srgbClr val="D9D9DE"/>
+                      </a:solidFill>
+                      <a:prstDash val="solid"/>
+                      <a:round/>
+                      <a:headEnd type="none" w="med" len="med"/>
+                      <a:tailEnd type="none" w="med" len="med"/>
+                    </a:lnR>
+                    <a:lnT w="9525" cap="flat" cmpd="sng" algn="ctr">
+                      <a:solidFill>
+                        <a:srgbClr val="D9D9DE"/>
+                      </a:solidFill>
+                      <a:prstDash val="solid"/>
+                      <a:round/>
+                      <a:headEnd type="none" w="med" len="med"/>
+                      <a:tailEnd type="none" w="med" len="med"/>
+                    </a:lnT>
+                    <a:lnB w="9525" cap="flat" cmpd="sng" algn="ctr">
+                      <a:solidFill>
+                        <a:srgbClr val="D9D9DE"/>
+                      </a:solidFill>
+                      <a:prstDash val="solid"/>
+                      <a:round/>
+                      <a:headEnd type="none" w="med" len="med"/>
+                      <a:tailEnd type="none" w="med" len="med"/>
+                    </a:lnB>
+                    <a:solidFill>
+                      <a:srgbClr val="FFFFFF"/>
+                    </a:solidFill>
+                  </a:tcPr>
+                </a:tc>
+                <a:tc>
+                  <a:txBody>
+                    <a:bodyPr/>
+                    <a:lstStyle/>
+                    <a:p>
+                      <a:pPr indent="0" marL="0">
+                        <a:buNone/>
+                      </a:pPr>
+                      <a:r>
+                        <a:rPr lang="en-US" sz="1200" i="1" dirty="0">
+                          <a:solidFill>
+                            <a:srgbClr val="55555B"/>
+                          </a:solidFill>
+                          <a:latin typeface="Calibri" pitchFamily="34" charset="0"/>
+                          <a:ea typeface="Calibri" pitchFamily="34" charset="-122"/>
+                          <a:cs typeface="Calibri" pitchFamily="34" charset="-120"/>
+                        </a:rPr>
+                        <a:t>-</a:t>
+                      </a:r>
+                      <a:endParaRPr lang="en-US" sz="1200" dirty="0">
+                        <a:latin typeface="Calibri" charset="0"/>
+                        <a:ea typeface="Calibri" charset="0"/>
+                        <a:cs typeface="Calibri" charset="0"/>
+                      </a:endParaRPr>
+                    </a:p>
+                  </a:txBody>
+                  <a:tcPr marL="91440" marR="91440" marT="45720" marB="45720" anchor="ctr">
+                    <a:lnL w="9525" cap="flat" cmpd="sng" algn="ctr">
+                      <a:solidFill>
+                        <a:srgbClr val="D9D9DE"/>
+                      </a:solidFill>
+                      <a:prstDash val="solid"/>
+                      <a:round/>
+                      <a:headEnd type="none" w="med" len="med"/>
+                      <a:tailEnd type="none" w="med" len="med"/>
+                    </a:lnL>
+                    <a:lnR w="9525" cap="flat" cmpd="sng" algn="ctr">
+                      <a:solidFill>
+                        <a:srgbClr val="D9D9DE"/>
+                      </a:solidFill>
+                      <a:prstDash val="solid"/>
+                      <a:round/>
+                      <a:headEnd type="none" w="med" len="med"/>
+                      <a:tailEnd type="none" w="med" len="med"/>
+                    </a:lnR>
+                    <a:lnT w="9525" cap="flat" cmpd="sng" algn="ctr">
+                      <a:solidFill>
+                        <a:srgbClr val="D9D9DE"/>
+                      </a:solidFill>
+                      <a:prstDash val="solid"/>
+                      <a:round/>
+                      <a:headEnd type="none" w="med" len="med"/>
+                      <a:tailEnd type="none" w="med" len="med"/>
+                    </a:lnT>
+                    <a:lnB w="9525" cap="flat" cmpd="sng" algn="ctr">
+                      <a:solidFill>
+                        <a:srgbClr val="D9D9DE"/>
+                      </a:solidFill>
+                      <a:prstDash val="solid"/>
+                      <a:round/>
+                      <a:headEnd type="none" w="med" len="med"/>
+                      <a:tailEnd type="none" w="med" len="med"/>
+                    </a:lnB>
+                    <a:solidFill>
+                      <a:srgbClr val="FFFFFF"/>
+                    </a:solidFill>
+                  </a:tcPr>
+                </a:tc>
+                <a:tc>
+                  <a:txBody>
+                    <a:bodyPr/>
+                    <a:lstStyle/>
+                    <a:p>
+                      <a:pPr indent="0" marL="0">
+                        <a:buNone/>
+                      </a:pPr>
+                      <a:r>
+                        <a:rPr lang="en-US" sz="1200" i="1" dirty="0">
+                          <a:solidFill>
+                            <a:srgbClr val="55555B"/>
+                          </a:solidFill>
+                          <a:latin typeface="Calibri" pitchFamily="34" charset="0"/>
+                          <a:ea typeface="Calibri" pitchFamily="34" charset="-122"/>
+                          <a:cs typeface="Calibri" pitchFamily="34" charset="-120"/>
+                        </a:rPr>
+                        <a:t>not evaluated</a:t>
+                      </a:r>
+                      <a:endParaRPr lang="en-US" sz="1200" dirty="0">
+                        <a:latin typeface="Calibri" charset="0"/>
+                        <a:ea typeface="Calibri" charset="0"/>
+                        <a:cs typeface="Calibri" charset="0"/>
+                      </a:endParaRPr>
+                    </a:p>
+                  </a:txBody>
+                  <a:tcPr marL="91440" marR="91440" marT="45720" marB="45720" anchor="ctr">
+                    <a:lnL w="9525" cap="flat" cmpd="sng" algn="ctr">
+                      <a:solidFill>
+                        <a:srgbClr val="D9D9DE"/>
+                      </a:solidFill>
+                      <a:prstDash val="solid"/>
+                      <a:round/>
+                      <a:headEnd type="none" w="med" len="med"/>
+                      <a:tailEnd type="none" w="med" len="med"/>
+                    </a:lnL>
+                    <a:lnR w="9525" cap="flat" cmpd="sng" algn="ctr">
+                      <a:solidFill>
+                        <a:srgbClr val="D9D9DE"/>
+                      </a:solidFill>
+                      <a:prstDash val="solid"/>
+                      <a:round/>
+                      <a:headEnd type="none" w="med" len="med"/>
+                      <a:tailEnd type="none" w="med" len="med"/>
+                    </a:lnR>
+                    <a:lnT w="9525" cap="flat" cmpd="sng" algn="ctr">
+                      <a:solidFill>
+                        <a:srgbClr val="D9D9DE"/>
+                      </a:solidFill>
+                      <a:prstDash val="solid"/>
+                      <a:round/>
+                      <a:headEnd type="none" w="med" len="med"/>
+                      <a:tailEnd type="none" w="med" len="med"/>
+                    </a:lnT>
+                    <a:lnB w="9525" cap="flat" cmpd="sng" algn="ctr">
+                      <a:solidFill>
+                        <a:srgbClr val="D9D9DE"/>
+                      </a:solidFill>
+                      <a:prstDash val="solid"/>
+                      <a:round/>
+                      <a:headEnd type="none" w="med" len="med"/>
+                      <a:tailEnd type="none" w="med" len="med"/>
+                    </a:lnB>
+                    <a:solidFill>
+                      <a:srgbClr val="FFFFFF"/>
+                    </a:solidFill>
+                  </a:tcPr>
+                </a:tc>
+                <a:tc>
+                  <a:txBody>
+                    <a:bodyPr/>
+                    <a:lstStyle/>
+                    <a:p>
+                      <a:pPr indent="0" marL="0">
+                        <a:buNone/>
+                      </a:pPr>
+                      <a:r>
+                        <a:rPr lang="en-US" sz="1200" i="1" dirty="0">
+                          <a:solidFill>
+                            <a:srgbClr val="55555B"/>
+                          </a:solidFill>
+                          <a:latin typeface="Calibri" pitchFamily="34" charset="0"/>
+                          <a:ea typeface="Calibri" pitchFamily="34" charset="-122"/>
+                          <a:cs typeface="Calibri" pitchFamily="34" charset="-120"/>
+                        </a:rPr>
+                        <a:t>not evaluated</a:t>
+                      </a:r>
+                      <a:endParaRPr lang="en-US" sz="1200" dirty="0">
+                        <a:latin typeface="Calibri" charset="0"/>
+                        <a:ea typeface="Calibri" charset="0"/>
+                        <a:cs typeface="Calibri" charset="0"/>
+                      </a:endParaRPr>
+                    </a:p>
+                  </a:txBody>
+                  <a:tcPr marL="91440" marR="91440" marT="45720" marB="45720" anchor="ctr">
+                    <a:lnL w="9525" cap="flat" cmpd="sng" algn="ctr">
+                      <a:solidFill>
+                        <a:srgbClr val="D9D9DE"/>
+                      </a:solidFill>
+                      <a:prstDash val="solid"/>
+                      <a:round/>
+                      <a:headEnd type="none" w="med" len="med"/>
+                      <a:tailEnd type="none" w="med" len="med"/>
+                    </a:lnL>
+                    <a:lnR w="9525" cap="flat" cmpd="sng" algn="ctr">
+                      <a:solidFill>
+                        <a:srgbClr val="D9D9DE"/>
+                      </a:solidFill>
+                      <a:prstDash val="solid"/>
+                      <a:round/>
+                      <a:headEnd type="none" w="med" len="med"/>
+                      <a:tailEnd type="none" w="med" len="med"/>
+                    </a:lnR>
+                    <a:lnT w="9525" cap="flat" cmpd="sng" algn="ctr">
+                      <a:solidFill>
+                        <a:srgbClr val="D9D9DE"/>
+                      </a:solidFill>
+                      <a:prstDash val="solid"/>
+                      <a:round/>
+                      <a:headEnd type="none" w="med" len="med"/>
+                      <a:tailEnd type="none" w="med" len="med"/>
+                    </a:lnT>
+                    <a:lnB w="9525" cap="flat" cmpd="sng" algn="ctr">
+                      <a:solidFill>
+                        <a:srgbClr val="D9D9DE"/>
+                      </a:solidFill>
+                      <a:prstDash val="solid"/>
+                      <a:round/>
+                      <a:headEnd type="none" w="med" len="med"/>
+                      <a:tailEnd type="none" w="med" len="med"/>
+                    </a:lnB>
+                    <a:solidFill>
+                      <a:srgbClr val="FFFFFF"/>
+                    </a:solidFill>
+                  </a:tcPr>
+                </a:tc>
+                <a:tc>
+                  <a:txBody>
+                    <a:bodyPr/>
+                    <a:lstStyle/>
+                    <a:p>
+                      <a:pPr indent="0" marL="0">
+                        <a:buNone/>
+                      </a:pPr>
+                      <a:r>
+                        <a:rPr lang="en-US" sz="1200" i="1" dirty="0">
+                          <a:solidFill>
+                            <a:srgbClr val="55555B"/>
+                          </a:solidFill>
+                          <a:latin typeface="Calibri" pitchFamily="34" charset="0"/>
+                          <a:ea typeface="Calibri" pitchFamily="34" charset="-122"/>
+                          <a:cs typeface="Calibri" pitchFamily="34" charset="-120"/>
+                        </a:rPr>
+                        <a:t>not evaluated</a:t>
+                      </a:r>
+                      <a:endParaRPr lang="en-US" sz="1200" dirty="0">
+                        <a:latin typeface="Calibri" charset="0"/>
+                        <a:ea typeface="Calibri" charset="0"/>
+                        <a:cs typeface="Calibri" charset="0"/>
+                      </a:endParaRPr>
+                    </a:p>
+                  </a:txBody>
+                  <a:tcPr marL="91440" marR="91440" marT="45720" marB="45720" anchor="ctr">
+                    <a:lnL w="9525" cap="flat" cmpd="sng" algn="ctr">
+                      <a:solidFill>
+                        <a:srgbClr val="D9D9DE"/>
+                      </a:solidFill>
+                      <a:prstDash val="solid"/>
+                      <a:round/>
+                      <a:headEnd type="none" w="med" len="med"/>
+                      <a:tailEnd type="none" w="med" len="med"/>
+                    </a:lnL>
+                    <a:lnR w="9525" cap="flat" cmpd="sng" algn="ctr">
+                      <a:solidFill>
+                        <a:srgbClr val="D9D9DE"/>
+                      </a:solidFill>
+                      <a:prstDash val="solid"/>
+                      <a:round/>
+                      <a:headEnd type="none" w="med" len="med"/>
+                      <a:tailEnd type="none" w="med" len="med"/>
+                    </a:lnR>
+                    <a:lnT w="9525" cap="flat" cmpd="sng" algn="ctr">
+                      <a:solidFill>
+                        <a:srgbClr val="D9D9DE"/>
+                      </a:solidFill>
+                      <a:prstDash val="solid"/>
+                      <a:round/>
+                      <a:headEnd type="none" w="med" len="med"/>
+                      <a:tailEnd type="none" w="med" len="med"/>
+                    </a:lnT>
+                    <a:lnB w="9525" cap="flat" cmpd="sng" algn="ctr">
+                      <a:solidFill>
+                        <a:srgbClr val="D9D9DE"/>
+                      </a:solidFill>
+                      <a:prstDash val="solid"/>
+                      <a:round/>
+                      <a:headEnd type="none" w="med" len="med"/>
+                      <a:tailEnd type="none" w="med" len="med"/>
+                    </a:lnB>
+                    <a:solidFill>
+                      <a:srgbClr val="FFFFFF"/>
+                    </a:solidFill>
+                  </a:tcPr>
+                </a:tc>
+                <a:tc>
+                  <a:txBody>
+                    <a:bodyPr/>
+                    <a:lstStyle/>
+                    <a:p>
+                      <a:pPr indent="0" marL="0">
+                        <a:buNone/>
+                      </a:pPr>
+                      <a:r>
+                        <a:rPr lang="en-US" sz="1200" i="1" dirty="0">
+                          <a:solidFill>
+                            <a:srgbClr val="55555B"/>
+                          </a:solidFill>
+                          <a:latin typeface="Calibri" pitchFamily="34" charset="0"/>
+                          <a:ea typeface="Calibri" pitchFamily="34" charset="-122"/>
+                          <a:cs typeface="Calibri" pitchFamily="34" charset="-120"/>
+                        </a:rPr>
+                        <a:t>-</a:t>
+                      </a:r>
+                      <a:endParaRPr lang="en-US" sz="1200" dirty="0">
+                        <a:latin typeface="Calibri" charset="0"/>
+                        <a:ea typeface="Calibri" charset="0"/>
+                        <a:cs typeface="Calibri" charset="0"/>
+                      </a:endParaRPr>
+                    </a:p>
+                  </a:txBody>
+                  <a:tcPr marL="91440" marR="91440" marT="45720" marB="45720" anchor="ctr">
+                    <a:lnL w="9525" cap="flat" cmpd="sng" algn="ctr">
+                      <a:solidFill>
+                        <a:srgbClr val="D9D9DE"/>
+                      </a:solidFill>
+                      <a:prstDash val="solid"/>
+                      <a:round/>
+                      <a:headEnd type="none" w="med" len="med"/>
+                      <a:tailEnd type="none" w="med" len="med"/>
+                    </a:lnL>
+                    <a:lnR w="9525" cap="flat" cmpd="sng" algn="ctr">
+                      <a:solidFill>
+                        <a:srgbClr val="D9D9DE"/>
+                      </a:solidFill>
+                      <a:prstDash val="solid"/>
+                      <a:round/>
+                      <a:headEnd type="none" w="med" len="med"/>
+                      <a:tailEnd type="none" w="med" len="med"/>
+                    </a:lnR>
+                    <a:lnT w="9525" cap="flat" cmpd="sng" algn="ctr">
+                      <a:solidFill>
+                        <a:srgbClr val="D9D9DE"/>
+                      </a:solidFill>
+                      <a:prstDash val="solid"/>
+                      <a:round/>
+                      <a:headEnd type="none" w="med" len="med"/>
+                      <a:tailEnd type="none" w="med" len="med"/>
+                    </a:lnT>
+                    <a:lnB w="9525" cap="flat" cmpd="sng" algn="ctr">
+                      <a:solidFill>
+                        <a:srgbClr val="D9D9DE"/>
+                      </a:solidFill>
+                      <a:prstDash val="solid"/>
+                      <a:round/>
+                      <a:headEnd type="none" w="med" len="med"/>
+                      <a:tailEnd type="none" w="med" len="med"/>
+                    </a:lnB>
+                    <a:solidFill>
+                      <a:srgbClr val="FFFFFF"/>
+                    </a:solidFill>
+                  </a:tcPr>
+                </a:tc>
+              </a:tr>
+            </a:tbl>
+          </a:graphicData>
+        </a:graphic>
+      </p:graphicFrame>
+      <p:sp>
+        <p:nvSpPr>
+          <p:cNvPr id="6" name="Shape 2"/>
+          <p:cNvSpPr/>
+          <p:nvPr/>
+        </p:nvSpPr>
+        <p:spPr>
+          <a:xfrm>
+            <a:off x="548640" y="4800600"/>
+            <a:ext cx="5408676" cy="1463040"/>
+          </a:xfrm>
+          <a:prstGeom prst="roundRect">
+            <a:avLst>
+              <a:gd name="adj" fmla="val 6250"/>
+            </a:avLst>
+          </a:prstGeom>
+          <a:solidFill>
+            <a:srgbClr val="FFFFFF"/>
+          </a:solidFill>
+          <a:ln w="9525">
+            <a:solidFill>
+              <a:srgbClr val="D9D9DE"/>
+            </a:solidFill>
+            <a:prstDash val="solid"/>
+          </a:ln>
+          <a:effectLst>
+            <a:outerShdw sx="100000" sy="100000" kx="0" ky="0" algn="bl" rotWithShape="0" blurRad="76200" dist="12700" dir="5400000">
+              <a:srgbClr val="000000">
+                <a:alpha val="8000"/>
+              </a:srgbClr>
+            </a:outerShdw>
+          </a:effectLst>
+        </p:spPr>
+      </p:sp>
+      <p:sp>
+        <p:nvSpPr>
+          <p:cNvPr id="7" name="Text 3"/>
+          <p:cNvSpPr txBox="1"/>
+          <p:nvPr/>
+        </p:nvSpPr>
+        <p:spPr>
+          <a:xfrm>
+            <a:off x="731520" y="4937760"/>
+            <a:ext cx="5042916" cy="320040"/>
+          </a:xfrm>
+          <a:prstGeom prst="rect">
+            <a:avLst/>
+          </a:prstGeom>
+          <a:noFill/>
+          <a:ln/>
+        </p:spPr>
+        <p:txBody>
+          <a:bodyPr wrap="square" lIns="0" tIns="0" rIns="0" bIns="0" rtlCol="0" anchor="t"/>
+          <a:lstStyle/>
+          <a:p>
+            <a:pPr indent="0" marL="0">
+              <a:buNone/>
+            </a:pPr>
+            <a:r>
+              <a:rPr lang="en-US" sz="1500" b="1" dirty="0">
+                <a:solidFill>
+                  <a:srgbClr val="1D1D1F"/>
+                </a:solidFill>
+              </a:rPr>
+              <a:t>Cost and reliability (code_history)</a:t>
+            </a:r>
+            <a:endParaRPr lang="en-US" sz="1500" dirty="0"/>
+          </a:p>
+        </p:txBody>
+      </p:sp>
+      <p:sp>
+        <p:nvSpPr>
+          <p:cNvPr id="8" name="Text 4"/>
+          <p:cNvSpPr txBox="1"/>
+          <p:nvPr/>
+        </p:nvSpPr>
+        <p:spPr>
+          <a:xfrm>
+            <a:off x="731520" y="5257800"/>
+            <a:ext cx="5042916" cy="896112"/>
+          </a:xfrm>
+          <a:prstGeom prst="rect">
+            <a:avLst/>
+          </a:prstGeom>
+          <a:noFill/>
+          <a:ln/>
+        </p:spPr>
+        <p:txBody>
+          <a:bodyPr wrap="square" lIns="0" tIns="0" rIns="0" bIns="0" rtlCol="0" anchor="t"/>
+          <a:lstStyle/>
+          <a:p>
+            <a:pPr indent="0" marL="0">
+              <a:buNone/>
+            </a:pPr>
+            <a:r>
+              <a:rPr lang="en-US" sz="1300" dirty="0">
+                <a:solidFill>
+                  <a:srgbClr val="55555B"/>
+                </a:solidFill>
+              </a:rPr>
+              <a:t>Hallucination rate: llama2 29%, codellama 20%, starcoder2 54%. Median latency: 8.3 s, 16.1 s, 1.4 s. Tokens out: 90, 193, 44.</a:t>
+            </a:r>
+            <a:endParaRPr lang="en-US" sz="1300" dirty="0"/>
+          </a:p>
+        </p:txBody>
+      </p:sp>
+      <p:sp>
+        <p:nvSpPr>
+          <p:cNvPr id="9" name="Shape 5"/>
+          <p:cNvSpPr/>
+          <p:nvPr/>
+        </p:nvSpPr>
+        <p:spPr>
+          <a:xfrm>
+            <a:off x="6231636" y="4800600"/>
+            <a:ext cx="5408676" cy="1463040"/>
+          </a:xfrm>
+          <a:prstGeom prst="roundRect">
+            <a:avLst>
+              <a:gd name="adj" fmla="val 6250"/>
+            </a:avLst>
+          </a:prstGeom>
+          <a:solidFill>
+            <a:srgbClr val="FFFFFF"/>
+          </a:solidFill>
+          <a:ln w="9525">
+            <a:solidFill>
+              <a:srgbClr val="D9D9DE"/>
+            </a:solidFill>
+            <a:prstDash val="solid"/>
+          </a:ln>
+          <a:effectLst>
+            <a:outerShdw sx="100000" sy="100000" kx="0" ky="0" algn="bl" rotWithShape="0" blurRad="76200" dist="12700" dir="5400000">
+              <a:srgbClr val="000000">
+                <a:alpha val="8000"/>
+              </a:srgbClr>
+            </a:outerShdw>
+          </a:effectLst>
+        </p:spPr>
+      </p:sp>
+      <p:sp>
+        <p:nvSpPr>
+          <p:cNvPr id="10" name="Text 6"/>
+          <p:cNvSpPr txBox="1"/>
+          <p:nvPr/>
+        </p:nvSpPr>
+        <p:spPr>
+          <a:xfrm>
+            <a:off x="6414516" y="4937760"/>
+            <a:ext cx="5042916" cy="320040"/>
+          </a:xfrm>
+          <a:prstGeom prst="rect">
+            <a:avLst/>
+          </a:prstGeom>
+          <a:noFill/>
+          <a:ln/>
+        </p:spPr>
+        <p:txBody>
+          <a:bodyPr wrap="square" lIns="0" tIns="0" rIns="0" bIns="0" rtlCol="0" anchor="t"/>
+          <a:lstStyle/>
+          <a:p>
+            <a:pPr indent="0" marL="0">
+              <a:buNone/>
+            </a:pPr>
+            <a:r>
+              <a:rPr lang="en-US" sz="1500" b="1" dirty="0">
+                <a:solidFill>
+                  <a:srgbClr val="1D1D1F"/>
+                </a:solidFill>
+              </a:rPr>
+              <a:t>Not evaluated</a:t>
+            </a:r>
+            <a:endParaRPr lang="en-US" sz="1500" dirty="0"/>
+          </a:p>
+        </p:txBody>
+      </p:sp>
+      <p:sp>
+        <p:nvSpPr>
+          <p:cNvPr id="11" name="Text 7"/>
+          <p:cNvSpPr txBox="1"/>
+          <p:nvPr/>
+        </p:nvSpPr>
+        <p:spPr>
+          <a:xfrm>
+            <a:off x="6414516" y="5257800"/>
+            <a:ext cx="5042916" cy="896112"/>
+          </a:xfrm>
+          <a:prstGeom prst="rect">
+            <a:avLst/>
+          </a:prstGeom>
+          <a:noFill/>
+          <a:ln/>
+        </p:spPr>
+        <p:txBody>
+          <a:bodyPr wrap="square" lIns="0" tIns="0" rIns="0" bIns="0" rtlCol="0" anchor="t"/>
+          <a:lstStyle/>
+          <a:p>
+            <a:pPr indent="0" marL="0">
+              <a:buNone/>
+            </a:pPr>
+            <a:r>
+              <a:rPr lang="en-US" sz="1300" dirty="0">
+                <a:solidFill>
+                  <a:srgbClr val="55555B"/>
+                </a:solidFill>
+              </a:rPr>
+              <a:t>Code generation, refactoring and a test-pass rate: the system answers questions and does not write code, so the dataset has no such tasks. Relevance is not scored separately.</a:t>
+            </a:r>
+            <a:endParaRPr lang="en-US" sz="1300" dirty="0"/>
+          </a:p>
+        </p:txBody>
+      </p:sp>
+      <p:sp>
+        <p:nvSpPr>
+          <p:cNvPr id="25" name="Slide Number Placeholder 0"/>
+          <p:cNvSpPr>
+            <a:spLocks noGrp="1"/>
+          </p:cNvSpPr>
+          <p:nvPr>
+            <p:ph type="sldNum" sz="quarter" idx="4294967295"/>
+          </p:nvPr>
+        </p:nvSpPr>
+        <p:spPr>
+          <a:xfrm>
+            <a:off x="10725912" y="6419088"/>
+            <a:ext cx="914400" cy="274320"/>
+          </a:xfrm>
+          <a:prstGeom prst="rect">
+            <a:avLst/>
+          </a:prstGeom>
+          <a:extLst>
+            <a:ext uri="{C572A759-6A51-4108-AA02-DFA0A04FC94B}">
+              <ma14:wrappingTextBoxFlag xmlns:ma14="http://schemas.microsoft.com/office/mac/drawingml/2011/main" val="0"/>
+            </a:ext>
+          </a:extLst>
+        </p:spPr>
+        <p:txBody>
+          <a:bodyPr/>
+          <a:lstStyle>
+            <a:lvl1pPr>
+              <a:defRPr sz="1100">
+                <a:solidFill>
+                  <a:srgbClr val="55555B"/>
+                </a:solidFill>
+                <a:latin typeface="Calibri"/>
+                <a:ea typeface="Calibri"/>
+                <a:cs typeface="Calibri"/>
+              </a:defRPr>
+            </a:lvl1pPr>
+          </a:lstStyle>
+          <a:p>
+            <a:pPr algn="r"/>
+            <a:fld id="{F7021451-1387-4CA6-816F-3879F97B5CBC}" type="slidenum">
+              <a:rPr b="0" lang="en-US"/>
+              <a:t>11</a:t>
+            </a:fld>
+            <a:endParaRPr lang="en-US"/>
+          </a:p>
+        </p:txBody>
+      </p:sp>
+    </p:spTree>
+  </p:cSld>
+  <p:clrMapOvr>
+    <a:masterClrMapping/>
+  </p:clrMapOvr>
+</p:sld>
+</file>
+
+<file path=ppt/slides/slide12.xml><?xml version="1.0" encoding="utf-8"?>
+<p:sld xmlns:a="http://schemas.openxmlformats.org/drawingml/2006/main" xmlns:r="http://schemas.openxmlformats.org/officeDocument/2006/relationships" xmlns:p="http://schemas.openxmlformats.org/presentationml/2006/main">
+  <p:cSld name="Slide 12">
+    <p:spTree>
+      <p:nvGrpSpPr>
+        <p:cNvPr id="1" name=""/>
+        <p:cNvGrpSpPr/>
+        <p:nvPr/>
+      </p:nvGrpSpPr>
+      <p:grpSpPr>
+        <a:xfrm>
+          <a:off x="0" y="0"/>
+          <a:ext cx="0" cy="0"/>
+          <a:chOff x="0" y="0"/>
+          <a:chExt cx="0" cy="0"/>
+        </a:xfrm>
+      </p:grpSpPr>
+      <p:sp>
+        <p:nvSpPr>
+          <p:cNvPr id="2" name="Text 0"/>
+          <p:cNvSpPr txBox="1"/>
+          <p:nvPr/>
+        </p:nvSpPr>
+        <p:spPr>
+          <a:xfrm>
+            <a:off x="548640" y="365760"/>
+            <a:ext cx="11091672" cy="274320"/>
+          </a:xfrm>
+          <a:prstGeom prst="rect">
+            <a:avLst/>
+          </a:prstGeom>
+          <a:noFill/>
+          <a:ln/>
+        </p:spPr>
+        <p:txBody>
+          <a:bodyPr wrap="square" lIns="0" tIns="0" rIns="0" bIns="0" rtlCol="0" anchor="ctr"/>
+          <a:lstStyle/>
+          <a:p>
+            <a:pPr indent="0" marL="0">
+              <a:buNone/>
+            </a:pPr>
+            <a:r>
+              <a:rPr lang="en-US" sz="1200" b="1" spc="200" kern="0" dirty="0">
+                <a:solidFill>
+                  <a:srgbClr val="0071E3"/>
+                </a:solidFill>
+              </a:rPr>
+              <a:t>FAILURE ANALYSIS</a:t>
+            </a:r>
+            <a:endParaRPr lang="en-US" sz="1200" dirty="0"/>
+          </a:p>
+        </p:txBody>
+      </p:sp>
+      <p:sp>
+        <p:nvSpPr>
+          <p:cNvPr id="3" name="Text 1"/>
+          <p:cNvSpPr txBox="1"/>
+          <p:nvPr/>
+        </p:nvSpPr>
+        <p:spPr>
+          <a:xfrm>
+            <a:off x="548640" y="658368"/>
+            <a:ext cx="11091672" cy="731520"/>
+          </a:xfrm>
+          <a:prstGeom prst="rect">
+            <a:avLst/>
+          </a:prstGeom>
+          <a:noFill/>
+          <a:ln/>
+        </p:spPr>
+        <p:txBody>
+          <a:bodyPr wrap="square" lIns="0" tIns="0" rIns="0" bIns="0" rtlCol="0" anchor="ctr"/>
+          <a:lstStyle/>
+          <a:p>
+            <a:pPr indent="0" marL="0">
+              <a:buNone/>
+            </a:pPr>
+            <a:r>
+              <a:rPr lang="en-US" sz="3600" b="1" dirty="0">
+                <a:solidFill>
+                  <a:srgbClr val="1D1D1F"/>
+                </a:solidFill>
+              </a:rPr>
+              <a:t>Where it goes wrong</a:t>
+            </a:r>
+            <a:endParaRPr lang="en-US" sz="3600" dirty="0"/>
+          </a:p>
+        </p:txBody>
+      </p:sp>
+      <p:graphicFrame>
+        <p:nvGraphicFramePr>
+          <p:cNvPr id="13" name="Table 0"/>
           <p:cNvGraphicFramePr>
             <a:graphicFrameLocks noGrp="1"/>
           </p:cNvGraphicFramePr>
@@ -8146,1065 +11906,6 @@
             <a:pPr algn="r"/>
             <a:fld id="{F7021451-1387-4CA6-816F-3879F97B5CBC}" type="slidenum">
               <a:rPr b="0" lang="en-US"/>
-              <a:t>11</a:t>
-            </a:fld>
-            <a:endParaRPr lang="en-US"/>
-          </a:p>
-        </p:txBody>
-      </p:sp>
-    </p:spTree>
-  </p:cSld>
-  <p:clrMapOvr>
-    <a:masterClrMapping/>
-  </p:clrMapOvr>
-</p:sld>
-</file>
-
-<file path=ppt/slides/slide12.xml><?xml version="1.0" encoding="utf-8"?>
-<p:sld xmlns:a="http://schemas.openxmlformats.org/drawingml/2006/main" xmlns:r="http://schemas.openxmlformats.org/officeDocument/2006/relationships" xmlns:p="http://schemas.openxmlformats.org/presentationml/2006/main">
-  <p:cSld name="Slide 12">
-    <p:spTree>
-      <p:nvGrpSpPr>
-        <p:cNvPr id="1" name=""/>
-        <p:cNvGrpSpPr/>
-        <p:nvPr/>
-      </p:nvGrpSpPr>
-      <p:grpSpPr>
-        <a:xfrm>
-          <a:off x="0" y="0"/>
-          <a:ext cx="0" cy="0"/>
-          <a:chOff x="0" y="0"/>
-          <a:chExt cx="0" cy="0"/>
-        </a:xfrm>
-      </p:grpSpPr>
-      <p:sp>
-        <p:nvSpPr>
-          <p:cNvPr id="2" name="Text 0"/>
-          <p:cNvSpPr txBox="1"/>
-          <p:nvPr/>
-        </p:nvSpPr>
-        <p:spPr>
-          <a:xfrm>
-            <a:off x="548640" y="365760"/>
-            <a:ext cx="11091672" cy="274320"/>
-          </a:xfrm>
-          <a:prstGeom prst="rect">
-            <a:avLst/>
-          </a:prstGeom>
-          <a:noFill/>
-          <a:ln/>
-        </p:spPr>
-        <p:txBody>
-          <a:bodyPr wrap="square" lIns="0" tIns="0" rIns="0" bIns="0" rtlCol="0" anchor="ctr"/>
-          <a:lstStyle/>
-          <a:p>
-            <a:pPr indent="0" marL="0">
-              <a:buNone/>
-            </a:pPr>
-            <a:r>
-              <a:rPr lang="en-US" sz="1200" b="1" spc="200" kern="0" dirty="0">
-                <a:solidFill>
-                  <a:srgbClr val="0071E3"/>
-                </a:solidFill>
-              </a:rPr>
-              <a:t>LIVE SYSTEM</a:t>
-            </a:r>
-            <a:endParaRPr lang="en-US" sz="1200" dirty="0"/>
-          </a:p>
-        </p:txBody>
-      </p:sp>
-      <p:sp>
-        <p:nvSpPr>
-          <p:cNvPr id="3" name="Text 1"/>
-          <p:cNvSpPr txBox="1"/>
-          <p:nvPr/>
-        </p:nvSpPr>
-        <p:spPr>
-          <a:xfrm>
-            <a:off x="548640" y="658368"/>
-            <a:ext cx="11091672" cy="731520"/>
-          </a:xfrm>
-          <a:prstGeom prst="rect">
-            <a:avLst/>
-          </a:prstGeom>
-          <a:noFill/>
-          <a:ln/>
-        </p:spPr>
-        <p:txBody>
-          <a:bodyPr wrap="square" lIns="0" tIns="0" rIns="0" bIns="0" rtlCol="0" anchor="ctr"/>
-          <a:lstStyle/>
-          <a:p>
-            <a:pPr indent="0" marL="0">
-              <a:buNone/>
-            </a:pPr>
-            <a:r>
-              <a:rPr lang="en-US" sz="3600" b="1" dirty="0">
-                <a:solidFill>
-                  <a:srgbClr val="1D1D1F"/>
-                </a:solidFill>
-              </a:rPr>
-              <a:t>The running stack</a:t>
-            </a:r>
-            <a:endParaRPr lang="en-US" sz="3600" dirty="0"/>
-          </a:p>
-        </p:txBody>
-      </p:sp>
-      <p:sp>
-        <p:nvSpPr>
-          <p:cNvPr id="4" name="Text 2"/>
-          <p:cNvSpPr txBox="1"/>
-          <p:nvPr/>
-        </p:nvSpPr>
-        <p:spPr>
-          <a:xfrm>
-            <a:off x="548640" y="1371600"/>
-            <a:ext cx="11091672" cy="548640"/>
-          </a:xfrm>
-          <a:prstGeom prst="rect">
-            <a:avLst/>
-          </a:prstGeom>
-          <a:noFill/>
-          <a:ln/>
-        </p:spPr>
-        <p:txBody>
-          <a:bodyPr wrap="square" lIns="0" tIns="0" rIns="0" bIns="0" rtlCol="0" anchor="t"/>
-          <a:lstStyle/>
-          <a:p>
-            <a:pPr indent="0" marL="0">
-              <a:buNone/>
-            </a:pPr>
-            <a:r>
-              <a:rPr lang="en-US" sz="1600" dirty="0">
-                <a:solidFill>
-                  <a:srgbClr val="55555B"/>
-                </a:solidFill>
-              </a:rPr>
-              <a:t>Shown live from the website during the talk (health is checked through the gateway every few seconds).</a:t>
-            </a:r>
-            <a:endParaRPr lang="en-US" sz="1600" dirty="0"/>
-          </a:p>
-        </p:txBody>
-      </p:sp>
-      <p:sp>
-        <p:nvSpPr>
-          <p:cNvPr id="6" name="Shape 3"/>
-          <p:cNvSpPr/>
-          <p:nvPr/>
-        </p:nvSpPr>
-        <p:spPr>
-          <a:xfrm>
-            <a:off x="548640" y="2194560"/>
-            <a:ext cx="3514344" cy="731520"/>
-          </a:xfrm>
-          <a:prstGeom prst="roundRect">
-            <a:avLst>
-              <a:gd name="adj" fmla="val 12500"/>
-            </a:avLst>
-          </a:prstGeom>
-          <a:solidFill>
-            <a:srgbClr val="FFFFFF"/>
-          </a:solidFill>
-          <a:ln w="9525">
-            <a:solidFill>
-              <a:srgbClr val="D9D9DE"/>
-            </a:solidFill>
-            <a:prstDash val="solid"/>
-          </a:ln>
-        </p:spPr>
-      </p:sp>
-      <p:sp>
-        <p:nvSpPr>
-          <p:cNvPr id="7" name="Shape 4"/>
-          <p:cNvSpPr/>
-          <p:nvPr/>
-        </p:nvSpPr>
-        <p:spPr>
-          <a:xfrm>
-            <a:off x="777240" y="2441448"/>
-            <a:ext cx="237744" cy="237744"/>
-          </a:xfrm>
-          <a:prstGeom prst="ellipse">
-            <a:avLst/>
-          </a:prstGeom>
-          <a:solidFill>
-            <a:srgbClr val="1E9E6A"/>
-          </a:solidFill>
-          <a:ln w="12700">
-            <a:solidFill>
-              <a:srgbClr val="1E9E6A"/>
-            </a:solidFill>
-            <a:prstDash val="solid"/>
-          </a:ln>
-        </p:spPr>
-      </p:sp>
-      <p:sp>
-        <p:nvSpPr>
-          <p:cNvPr id="8" name="Text 5"/>
-          <p:cNvSpPr txBox="1"/>
-          <p:nvPr/>
-        </p:nvSpPr>
-        <p:spPr>
-          <a:xfrm>
-            <a:off x="1188720" y="2194560"/>
-            <a:ext cx="1685544" cy="731520"/>
-          </a:xfrm>
-          <a:prstGeom prst="rect">
-            <a:avLst/>
-          </a:prstGeom>
-          <a:noFill/>
-          <a:ln/>
-        </p:spPr>
-        <p:txBody>
-          <a:bodyPr wrap="square" lIns="0" tIns="0" rIns="0" bIns="0" rtlCol="0" anchor="ctr"/>
-          <a:lstStyle/>
-          <a:p>
-            <a:pPr indent="0" marL="0">
-              <a:buNone/>
-            </a:pPr>
-            <a:r>
-              <a:rPr lang="en-US" sz="1800" dirty="0">
-                <a:solidFill>
-                  <a:srgbClr val="1D1D1F"/>
-                </a:solidFill>
-              </a:rPr>
-              <a:t>Gateway</a:t>
-            </a:r>
-            <a:endParaRPr lang="en-US" sz="1800" dirty="0"/>
-          </a:p>
-        </p:txBody>
-      </p:sp>
-      <p:sp>
-        <p:nvSpPr>
-          <p:cNvPr id="9" name="Text 6"/>
-          <p:cNvSpPr txBox="1"/>
-          <p:nvPr/>
-        </p:nvSpPr>
-        <p:spPr>
-          <a:xfrm>
-            <a:off x="2874264" y="2194560"/>
-            <a:ext cx="1005840" cy="731520"/>
-          </a:xfrm>
-          <a:prstGeom prst="rect">
-            <a:avLst/>
-          </a:prstGeom>
-          <a:noFill/>
-          <a:ln/>
-        </p:spPr>
-        <p:txBody>
-          <a:bodyPr wrap="square" lIns="0" tIns="0" rIns="0" bIns="0" rtlCol="0" anchor="ctr"/>
-          <a:lstStyle/>
-          <a:p>
-            <a:pPr algn="r" indent="0" marL="0">
-              <a:buNone/>
-            </a:pPr>
-            <a:r>
-              <a:rPr lang="en-US" sz="1300" dirty="0">
-                <a:solidFill>
-                  <a:srgbClr val="55555B"/>
-                </a:solidFill>
-              </a:rPr>
-              <a:t>healthy</a:t>
-            </a:r>
-            <a:endParaRPr lang="en-US" sz="1300" dirty="0"/>
-          </a:p>
-        </p:txBody>
-      </p:sp>
-      <p:sp>
-        <p:nvSpPr>
-          <p:cNvPr id="10" name="Shape 7"/>
-          <p:cNvSpPr/>
-          <p:nvPr/>
-        </p:nvSpPr>
-        <p:spPr>
-          <a:xfrm>
-            <a:off x="4337304" y="2194560"/>
-            <a:ext cx="3514344" cy="731520"/>
-          </a:xfrm>
-          <a:prstGeom prst="roundRect">
-            <a:avLst>
-              <a:gd name="adj" fmla="val 12500"/>
-            </a:avLst>
-          </a:prstGeom>
-          <a:solidFill>
-            <a:srgbClr val="FFFFFF"/>
-          </a:solidFill>
-          <a:ln w="9525">
-            <a:solidFill>
-              <a:srgbClr val="D9D9DE"/>
-            </a:solidFill>
-            <a:prstDash val="solid"/>
-          </a:ln>
-        </p:spPr>
-      </p:sp>
-      <p:sp>
-        <p:nvSpPr>
-          <p:cNvPr id="11" name="Shape 8"/>
-          <p:cNvSpPr/>
-          <p:nvPr/>
-        </p:nvSpPr>
-        <p:spPr>
-          <a:xfrm>
-            <a:off x="4565904" y="2441448"/>
-            <a:ext cx="237744" cy="237744"/>
-          </a:xfrm>
-          <a:prstGeom prst="ellipse">
-            <a:avLst/>
-          </a:prstGeom>
-          <a:solidFill>
-            <a:srgbClr val="1E9E6A"/>
-          </a:solidFill>
-          <a:ln w="12700">
-            <a:solidFill>
-              <a:srgbClr val="1E9E6A"/>
-            </a:solidFill>
-            <a:prstDash val="solid"/>
-          </a:ln>
-        </p:spPr>
-      </p:sp>
-      <p:sp>
-        <p:nvSpPr>
-          <p:cNvPr id="12" name="Text 9"/>
-          <p:cNvSpPr txBox="1"/>
-          <p:nvPr/>
-        </p:nvSpPr>
-        <p:spPr>
-          <a:xfrm>
-            <a:off x="4977384" y="2194560"/>
-            <a:ext cx="1685544" cy="731520"/>
-          </a:xfrm>
-          <a:prstGeom prst="rect">
-            <a:avLst/>
-          </a:prstGeom>
-          <a:noFill/>
-          <a:ln/>
-        </p:spPr>
-        <p:txBody>
-          <a:bodyPr wrap="square" lIns="0" tIns="0" rIns="0" bIns="0" rtlCol="0" anchor="ctr"/>
-          <a:lstStyle/>
-          <a:p>
-            <a:pPr indent="0" marL="0">
-              <a:buNone/>
-            </a:pPr>
-            <a:r>
-              <a:rPr lang="en-US" sz="1800" dirty="0">
-                <a:solidFill>
-                  <a:srgbClr val="1D1D1F"/>
-                </a:solidFill>
-              </a:rPr>
-              <a:t>Ingest</a:t>
-            </a:r>
-            <a:endParaRPr lang="en-US" sz="1800" dirty="0"/>
-          </a:p>
-        </p:txBody>
-      </p:sp>
-      <p:sp>
-        <p:nvSpPr>
-          <p:cNvPr id="13" name="Text 10"/>
-          <p:cNvSpPr txBox="1"/>
-          <p:nvPr/>
-        </p:nvSpPr>
-        <p:spPr>
-          <a:xfrm>
-            <a:off x="6662928" y="2194560"/>
-            <a:ext cx="1005840" cy="731520"/>
-          </a:xfrm>
-          <a:prstGeom prst="rect">
-            <a:avLst/>
-          </a:prstGeom>
-          <a:noFill/>
-          <a:ln/>
-        </p:spPr>
-        <p:txBody>
-          <a:bodyPr wrap="square" lIns="0" tIns="0" rIns="0" bIns="0" rtlCol="0" anchor="ctr"/>
-          <a:lstStyle/>
-          <a:p>
-            <a:pPr algn="r" indent="0" marL="0">
-              <a:buNone/>
-            </a:pPr>
-            <a:r>
-              <a:rPr lang="en-US" sz="1300" dirty="0">
-                <a:solidFill>
-                  <a:srgbClr val="55555B"/>
-                </a:solidFill>
-              </a:rPr>
-              <a:t>healthy</a:t>
-            </a:r>
-            <a:endParaRPr lang="en-US" sz="1300" dirty="0"/>
-          </a:p>
-        </p:txBody>
-      </p:sp>
-      <p:sp>
-        <p:nvSpPr>
-          <p:cNvPr id="14" name="Shape 11"/>
-          <p:cNvSpPr/>
-          <p:nvPr/>
-        </p:nvSpPr>
-        <p:spPr>
-          <a:xfrm>
-            <a:off x="8125968" y="2194560"/>
-            <a:ext cx="3514344" cy="731520"/>
-          </a:xfrm>
-          <a:prstGeom prst="roundRect">
-            <a:avLst>
-              <a:gd name="adj" fmla="val 12500"/>
-            </a:avLst>
-          </a:prstGeom>
-          <a:solidFill>
-            <a:srgbClr val="FFFFFF"/>
-          </a:solidFill>
-          <a:ln w="9525">
-            <a:solidFill>
-              <a:srgbClr val="D9D9DE"/>
-            </a:solidFill>
-            <a:prstDash val="solid"/>
-          </a:ln>
-        </p:spPr>
-      </p:sp>
-      <p:sp>
-        <p:nvSpPr>
-          <p:cNvPr id="15" name="Shape 12"/>
-          <p:cNvSpPr/>
-          <p:nvPr/>
-        </p:nvSpPr>
-        <p:spPr>
-          <a:xfrm>
-            <a:off x="8354568" y="2441448"/>
-            <a:ext cx="237744" cy="237744"/>
-          </a:xfrm>
-          <a:prstGeom prst="ellipse">
-            <a:avLst/>
-          </a:prstGeom>
-          <a:solidFill>
-            <a:srgbClr val="1E9E6A"/>
-          </a:solidFill>
-          <a:ln w="12700">
-            <a:solidFill>
-              <a:srgbClr val="1E9E6A"/>
-            </a:solidFill>
-            <a:prstDash val="solid"/>
-          </a:ln>
-        </p:spPr>
-      </p:sp>
-      <p:sp>
-        <p:nvSpPr>
-          <p:cNvPr id="16" name="Text 13"/>
-          <p:cNvSpPr txBox="1"/>
-          <p:nvPr/>
-        </p:nvSpPr>
-        <p:spPr>
-          <a:xfrm>
-            <a:off x="8766048" y="2194560"/>
-            <a:ext cx="1685544" cy="731520"/>
-          </a:xfrm>
-          <a:prstGeom prst="rect">
-            <a:avLst/>
-          </a:prstGeom>
-          <a:noFill/>
-          <a:ln/>
-        </p:spPr>
-        <p:txBody>
-          <a:bodyPr wrap="square" lIns="0" tIns="0" rIns="0" bIns="0" rtlCol="0" anchor="ctr"/>
-          <a:lstStyle/>
-          <a:p>
-            <a:pPr indent="0" marL="0">
-              <a:buNone/>
-            </a:pPr>
-            <a:r>
-              <a:rPr lang="en-US" sz="1800" dirty="0">
-                <a:solidFill>
-                  <a:srgbClr val="1D1D1F"/>
-                </a:solidFill>
-              </a:rPr>
-              <a:t>Rag</a:t>
-            </a:r>
-            <a:endParaRPr lang="en-US" sz="1800" dirty="0"/>
-          </a:p>
-        </p:txBody>
-      </p:sp>
-      <p:sp>
-        <p:nvSpPr>
-          <p:cNvPr id="17" name="Text 14"/>
-          <p:cNvSpPr txBox="1"/>
-          <p:nvPr/>
-        </p:nvSpPr>
-        <p:spPr>
-          <a:xfrm>
-            <a:off x="10451592" y="2194560"/>
-            <a:ext cx="1005840" cy="731520"/>
-          </a:xfrm>
-          <a:prstGeom prst="rect">
-            <a:avLst/>
-          </a:prstGeom>
-          <a:noFill/>
-          <a:ln/>
-        </p:spPr>
-        <p:txBody>
-          <a:bodyPr wrap="square" lIns="0" tIns="0" rIns="0" bIns="0" rtlCol="0" anchor="ctr"/>
-          <a:lstStyle/>
-          <a:p>
-            <a:pPr algn="r" indent="0" marL="0">
-              <a:buNone/>
-            </a:pPr>
-            <a:r>
-              <a:rPr lang="en-US" sz="1300" dirty="0">
-                <a:solidFill>
-                  <a:srgbClr val="55555B"/>
-                </a:solidFill>
-              </a:rPr>
-              <a:t>healthy</a:t>
-            </a:r>
-            <a:endParaRPr lang="en-US" sz="1300" dirty="0"/>
-          </a:p>
-        </p:txBody>
-      </p:sp>
-      <p:sp>
-        <p:nvSpPr>
-          <p:cNvPr id="18" name="Shape 15"/>
-          <p:cNvSpPr/>
-          <p:nvPr/>
-        </p:nvSpPr>
-        <p:spPr>
-          <a:xfrm>
-            <a:off x="548640" y="3154680"/>
-            <a:ext cx="3514344" cy="731520"/>
-          </a:xfrm>
-          <a:prstGeom prst="roundRect">
-            <a:avLst>
-              <a:gd name="adj" fmla="val 12500"/>
-            </a:avLst>
-          </a:prstGeom>
-          <a:solidFill>
-            <a:srgbClr val="FFFFFF"/>
-          </a:solidFill>
-          <a:ln w="9525">
-            <a:solidFill>
-              <a:srgbClr val="D9D9DE"/>
-            </a:solidFill>
-            <a:prstDash val="solid"/>
-          </a:ln>
-        </p:spPr>
-      </p:sp>
-      <p:sp>
-        <p:nvSpPr>
-          <p:cNvPr id="19" name="Shape 16"/>
-          <p:cNvSpPr/>
-          <p:nvPr/>
-        </p:nvSpPr>
-        <p:spPr>
-          <a:xfrm>
-            <a:off x="777240" y="3401568"/>
-            <a:ext cx="237744" cy="237744"/>
-          </a:xfrm>
-          <a:prstGeom prst="ellipse">
-            <a:avLst/>
-          </a:prstGeom>
-          <a:solidFill>
-            <a:srgbClr val="1E9E6A"/>
-          </a:solidFill>
-          <a:ln w="12700">
-            <a:solidFill>
-              <a:srgbClr val="1E9E6A"/>
-            </a:solidFill>
-            <a:prstDash val="solid"/>
-          </a:ln>
-        </p:spPr>
-      </p:sp>
-      <p:sp>
-        <p:nvSpPr>
-          <p:cNvPr id="20" name="Text 17"/>
-          <p:cNvSpPr txBox="1"/>
-          <p:nvPr/>
-        </p:nvSpPr>
-        <p:spPr>
-          <a:xfrm>
-            <a:off x="1188720" y="3154680"/>
-            <a:ext cx="1685544" cy="731520"/>
-          </a:xfrm>
-          <a:prstGeom prst="rect">
-            <a:avLst/>
-          </a:prstGeom>
-          <a:noFill/>
-          <a:ln/>
-        </p:spPr>
-        <p:txBody>
-          <a:bodyPr wrap="square" lIns="0" tIns="0" rIns="0" bIns="0" rtlCol="0" anchor="ctr"/>
-          <a:lstStyle/>
-          <a:p>
-            <a:pPr indent="0" marL="0">
-              <a:buNone/>
-            </a:pPr>
-            <a:r>
-              <a:rPr lang="en-US" sz="1800" dirty="0">
-                <a:solidFill>
-                  <a:srgbClr val="1D1D1F"/>
-                </a:solidFill>
-              </a:rPr>
-              <a:t>Llm</a:t>
-            </a:r>
-            <a:endParaRPr lang="en-US" sz="1800" dirty="0"/>
-          </a:p>
-        </p:txBody>
-      </p:sp>
-      <p:sp>
-        <p:nvSpPr>
-          <p:cNvPr id="21" name="Text 18"/>
-          <p:cNvSpPr txBox="1"/>
-          <p:nvPr/>
-        </p:nvSpPr>
-        <p:spPr>
-          <a:xfrm>
-            <a:off x="2874264" y="3154680"/>
-            <a:ext cx="1005840" cy="731520"/>
-          </a:xfrm>
-          <a:prstGeom prst="rect">
-            <a:avLst/>
-          </a:prstGeom>
-          <a:noFill/>
-          <a:ln/>
-        </p:spPr>
-        <p:txBody>
-          <a:bodyPr wrap="square" lIns="0" tIns="0" rIns="0" bIns="0" rtlCol="0" anchor="ctr"/>
-          <a:lstStyle/>
-          <a:p>
-            <a:pPr algn="r" indent="0" marL="0">
-              <a:buNone/>
-            </a:pPr>
-            <a:r>
-              <a:rPr lang="en-US" sz="1300" dirty="0">
-                <a:solidFill>
-                  <a:srgbClr val="55555B"/>
-                </a:solidFill>
-              </a:rPr>
-              <a:t>healthy</a:t>
-            </a:r>
-            <a:endParaRPr lang="en-US" sz="1300" dirty="0"/>
-          </a:p>
-        </p:txBody>
-      </p:sp>
-      <p:sp>
-        <p:nvSpPr>
-          <p:cNvPr id="22" name="Shape 19"/>
-          <p:cNvSpPr/>
-          <p:nvPr/>
-        </p:nvSpPr>
-        <p:spPr>
-          <a:xfrm>
-            <a:off x="4337304" y="3154680"/>
-            <a:ext cx="3514344" cy="731520"/>
-          </a:xfrm>
-          <a:prstGeom prst="roundRect">
-            <a:avLst>
-              <a:gd name="adj" fmla="val 12500"/>
-            </a:avLst>
-          </a:prstGeom>
-          <a:solidFill>
-            <a:srgbClr val="FFFFFF"/>
-          </a:solidFill>
-          <a:ln w="9525">
-            <a:solidFill>
-              <a:srgbClr val="D9D9DE"/>
-            </a:solidFill>
-            <a:prstDash val="solid"/>
-          </a:ln>
-        </p:spPr>
-      </p:sp>
-      <p:sp>
-        <p:nvSpPr>
-          <p:cNvPr id="23" name="Shape 20"/>
-          <p:cNvSpPr/>
-          <p:nvPr/>
-        </p:nvSpPr>
-        <p:spPr>
-          <a:xfrm>
-            <a:off x="4565904" y="3401568"/>
-            <a:ext cx="237744" cy="237744"/>
-          </a:xfrm>
-          <a:prstGeom prst="ellipse">
-            <a:avLst/>
-          </a:prstGeom>
-          <a:solidFill>
-            <a:srgbClr val="1E9E6A"/>
-          </a:solidFill>
-          <a:ln w="12700">
-            <a:solidFill>
-              <a:srgbClr val="1E9E6A"/>
-            </a:solidFill>
-            <a:prstDash val="solid"/>
-          </a:ln>
-        </p:spPr>
-      </p:sp>
-      <p:sp>
-        <p:nvSpPr>
-          <p:cNvPr id="24" name="Text 21"/>
-          <p:cNvSpPr txBox="1"/>
-          <p:nvPr/>
-        </p:nvSpPr>
-        <p:spPr>
-          <a:xfrm>
-            <a:off x="4977384" y="3154680"/>
-            <a:ext cx="1685544" cy="731520"/>
-          </a:xfrm>
-          <a:prstGeom prst="rect">
-            <a:avLst/>
-          </a:prstGeom>
-          <a:noFill/>
-          <a:ln/>
-        </p:spPr>
-        <p:txBody>
-          <a:bodyPr wrap="square" lIns="0" tIns="0" rIns="0" bIns="0" rtlCol="0" anchor="ctr"/>
-          <a:lstStyle/>
-          <a:p>
-            <a:pPr indent="0" marL="0">
-              <a:buNone/>
-            </a:pPr>
-            <a:r>
-              <a:rPr lang="en-US" sz="1800" dirty="0">
-                <a:solidFill>
-                  <a:srgbClr val="1D1D1F"/>
-                </a:solidFill>
-              </a:rPr>
-              <a:t>Orchestrator</a:t>
-            </a:r>
-            <a:endParaRPr lang="en-US" sz="1800" dirty="0"/>
-          </a:p>
-        </p:txBody>
-      </p:sp>
-      <p:sp>
-        <p:nvSpPr>
-          <p:cNvPr id="25" name="Text 22"/>
-          <p:cNvSpPr txBox="1"/>
-          <p:nvPr/>
-        </p:nvSpPr>
-        <p:spPr>
-          <a:xfrm>
-            <a:off x="6662928" y="3154680"/>
-            <a:ext cx="1005840" cy="731520"/>
-          </a:xfrm>
-          <a:prstGeom prst="rect">
-            <a:avLst/>
-          </a:prstGeom>
-          <a:noFill/>
-          <a:ln/>
-        </p:spPr>
-        <p:txBody>
-          <a:bodyPr wrap="square" lIns="0" tIns="0" rIns="0" bIns="0" rtlCol="0" anchor="ctr"/>
-          <a:lstStyle/>
-          <a:p>
-            <a:pPr algn="r" indent="0" marL="0">
-              <a:buNone/>
-            </a:pPr>
-            <a:r>
-              <a:rPr lang="en-US" sz="1300" dirty="0">
-                <a:solidFill>
-                  <a:srgbClr val="55555B"/>
-                </a:solidFill>
-              </a:rPr>
-              <a:t>healthy</a:t>
-            </a:r>
-            <a:endParaRPr lang="en-US" sz="1300" dirty="0"/>
-          </a:p>
-        </p:txBody>
-      </p:sp>
-      <p:sp>
-        <p:nvSpPr>
-          <p:cNvPr id="26" name="Shape 23"/>
-          <p:cNvSpPr/>
-          <p:nvPr/>
-        </p:nvSpPr>
-        <p:spPr>
-          <a:xfrm>
-            <a:off x="8125968" y="3154680"/>
-            <a:ext cx="3514344" cy="731520"/>
-          </a:xfrm>
-          <a:prstGeom prst="roundRect">
-            <a:avLst>
-              <a:gd name="adj" fmla="val 12500"/>
-            </a:avLst>
-          </a:prstGeom>
-          <a:solidFill>
-            <a:srgbClr val="FFFFFF"/>
-          </a:solidFill>
-          <a:ln w="9525">
-            <a:solidFill>
-              <a:srgbClr val="D9D9DE"/>
-            </a:solidFill>
-            <a:prstDash val="solid"/>
-          </a:ln>
-        </p:spPr>
-      </p:sp>
-      <p:sp>
-        <p:nvSpPr>
-          <p:cNvPr id="27" name="Shape 24"/>
-          <p:cNvSpPr/>
-          <p:nvPr/>
-        </p:nvSpPr>
-        <p:spPr>
-          <a:xfrm>
-            <a:off x="8354568" y="3401568"/>
-            <a:ext cx="237744" cy="237744"/>
-          </a:xfrm>
-          <a:prstGeom prst="ellipse">
-            <a:avLst/>
-          </a:prstGeom>
-          <a:solidFill>
-            <a:srgbClr val="1E9E6A"/>
-          </a:solidFill>
-          <a:ln w="12700">
-            <a:solidFill>
-              <a:srgbClr val="1E9E6A"/>
-            </a:solidFill>
-            <a:prstDash val="solid"/>
-          </a:ln>
-        </p:spPr>
-      </p:sp>
-      <p:sp>
-        <p:nvSpPr>
-          <p:cNvPr id="28" name="Text 25"/>
-          <p:cNvSpPr txBox="1"/>
-          <p:nvPr/>
-        </p:nvSpPr>
-        <p:spPr>
-          <a:xfrm>
-            <a:off x="8766048" y="3154680"/>
-            <a:ext cx="1685544" cy="731520"/>
-          </a:xfrm>
-          <a:prstGeom prst="rect">
-            <a:avLst/>
-          </a:prstGeom>
-          <a:noFill/>
-          <a:ln/>
-        </p:spPr>
-        <p:txBody>
-          <a:bodyPr wrap="square" lIns="0" tIns="0" rIns="0" bIns="0" rtlCol="0" anchor="ctr"/>
-          <a:lstStyle/>
-          <a:p>
-            <a:pPr indent="0" marL="0">
-              <a:buNone/>
-            </a:pPr>
-            <a:r>
-              <a:rPr lang="en-US" sz="1800" dirty="0">
-                <a:solidFill>
-                  <a:srgbClr val="1D1D1F"/>
-                </a:solidFill>
-              </a:rPr>
-              <a:t>Eval</a:t>
-            </a:r>
-            <a:endParaRPr lang="en-US" sz="1800" dirty="0"/>
-          </a:p>
-        </p:txBody>
-      </p:sp>
-      <p:sp>
-        <p:nvSpPr>
-          <p:cNvPr id="29" name="Text 26"/>
-          <p:cNvSpPr txBox="1"/>
-          <p:nvPr/>
-        </p:nvSpPr>
-        <p:spPr>
-          <a:xfrm>
-            <a:off x="10451592" y="3154680"/>
-            <a:ext cx="1005840" cy="731520"/>
-          </a:xfrm>
-          <a:prstGeom prst="rect">
-            <a:avLst/>
-          </a:prstGeom>
-          <a:noFill/>
-          <a:ln/>
-        </p:spPr>
-        <p:txBody>
-          <a:bodyPr wrap="square" lIns="0" tIns="0" rIns="0" bIns="0" rtlCol="0" anchor="ctr"/>
-          <a:lstStyle/>
-          <a:p>
-            <a:pPr algn="r" indent="0" marL="0">
-              <a:buNone/>
-            </a:pPr>
-            <a:r>
-              <a:rPr lang="en-US" sz="1300" dirty="0">
-                <a:solidFill>
-                  <a:srgbClr val="55555B"/>
-                </a:solidFill>
-              </a:rPr>
-              <a:t>healthy</a:t>
-            </a:r>
-            <a:endParaRPr lang="en-US" sz="1300" dirty="0"/>
-          </a:p>
-        </p:txBody>
-      </p:sp>
-      <p:sp>
-        <p:nvSpPr>
-          <p:cNvPr id="30" name="Shape 27"/>
-          <p:cNvSpPr/>
-          <p:nvPr/>
-        </p:nvSpPr>
-        <p:spPr>
-          <a:xfrm>
-            <a:off x="548640" y="4160520"/>
-            <a:ext cx="11091672" cy="2011680"/>
-          </a:xfrm>
-          <a:prstGeom prst="roundRect">
-            <a:avLst>
-              <a:gd name="adj" fmla="val 4545"/>
-            </a:avLst>
-          </a:prstGeom>
-          <a:solidFill>
-            <a:srgbClr val="FFFFFF"/>
-          </a:solidFill>
-          <a:ln w="9525">
-            <a:solidFill>
-              <a:srgbClr val="D9D9DE"/>
-            </a:solidFill>
-            <a:prstDash val="solid"/>
-          </a:ln>
-          <a:effectLst>
-            <a:outerShdw sx="100000" sy="100000" kx="0" ky="0" algn="bl" rotWithShape="0" blurRad="76200" dist="12700" dir="5400000">
-              <a:srgbClr val="000000">
-                <a:alpha val="8000"/>
-              </a:srgbClr>
-            </a:outerShdw>
-          </a:effectLst>
-        </p:spPr>
-      </p:sp>
-      <p:sp>
-        <p:nvSpPr>
-          <p:cNvPr id="31" name="Text 28"/>
-          <p:cNvSpPr txBox="1"/>
-          <p:nvPr/>
-        </p:nvSpPr>
-        <p:spPr>
-          <a:xfrm>
-            <a:off x="731520" y="4297680"/>
-            <a:ext cx="10725912" cy="411480"/>
-          </a:xfrm>
-          <a:prstGeom prst="rect">
-            <a:avLst/>
-          </a:prstGeom>
-          <a:noFill/>
-          <a:ln/>
-        </p:spPr>
-        <p:txBody>
-          <a:bodyPr wrap="square" lIns="0" tIns="0" rIns="0" bIns="0" rtlCol="0" anchor="t"/>
-          <a:lstStyle/>
-          <a:p>
-            <a:pPr indent="0" marL="0">
-              <a:buNone/>
-            </a:pPr>
-            <a:r>
-              <a:rPr lang="en-US" sz="1800" b="1" dirty="0">
-                <a:solidFill>
-                  <a:srgbClr val="1D1D1F"/>
-                </a:solidFill>
-              </a:rPr>
-              <a:t>What to demo</a:t>
-            </a:r>
-            <a:endParaRPr lang="en-US" sz="1800" dirty="0"/>
-          </a:p>
-        </p:txBody>
-      </p:sp>
-      <p:sp>
-        <p:nvSpPr>
-          <p:cNvPr id="32" name="Text 29"/>
-          <p:cNvSpPr txBox="1"/>
-          <p:nvPr/>
-        </p:nvSpPr>
-        <p:spPr>
-          <a:xfrm>
-            <a:off x="731520" y="4709160"/>
-            <a:ext cx="10725912" cy="1353312"/>
-          </a:xfrm>
-          <a:prstGeom prst="rect">
-            <a:avLst/>
-          </a:prstGeom>
-          <a:noFill/>
-          <a:ln/>
-        </p:spPr>
-        <p:txBody>
-          <a:bodyPr wrap="square" lIns="0" tIns="0" rIns="0" bIns="0" rtlCol="0" anchor="t"/>
-          <a:lstStyle/>
-          <a:p>
-            <a:pPr indent="0" marL="0">
-              <a:buNone/>
-            </a:pPr>
-            <a:r>
-              <a:rPr lang="en-US" sz="1500" dirty="0">
-                <a:solidFill>
-                  <a:srgbClr val="1D1D1F"/>
-                </a:solidFill>
-              </a:rPr>
-              <a:t>Ask: "Why does itsdangerous keep SHA-1 as its default digest?" and show the cited answer and the evidence chain.</a:t>
-            </a:r>
-            <a:endParaRPr lang="en-US" sz="1500" dirty="0"/>
-          </a:p>
-          <a:p>
-            <a:pPr indent="0" marL="0">
-              <a:buNone/>
-            </a:pPr>
-            <a:r>
-              <a:rPr lang="en-US" sz="1500" dirty="0">
-                <a:solidFill>
-                  <a:srgbClr val="1D1D1F"/>
-                </a:solidFill>
-              </a:rPr>
-              <a:t>Evaluation page: the held-out run, per-mode leaderboard, and which model is best for what.</a:t>
-            </a:r>
-            <a:endParaRPr lang="en-US" sz="1500" dirty="0"/>
-          </a:p>
-          <a:p>
-            <a:pPr indent="0" marL="0">
-              <a:buNone/>
-            </a:pPr>
-            <a:r>
-              <a:rPr lang="en-US" sz="1500" dirty="0">
-                <a:solidFill>
-                  <a:srgbClr val="1D1D1F"/>
-                </a:solidFill>
-              </a:rPr>
-              <a:t>Repositories page: the three indexed repositories (demo, itsdangerous, Nexus).</a:t>
-            </a:r>
-            <a:endParaRPr lang="en-US" sz="1500" dirty="0"/>
-          </a:p>
-        </p:txBody>
-      </p:sp>
-      <p:sp>
-        <p:nvSpPr>
-          <p:cNvPr id="25" name="Slide Number Placeholder 0"/>
-          <p:cNvSpPr>
-            <a:spLocks noGrp="1"/>
-          </p:cNvSpPr>
-          <p:nvPr>
-            <p:ph type="sldNum" sz="quarter" idx="4294967295"/>
-          </p:nvPr>
-        </p:nvSpPr>
-        <p:spPr>
-          <a:xfrm>
-            <a:off x="10725912" y="6419088"/>
-            <a:ext cx="914400" cy="274320"/>
-          </a:xfrm>
-          <a:prstGeom prst="rect">
-            <a:avLst/>
-          </a:prstGeom>
-          <a:extLst>
-            <a:ext uri="{C572A759-6A51-4108-AA02-DFA0A04FC94B}">
-              <ma14:wrappingTextBoxFlag xmlns:ma14="http://schemas.microsoft.com/office/mac/drawingml/2011/main" val="0"/>
-            </a:ext>
-          </a:extLst>
-        </p:spPr>
-        <p:txBody>
-          <a:bodyPr/>
-          <a:lstStyle>
-            <a:lvl1pPr>
-              <a:defRPr sz="1100">
-                <a:solidFill>
-                  <a:srgbClr val="55555B"/>
-                </a:solidFill>
-                <a:latin typeface="Calibri"/>
-                <a:ea typeface="Calibri"/>
-                <a:cs typeface="Calibri"/>
-              </a:defRPr>
-            </a:lvl1pPr>
-          </a:lstStyle>
-          <a:p>
-            <a:pPr algn="r"/>
-            <a:fld id="{F7021451-1387-4CA6-816F-3879F97B5CBC}" type="slidenum">
-              <a:rPr b="0" lang="en-US"/>
               <a:t>12</a:t>
             </a:fld>
             <a:endParaRPr lang="en-US"/>
@@ -9244,8 +11945,8 @@
         </p:nvSpPr>
         <p:spPr>
           <a:xfrm>
-            <a:off x="548640" y="2194560"/>
-            <a:ext cx="11091672" cy="1188720"/>
+            <a:off x="548640" y="365760"/>
+            <a:ext cx="11091672" cy="274320"/>
           </a:xfrm>
           <a:prstGeom prst="rect">
             <a:avLst/>
@@ -9261,14 +11962,14 @@
               <a:buNone/>
             </a:pPr>
             <a:r>
-              <a:rPr lang="en-US" sz="6400" b="1" dirty="0">
-                <a:solidFill>
-                  <a:srgbClr val="1D1D1F"/>
+              <a:rPr lang="en-US" sz="1200" b="1" spc="200" kern="0" dirty="0">
+                <a:solidFill>
+                  <a:srgbClr val="0071E3"/>
                 </a:solidFill>
               </a:rPr>
-              <a:t>Questions?</a:t>
-            </a:r>
-            <a:endParaRPr lang="en-US" sz="6400" dirty="0"/>
+              <a:t>LIVE SYSTEM</a:t>
+            </a:r>
+            <a:endParaRPr lang="en-US" sz="1200" dirty="0"/>
           </a:p>
         </p:txBody>
       </p:sp>
@@ -9280,8 +11981,8 @@
         </p:nvSpPr>
         <p:spPr>
           <a:xfrm>
-            <a:off x="548640" y="3566160"/>
-            <a:ext cx="11091672" cy="457200"/>
+            <a:off x="548640" y="658368"/>
+            <a:ext cx="11091672" cy="731520"/>
           </a:xfrm>
           <a:prstGeom prst="rect">
             <a:avLst/>
@@ -9297,14 +11998,14 @@
               <a:buNone/>
             </a:pPr>
             <a:r>
-              <a:rPr lang="en-US" sz="2200" dirty="0">
-                <a:solidFill>
-                  <a:srgbClr val="55555B"/>
+              <a:rPr lang="en-US" sz="3600" b="1" dirty="0">
+                <a:solidFill>
+                  <a:srgbClr val="1D1D1F"/>
                 </a:solidFill>
               </a:rPr>
-              <a:t>github.com/IATESPAGHETTI/Code_Origin</a:t>
-            </a:r>
-            <a:endParaRPr lang="en-US" sz="2200" dirty="0"/>
+              <a:t>The running stack</a:t>
+            </a:r>
+            <a:endParaRPr lang="en-US" sz="3600" dirty="0"/>
           </a:p>
         </p:txBody>
       </p:sp>
@@ -9316,8 +12017,8 @@
         </p:nvSpPr>
         <p:spPr>
           <a:xfrm>
-            <a:off x="548640" y="4297680"/>
-            <a:ext cx="11091672" cy="457200"/>
+            <a:off x="548640" y="1371600"/>
+            <a:ext cx="11091672" cy="548640"/>
           </a:xfrm>
           <a:prstGeom prst="rect">
             <a:avLst/>
@@ -9326,21 +12027,899 @@
           <a:ln/>
         </p:spPr>
         <p:txBody>
-          <a:bodyPr wrap="square" lIns="0" tIns="0" rIns="0" bIns="0" rtlCol="0" anchor="ctr"/>
+          <a:bodyPr wrap="square" lIns="0" tIns="0" rIns="0" bIns="0" rtlCol="0" anchor="t"/>
           <a:lstStyle/>
           <a:p>
             <a:pPr indent="0" marL="0">
               <a:buNone/>
             </a:pPr>
             <a:r>
+              <a:rPr lang="en-US" sz="1600" dirty="0">
+                <a:solidFill>
+                  <a:srgbClr val="55555B"/>
+                </a:solidFill>
+              </a:rPr>
+              <a:t>Shown live from the website during the talk (health is checked through the gateway every few seconds).</a:t>
+            </a:r>
+            <a:endParaRPr lang="en-US" sz="1600" dirty="0"/>
+          </a:p>
+        </p:txBody>
+      </p:sp>
+      <p:sp>
+        <p:nvSpPr>
+          <p:cNvPr id="6" name="Shape 3"/>
+          <p:cNvSpPr/>
+          <p:nvPr/>
+        </p:nvSpPr>
+        <p:spPr>
+          <a:xfrm>
+            <a:off x="548640" y="2194560"/>
+            <a:ext cx="3514344" cy="731520"/>
+          </a:xfrm>
+          <a:prstGeom prst="roundRect">
+            <a:avLst>
+              <a:gd name="adj" fmla="val 12500"/>
+            </a:avLst>
+          </a:prstGeom>
+          <a:solidFill>
+            <a:srgbClr val="FFFFFF"/>
+          </a:solidFill>
+          <a:ln w="9525">
+            <a:solidFill>
+              <a:srgbClr val="D9D9DE"/>
+            </a:solidFill>
+            <a:prstDash val="solid"/>
+          </a:ln>
+        </p:spPr>
+      </p:sp>
+      <p:sp>
+        <p:nvSpPr>
+          <p:cNvPr id="7" name="Shape 4"/>
+          <p:cNvSpPr/>
+          <p:nvPr/>
+        </p:nvSpPr>
+        <p:spPr>
+          <a:xfrm>
+            <a:off x="777240" y="2441448"/>
+            <a:ext cx="237744" cy="237744"/>
+          </a:xfrm>
+          <a:prstGeom prst="ellipse">
+            <a:avLst/>
+          </a:prstGeom>
+          <a:solidFill>
+            <a:srgbClr val="1E9E6A"/>
+          </a:solidFill>
+          <a:ln w="12700">
+            <a:solidFill>
+              <a:srgbClr val="1E9E6A"/>
+            </a:solidFill>
+            <a:prstDash val="solid"/>
+          </a:ln>
+        </p:spPr>
+      </p:sp>
+      <p:sp>
+        <p:nvSpPr>
+          <p:cNvPr id="8" name="Text 5"/>
+          <p:cNvSpPr txBox="1"/>
+          <p:nvPr/>
+        </p:nvSpPr>
+        <p:spPr>
+          <a:xfrm>
+            <a:off x="1188720" y="2194560"/>
+            <a:ext cx="1685544" cy="731520"/>
+          </a:xfrm>
+          <a:prstGeom prst="rect">
+            <a:avLst/>
+          </a:prstGeom>
+          <a:noFill/>
+          <a:ln/>
+        </p:spPr>
+        <p:txBody>
+          <a:bodyPr wrap="square" lIns="0" tIns="0" rIns="0" bIns="0" rtlCol="0" anchor="ctr"/>
+          <a:lstStyle/>
+          <a:p>
+            <a:pPr indent="0" marL="0">
+              <a:buNone/>
+            </a:pPr>
+            <a:r>
               <a:rPr lang="en-US" sz="1800" dirty="0">
                 <a:solidFill>
-                  <a:srgbClr val="0071E3"/>
+                  <a:srgbClr val="1D1D1F"/>
                 </a:solidFill>
               </a:rPr>
-              <a:t>We claim: supported on one real repository for 7B models, not yet general.</a:t>
+              <a:t>Gateway</a:t>
             </a:r>
             <a:endParaRPr lang="en-US" sz="1800" dirty="0"/>
+          </a:p>
+        </p:txBody>
+      </p:sp>
+      <p:sp>
+        <p:nvSpPr>
+          <p:cNvPr id="9" name="Text 6"/>
+          <p:cNvSpPr txBox="1"/>
+          <p:nvPr/>
+        </p:nvSpPr>
+        <p:spPr>
+          <a:xfrm>
+            <a:off x="2874264" y="2194560"/>
+            <a:ext cx="1005840" cy="731520"/>
+          </a:xfrm>
+          <a:prstGeom prst="rect">
+            <a:avLst/>
+          </a:prstGeom>
+          <a:noFill/>
+          <a:ln/>
+        </p:spPr>
+        <p:txBody>
+          <a:bodyPr wrap="square" lIns="0" tIns="0" rIns="0" bIns="0" rtlCol="0" anchor="ctr"/>
+          <a:lstStyle/>
+          <a:p>
+            <a:pPr algn="r" indent="0" marL="0">
+              <a:buNone/>
+            </a:pPr>
+            <a:r>
+              <a:rPr lang="en-US" sz="1300" dirty="0">
+                <a:solidFill>
+                  <a:srgbClr val="55555B"/>
+                </a:solidFill>
+              </a:rPr>
+              <a:t>healthy</a:t>
+            </a:r>
+            <a:endParaRPr lang="en-US" sz="1300" dirty="0"/>
+          </a:p>
+        </p:txBody>
+      </p:sp>
+      <p:sp>
+        <p:nvSpPr>
+          <p:cNvPr id="10" name="Shape 7"/>
+          <p:cNvSpPr/>
+          <p:nvPr/>
+        </p:nvSpPr>
+        <p:spPr>
+          <a:xfrm>
+            <a:off x="4337304" y="2194560"/>
+            <a:ext cx="3514344" cy="731520"/>
+          </a:xfrm>
+          <a:prstGeom prst="roundRect">
+            <a:avLst>
+              <a:gd name="adj" fmla="val 12500"/>
+            </a:avLst>
+          </a:prstGeom>
+          <a:solidFill>
+            <a:srgbClr val="FFFFFF"/>
+          </a:solidFill>
+          <a:ln w="9525">
+            <a:solidFill>
+              <a:srgbClr val="D9D9DE"/>
+            </a:solidFill>
+            <a:prstDash val="solid"/>
+          </a:ln>
+        </p:spPr>
+      </p:sp>
+      <p:sp>
+        <p:nvSpPr>
+          <p:cNvPr id="11" name="Shape 8"/>
+          <p:cNvSpPr/>
+          <p:nvPr/>
+        </p:nvSpPr>
+        <p:spPr>
+          <a:xfrm>
+            <a:off x="4565904" y="2441448"/>
+            <a:ext cx="237744" cy="237744"/>
+          </a:xfrm>
+          <a:prstGeom prst="ellipse">
+            <a:avLst/>
+          </a:prstGeom>
+          <a:solidFill>
+            <a:srgbClr val="1E9E6A"/>
+          </a:solidFill>
+          <a:ln w="12700">
+            <a:solidFill>
+              <a:srgbClr val="1E9E6A"/>
+            </a:solidFill>
+            <a:prstDash val="solid"/>
+          </a:ln>
+        </p:spPr>
+      </p:sp>
+      <p:sp>
+        <p:nvSpPr>
+          <p:cNvPr id="12" name="Text 9"/>
+          <p:cNvSpPr txBox="1"/>
+          <p:nvPr/>
+        </p:nvSpPr>
+        <p:spPr>
+          <a:xfrm>
+            <a:off x="4977384" y="2194560"/>
+            <a:ext cx="1685544" cy="731520"/>
+          </a:xfrm>
+          <a:prstGeom prst="rect">
+            <a:avLst/>
+          </a:prstGeom>
+          <a:noFill/>
+          <a:ln/>
+        </p:spPr>
+        <p:txBody>
+          <a:bodyPr wrap="square" lIns="0" tIns="0" rIns="0" bIns="0" rtlCol="0" anchor="ctr"/>
+          <a:lstStyle/>
+          <a:p>
+            <a:pPr indent="0" marL="0">
+              <a:buNone/>
+            </a:pPr>
+            <a:r>
+              <a:rPr lang="en-US" sz="1800" dirty="0">
+                <a:solidFill>
+                  <a:srgbClr val="1D1D1F"/>
+                </a:solidFill>
+              </a:rPr>
+              <a:t>Ingest</a:t>
+            </a:r>
+            <a:endParaRPr lang="en-US" sz="1800" dirty="0"/>
+          </a:p>
+        </p:txBody>
+      </p:sp>
+      <p:sp>
+        <p:nvSpPr>
+          <p:cNvPr id="13" name="Text 10"/>
+          <p:cNvSpPr txBox="1"/>
+          <p:nvPr/>
+        </p:nvSpPr>
+        <p:spPr>
+          <a:xfrm>
+            <a:off x="6662928" y="2194560"/>
+            <a:ext cx="1005840" cy="731520"/>
+          </a:xfrm>
+          <a:prstGeom prst="rect">
+            <a:avLst/>
+          </a:prstGeom>
+          <a:noFill/>
+          <a:ln/>
+        </p:spPr>
+        <p:txBody>
+          <a:bodyPr wrap="square" lIns="0" tIns="0" rIns="0" bIns="0" rtlCol="0" anchor="ctr"/>
+          <a:lstStyle/>
+          <a:p>
+            <a:pPr algn="r" indent="0" marL="0">
+              <a:buNone/>
+            </a:pPr>
+            <a:r>
+              <a:rPr lang="en-US" sz="1300" dirty="0">
+                <a:solidFill>
+                  <a:srgbClr val="55555B"/>
+                </a:solidFill>
+              </a:rPr>
+              <a:t>healthy</a:t>
+            </a:r>
+            <a:endParaRPr lang="en-US" sz="1300" dirty="0"/>
+          </a:p>
+        </p:txBody>
+      </p:sp>
+      <p:sp>
+        <p:nvSpPr>
+          <p:cNvPr id="14" name="Shape 11"/>
+          <p:cNvSpPr/>
+          <p:nvPr/>
+        </p:nvSpPr>
+        <p:spPr>
+          <a:xfrm>
+            <a:off x="8125968" y="2194560"/>
+            <a:ext cx="3514344" cy="731520"/>
+          </a:xfrm>
+          <a:prstGeom prst="roundRect">
+            <a:avLst>
+              <a:gd name="adj" fmla="val 12500"/>
+            </a:avLst>
+          </a:prstGeom>
+          <a:solidFill>
+            <a:srgbClr val="FFFFFF"/>
+          </a:solidFill>
+          <a:ln w="9525">
+            <a:solidFill>
+              <a:srgbClr val="D9D9DE"/>
+            </a:solidFill>
+            <a:prstDash val="solid"/>
+          </a:ln>
+        </p:spPr>
+      </p:sp>
+      <p:sp>
+        <p:nvSpPr>
+          <p:cNvPr id="15" name="Shape 12"/>
+          <p:cNvSpPr/>
+          <p:nvPr/>
+        </p:nvSpPr>
+        <p:spPr>
+          <a:xfrm>
+            <a:off x="8354568" y="2441448"/>
+            <a:ext cx="237744" cy="237744"/>
+          </a:xfrm>
+          <a:prstGeom prst="ellipse">
+            <a:avLst/>
+          </a:prstGeom>
+          <a:solidFill>
+            <a:srgbClr val="1E9E6A"/>
+          </a:solidFill>
+          <a:ln w="12700">
+            <a:solidFill>
+              <a:srgbClr val="1E9E6A"/>
+            </a:solidFill>
+            <a:prstDash val="solid"/>
+          </a:ln>
+        </p:spPr>
+      </p:sp>
+      <p:sp>
+        <p:nvSpPr>
+          <p:cNvPr id="16" name="Text 13"/>
+          <p:cNvSpPr txBox="1"/>
+          <p:nvPr/>
+        </p:nvSpPr>
+        <p:spPr>
+          <a:xfrm>
+            <a:off x="8766048" y="2194560"/>
+            <a:ext cx="1685544" cy="731520"/>
+          </a:xfrm>
+          <a:prstGeom prst="rect">
+            <a:avLst/>
+          </a:prstGeom>
+          <a:noFill/>
+          <a:ln/>
+        </p:spPr>
+        <p:txBody>
+          <a:bodyPr wrap="square" lIns="0" tIns="0" rIns="0" bIns="0" rtlCol="0" anchor="ctr"/>
+          <a:lstStyle/>
+          <a:p>
+            <a:pPr indent="0" marL="0">
+              <a:buNone/>
+            </a:pPr>
+            <a:r>
+              <a:rPr lang="en-US" sz="1800" dirty="0">
+                <a:solidFill>
+                  <a:srgbClr val="1D1D1F"/>
+                </a:solidFill>
+              </a:rPr>
+              <a:t>Rag</a:t>
+            </a:r>
+            <a:endParaRPr lang="en-US" sz="1800" dirty="0"/>
+          </a:p>
+        </p:txBody>
+      </p:sp>
+      <p:sp>
+        <p:nvSpPr>
+          <p:cNvPr id="17" name="Text 14"/>
+          <p:cNvSpPr txBox="1"/>
+          <p:nvPr/>
+        </p:nvSpPr>
+        <p:spPr>
+          <a:xfrm>
+            <a:off x="10451592" y="2194560"/>
+            <a:ext cx="1005840" cy="731520"/>
+          </a:xfrm>
+          <a:prstGeom prst="rect">
+            <a:avLst/>
+          </a:prstGeom>
+          <a:noFill/>
+          <a:ln/>
+        </p:spPr>
+        <p:txBody>
+          <a:bodyPr wrap="square" lIns="0" tIns="0" rIns="0" bIns="0" rtlCol="0" anchor="ctr"/>
+          <a:lstStyle/>
+          <a:p>
+            <a:pPr algn="r" indent="0" marL="0">
+              <a:buNone/>
+            </a:pPr>
+            <a:r>
+              <a:rPr lang="en-US" sz="1300" dirty="0">
+                <a:solidFill>
+                  <a:srgbClr val="55555B"/>
+                </a:solidFill>
+              </a:rPr>
+              <a:t>healthy</a:t>
+            </a:r>
+            <a:endParaRPr lang="en-US" sz="1300" dirty="0"/>
+          </a:p>
+        </p:txBody>
+      </p:sp>
+      <p:sp>
+        <p:nvSpPr>
+          <p:cNvPr id="18" name="Shape 15"/>
+          <p:cNvSpPr/>
+          <p:nvPr/>
+        </p:nvSpPr>
+        <p:spPr>
+          <a:xfrm>
+            <a:off x="548640" y="3154680"/>
+            <a:ext cx="3514344" cy="731520"/>
+          </a:xfrm>
+          <a:prstGeom prst="roundRect">
+            <a:avLst>
+              <a:gd name="adj" fmla="val 12500"/>
+            </a:avLst>
+          </a:prstGeom>
+          <a:solidFill>
+            <a:srgbClr val="FFFFFF"/>
+          </a:solidFill>
+          <a:ln w="9525">
+            <a:solidFill>
+              <a:srgbClr val="D9D9DE"/>
+            </a:solidFill>
+            <a:prstDash val="solid"/>
+          </a:ln>
+        </p:spPr>
+      </p:sp>
+      <p:sp>
+        <p:nvSpPr>
+          <p:cNvPr id="19" name="Shape 16"/>
+          <p:cNvSpPr/>
+          <p:nvPr/>
+        </p:nvSpPr>
+        <p:spPr>
+          <a:xfrm>
+            <a:off x="777240" y="3401568"/>
+            <a:ext cx="237744" cy="237744"/>
+          </a:xfrm>
+          <a:prstGeom prst="ellipse">
+            <a:avLst/>
+          </a:prstGeom>
+          <a:solidFill>
+            <a:srgbClr val="1E9E6A"/>
+          </a:solidFill>
+          <a:ln w="12700">
+            <a:solidFill>
+              <a:srgbClr val="1E9E6A"/>
+            </a:solidFill>
+            <a:prstDash val="solid"/>
+          </a:ln>
+        </p:spPr>
+      </p:sp>
+      <p:sp>
+        <p:nvSpPr>
+          <p:cNvPr id="20" name="Text 17"/>
+          <p:cNvSpPr txBox="1"/>
+          <p:nvPr/>
+        </p:nvSpPr>
+        <p:spPr>
+          <a:xfrm>
+            <a:off x="1188720" y="3154680"/>
+            <a:ext cx="1685544" cy="731520"/>
+          </a:xfrm>
+          <a:prstGeom prst="rect">
+            <a:avLst/>
+          </a:prstGeom>
+          <a:noFill/>
+          <a:ln/>
+        </p:spPr>
+        <p:txBody>
+          <a:bodyPr wrap="square" lIns="0" tIns="0" rIns="0" bIns="0" rtlCol="0" anchor="ctr"/>
+          <a:lstStyle/>
+          <a:p>
+            <a:pPr indent="0" marL="0">
+              <a:buNone/>
+            </a:pPr>
+            <a:r>
+              <a:rPr lang="en-US" sz="1800" dirty="0">
+                <a:solidFill>
+                  <a:srgbClr val="1D1D1F"/>
+                </a:solidFill>
+              </a:rPr>
+              <a:t>Llm</a:t>
+            </a:r>
+            <a:endParaRPr lang="en-US" sz="1800" dirty="0"/>
+          </a:p>
+        </p:txBody>
+      </p:sp>
+      <p:sp>
+        <p:nvSpPr>
+          <p:cNvPr id="21" name="Text 18"/>
+          <p:cNvSpPr txBox="1"/>
+          <p:nvPr/>
+        </p:nvSpPr>
+        <p:spPr>
+          <a:xfrm>
+            <a:off x="2874264" y="3154680"/>
+            <a:ext cx="1005840" cy="731520"/>
+          </a:xfrm>
+          <a:prstGeom prst="rect">
+            <a:avLst/>
+          </a:prstGeom>
+          <a:noFill/>
+          <a:ln/>
+        </p:spPr>
+        <p:txBody>
+          <a:bodyPr wrap="square" lIns="0" tIns="0" rIns="0" bIns="0" rtlCol="0" anchor="ctr"/>
+          <a:lstStyle/>
+          <a:p>
+            <a:pPr algn="r" indent="0" marL="0">
+              <a:buNone/>
+            </a:pPr>
+            <a:r>
+              <a:rPr lang="en-US" sz="1300" dirty="0">
+                <a:solidFill>
+                  <a:srgbClr val="55555B"/>
+                </a:solidFill>
+              </a:rPr>
+              <a:t>healthy</a:t>
+            </a:r>
+            <a:endParaRPr lang="en-US" sz="1300" dirty="0"/>
+          </a:p>
+        </p:txBody>
+      </p:sp>
+      <p:sp>
+        <p:nvSpPr>
+          <p:cNvPr id="22" name="Shape 19"/>
+          <p:cNvSpPr/>
+          <p:nvPr/>
+        </p:nvSpPr>
+        <p:spPr>
+          <a:xfrm>
+            <a:off x="4337304" y="3154680"/>
+            <a:ext cx="3514344" cy="731520"/>
+          </a:xfrm>
+          <a:prstGeom prst="roundRect">
+            <a:avLst>
+              <a:gd name="adj" fmla="val 12500"/>
+            </a:avLst>
+          </a:prstGeom>
+          <a:solidFill>
+            <a:srgbClr val="FFFFFF"/>
+          </a:solidFill>
+          <a:ln w="9525">
+            <a:solidFill>
+              <a:srgbClr val="D9D9DE"/>
+            </a:solidFill>
+            <a:prstDash val="solid"/>
+          </a:ln>
+        </p:spPr>
+      </p:sp>
+      <p:sp>
+        <p:nvSpPr>
+          <p:cNvPr id="23" name="Shape 20"/>
+          <p:cNvSpPr/>
+          <p:nvPr/>
+        </p:nvSpPr>
+        <p:spPr>
+          <a:xfrm>
+            <a:off x="4565904" y="3401568"/>
+            <a:ext cx="237744" cy="237744"/>
+          </a:xfrm>
+          <a:prstGeom prst="ellipse">
+            <a:avLst/>
+          </a:prstGeom>
+          <a:solidFill>
+            <a:srgbClr val="1E9E6A"/>
+          </a:solidFill>
+          <a:ln w="12700">
+            <a:solidFill>
+              <a:srgbClr val="1E9E6A"/>
+            </a:solidFill>
+            <a:prstDash val="solid"/>
+          </a:ln>
+        </p:spPr>
+      </p:sp>
+      <p:sp>
+        <p:nvSpPr>
+          <p:cNvPr id="24" name="Text 21"/>
+          <p:cNvSpPr txBox="1"/>
+          <p:nvPr/>
+        </p:nvSpPr>
+        <p:spPr>
+          <a:xfrm>
+            <a:off x="4977384" y="3154680"/>
+            <a:ext cx="1685544" cy="731520"/>
+          </a:xfrm>
+          <a:prstGeom prst="rect">
+            <a:avLst/>
+          </a:prstGeom>
+          <a:noFill/>
+          <a:ln/>
+        </p:spPr>
+        <p:txBody>
+          <a:bodyPr wrap="square" lIns="0" tIns="0" rIns="0" bIns="0" rtlCol="0" anchor="ctr"/>
+          <a:lstStyle/>
+          <a:p>
+            <a:pPr indent="0" marL="0">
+              <a:buNone/>
+            </a:pPr>
+            <a:r>
+              <a:rPr lang="en-US" sz="1800" dirty="0">
+                <a:solidFill>
+                  <a:srgbClr val="1D1D1F"/>
+                </a:solidFill>
+              </a:rPr>
+              <a:t>Orchestrator</a:t>
+            </a:r>
+            <a:endParaRPr lang="en-US" sz="1800" dirty="0"/>
+          </a:p>
+        </p:txBody>
+      </p:sp>
+      <p:sp>
+        <p:nvSpPr>
+          <p:cNvPr id="25" name="Text 22"/>
+          <p:cNvSpPr txBox="1"/>
+          <p:nvPr/>
+        </p:nvSpPr>
+        <p:spPr>
+          <a:xfrm>
+            <a:off x="6662928" y="3154680"/>
+            <a:ext cx="1005840" cy="731520"/>
+          </a:xfrm>
+          <a:prstGeom prst="rect">
+            <a:avLst/>
+          </a:prstGeom>
+          <a:noFill/>
+          <a:ln/>
+        </p:spPr>
+        <p:txBody>
+          <a:bodyPr wrap="square" lIns="0" tIns="0" rIns="0" bIns="0" rtlCol="0" anchor="ctr"/>
+          <a:lstStyle/>
+          <a:p>
+            <a:pPr algn="r" indent="0" marL="0">
+              <a:buNone/>
+            </a:pPr>
+            <a:r>
+              <a:rPr lang="en-US" sz="1300" dirty="0">
+                <a:solidFill>
+                  <a:srgbClr val="55555B"/>
+                </a:solidFill>
+              </a:rPr>
+              <a:t>healthy</a:t>
+            </a:r>
+            <a:endParaRPr lang="en-US" sz="1300" dirty="0"/>
+          </a:p>
+        </p:txBody>
+      </p:sp>
+      <p:sp>
+        <p:nvSpPr>
+          <p:cNvPr id="26" name="Shape 23"/>
+          <p:cNvSpPr/>
+          <p:nvPr/>
+        </p:nvSpPr>
+        <p:spPr>
+          <a:xfrm>
+            <a:off x="8125968" y="3154680"/>
+            <a:ext cx="3514344" cy="731520"/>
+          </a:xfrm>
+          <a:prstGeom prst="roundRect">
+            <a:avLst>
+              <a:gd name="adj" fmla="val 12500"/>
+            </a:avLst>
+          </a:prstGeom>
+          <a:solidFill>
+            <a:srgbClr val="FFFFFF"/>
+          </a:solidFill>
+          <a:ln w="9525">
+            <a:solidFill>
+              <a:srgbClr val="D9D9DE"/>
+            </a:solidFill>
+            <a:prstDash val="solid"/>
+          </a:ln>
+        </p:spPr>
+      </p:sp>
+      <p:sp>
+        <p:nvSpPr>
+          <p:cNvPr id="27" name="Shape 24"/>
+          <p:cNvSpPr/>
+          <p:nvPr/>
+        </p:nvSpPr>
+        <p:spPr>
+          <a:xfrm>
+            <a:off x="8354568" y="3401568"/>
+            <a:ext cx="237744" cy="237744"/>
+          </a:xfrm>
+          <a:prstGeom prst="ellipse">
+            <a:avLst/>
+          </a:prstGeom>
+          <a:solidFill>
+            <a:srgbClr val="1E9E6A"/>
+          </a:solidFill>
+          <a:ln w="12700">
+            <a:solidFill>
+              <a:srgbClr val="1E9E6A"/>
+            </a:solidFill>
+            <a:prstDash val="solid"/>
+          </a:ln>
+        </p:spPr>
+      </p:sp>
+      <p:sp>
+        <p:nvSpPr>
+          <p:cNvPr id="28" name="Text 25"/>
+          <p:cNvSpPr txBox="1"/>
+          <p:nvPr/>
+        </p:nvSpPr>
+        <p:spPr>
+          <a:xfrm>
+            <a:off x="8766048" y="3154680"/>
+            <a:ext cx="1685544" cy="731520"/>
+          </a:xfrm>
+          <a:prstGeom prst="rect">
+            <a:avLst/>
+          </a:prstGeom>
+          <a:noFill/>
+          <a:ln/>
+        </p:spPr>
+        <p:txBody>
+          <a:bodyPr wrap="square" lIns="0" tIns="0" rIns="0" bIns="0" rtlCol="0" anchor="ctr"/>
+          <a:lstStyle/>
+          <a:p>
+            <a:pPr indent="0" marL="0">
+              <a:buNone/>
+            </a:pPr>
+            <a:r>
+              <a:rPr lang="en-US" sz="1800" dirty="0">
+                <a:solidFill>
+                  <a:srgbClr val="1D1D1F"/>
+                </a:solidFill>
+              </a:rPr>
+              <a:t>Eval</a:t>
+            </a:r>
+            <a:endParaRPr lang="en-US" sz="1800" dirty="0"/>
+          </a:p>
+        </p:txBody>
+      </p:sp>
+      <p:sp>
+        <p:nvSpPr>
+          <p:cNvPr id="29" name="Text 26"/>
+          <p:cNvSpPr txBox="1"/>
+          <p:nvPr/>
+        </p:nvSpPr>
+        <p:spPr>
+          <a:xfrm>
+            <a:off x="10451592" y="3154680"/>
+            <a:ext cx="1005840" cy="731520"/>
+          </a:xfrm>
+          <a:prstGeom prst="rect">
+            <a:avLst/>
+          </a:prstGeom>
+          <a:noFill/>
+          <a:ln/>
+        </p:spPr>
+        <p:txBody>
+          <a:bodyPr wrap="square" lIns="0" tIns="0" rIns="0" bIns="0" rtlCol="0" anchor="ctr"/>
+          <a:lstStyle/>
+          <a:p>
+            <a:pPr algn="r" indent="0" marL="0">
+              <a:buNone/>
+            </a:pPr>
+            <a:r>
+              <a:rPr lang="en-US" sz="1300" dirty="0">
+                <a:solidFill>
+                  <a:srgbClr val="55555B"/>
+                </a:solidFill>
+              </a:rPr>
+              <a:t>healthy</a:t>
+            </a:r>
+            <a:endParaRPr lang="en-US" sz="1300" dirty="0"/>
+          </a:p>
+        </p:txBody>
+      </p:sp>
+      <p:sp>
+        <p:nvSpPr>
+          <p:cNvPr id="30" name="Shape 27"/>
+          <p:cNvSpPr/>
+          <p:nvPr/>
+        </p:nvSpPr>
+        <p:spPr>
+          <a:xfrm>
+            <a:off x="548640" y="4160520"/>
+            <a:ext cx="11091672" cy="2011680"/>
+          </a:xfrm>
+          <a:prstGeom prst="roundRect">
+            <a:avLst>
+              <a:gd name="adj" fmla="val 4545"/>
+            </a:avLst>
+          </a:prstGeom>
+          <a:solidFill>
+            <a:srgbClr val="FFFFFF"/>
+          </a:solidFill>
+          <a:ln w="9525">
+            <a:solidFill>
+              <a:srgbClr val="D9D9DE"/>
+            </a:solidFill>
+            <a:prstDash val="solid"/>
+          </a:ln>
+          <a:effectLst>
+            <a:outerShdw sx="100000" sy="100000" kx="0" ky="0" algn="bl" rotWithShape="0" blurRad="76200" dist="12700" dir="5400000">
+              <a:srgbClr val="000000">
+                <a:alpha val="8000"/>
+              </a:srgbClr>
+            </a:outerShdw>
+          </a:effectLst>
+        </p:spPr>
+      </p:sp>
+      <p:sp>
+        <p:nvSpPr>
+          <p:cNvPr id="31" name="Text 28"/>
+          <p:cNvSpPr txBox="1"/>
+          <p:nvPr/>
+        </p:nvSpPr>
+        <p:spPr>
+          <a:xfrm>
+            <a:off x="731520" y="4297680"/>
+            <a:ext cx="10725912" cy="411480"/>
+          </a:xfrm>
+          <a:prstGeom prst="rect">
+            <a:avLst/>
+          </a:prstGeom>
+          <a:noFill/>
+          <a:ln/>
+        </p:spPr>
+        <p:txBody>
+          <a:bodyPr wrap="square" lIns="0" tIns="0" rIns="0" bIns="0" rtlCol="0" anchor="t"/>
+          <a:lstStyle/>
+          <a:p>
+            <a:pPr indent="0" marL="0">
+              <a:buNone/>
+            </a:pPr>
+            <a:r>
+              <a:rPr lang="en-US" sz="1800" b="1" dirty="0">
+                <a:solidFill>
+                  <a:srgbClr val="1D1D1F"/>
+                </a:solidFill>
+              </a:rPr>
+              <a:t>What to demo</a:t>
+            </a:r>
+            <a:endParaRPr lang="en-US" sz="1800" dirty="0"/>
+          </a:p>
+        </p:txBody>
+      </p:sp>
+      <p:sp>
+        <p:nvSpPr>
+          <p:cNvPr id="32" name="Text 29"/>
+          <p:cNvSpPr txBox="1"/>
+          <p:nvPr/>
+        </p:nvSpPr>
+        <p:spPr>
+          <a:xfrm>
+            <a:off x="731520" y="4709160"/>
+            <a:ext cx="10725912" cy="1353312"/>
+          </a:xfrm>
+          <a:prstGeom prst="rect">
+            <a:avLst/>
+          </a:prstGeom>
+          <a:noFill/>
+          <a:ln/>
+        </p:spPr>
+        <p:txBody>
+          <a:bodyPr wrap="square" lIns="0" tIns="0" rIns="0" bIns="0" rtlCol="0" anchor="t"/>
+          <a:lstStyle/>
+          <a:p>
+            <a:pPr indent="0" marL="0">
+              <a:buNone/>
+            </a:pPr>
+            <a:r>
+              <a:rPr lang="en-US" sz="1500" dirty="0">
+                <a:solidFill>
+                  <a:srgbClr val="1D1D1F"/>
+                </a:solidFill>
+              </a:rPr>
+              <a:t>Ask: "Why does itsdangerous keep SHA-1 as its default digest?" and show the cited answer and the evidence chain.</a:t>
+            </a:r>
+            <a:endParaRPr lang="en-US" sz="1500" dirty="0"/>
+          </a:p>
+          <a:p>
+            <a:pPr indent="0" marL="0">
+              <a:buNone/>
+            </a:pPr>
+            <a:r>
+              <a:rPr lang="en-US" sz="1500" dirty="0">
+                <a:solidFill>
+                  <a:srgbClr val="1D1D1F"/>
+                </a:solidFill>
+              </a:rPr>
+              <a:t>Evaluation page: the held-out run, per-mode leaderboard, and which model is best for what.</a:t>
+            </a:r>
+            <a:endParaRPr lang="en-US" sz="1500" dirty="0"/>
+          </a:p>
+          <a:p>
+            <a:pPr indent="0" marL="0">
+              <a:buNone/>
+            </a:pPr>
+            <a:r>
+              <a:rPr lang="en-US" sz="1500" dirty="0">
+                <a:solidFill>
+                  <a:srgbClr val="1D1D1F"/>
+                </a:solidFill>
+              </a:rPr>
+              <a:t>Repositories page: the three indexed repositories (demo, itsdangerous, Nexus).</a:t>
+            </a:r>
+            <a:endParaRPr lang="en-US" sz="1500" dirty="0"/>
           </a:p>
         </p:txBody>
       </p:sp>
@@ -9387,6 +12966,187 @@
             <a:fld id="{F7021451-1387-4CA6-816F-3879F97B5CBC}" type="slidenum">
               <a:rPr b="0" lang="en-US"/>
               <a:t>13</a:t>
+            </a:fld>
+            <a:endParaRPr lang="en-US"/>
+          </a:p>
+        </p:txBody>
+      </p:sp>
+    </p:spTree>
+  </p:cSld>
+  <p:clrMapOvr>
+    <a:masterClrMapping/>
+  </p:clrMapOvr>
+</p:sld>
+</file>
+
+<file path=ppt/slides/slide14.xml><?xml version="1.0" encoding="utf-8"?>
+<p:sld xmlns:a="http://schemas.openxmlformats.org/drawingml/2006/main" xmlns:r="http://schemas.openxmlformats.org/officeDocument/2006/relationships" xmlns:p="http://schemas.openxmlformats.org/presentationml/2006/main">
+  <p:cSld name="Slide 14">
+    <p:spTree>
+      <p:nvGrpSpPr>
+        <p:cNvPr id="1" name=""/>
+        <p:cNvGrpSpPr/>
+        <p:nvPr/>
+      </p:nvGrpSpPr>
+      <p:grpSpPr>
+        <a:xfrm>
+          <a:off x="0" y="0"/>
+          <a:ext cx="0" cy="0"/>
+          <a:chOff x="0" y="0"/>
+          <a:chExt cx="0" cy="0"/>
+        </a:xfrm>
+      </p:grpSpPr>
+      <p:sp>
+        <p:nvSpPr>
+          <p:cNvPr id="2" name="Text 0"/>
+          <p:cNvSpPr txBox="1"/>
+          <p:nvPr/>
+        </p:nvSpPr>
+        <p:spPr>
+          <a:xfrm>
+            <a:off x="548640" y="2194560"/>
+            <a:ext cx="11091672" cy="1188720"/>
+          </a:xfrm>
+          <a:prstGeom prst="rect">
+            <a:avLst/>
+          </a:prstGeom>
+          <a:noFill/>
+          <a:ln/>
+        </p:spPr>
+        <p:txBody>
+          <a:bodyPr wrap="square" lIns="0" tIns="0" rIns="0" bIns="0" rtlCol="0" anchor="ctr"/>
+          <a:lstStyle/>
+          <a:p>
+            <a:pPr indent="0" marL="0">
+              <a:buNone/>
+            </a:pPr>
+            <a:r>
+              <a:rPr lang="en-US" sz="6400" b="1" dirty="0">
+                <a:solidFill>
+                  <a:srgbClr val="1D1D1F"/>
+                </a:solidFill>
+              </a:rPr>
+              <a:t>Questions?</a:t>
+            </a:r>
+            <a:endParaRPr lang="en-US" sz="6400" dirty="0"/>
+          </a:p>
+        </p:txBody>
+      </p:sp>
+      <p:sp>
+        <p:nvSpPr>
+          <p:cNvPr id="3" name="Text 1"/>
+          <p:cNvSpPr txBox="1"/>
+          <p:nvPr/>
+        </p:nvSpPr>
+        <p:spPr>
+          <a:xfrm>
+            <a:off x="548640" y="3566160"/>
+            <a:ext cx="11091672" cy="457200"/>
+          </a:xfrm>
+          <a:prstGeom prst="rect">
+            <a:avLst/>
+          </a:prstGeom>
+          <a:noFill/>
+          <a:ln/>
+        </p:spPr>
+        <p:txBody>
+          <a:bodyPr wrap="square" lIns="0" tIns="0" rIns="0" bIns="0" rtlCol="0" anchor="ctr"/>
+          <a:lstStyle/>
+          <a:p>
+            <a:pPr indent="0" marL="0">
+              <a:buNone/>
+            </a:pPr>
+            <a:r>
+              <a:rPr lang="en-US" sz="2200" dirty="0">
+                <a:solidFill>
+                  <a:srgbClr val="55555B"/>
+                </a:solidFill>
+              </a:rPr>
+              <a:t>github.com/IATESPAGHETTI/Code_Origin</a:t>
+            </a:r>
+            <a:endParaRPr lang="en-US" sz="2200" dirty="0"/>
+          </a:p>
+        </p:txBody>
+      </p:sp>
+      <p:sp>
+        <p:nvSpPr>
+          <p:cNvPr id="4" name="Text 2"/>
+          <p:cNvSpPr txBox="1"/>
+          <p:nvPr/>
+        </p:nvSpPr>
+        <p:spPr>
+          <a:xfrm>
+            <a:off x="548640" y="4297680"/>
+            <a:ext cx="11091672" cy="457200"/>
+          </a:xfrm>
+          <a:prstGeom prst="rect">
+            <a:avLst/>
+          </a:prstGeom>
+          <a:noFill/>
+          <a:ln/>
+        </p:spPr>
+        <p:txBody>
+          <a:bodyPr wrap="square" lIns="0" tIns="0" rIns="0" bIns="0" rtlCol="0" anchor="ctr"/>
+          <a:lstStyle/>
+          <a:p>
+            <a:pPr indent="0" marL="0">
+              <a:buNone/>
+            </a:pPr>
+            <a:r>
+              <a:rPr lang="en-US" sz="1800" dirty="0">
+                <a:solidFill>
+                  <a:srgbClr val="0071E3"/>
+                </a:solidFill>
+              </a:rPr>
+              <a:t>We claim: supported on one real repository for 7B models, not yet general.</a:t>
+            </a:r>
+            <a:endParaRPr lang="en-US" sz="1800" dirty="0"/>
+          </a:p>
+        </p:txBody>
+      </p:sp>
+      <p:sp>
+        <p:nvSpPr>
+          <p:cNvPr id="25" name="Slide Number Placeholder 0"/>
+          <p:cNvSpPr>
+            <a:spLocks noGrp="1"/>
+          </p:cNvSpPr>
+          <p:nvPr>
+            <p:ph type="sldNum" sz="quarter" idx="4294967295"/>
+          </p:nvPr>
+        </p:nvSpPr>
+        <p:spPr>
+          <a:xfrm>
+            <a:off x="10725912" y="6419088"/>
+            <a:ext cx="914400" cy="274320"/>
+          </a:xfrm>
+          <a:prstGeom prst="rect">
+            <a:avLst/>
+          </a:prstGeom>
+          <a:extLst>
+            <a:ext uri="{C572A759-6A51-4108-AA02-DFA0A04FC94B}">
+              <ma14:wrappingTextBoxFlag xmlns:ma14="http://schemas.microsoft.com/office/mac/drawingml/2011/main" val="0"/>
+            </a:ext>
+          </a:extLst>
+        </p:spPr>
+        <p:txBody>
+          <a:bodyPr/>
+          <a:lstStyle>
+            <a:lvl1pPr>
+              <a:defRPr sz="1100">
+                <a:solidFill>
+                  <a:srgbClr val="55555B"/>
+                </a:solidFill>
+                <a:latin typeface="Calibri"/>
+                <a:ea typeface="Calibri"/>
+                <a:cs typeface="Calibri"/>
+              </a:defRPr>
+            </a:lvl1pPr>
+          </a:lstStyle>
+          <a:p>
+            <a:pPr algn="r"/>
+            <a:fld id="{F7021451-1387-4CA6-816F-3879F97B5CBC}" type="slidenum">
+              <a:rPr b="0" lang="en-US"/>
+              <a:t>14</a:t>
             </a:fld>
             <a:endParaRPr lang="en-US"/>
           </a:p>

--- a/docs/CodeOrigin_presentation.pptx
+++ b/docs/CodeOrigin_presentation.pptx
@@ -19,9 +19,10 @@
     <p:sldId id="267" r:id="rId13"/>
     <p:sldId id="268" r:id="rId14"/>
     <p:sldId id="269" r:id="rId15"/>
+    <p:sldId id="270" r:id="rId16"/>
   </p:sldIdLst>
   <p:notesMasterIdLst>
-    <p:notesMasterId r:id="rId16"/>
+    <p:notesMasterId r:id="rId17"/>
   </p:notesMasterIdLst>
   <p:sldSz cx="12192000" cy="6858000"/>
   <p:notesSz cx="6858000" cy="12192000"/>
@@ -1060,7 +1061,7 @@
           <a:p>
             <a:r>
               <a:rPr lang="en-US" dirty="0"/>
-              <a:t>Top three rows are the held-out real repository. History effect is code_history minus code_only on the history questions, with a 95% bootstrap interval. It holds on a real repository: both 7B models pass the pre-registered rule, an independent LLM judge (DeepSeek) confirms it (+0.35 for both), and excluding two items an independent review flagged leaves the conclusions unchanged. starcoder2:3b gets no benefit on either repository: even with the gold evidence it mostly invents. One caution: on the 4 code-only control questions the judge hints history can hurt.</a:t>
+              <a:t>Overall correctness (all categories pooled) rises from no_context to code_only to code_history for both 7B models. The pre-registered test is the paired difference code_history minus code_only on the 24 history questions: llama2 +0.32, codellama +0.28, both with intervals excluding 0, so history is useful for them. starcoder2:3b shows no effect. Honest reading: automatic scoring, small samples, one repository.</a:t>
             </a:r>
             <a:endParaRPr lang="en-US" dirty="0"/>
           </a:p>
@@ -1148,7 +1149,7 @@
           <a:p>
             <a:r>
               <a:rPr lang="en-US" dirty="0"/>
-              <a:t>Each task maps to a question category on the real repository. Numbers are correctness in the RAG mode (code_history), automatic score then DeepSeek judge in brackets. With 2 to 10 questions per task a gap under 0.10 is a tie. Explanation, bug analysis and dependency links: llama2 and codellama tie, starcoder2 far behind. Code retrieval: codellama leads (4 questions). RAG overall: llama2 and codellama tie on accuracy; llama2 is twice as fast, codellama hallucinated less. Code generation and refactoring were not evaluated because the system answers questions and does not write code, so there is also no test-pass rate; do not invent numbers.</a:t>
+              <a:t>Top three rows are the held-out real repository. History effect is code_history minus code_only on the history questions, with a 95% bootstrap interval. It holds on a real repository: both 7B models pass the pre-registered rule, an independent LLM judge (DeepSeek) confirms it (+0.35 for both), and excluding two items an independent review flagged leaves the conclusions unchanged. starcoder2:3b gets no benefit on either repository: even with the gold evidence it mostly invents. One caution: on the 4 code-only control questions the judge hints history can hurt.</a:t>
             </a:r>
             <a:endParaRPr lang="en-US" dirty="0"/>
           </a:p>
@@ -1236,7 +1237,7 @@
           <a:p>
             <a:r>
               <a:rPr lang="en-US" dirty="0"/>
-              <a:t>Each failure was found in real output and traced to a cause. (1) Retrieval missed an unusual phrasing: for "why was 1.0.0 removed from PyPI" it fetched unrelated issues and both models invented a reason. (2) History can distract on code-only questions: llama2 said the key derivation is hmac and cited an unrelated commit. (3) The refusal gate G2 did not fire for on-topic unanswerable questions; codellama invented a customer name. (4) Models rarely cite the gold source. (5) The automatic score is generous: DeepSeek rated 42 of 143 full-credit answers as only partly right or wrong; agreement kappa 0.75. Human check: I graded 18 factual rows by hand and agreed 18 of 18; the 16 technical rows are LLM-judged only.</a:t>
+              <a:t>Each task maps to a question category on the real repository. Numbers are correctness in the RAG mode (code_history), automatic score then DeepSeek judge in brackets. With 2 to 10 questions per task a gap under 0.10 is a tie. Explanation, bug analysis and dependency links: llama2 and codellama tie, starcoder2 far behind. Code retrieval: codellama leads (4 questions). RAG overall: llama2 and codellama tie on accuracy; llama2 is faster at the median, codellama hallucinated less. Code generation and refactoring were not evaluated because the system answers questions and does not write code, so there is also no test-pass rate; do not invent numbers.</a:t>
             </a:r>
             <a:endParaRPr lang="en-US" dirty="0"/>
           </a:p>
@@ -1324,7 +1325,7 @@
           <a:p>
             <a:r>
               <a:rPr lang="en-US" dirty="0"/>
-              <a:t>Open the website. Show: Ask (a real question with citations, the evidence chain and the guardrail trace), Repositories (the indexed repos), Evaluation (the held-out run and the which-model-for-what panel), and the slides. Suggested demo question on itsdangerous: "Why does itsdangerous keep SHA-1 as its default digest?"</a:t>
+              <a:t>Each failure was found in real output and traced to a cause. (1) Retrieval missed an unusual phrasing: for "why was 1.0.0 removed from PyPI" it fetched unrelated issues and both models invented a reason. (2) History can distract on code-only questions: llama2 said the key derivation is hmac and cited an unrelated commit. (3) The refusal gate G2 did not fire for on-topic unanswerable questions; codellama invented a customer name. (4) Models rarely cite the gold source. (5) The automatic score is generous: DeepSeek rated 42 of 143 full-credit answers as only partly right or wrong; agreement kappa 0.75. Human check: I graded 18 factual rows by hand and agreed 18 of 18; the 16 technical rows are LLM-judged only.</a:t>
             </a:r>
             <a:endParaRPr lang="en-US" dirty="0"/>
           </a:p>
@@ -1412,7 +1413,7 @@
           <a:p>
             <a:r>
               <a:rPr lang="en-US" dirty="0"/>
-              <a:t>Be ready to explain: the research question, the four modes and why oracle exists, the decision rule, why starcoder2 is inconclusive (it cannot use evidence even when given it), what went wrong (retrieval misses, refusal gate, history distracting on code questions), and what is not validated (human grading covers factual rows only).</a:t>
+              <a:t>Open the website. Show: Ask (a real question with citations, the evidence chain and the guardrail trace), Repositories (the indexed repos), Evaluation (the held-out run and the which-model-for-what panel), and the slides. Suggested demo question on itsdangerous: "Why does itsdangerous keep SHA-1 as its default digest?"</a:t>
             </a:r>
             <a:endParaRPr lang="en-US" dirty="0"/>
           </a:p>
@@ -1436,6 +1437,94 @@
             <a:fld id="{F7021451-1387-4CA6-816F-3879F97B5CBC}" type="slidenum">
               <a:rPr lang="en-US"/>
               <a:t>14</a:t>
+            </a:fld>
+            <a:endParaRPr lang="en-US"/>
+          </a:p>
+        </p:txBody>
+      </p:sp>
+    </p:spTree>
+    <p:extLst>
+      <p:ext uri="{BB962C8B-B14F-4D97-AF65-F5344CB8AC3E}">
+        <p14:creationId xmlns:p14="http://schemas.microsoft.com/office/powerpoint/2010/main" val="1024086991"/>
+      </p:ext>
+    </p:extLst>
+  </p:cSld>
+  <p:clrMapOvr>
+    <a:masterClrMapping/>
+  </p:clrMapOvr>
+</p:notes>
+</file>
+
+<file path=ppt/notesSlides/notesSlide15.xml><?xml version="1.0" encoding="utf-8"?>
+<p:notes xmlns:a="http://schemas.openxmlformats.org/drawingml/2006/main" xmlns:r="http://schemas.openxmlformats.org/officeDocument/2006/relationships" xmlns:p="http://schemas.openxmlformats.org/presentationml/2006/main">
+  <p:cSld>
+    <p:spTree>
+      <p:nvGrpSpPr>
+        <p:cNvPr id="1" name=""/>
+        <p:cNvGrpSpPr/>
+        <p:nvPr/>
+      </p:nvGrpSpPr>
+      <p:grpSpPr>
+        <a:xfrm>
+          <a:off x="0" y="0"/>
+          <a:ext cx="0" cy="0"/>
+          <a:chOff x="0" y="0"/>
+          <a:chExt cx="0" cy="0"/>
+        </a:xfrm>
+      </p:grpSpPr>
+      <p:sp>
+        <p:nvSpPr>
+          <p:cNvPr id="2" name="Slide Image Placeholder 1"/>
+          <p:cNvSpPr>
+            <a:spLocks noGrp="1" noRot="1" noChangeAspect="1"/>
+          </p:cNvSpPr>
+          <p:nvPr>
+            <p:ph type="sldImg"/>
+          </p:nvPr>
+        </p:nvSpPr>
+        <p:spPr/>
+      </p:sp>
+      <p:sp>
+        <p:nvSpPr>
+          <p:cNvPr id="3" name="Notes Placeholder 2"/>
+          <p:cNvSpPr>
+            <a:spLocks noGrp="1"/>
+          </p:cNvSpPr>
+          <p:nvPr>
+            <p:ph type="body" idx="1"/>
+          </p:nvPr>
+        </p:nvSpPr>
+        <p:spPr/>
+        <p:txBody>
+          <a:bodyPr/>
+          <a:lstStyle/>
+          <a:p>
+            <a:r>
+              <a:rPr lang="en-US" dirty="0"/>
+              <a:t>Be ready to explain: the research question, the four modes and why oracle exists, the decision rule, why starcoder2 is inconclusive (it cannot use evidence even when given it), what went wrong (retrieval misses, refusal gate, history distracting on code questions), and what is not validated (human grading covers factual rows only).</a:t>
+            </a:r>
+            <a:endParaRPr lang="en-US" dirty="0"/>
+          </a:p>
+        </p:txBody>
+      </p:sp>
+      <p:sp>
+        <p:nvSpPr>
+          <p:cNvPr id="4" name="Slide Number Placeholder 3"/>
+          <p:cNvSpPr>
+            <a:spLocks noGrp="1"/>
+          </p:cNvSpPr>
+          <p:nvPr>
+            <p:ph type="sldNum" sz="quarter" idx="10"/>
+          </p:nvPr>
+        </p:nvSpPr>
+        <p:spPr/>
+        <p:txBody>
+          <a:bodyPr/>
+          <a:lstStyle/>
+          <a:p>
+            <a:fld id="{F7021451-1387-4CA6-816F-3879F97B5CBC}" type="slidenum">
+              <a:rPr lang="en-US"/>
+              <a:t>15</a:t>
             </a:fld>
             <a:endParaRPr lang="en-US"/>
           </a:p>
@@ -2116,7 +2205,7 @@
           <a:p>
             <a:r>
               <a:rPr lang="en-US" dirty="0"/>
-              <a:t>Overall correctness (all categories pooled) rises from no_context to code_only to code_history for both 7B models. The pre-registered test is the paired difference code_history minus code_only on the 24 history questions: llama2 +0.32, codellama +0.28, both with intervals excluding 0, so history is useful for them. starcoder2:3b shows no effect. Honest reading: automatic scoring, small samples, one repository.</a:t>
+              <a:t>Show Grafana at localhost:3000 (dashboard CodeOrigin overview). Top: live service metrics from the gateway (requests per second, p95 latency, guardrail triggers, LLM tokens) and logs from Loki. Middle: the evaluation results of the selected run exported as metrics by the eval service. Bottom: quality and cost per model: hallucination rate, retrieval recall and precision by mode, latency, tokens. Pick the run in the Eval run selector. Ask a question on the Ask page first so the live panels move.</a:t>
             </a:r>
             <a:endParaRPr lang="en-US" dirty="0"/>
           </a:p>
@@ -2897,7 +2986,7 @@
                   <a:srgbClr val="0071E3"/>
                 </a:solidFill>
               </a:rPr>
-              <a:t>RESULTS AND INTERPRETATION</a:t>
+              <a:t>RESULTS: HELD-OUT RUN ON A REAL REPOSITORY</a:t>
             </a:r>
             <a:endParaRPr lang="en-US" sz="1200" dirty="0"/>
           </a:p>
@@ -2933,15 +3022,761 @@
                   <a:srgbClr val="1D1D1F"/>
                 </a:solidFill>
               </a:rPr>
-              <a:t>What the numbers mean</a:t>
+              <a:t>What the experiment shows</a:t>
             </a:r>
             <a:endParaRPr lang="en-US" sz="3600" dirty="0"/>
+          </a:p>
+        </p:txBody>
+      </p:sp>
+      <p:sp>
+        <p:nvSpPr>
+          <p:cNvPr id="4" name="Text 2"/>
+          <p:cNvSpPr txBox="1"/>
+          <p:nvPr/>
+        </p:nvSpPr>
+        <p:spPr>
+          <a:xfrm>
+            <a:off x="548640" y="1371600"/>
+            <a:ext cx="11091672" cy="548640"/>
+          </a:xfrm>
+          <a:prstGeom prst="rect">
+            <a:avLst/>
+          </a:prstGeom>
+          <a:noFill/>
+          <a:ln/>
+        </p:spPr>
+        <p:txBody>
+          <a:bodyPr wrap="square" lIns="0" tIns="0" rIns="0" bIns="0" rtlCol="0" anchor="t"/>
+          <a:lstStyle/>
+          <a:p>
+            <a:pPr indent="0" marL="0">
+              <a:buNone/>
+            </a:pPr>
+            <a:r>
+              <a:rPr lang="en-US" sz="1600" dirty="0">
+                <a:solidFill>
+                  <a:srgbClr val="55555B"/>
+                </a:solidFill>
+              </a:rPr>
+              <a:t>Run #8: pallets/itsdangerous, 35 questions, 399 answers, real local models. Overall correctness per mode.</a:t>
+            </a:r>
+            <a:endParaRPr lang="en-US" sz="1600" dirty="0"/>
           </a:p>
         </p:txBody>
       </p:sp>
       <p:graphicFrame>
         <p:nvGraphicFramePr>
-          <p:cNvPr id="11" name="Table 0"/>
+          <p:cNvPr id="6" name="Chart 0" descr=""/>
+          <p:cNvGraphicFramePr/>
+          <p:nvPr/>
+        </p:nvGraphicFramePr>
+        <p:xfrm>
+          <a:off x="548640" y="2011680"/>
+          <a:ext cx="6949440" cy="4206240"/>
+        </p:xfrm>
+        <a:graphic xmlns:a="http://schemas.openxmlformats.org/drawingml/2006/main">
+          <a:graphicData uri="http://schemas.openxmlformats.org/drawingml/2006/chart">
+            <c:chart xmlns:c="http://schemas.openxmlformats.org/drawingml/2006/chart" r:id="rId1"/>
+          </a:graphicData>
+        </a:graphic>
+      </p:graphicFrame>
+      <p:sp>
+        <p:nvSpPr>
+          <p:cNvPr id="7" name="Text 3"/>
+          <p:cNvSpPr txBox="1"/>
+          <p:nvPr/>
+        </p:nvSpPr>
+        <p:spPr>
+          <a:xfrm>
+            <a:off x="7772400" y="2011680"/>
+            <a:ext cx="3840480" cy="320040"/>
+          </a:xfrm>
+          <a:prstGeom prst="rect">
+            <a:avLst/>
+          </a:prstGeom>
+          <a:noFill/>
+          <a:ln/>
+        </p:spPr>
+        <p:txBody>
+          <a:bodyPr wrap="square" lIns="0" tIns="0" rIns="0" bIns="0" rtlCol="0" anchor="ctr"/>
+          <a:lstStyle/>
+          <a:p>
+            <a:pPr indent="0" marL="0">
+              <a:buNone/>
+            </a:pPr>
+            <a:r>
+              <a:rPr lang="en-US" sz="1400" b="1" dirty="0">
+                <a:solidFill>
+                  <a:srgbClr val="1D1D1F"/>
+                </a:solidFill>
+              </a:rPr>
+              <a:t>History vs code-only (24 history questions)</a:t>
+            </a:r>
+            <a:endParaRPr lang="en-US" sz="1400" dirty="0"/>
+          </a:p>
+        </p:txBody>
+      </p:sp>
+      <p:sp>
+        <p:nvSpPr>
+          <p:cNvPr id="8" name="Shape 4"/>
+          <p:cNvSpPr/>
+          <p:nvPr/>
+        </p:nvSpPr>
+        <p:spPr>
+          <a:xfrm>
+            <a:off x="7772400" y="2423160"/>
+            <a:ext cx="3867912" cy="1051560"/>
+          </a:xfrm>
+          <a:prstGeom prst="roundRect">
+            <a:avLst>
+              <a:gd name="adj" fmla="val 8696"/>
+            </a:avLst>
+          </a:prstGeom>
+          <a:solidFill>
+            <a:srgbClr val="FFFFFF"/>
+          </a:solidFill>
+          <a:ln w="9525">
+            <a:solidFill>
+              <a:srgbClr val="D9D9DE"/>
+            </a:solidFill>
+            <a:prstDash val="solid"/>
+          </a:ln>
+        </p:spPr>
+      </p:sp>
+      <p:sp>
+        <p:nvSpPr>
+          <p:cNvPr id="9" name="Text 5"/>
+          <p:cNvSpPr txBox="1"/>
+          <p:nvPr/>
+        </p:nvSpPr>
+        <p:spPr>
+          <a:xfrm>
+            <a:off x="7955280" y="2514600"/>
+            <a:ext cx="2011680" cy="320040"/>
+          </a:xfrm>
+          <a:prstGeom prst="rect">
+            <a:avLst/>
+          </a:prstGeom>
+          <a:noFill/>
+          <a:ln/>
+        </p:spPr>
+        <p:txBody>
+          <a:bodyPr wrap="square" lIns="0" tIns="0" rIns="0" bIns="0" rtlCol="0" anchor="ctr"/>
+          <a:lstStyle/>
+          <a:p>
+            <a:pPr indent="0" marL="0">
+              <a:buNone/>
+            </a:pPr>
+            <a:r>
+              <a:rPr lang="en-US" sz="1500" b="1" dirty="0">
+                <a:solidFill>
+                  <a:srgbClr val="1D1D1F"/>
+                </a:solidFill>
+              </a:rPr>
+              <a:t>llama2</a:t>
+            </a:r>
+            <a:endParaRPr lang="en-US" sz="1500" dirty="0"/>
+          </a:p>
+        </p:txBody>
+      </p:sp>
+      <p:sp>
+        <p:nvSpPr>
+          <p:cNvPr id="10" name="Text 6"/>
+          <p:cNvSpPr txBox="1"/>
+          <p:nvPr/>
+        </p:nvSpPr>
+        <p:spPr>
+          <a:xfrm>
+            <a:off x="9966960" y="2468880"/>
+            <a:ext cx="1554480" cy="457200"/>
+          </a:xfrm>
+          <a:prstGeom prst="rect">
+            <a:avLst/>
+          </a:prstGeom>
+          <a:noFill/>
+          <a:ln/>
+        </p:spPr>
+        <p:txBody>
+          <a:bodyPr wrap="square" lIns="0" tIns="0" rIns="0" bIns="0" rtlCol="0" anchor="ctr"/>
+          <a:lstStyle/>
+          <a:p>
+            <a:pPr algn="r" indent="0" marL="0">
+              <a:buNone/>
+            </a:pPr>
+            <a:r>
+              <a:rPr lang="en-US" sz="2400" b="1" dirty="0">
+                <a:solidFill>
+                  <a:srgbClr val="1E9E6A"/>
+                </a:solidFill>
+              </a:rPr>
+              <a:t>+0.32</a:t>
+            </a:r>
+            <a:endParaRPr lang="en-US" sz="2400" dirty="0"/>
+          </a:p>
+        </p:txBody>
+      </p:sp>
+      <p:sp>
+        <p:nvSpPr>
+          <p:cNvPr id="11" name="Text 7"/>
+          <p:cNvSpPr txBox="1"/>
+          <p:nvPr/>
+        </p:nvSpPr>
+        <p:spPr>
+          <a:xfrm>
+            <a:off x="7955280" y="2880360"/>
+            <a:ext cx="3566160" cy="274320"/>
+          </a:xfrm>
+          <a:prstGeom prst="rect">
+            <a:avLst/>
+          </a:prstGeom>
+          <a:noFill/>
+          <a:ln/>
+        </p:spPr>
+        <p:txBody>
+          <a:bodyPr wrap="square" lIns="0" tIns="0" rIns="0" bIns="0" rtlCol="0" anchor="ctr"/>
+          <a:lstStyle/>
+          <a:p>
+            <a:pPr indent="0" marL="0">
+              <a:buNone/>
+            </a:pPr>
+            <a:r>
+              <a:rPr lang="en-US" sz="1200" dirty="0">
+                <a:solidFill>
+                  <a:srgbClr val="55555B"/>
+                </a:solidFill>
+              </a:rPr>
+              <a:t>95% CI [+0.07, +0.55]</a:t>
+            </a:r>
+            <a:endParaRPr lang="en-US" sz="1200" dirty="0"/>
+          </a:p>
+        </p:txBody>
+      </p:sp>
+      <p:sp>
+        <p:nvSpPr>
+          <p:cNvPr id="12" name="Text 8"/>
+          <p:cNvSpPr txBox="1"/>
+          <p:nvPr/>
+        </p:nvSpPr>
+        <p:spPr>
+          <a:xfrm>
+            <a:off x="7955280" y="3136392"/>
+            <a:ext cx="3566160" cy="274320"/>
+          </a:xfrm>
+          <a:prstGeom prst="rect">
+            <a:avLst/>
+          </a:prstGeom>
+          <a:noFill/>
+          <a:ln/>
+        </p:spPr>
+        <p:txBody>
+          <a:bodyPr wrap="square" lIns="0" tIns="0" rIns="0" bIns="0" rtlCol="0" anchor="ctr"/>
+          <a:lstStyle/>
+          <a:p>
+            <a:pPr indent="0" marL="0">
+              <a:buNone/>
+            </a:pPr>
+            <a:r>
+              <a:rPr lang="en-US" sz="1300" b="1" dirty="0">
+                <a:solidFill>
+                  <a:srgbClr val="1E9E6A"/>
+                </a:solidFill>
+              </a:rPr>
+              <a:t>history is useful</a:t>
+            </a:r>
+            <a:endParaRPr lang="en-US" sz="1300" dirty="0"/>
+          </a:p>
+        </p:txBody>
+      </p:sp>
+      <p:sp>
+        <p:nvSpPr>
+          <p:cNvPr id="13" name="Shape 9"/>
+          <p:cNvSpPr/>
+          <p:nvPr/>
+        </p:nvSpPr>
+        <p:spPr>
+          <a:xfrm>
+            <a:off x="7772400" y="3611880"/>
+            <a:ext cx="3867912" cy="1051560"/>
+          </a:xfrm>
+          <a:prstGeom prst="roundRect">
+            <a:avLst>
+              <a:gd name="adj" fmla="val 8696"/>
+            </a:avLst>
+          </a:prstGeom>
+          <a:solidFill>
+            <a:srgbClr val="FFFFFF"/>
+          </a:solidFill>
+          <a:ln w="9525">
+            <a:solidFill>
+              <a:srgbClr val="D9D9DE"/>
+            </a:solidFill>
+            <a:prstDash val="solid"/>
+          </a:ln>
+        </p:spPr>
+      </p:sp>
+      <p:sp>
+        <p:nvSpPr>
+          <p:cNvPr id="14" name="Text 10"/>
+          <p:cNvSpPr txBox="1"/>
+          <p:nvPr/>
+        </p:nvSpPr>
+        <p:spPr>
+          <a:xfrm>
+            <a:off x="7955280" y="3703320"/>
+            <a:ext cx="2011680" cy="320040"/>
+          </a:xfrm>
+          <a:prstGeom prst="rect">
+            <a:avLst/>
+          </a:prstGeom>
+          <a:noFill/>
+          <a:ln/>
+        </p:spPr>
+        <p:txBody>
+          <a:bodyPr wrap="square" lIns="0" tIns="0" rIns="0" bIns="0" rtlCol="0" anchor="ctr"/>
+          <a:lstStyle/>
+          <a:p>
+            <a:pPr indent="0" marL="0">
+              <a:buNone/>
+            </a:pPr>
+            <a:r>
+              <a:rPr lang="en-US" sz="1500" b="1" dirty="0">
+                <a:solidFill>
+                  <a:srgbClr val="1D1D1F"/>
+                </a:solidFill>
+              </a:rPr>
+              <a:t>codellama:7b</a:t>
+            </a:r>
+            <a:endParaRPr lang="en-US" sz="1500" dirty="0"/>
+          </a:p>
+        </p:txBody>
+      </p:sp>
+      <p:sp>
+        <p:nvSpPr>
+          <p:cNvPr id="15" name="Text 11"/>
+          <p:cNvSpPr txBox="1"/>
+          <p:nvPr/>
+        </p:nvSpPr>
+        <p:spPr>
+          <a:xfrm>
+            <a:off x="9966960" y="3657600"/>
+            <a:ext cx="1554480" cy="457200"/>
+          </a:xfrm>
+          <a:prstGeom prst="rect">
+            <a:avLst/>
+          </a:prstGeom>
+          <a:noFill/>
+          <a:ln/>
+        </p:spPr>
+        <p:txBody>
+          <a:bodyPr wrap="square" lIns="0" tIns="0" rIns="0" bIns="0" rtlCol="0" anchor="ctr"/>
+          <a:lstStyle/>
+          <a:p>
+            <a:pPr algn="r" indent="0" marL="0">
+              <a:buNone/>
+            </a:pPr>
+            <a:r>
+              <a:rPr lang="en-US" sz="2400" b="1" dirty="0">
+                <a:solidFill>
+                  <a:srgbClr val="1E9E6A"/>
+                </a:solidFill>
+              </a:rPr>
+              <a:t>+0.28</a:t>
+            </a:r>
+            <a:endParaRPr lang="en-US" sz="2400" dirty="0"/>
+          </a:p>
+        </p:txBody>
+      </p:sp>
+      <p:sp>
+        <p:nvSpPr>
+          <p:cNvPr id="16" name="Text 12"/>
+          <p:cNvSpPr txBox="1"/>
+          <p:nvPr/>
+        </p:nvSpPr>
+        <p:spPr>
+          <a:xfrm>
+            <a:off x="7955280" y="4069080"/>
+            <a:ext cx="3566160" cy="274320"/>
+          </a:xfrm>
+          <a:prstGeom prst="rect">
+            <a:avLst/>
+          </a:prstGeom>
+          <a:noFill/>
+          <a:ln/>
+        </p:spPr>
+        <p:txBody>
+          <a:bodyPr wrap="square" lIns="0" tIns="0" rIns="0" bIns="0" rtlCol="0" anchor="ctr"/>
+          <a:lstStyle/>
+          <a:p>
+            <a:pPr indent="0" marL="0">
+              <a:buNone/>
+            </a:pPr>
+            <a:r>
+              <a:rPr lang="en-US" sz="1200" dirty="0">
+                <a:solidFill>
+                  <a:srgbClr val="55555B"/>
+                </a:solidFill>
+              </a:rPr>
+              <a:t>95% CI [+0.05, +0.49]</a:t>
+            </a:r>
+            <a:endParaRPr lang="en-US" sz="1200" dirty="0"/>
+          </a:p>
+        </p:txBody>
+      </p:sp>
+      <p:sp>
+        <p:nvSpPr>
+          <p:cNvPr id="17" name="Text 13"/>
+          <p:cNvSpPr txBox="1"/>
+          <p:nvPr/>
+        </p:nvSpPr>
+        <p:spPr>
+          <a:xfrm>
+            <a:off x="7955280" y="4325112"/>
+            <a:ext cx="3566160" cy="274320"/>
+          </a:xfrm>
+          <a:prstGeom prst="rect">
+            <a:avLst/>
+          </a:prstGeom>
+          <a:noFill/>
+          <a:ln/>
+        </p:spPr>
+        <p:txBody>
+          <a:bodyPr wrap="square" lIns="0" tIns="0" rIns="0" bIns="0" rtlCol="0" anchor="ctr"/>
+          <a:lstStyle/>
+          <a:p>
+            <a:pPr indent="0" marL="0">
+              <a:buNone/>
+            </a:pPr>
+            <a:r>
+              <a:rPr lang="en-US" sz="1300" b="1" dirty="0">
+                <a:solidFill>
+                  <a:srgbClr val="1E9E6A"/>
+                </a:solidFill>
+              </a:rPr>
+              <a:t>history is useful</a:t>
+            </a:r>
+            <a:endParaRPr lang="en-US" sz="1300" dirty="0"/>
+          </a:p>
+        </p:txBody>
+      </p:sp>
+      <p:sp>
+        <p:nvSpPr>
+          <p:cNvPr id="18" name="Shape 14"/>
+          <p:cNvSpPr/>
+          <p:nvPr/>
+        </p:nvSpPr>
+        <p:spPr>
+          <a:xfrm>
+            <a:off x="7772400" y="4800600"/>
+            <a:ext cx="3867912" cy="1051560"/>
+          </a:xfrm>
+          <a:prstGeom prst="roundRect">
+            <a:avLst>
+              <a:gd name="adj" fmla="val 8696"/>
+            </a:avLst>
+          </a:prstGeom>
+          <a:solidFill>
+            <a:srgbClr val="FFFFFF"/>
+          </a:solidFill>
+          <a:ln w="9525">
+            <a:solidFill>
+              <a:srgbClr val="D9D9DE"/>
+            </a:solidFill>
+            <a:prstDash val="solid"/>
+          </a:ln>
+        </p:spPr>
+      </p:sp>
+      <p:sp>
+        <p:nvSpPr>
+          <p:cNvPr id="19" name="Text 15"/>
+          <p:cNvSpPr txBox="1"/>
+          <p:nvPr/>
+        </p:nvSpPr>
+        <p:spPr>
+          <a:xfrm>
+            <a:off x="7955280" y="4892040"/>
+            <a:ext cx="2011680" cy="320040"/>
+          </a:xfrm>
+          <a:prstGeom prst="rect">
+            <a:avLst/>
+          </a:prstGeom>
+          <a:noFill/>
+          <a:ln/>
+        </p:spPr>
+        <p:txBody>
+          <a:bodyPr wrap="square" lIns="0" tIns="0" rIns="0" bIns="0" rtlCol="0" anchor="ctr"/>
+          <a:lstStyle/>
+          <a:p>
+            <a:pPr indent="0" marL="0">
+              <a:buNone/>
+            </a:pPr>
+            <a:r>
+              <a:rPr lang="en-US" sz="1500" b="1" dirty="0">
+                <a:solidFill>
+                  <a:srgbClr val="1D1D1F"/>
+                </a:solidFill>
+              </a:rPr>
+              <a:t>starcoder2:3b</a:t>
+            </a:r>
+            <a:endParaRPr lang="en-US" sz="1500" dirty="0"/>
+          </a:p>
+        </p:txBody>
+      </p:sp>
+      <p:sp>
+        <p:nvSpPr>
+          <p:cNvPr id="20" name="Text 16"/>
+          <p:cNvSpPr txBox="1"/>
+          <p:nvPr/>
+        </p:nvSpPr>
+        <p:spPr>
+          <a:xfrm>
+            <a:off x="9966960" y="4846320"/>
+            <a:ext cx="1554480" cy="457200"/>
+          </a:xfrm>
+          <a:prstGeom prst="rect">
+            <a:avLst/>
+          </a:prstGeom>
+          <a:noFill/>
+          <a:ln/>
+        </p:spPr>
+        <p:txBody>
+          <a:bodyPr wrap="square" lIns="0" tIns="0" rIns="0" bIns="0" rtlCol="0" anchor="ctr"/>
+          <a:lstStyle/>
+          <a:p>
+            <a:pPr algn="r" indent="0" marL="0">
+              <a:buNone/>
+            </a:pPr>
+            <a:r>
+              <a:rPr lang="en-US" sz="2400" b="1" dirty="0">
+                <a:solidFill>
+                  <a:srgbClr val="55555B"/>
+                </a:solidFill>
+              </a:rPr>
+              <a:t>−0.02</a:t>
+            </a:r>
+            <a:endParaRPr lang="en-US" sz="2400" dirty="0"/>
+          </a:p>
+        </p:txBody>
+      </p:sp>
+      <p:sp>
+        <p:nvSpPr>
+          <p:cNvPr id="21" name="Text 17"/>
+          <p:cNvSpPr txBox="1"/>
+          <p:nvPr/>
+        </p:nvSpPr>
+        <p:spPr>
+          <a:xfrm>
+            <a:off x="7955280" y="5257800"/>
+            <a:ext cx="3566160" cy="274320"/>
+          </a:xfrm>
+          <a:prstGeom prst="rect">
+            <a:avLst/>
+          </a:prstGeom>
+          <a:noFill/>
+          <a:ln/>
+        </p:spPr>
+        <p:txBody>
+          <a:bodyPr wrap="square" lIns="0" tIns="0" rIns="0" bIns="0" rtlCol="0" anchor="ctr"/>
+          <a:lstStyle/>
+          <a:p>
+            <a:pPr indent="0" marL="0">
+              <a:buNone/>
+            </a:pPr>
+            <a:r>
+              <a:rPr lang="en-US" sz="1200" dirty="0">
+                <a:solidFill>
+                  <a:srgbClr val="55555B"/>
+                </a:solidFill>
+              </a:rPr>
+              <a:t>95% CI [−0.21, +0.17]</a:t>
+            </a:r>
+            <a:endParaRPr lang="en-US" sz="1200" dirty="0"/>
+          </a:p>
+        </p:txBody>
+      </p:sp>
+      <p:sp>
+        <p:nvSpPr>
+          <p:cNvPr id="22" name="Text 18"/>
+          <p:cNvSpPr txBox="1"/>
+          <p:nvPr/>
+        </p:nvSpPr>
+        <p:spPr>
+          <a:xfrm>
+            <a:off x="7955280" y="5513832"/>
+            <a:ext cx="3566160" cy="274320"/>
+          </a:xfrm>
+          <a:prstGeom prst="rect">
+            <a:avLst/>
+          </a:prstGeom>
+          <a:noFill/>
+          <a:ln/>
+        </p:spPr>
+        <p:txBody>
+          <a:bodyPr wrap="square" lIns="0" tIns="0" rIns="0" bIns="0" rtlCol="0" anchor="ctr"/>
+          <a:lstStyle/>
+          <a:p>
+            <a:pPr indent="0" marL="0">
+              <a:buNone/>
+            </a:pPr>
+            <a:r>
+              <a:rPr lang="en-US" sz="1300" b="1" dirty="0">
+                <a:solidFill>
+                  <a:srgbClr val="55555B"/>
+                </a:solidFill>
+              </a:rPr>
+              <a:t>no effect detected</a:t>
+            </a:r>
+            <a:endParaRPr lang="en-US" sz="1300" dirty="0"/>
+          </a:p>
+        </p:txBody>
+      </p:sp>
+      <p:sp>
+        <p:nvSpPr>
+          <p:cNvPr id="25" name="Slide Number Placeholder 0"/>
+          <p:cNvSpPr>
+            <a:spLocks noGrp="1"/>
+          </p:cNvSpPr>
+          <p:nvPr>
+            <p:ph type="sldNum" sz="quarter" idx="4294967295"/>
+          </p:nvPr>
+        </p:nvSpPr>
+        <p:spPr>
+          <a:xfrm>
+            <a:off x="10725912" y="6419088"/>
+            <a:ext cx="914400" cy="274320"/>
+          </a:xfrm>
+          <a:prstGeom prst="rect">
+            <a:avLst/>
+          </a:prstGeom>
+          <a:extLst>
+            <a:ext uri="{C572A759-6A51-4108-AA02-DFA0A04FC94B}">
+              <ma14:wrappingTextBoxFlag xmlns:ma14="http://schemas.microsoft.com/office/mac/drawingml/2011/main" val="0"/>
+            </a:ext>
+          </a:extLst>
+        </p:spPr>
+        <p:txBody>
+          <a:bodyPr/>
+          <a:lstStyle>
+            <a:lvl1pPr>
+              <a:defRPr sz="1100">
+                <a:solidFill>
+                  <a:srgbClr val="55555B"/>
+                </a:solidFill>
+                <a:latin typeface="Calibri"/>
+                <a:ea typeface="Calibri"/>
+                <a:cs typeface="Calibri"/>
+              </a:defRPr>
+            </a:lvl1pPr>
+          </a:lstStyle>
+          <a:p>
+            <a:pPr algn="r"/>
+            <a:fld id="{F7021451-1387-4CA6-816F-3879F97B5CBC}" type="slidenum">
+              <a:rPr b="0" lang="en-US"/>
+              <a:t>10</a:t>
+            </a:fld>
+            <a:endParaRPr lang="en-US"/>
+          </a:p>
+        </p:txBody>
+      </p:sp>
+    </p:spTree>
+  </p:cSld>
+  <p:clrMapOvr>
+    <a:masterClrMapping/>
+  </p:clrMapOvr>
+</p:sld>
+</file>
+
+<file path=ppt/slides/slide11.xml><?xml version="1.0" encoding="utf-8"?>
+<p:sld xmlns:a="http://schemas.openxmlformats.org/drawingml/2006/main" xmlns:r="http://schemas.openxmlformats.org/officeDocument/2006/relationships" xmlns:p="http://schemas.openxmlformats.org/presentationml/2006/main">
+  <p:cSld name="Slide 11">
+    <p:spTree>
+      <p:nvGrpSpPr>
+        <p:cNvPr id="1" name=""/>
+        <p:cNvGrpSpPr/>
+        <p:nvPr/>
+      </p:nvGrpSpPr>
+      <p:grpSpPr>
+        <a:xfrm>
+          <a:off x="0" y="0"/>
+          <a:ext cx="0" cy="0"/>
+          <a:chOff x="0" y="0"/>
+          <a:chExt cx="0" cy="0"/>
+        </a:xfrm>
+      </p:grpSpPr>
+      <p:sp>
+        <p:nvSpPr>
+          <p:cNvPr id="2" name="Text 0"/>
+          <p:cNvSpPr txBox="1"/>
+          <p:nvPr/>
+        </p:nvSpPr>
+        <p:spPr>
+          <a:xfrm>
+            <a:off x="548640" y="365760"/>
+            <a:ext cx="11091672" cy="274320"/>
+          </a:xfrm>
+          <a:prstGeom prst="rect">
+            <a:avLst/>
+          </a:prstGeom>
+          <a:noFill/>
+          <a:ln/>
+        </p:spPr>
+        <p:txBody>
+          <a:bodyPr wrap="square" lIns="0" tIns="0" rIns="0" bIns="0" rtlCol="0" anchor="ctr"/>
+          <a:lstStyle/>
+          <a:p>
+            <a:pPr indent="0" marL="0">
+              <a:buNone/>
+            </a:pPr>
+            <a:r>
+              <a:rPr lang="en-US" sz="1200" b="1" spc="200" kern="0" dirty="0">
+                <a:solidFill>
+                  <a:srgbClr val="0071E3"/>
+                </a:solidFill>
+              </a:rPr>
+              <a:t>RESULTS AND INTERPRETATION</a:t>
+            </a:r>
+            <a:endParaRPr lang="en-US" sz="1200" dirty="0"/>
+          </a:p>
+        </p:txBody>
+      </p:sp>
+      <p:sp>
+        <p:nvSpPr>
+          <p:cNvPr id="3" name="Text 1"/>
+          <p:cNvSpPr txBox="1"/>
+          <p:nvPr/>
+        </p:nvSpPr>
+        <p:spPr>
+          <a:xfrm>
+            <a:off x="548640" y="658368"/>
+            <a:ext cx="11091672" cy="731520"/>
+          </a:xfrm>
+          <a:prstGeom prst="rect">
+            <a:avLst/>
+          </a:prstGeom>
+          <a:noFill/>
+          <a:ln/>
+        </p:spPr>
+        <p:txBody>
+          <a:bodyPr wrap="square" lIns="0" tIns="0" rIns="0" bIns="0" rtlCol="0" anchor="ctr"/>
+          <a:lstStyle/>
+          <a:p>
+            <a:pPr indent="0" marL="0">
+              <a:buNone/>
+            </a:pPr>
+            <a:r>
+              <a:rPr lang="en-US" sz="3600" b="1" dirty="0">
+                <a:solidFill>
+                  <a:srgbClr val="1D1D1F"/>
+                </a:solidFill>
+              </a:rPr>
+              <a:t>What the numbers mean</a:t>
+            </a:r>
+            <a:endParaRPr lang="en-US" sz="3600" dirty="0"/>
+          </a:p>
+        </p:txBody>
+      </p:sp>
+      <p:graphicFrame>
+        <p:nvGraphicFramePr>
+          <p:cNvPr id="12" name="Table 0"/>
           <p:cNvGraphicFramePr>
             <a:graphicFrameLocks noGrp="1"/>
           </p:cNvGraphicFramePr>
@@ -6617,7 +7452,7 @@
             <a:pPr algn="r"/>
             <a:fld id="{F7021451-1387-4CA6-816F-3879F97B5CBC}" type="slidenum">
               <a:rPr b="0" lang="en-US"/>
-              <a:t>10</a:t>
+              <a:t>11</a:t>
             </a:fld>
             <a:endParaRPr lang="en-US"/>
           </a:p>
@@ -6631,9 +7466,9 @@
 </p:sld>
 </file>
 
-<file path=ppt/slides/slide11.xml><?xml version="1.0" encoding="utf-8"?>
+<file path=ppt/slides/slide12.xml><?xml version="1.0" encoding="utf-8"?>
 <p:sld xmlns:a="http://schemas.openxmlformats.org/drawingml/2006/main" xmlns:r="http://schemas.openxmlformats.org/officeDocument/2006/relationships" xmlns:p="http://schemas.openxmlformats.org/presentationml/2006/main">
-  <p:cSld name="Slide 11">
+  <p:cSld name="Slide 12">
     <p:spTree>
       <p:nvGrpSpPr>
         <p:cNvPr id="1" name=""/>
@@ -6722,7 +7557,7 @@
       </p:sp>
       <p:graphicFrame>
         <p:nvGraphicFramePr>
-          <p:cNvPr id="12" name="Table 0"/>
+          <p:cNvPr id="13" name="Table 0"/>
           <p:cNvGraphicFramePr>
             <a:graphicFrameLocks noGrp="1"/>
           </p:cNvGraphicFramePr>
@@ -10134,7 +10969,7 @@
                   <a:srgbClr val="55555B"/>
                 </a:solidFill>
               </a:rPr>
-              <a:t>Hallucination rate: llama2 29%, codellama 20%, starcoder2 54%. Median latency: 8.3 s, 16.1 s, 1.4 s. Tokens out: 90, 193, 44.</a:t>
+              <a:t>Hallucination rate: llama2 31%, codellama 22%, starcoder2 59%. Median latency: 8.3 s, 16.1 s, 1.4 s (means 12.0, 14.5, 2.3). Tokens out (median): 90, 193, 44. Live in Grafana.</a:t>
             </a:r>
             <a:endParaRPr lang="en-US" sz="1300" dirty="0"/>
           </a:p>
@@ -10288,7 +11123,7 @@
             <a:pPr algn="r"/>
             <a:fld id="{F7021451-1387-4CA6-816F-3879F97B5CBC}" type="slidenum">
               <a:rPr b="0" lang="en-US"/>
-              <a:t>11</a:t>
+              <a:t>12</a:t>
             </a:fld>
             <a:endParaRPr lang="en-US"/>
           </a:p>
@@ -10302,9 +11137,9 @@
 </p:sld>
 </file>
 
-<file path=ppt/slides/slide12.xml><?xml version="1.0" encoding="utf-8"?>
+<file path=ppt/slides/slide13.xml><?xml version="1.0" encoding="utf-8"?>
 <p:sld xmlns:a="http://schemas.openxmlformats.org/drawingml/2006/main" xmlns:r="http://schemas.openxmlformats.org/officeDocument/2006/relationships" xmlns:p="http://schemas.openxmlformats.org/presentationml/2006/main">
-  <p:cSld name="Slide 12">
+  <p:cSld name="Slide 13">
     <p:spTree>
       <p:nvGrpSpPr>
         <p:cNvPr id="1" name=""/>
@@ -10393,7 +11228,7 @@
       </p:sp>
       <p:graphicFrame>
         <p:nvGraphicFramePr>
-          <p:cNvPr id="13" name="Table 0"/>
+          <p:cNvPr id="14" name="Table 0"/>
           <p:cNvGraphicFramePr>
             <a:graphicFrameLocks noGrp="1"/>
           </p:cNvGraphicFramePr>
@@ -11906,1065 +12741,6 @@
             <a:pPr algn="r"/>
             <a:fld id="{F7021451-1387-4CA6-816F-3879F97B5CBC}" type="slidenum">
               <a:rPr b="0" lang="en-US"/>
-              <a:t>12</a:t>
-            </a:fld>
-            <a:endParaRPr lang="en-US"/>
-          </a:p>
-        </p:txBody>
-      </p:sp>
-    </p:spTree>
-  </p:cSld>
-  <p:clrMapOvr>
-    <a:masterClrMapping/>
-  </p:clrMapOvr>
-</p:sld>
-</file>
-
-<file path=ppt/slides/slide13.xml><?xml version="1.0" encoding="utf-8"?>
-<p:sld xmlns:a="http://schemas.openxmlformats.org/drawingml/2006/main" xmlns:r="http://schemas.openxmlformats.org/officeDocument/2006/relationships" xmlns:p="http://schemas.openxmlformats.org/presentationml/2006/main">
-  <p:cSld name="Slide 13">
-    <p:spTree>
-      <p:nvGrpSpPr>
-        <p:cNvPr id="1" name=""/>
-        <p:cNvGrpSpPr/>
-        <p:nvPr/>
-      </p:nvGrpSpPr>
-      <p:grpSpPr>
-        <a:xfrm>
-          <a:off x="0" y="0"/>
-          <a:ext cx="0" cy="0"/>
-          <a:chOff x="0" y="0"/>
-          <a:chExt cx="0" cy="0"/>
-        </a:xfrm>
-      </p:grpSpPr>
-      <p:sp>
-        <p:nvSpPr>
-          <p:cNvPr id="2" name="Text 0"/>
-          <p:cNvSpPr txBox="1"/>
-          <p:nvPr/>
-        </p:nvSpPr>
-        <p:spPr>
-          <a:xfrm>
-            <a:off x="548640" y="365760"/>
-            <a:ext cx="11091672" cy="274320"/>
-          </a:xfrm>
-          <a:prstGeom prst="rect">
-            <a:avLst/>
-          </a:prstGeom>
-          <a:noFill/>
-          <a:ln/>
-        </p:spPr>
-        <p:txBody>
-          <a:bodyPr wrap="square" lIns="0" tIns="0" rIns="0" bIns="0" rtlCol="0" anchor="ctr"/>
-          <a:lstStyle/>
-          <a:p>
-            <a:pPr indent="0" marL="0">
-              <a:buNone/>
-            </a:pPr>
-            <a:r>
-              <a:rPr lang="en-US" sz="1200" b="1" spc="200" kern="0" dirty="0">
-                <a:solidFill>
-                  <a:srgbClr val="0071E3"/>
-                </a:solidFill>
-              </a:rPr>
-              <a:t>LIVE SYSTEM</a:t>
-            </a:r>
-            <a:endParaRPr lang="en-US" sz="1200" dirty="0"/>
-          </a:p>
-        </p:txBody>
-      </p:sp>
-      <p:sp>
-        <p:nvSpPr>
-          <p:cNvPr id="3" name="Text 1"/>
-          <p:cNvSpPr txBox="1"/>
-          <p:nvPr/>
-        </p:nvSpPr>
-        <p:spPr>
-          <a:xfrm>
-            <a:off x="548640" y="658368"/>
-            <a:ext cx="11091672" cy="731520"/>
-          </a:xfrm>
-          <a:prstGeom prst="rect">
-            <a:avLst/>
-          </a:prstGeom>
-          <a:noFill/>
-          <a:ln/>
-        </p:spPr>
-        <p:txBody>
-          <a:bodyPr wrap="square" lIns="0" tIns="0" rIns="0" bIns="0" rtlCol="0" anchor="ctr"/>
-          <a:lstStyle/>
-          <a:p>
-            <a:pPr indent="0" marL="0">
-              <a:buNone/>
-            </a:pPr>
-            <a:r>
-              <a:rPr lang="en-US" sz="3600" b="1" dirty="0">
-                <a:solidFill>
-                  <a:srgbClr val="1D1D1F"/>
-                </a:solidFill>
-              </a:rPr>
-              <a:t>The running stack</a:t>
-            </a:r>
-            <a:endParaRPr lang="en-US" sz="3600" dirty="0"/>
-          </a:p>
-        </p:txBody>
-      </p:sp>
-      <p:sp>
-        <p:nvSpPr>
-          <p:cNvPr id="4" name="Text 2"/>
-          <p:cNvSpPr txBox="1"/>
-          <p:nvPr/>
-        </p:nvSpPr>
-        <p:spPr>
-          <a:xfrm>
-            <a:off x="548640" y="1371600"/>
-            <a:ext cx="11091672" cy="548640"/>
-          </a:xfrm>
-          <a:prstGeom prst="rect">
-            <a:avLst/>
-          </a:prstGeom>
-          <a:noFill/>
-          <a:ln/>
-        </p:spPr>
-        <p:txBody>
-          <a:bodyPr wrap="square" lIns="0" tIns="0" rIns="0" bIns="0" rtlCol="0" anchor="t"/>
-          <a:lstStyle/>
-          <a:p>
-            <a:pPr indent="0" marL="0">
-              <a:buNone/>
-            </a:pPr>
-            <a:r>
-              <a:rPr lang="en-US" sz="1600" dirty="0">
-                <a:solidFill>
-                  <a:srgbClr val="55555B"/>
-                </a:solidFill>
-              </a:rPr>
-              <a:t>Shown live from the website during the talk (health is checked through the gateway every few seconds).</a:t>
-            </a:r>
-            <a:endParaRPr lang="en-US" sz="1600" dirty="0"/>
-          </a:p>
-        </p:txBody>
-      </p:sp>
-      <p:sp>
-        <p:nvSpPr>
-          <p:cNvPr id="6" name="Shape 3"/>
-          <p:cNvSpPr/>
-          <p:nvPr/>
-        </p:nvSpPr>
-        <p:spPr>
-          <a:xfrm>
-            <a:off x="548640" y="2194560"/>
-            <a:ext cx="3514344" cy="731520"/>
-          </a:xfrm>
-          <a:prstGeom prst="roundRect">
-            <a:avLst>
-              <a:gd name="adj" fmla="val 12500"/>
-            </a:avLst>
-          </a:prstGeom>
-          <a:solidFill>
-            <a:srgbClr val="FFFFFF"/>
-          </a:solidFill>
-          <a:ln w="9525">
-            <a:solidFill>
-              <a:srgbClr val="D9D9DE"/>
-            </a:solidFill>
-            <a:prstDash val="solid"/>
-          </a:ln>
-        </p:spPr>
-      </p:sp>
-      <p:sp>
-        <p:nvSpPr>
-          <p:cNvPr id="7" name="Shape 4"/>
-          <p:cNvSpPr/>
-          <p:nvPr/>
-        </p:nvSpPr>
-        <p:spPr>
-          <a:xfrm>
-            <a:off x="777240" y="2441448"/>
-            <a:ext cx="237744" cy="237744"/>
-          </a:xfrm>
-          <a:prstGeom prst="ellipse">
-            <a:avLst/>
-          </a:prstGeom>
-          <a:solidFill>
-            <a:srgbClr val="1E9E6A"/>
-          </a:solidFill>
-          <a:ln w="12700">
-            <a:solidFill>
-              <a:srgbClr val="1E9E6A"/>
-            </a:solidFill>
-            <a:prstDash val="solid"/>
-          </a:ln>
-        </p:spPr>
-      </p:sp>
-      <p:sp>
-        <p:nvSpPr>
-          <p:cNvPr id="8" name="Text 5"/>
-          <p:cNvSpPr txBox="1"/>
-          <p:nvPr/>
-        </p:nvSpPr>
-        <p:spPr>
-          <a:xfrm>
-            <a:off x="1188720" y="2194560"/>
-            <a:ext cx="1685544" cy="731520"/>
-          </a:xfrm>
-          <a:prstGeom prst="rect">
-            <a:avLst/>
-          </a:prstGeom>
-          <a:noFill/>
-          <a:ln/>
-        </p:spPr>
-        <p:txBody>
-          <a:bodyPr wrap="square" lIns="0" tIns="0" rIns="0" bIns="0" rtlCol="0" anchor="ctr"/>
-          <a:lstStyle/>
-          <a:p>
-            <a:pPr indent="0" marL="0">
-              <a:buNone/>
-            </a:pPr>
-            <a:r>
-              <a:rPr lang="en-US" sz="1800" dirty="0">
-                <a:solidFill>
-                  <a:srgbClr val="1D1D1F"/>
-                </a:solidFill>
-              </a:rPr>
-              <a:t>Gateway</a:t>
-            </a:r>
-            <a:endParaRPr lang="en-US" sz="1800" dirty="0"/>
-          </a:p>
-        </p:txBody>
-      </p:sp>
-      <p:sp>
-        <p:nvSpPr>
-          <p:cNvPr id="9" name="Text 6"/>
-          <p:cNvSpPr txBox="1"/>
-          <p:nvPr/>
-        </p:nvSpPr>
-        <p:spPr>
-          <a:xfrm>
-            <a:off x="2874264" y="2194560"/>
-            <a:ext cx="1005840" cy="731520"/>
-          </a:xfrm>
-          <a:prstGeom prst="rect">
-            <a:avLst/>
-          </a:prstGeom>
-          <a:noFill/>
-          <a:ln/>
-        </p:spPr>
-        <p:txBody>
-          <a:bodyPr wrap="square" lIns="0" tIns="0" rIns="0" bIns="0" rtlCol="0" anchor="ctr"/>
-          <a:lstStyle/>
-          <a:p>
-            <a:pPr algn="r" indent="0" marL="0">
-              <a:buNone/>
-            </a:pPr>
-            <a:r>
-              <a:rPr lang="en-US" sz="1300" dirty="0">
-                <a:solidFill>
-                  <a:srgbClr val="55555B"/>
-                </a:solidFill>
-              </a:rPr>
-              <a:t>healthy</a:t>
-            </a:r>
-            <a:endParaRPr lang="en-US" sz="1300" dirty="0"/>
-          </a:p>
-        </p:txBody>
-      </p:sp>
-      <p:sp>
-        <p:nvSpPr>
-          <p:cNvPr id="10" name="Shape 7"/>
-          <p:cNvSpPr/>
-          <p:nvPr/>
-        </p:nvSpPr>
-        <p:spPr>
-          <a:xfrm>
-            <a:off x="4337304" y="2194560"/>
-            <a:ext cx="3514344" cy="731520"/>
-          </a:xfrm>
-          <a:prstGeom prst="roundRect">
-            <a:avLst>
-              <a:gd name="adj" fmla="val 12500"/>
-            </a:avLst>
-          </a:prstGeom>
-          <a:solidFill>
-            <a:srgbClr val="FFFFFF"/>
-          </a:solidFill>
-          <a:ln w="9525">
-            <a:solidFill>
-              <a:srgbClr val="D9D9DE"/>
-            </a:solidFill>
-            <a:prstDash val="solid"/>
-          </a:ln>
-        </p:spPr>
-      </p:sp>
-      <p:sp>
-        <p:nvSpPr>
-          <p:cNvPr id="11" name="Shape 8"/>
-          <p:cNvSpPr/>
-          <p:nvPr/>
-        </p:nvSpPr>
-        <p:spPr>
-          <a:xfrm>
-            <a:off x="4565904" y="2441448"/>
-            <a:ext cx="237744" cy="237744"/>
-          </a:xfrm>
-          <a:prstGeom prst="ellipse">
-            <a:avLst/>
-          </a:prstGeom>
-          <a:solidFill>
-            <a:srgbClr val="1E9E6A"/>
-          </a:solidFill>
-          <a:ln w="12700">
-            <a:solidFill>
-              <a:srgbClr val="1E9E6A"/>
-            </a:solidFill>
-            <a:prstDash val="solid"/>
-          </a:ln>
-        </p:spPr>
-      </p:sp>
-      <p:sp>
-        <p:nvSpPr>
-          <p:cNvPr id="12" name="Text 9"/>
-          <p:cNvSpPr txBox="1"/>
-          <p:nvPr/>
-        </p:nvSpPr>
-        <p:spPr>
-          <a:xfrm>
-            <a:off x="4977384" y="2194560"/>
-            <a:ext cx="1685544" cy="731520"/>
-          </a:xfrm>
-          <a:prstGeom prst="rect">
-            <a:avLst/>
-          </a:prstGeom>
-          <a:noFill/>
-          <a:ln/>
-        </p:spPr>
-        <p:txBody>
-          <a:bodyPr wrap="square" lIns="0" tIns="0" rIns="0" bIns="0" rtlCol="0" anchor="ctr"/>
-          <a:lstStyle/>
-          <a:p>
-            <a:pPr indent="0" marL="0">
-              <a:buNone/>
-            </a:pPr>
-            <a:r>
-              <a:rPr lang="en-US" sz="1800" dirty="0">
-                <a:solidFill>
-                  <a:srgbClr val="1D1D1F"/>
-                </a:solidFill>
-              </a:rPr>
-              <a:t>Ingest</a:t>
-            </a:r>
-            <a:endParaRPr lang="en-US" sz="1800" dirty="0"/>
-          </a:p>
-        </p:txBody>
-      </p:sp>
-      <p:sp>
-        <p:nvSpPr>
-          <p:cNvPr id="13" name="Text 10"/>
-          <p:cNvSpPr txBox="1"/>
-          <p:nvPr/>
-        </p:nvSpPr>
-        <p:spPr>
-          <a:xfrm>
-            <a:off x="6662928" y="2194560"/>
-            <a:ext cx="1005840" cy="731520"/>
-          </a:xfrm>
-          <a:prstGeom prst="rect">
-            <a:avLst/>
-          </a:prstGeom>
-          <a:noFill/>
-          <a:ln/>
-        </p:spPr>
-        <p:txBody>
-          <a:bodyPr wrap="square" lIns="0" tIns="0" rIns="0" bIns="0" rtlCol="0" anchor="ctr"/>
-          <a:lstStyle/>
-          <a:p>
-            <a:pPr algn="r" indent="0" marL="0">
-              <a:buNone/>
-            </a:pPr>
-            <a:r>
-              <a:rPr lang="en-US" sz="1300" dirty="0">
-                <a:solidFill>
-                  <a:srgbClr val="55555B"/>
-                </a:solidFill>
-              </a:rPr>
-              <a:t>healthy</a:t>
-            </a:r>
-            <a:endParaRPr lang="en-US" sz="1300" dirty="0"/>
-          </a:p>
-        </p:txBody>
-      </p:sp>
-      <p:sp>
-        <p:nvSpPr>
-          <p:cNvPr id="14" name="Shape 11"/>
-          <p:cNvSpPr/>
-          <p:nvPr/>
-        </p:nvSpPr>
-        <p:spPr>
-          <a:xfrm>
-            <a:off x="8125968" y="2194560"/>
-            <a:ext cx="3514344" cy="731520"/>
-          </a:xfrm>
-          <a:prstGeom prst="roundRect">
-            <a:avLst>
-              <a:gd name="adj" fmla="val 12500"/>
-            </a:avLst>
-          </a:prstGeom>
-          <a:solidFill>
-            <a:srgbClr val="FFFFFF"/>
-          </a:solidFill>
-          <a:ln w="9525">
-            <a:solidFill>
-              <a:srgbClr val="D9D9DE"/>
-            </a:solidFill>
-            <a:prstDash val="solid"/>
-          </a:ln>
-        </p:spPr>
-      </p:sp>
-      <p:sp>
-        <p:nvSpPr>
-          <p:cNvPr id="15" name="Shape 12"/>
-          <p:cNvSpPr/>
-          <p:nvPr/>
-        </p:nvSpPr>
-        <p:spPr>
-          <a:xfrm>
-            <a:off x="8354568" y="2441448"/>
-            <a:ext cx="237744" cy="237744"/>
-          </a:xfrm>
-          <a:prstGeom prst="ellipse">
-            <a:avLst/>
-          </a:prstGeom>
-          <a:solidFill>
-            <a:srgbClr val="1E9E6A"/>
-          </a:solidFill>
-          <a:ln w="12700">
-            <a:solidFill>
-              <a:srgbClr val="1E9E6A"/>
-            </a:solidFill>
-            <a:prstDash val="solid"/>
-          </a:ln>
-        </p:spPr>
-      </p:sp>
-      <p:sp>
-        <p:nvSpPr>
-          <p:cNvPr id="16" name="Text 13"/>
-          <p:cNvSpPr txBox="1"/>
-          <p:nvPr/>
-        </p:nvSpPr>
-        <p:spPr>
-          <a:xfrm>
-            <a:off x="8766048" y="2194560"/>
-            <a:ext cx="1685544" cy="731520"/>
-          </a:xfrm>
-          <a:prstGeom prst="rect">
-            <a:avLst/>
-          </a:prstGeom>
-          <a:noFill/>
-          <a:ln/>
-        </p:spPr>
-        <p:txBody>
-          <a:bodyPr wrap="square" lIns="0" tIns="0" rIns="0" bIns="0" rtlCol="0" anchor="ctr"/>
-          <a:lstStyle/>
-          <a:p>
-            <a:pPr indent="0" marL="0">
-              <a:buNone/>
-            </a:pPr>
-            <a:r>
-              <a:rPr lang="en-US" sz="1800" dirty="0">
-                <a:solidFill>
-                  <a:srgbClr val="1D1D1F"/>
-                </a:solidFill>
-              </a:rPr>
-              <a:t>Rag</a:t>
-            </a:r>
-            <a:endParaRPr lang="en-US" sz="1800" dirty="0"/>
-          </a:p>
-        </p:txBody>
-      </p:sp>
-      <p:sp>
-        <p:nvSpPr>
-          <p:cNvPr id="17" name="Text 14"/>
-          <p:cNvSpPr txBox="1"/>
-          <p:nvPr/>
-        </p:nvSpPr>
-        <p:spPr>
-          <a:xfrm>
-            <a:off x="10451592" y="2194560"/>
-            <a:ext cx="1005840" cy="731520"/>
-          </a:xfrm>
-          <a:prstGeom prst="rect">
-            <a:avLst/>
-          </a:prstGeom>
-          <a:noFill/>
-          <a:ln/>
-        </p:spPr>
-        <p:txBody>
-          <a:bodyPr wrap="square" lIns="0" tIns="0" rIns="0" bIns="0" rtlCol="0" anchor="ctr"/>
-          <a:lstStyle/>
-          <a:p>
-            <a:pPr algn="r" indent="0" marL="0">
-              <a:buNone/>
-            </a:pPr>
-            <a:r>
-              <a:rPr lang="en-US" sz="1300" dirty="0">
-                <a:solidFill>
-                  <a:srgbClr val="55555B"/>
-                </a:solidFill>
-              </a:rPr>
-              <a:t>healthy</a:t>
-            </a:r>
-            <a:endParaRPr lang="en-US" sz="1300" dirty="0"/>
-          </a:p>
-        </p:txBody>
-      </p:sp>
-      <p:sp>
-        <p:nvSpPr>
-          <p:cNvPr id="18" name="Shape 15"/>
-          <p:cNvSpPr/>
-          <p:nvPr/>
-        </p:nvSpPr>
-        <p:spPr>
-          <a:xfrm>
-            <a:off x="548640" y="3154680"/>
-            <a:ext cx="3514344" cy="731520"/>
-          </a:xfrm>
-          <a:prstGeom prst="roundRect">
-            <a:avLst>
-              <a:gd name="adj" fmla="val 12500"/>
-            </a:avLst>
-          </a:prstGeom>
-          <a:solidFill>
-            <a:srgbClr val="FFFFFF"/>
-          </a:solidFill>
-          <a:ln w="9525">
-            <a:solidFill>
-              <a:srgbClr val="D9D9DE"/>
-            </a:solidFill>
-            <a:prstDash val="solid"/>
-          </a:ln>
-        </p:spPr>
-      </p:sp>
-      <p:sp>
-        <p:nvSpPr>
-          <p:cNvPr id="19" name="Shape 16"/>
-          <p:cNvSpPr/>
-          <p:nvPr/>
-        </p:nvSpPr>
-        <p:spPr>
-          <a:xfrm>
-            <a:off x="777240" y="3401568"/>
-            <a:ext cx="237744" cy="237744"/>
-          </a:xfrm>
-          <a:prstGeom prst="ellipse">
-            <a:avLst/>
-          </a:prstGeom>
-          <a:solidFill>
-            <a:srgbClr val="1E9E6A"/>
-          </a:solidFill>
-          <a:ln w="12700">
-            <a:solidFill>
-              <a:srgbClr val="1E9E6A"/>
-            </a:solidFill>
-            <a:prstDash val="solid"/>
-          </a:ln>
-        </p:spPr>
-      </p:sp>
-      <p:sp>
-        <p:nvSpPr>
-          <p:cNvPr id="20" name="Text 17"/>
-          <p:cNvSpPr txBox="1"/>
-          <p:nvPr/>
-        </p:nvSpPr>
-        <p:spPr>
-          <a:xfrm>
-            <a:off x="1188720" y="3154680"/>
-            <a:ext cx="1685544" cy="731520"/>
-          </a:xfrm>
-          <a:prstGeom prst="rect">
-            <a:avLst/>
-          </a:prstGeom>
-          <a:noFill/>
-          <a:ln/>
-        </p:spPr>
-        <p:txBody>
-          <a:bodyPr wrap="square" lIns="0" tIns="0" rIns="0" bIns="0" rtlCol="0" anchor="ctr"/>
-          <a:lstStyle/>
-          <a:p>
-            <a:pPr indent="0" marL="0">
-              <a:buNone/>
-            </a:pPr>
-            <a:r>
-              <a:rPr lang="en-US" sz="1800" dirty="0">
-                <a:solidFill>
-                  <a:srgbClr val="1D1D1F"/>
-                </a:solidFill>
-              </a:rPr>
-              <a:t>Llm</a:t>
-            </a:r>
-            <a:endParaRPr lang="en-US" sz="1800" dirty="0"/>
-          </a:p>
-        </p:txBody>
-      </p:sp>
-      <p:sp>
-        <p:nvSpPr>
-          <p:cNvPr id="21" name="Text 18"/>
-          <p:cNvSpPr txBox="1"/>
-          <p:nvPr/>
-        </p:nvSpPr>
-        <p:spPr>
-          <a:xfrm>
-            <a:off x="2874264" y="3154680"/>
-            <a:ext cx="1005840" cy="731520"/>
-          </a:xfrm>
-          <a:prstGeom prst="rect">
-            <a:avLst/>
-          </a:prstGeom>
-          <a:noFill/>
-          <a:ln/>
-        </p:spPr>
-        <p:txBody>
-          <a:bodyPr wrap="square" lIns="0" tIns="0" rIns="0" bIns="0" rtlCol="0" anchor="ctr"/>
-          <a:lstStyle/>
-          <a:p>
-            <a:pPr algn="r" indent="0" marL="0">
-              <a:buNone/>
-            </a:pPr>
-            <a:r>
-              <a:rPr lang="en-US" sz="1300" dirty="0">
-                <a:solidFill>
-                  <a:srgbClr val="55555B"/>
-                </a:solidFill>
-              </a:rPr>
-              <a:t>healthy</a:t>
-            </a:r>
-            <a:endParaRPr lang="en-US" sz="1300" dirty="0"/>
-          </a:p>
-        </p:txBody>
-      </p:sp>
-      <p:sp>
-        <p:nvSpPr>
-          <p:cNvPr id="22" name="Shape 19"/>
-          <p:cNvSpPr/>
-          <p:nvPr/>
-        </p:nvSpPr>
-        <p:spPr>
-          <a:xfrm>
-            <a:off x="4337304" y="3154680"/>
-            <a:ext cx="3514344" cy="731520"/>
-          </a:xfrm>
-          <a:prstGeom prst="roundRect">
-            <a:avLst>
-              <a:gd name="adj" fmla="val 12500"/>
-            </a:avLst>
-          </a:prstGeom>
-          <a:solidFill>
-            <a:srgbClr val="FFFFFF"/>
-          </a:solidFill>
-          <a:ln w="9525">
-            <a:solidFill>
-              <a:srgbClr val="D9D9DE"/>
-            </a:solidFill>
-            <a:prstDash val="solid"/>
-          </a:ln>
-        </p:spPr>
-      </p:sp>
-      <p:sp>
-        <p:nvSpPr>
-          <p:cNvPr id="23" name="Shape 20"/>
-          <p:cNvSpPr/>
-          <p:nvPr/>
-        </p:nvSpPr>
-        <p:spPr>
-          <a:xfrm>
-            <a:off x="4565904" y="3401568"/>
-            <a:ext cx="237744" cy="237744"/>
-          </a:xfrm>
-          <a:prstGeom prst="ellipse">
-            <a:avLst/>
-          </a:prstGeom>
-          <a:solidFill>
-            <a:srgbClr val="1E9E6A"/>
-          </a:solidFill>
-          <a:ln w="12700">
-            <a:solidFill>
-              <a:srgbClr val="1E9E6A"/>
-            </a:solidFill>
-            <a:prstDash val="solid"/>
-          </a:ln>
-        </p:spPr>
-      </p:sp>
-      <p:sp>
-        <p:nvSpPr>
-          <p:cNvPr id="24" name="Text 21"/>
-          <p:cNvSpPr txBox="1"/>
-          <p:nvPr/>
-        </p:nvSpPr>
-        <p:spPr>
-          <a:xfrm>
-            <a:off x="4977384" y="3154680"/>
-            <a:ext cx="1685544" cy="731520"/>
-          </a:xfrm>
-          <a:prstGeom prst="rect">
-            <a:avLst/>
-          </a:prstGeom>
-          <a:noFill/>
-          <a:ln/>
-        </p:spPr>
-        <p:txBody>
-          <a:bodyPr wrap="square" lIns="0" tIns="0" rIns="0" bIns="0" rtlCol="0" anchor="ctr"/>
-          <a:lstStyle/>
-          <a:p>
-            <a:pPr indent="0" marL="0">
-              <a:buNone/>
-            </a:pPr>
-            <a:r>
-              <a:rPr lang="en-US" sz="1800" dirty="0">
-                <a:solidFill>
-                  <a:srgbClr val="1D1D1F"/>
-                </a:solidFill>
-              </a:rPr>
-              <a:t>Orchestrator</a:t>
-            </a:r>
-            <a:endParaRPr lang="en-US" sz="1800" dirty="0"/>
-          </a:p>
-        </p:txBody>
-      </p:sp>
-      <p:sp>
-        <p:nvSpPr>
-          <p:cNvPr id="25" name="Text 22"/>
-          <p:cNvSpPr txBox="1"/>
-          <p:nvPr/>
-        </p:nvSpPr>
-        <p:spPr>
-          <a:xfrm>
-            <a:off x="6662928" y="3154680"/>
-            <a:ext cx="1005840" cy="731520"/>
-          </a:xfrm>
-          <a:prstGeom prst="rect">
-            <a:avLst/>
-          </a:prstGeom>
-          <a:noFill/>
-          <a:ln/>
-        </p:spPr>
-        <p:txBody>
-          <a:bodyPr wrap="square" lIns="0" tIns="0" rIns="0" bIns="0" rtlCol="0" anchor="ctr"/>
-          <a:lstStyle/>
-          <a:p>
-            <a:pPr algn="r" indent="0" marL="0">
-              <a:buNone/>
-            </a:pPr>
-            <a:r>
-              <a:rPr lang="en-US" sz="1300" dirty="0">
-                <a:solidFill>
-                  <a:srgbClr val="55555B"/>
-                </a:solidFill>
-              </a:rPr>
-              <a:t>healthy</a:t>
-            </a:r>
-            <a:endParaRPr lang="en-US" sz="1300" dirty="0"/>
-          </a:p>
-        </p:txBody>
-      </p:sp>
-      <p:sp>
-        <p:nvSpPr>
-          <p:cNvPr id="26" name="Shape 23"/>
-          <p:cNvSpPr/>
-          <p:nvPr/>
-        </p:nvSpPr>
-        <p:spPr>
-          <a:xfrm>
-            <a:off x="8125968" y="3154680"/>
-            <a:ext cx="3514344" cy="731520"/>
-          </a:xfrm>
-          <a:prstGeom prst="roundRect">
-            <a:avLst>
-              <a:gd name="adj" fmla="val 12500"/>
-            </a:avLst>
-          </a:prstGeom>
-          <a:solidFill>
-            <a:srgbClr val="FFFFFF"/>
-          </a:solidFill>
-          <a:ln w="9525">
-            <a:solidFill>
-              <a:srgbClr val="D9D9DE"/>
-            </a:solidFill>
-            <a:prstDash val="solid"/>
-          </a:ln>
-        </p:spPr>
-      </p:sp>
-      <p:sp>
-        <p:nvSpPr>
-          <p:cNvPr id="27" name="Shape 24"/>
-          <p:cNvSpPr/>
-          <p:nvPr/>
-        </p:nvSpPr>
-        <p:spPr>
-          <a:xfrm>
-            <a:off x="8354568" y="3401568"/>
-            <a:ext cx="237744" cy="237744"/>
-          </a:xfrm>
-          <a:prstGeom prst="ellipse">
-            <a:avLst/>
-          </a:prstGeom>
-          <a:solidFill>
-            <a:srgbClr val="1E9E6A"/>
-          </a:solidFill>
-          <a:ln w="12700">
-            <a:solidFill>
-              <a:srgbClr val="1E9E6A"/>
-            </a:solidFill>
-            <a:prstDash val="solid"/>
-          </a:ln>
-        </p:spPr>
-      </p:sp>
-      <p:sp>
-        <p:nvSpPr>
-          <p:cNvPr id="28" name="Text 25"/>
-          <p:cNvSpPr txBox="1"/>
-          <p:nvPr/>
-        </p:nvSpPr>
-        <p:spPr>
-          <a:xfrm>
-            <a:off x="8766048" y="3154680"/>
-            <a:ext cx="1685544" cy="731520"/>
-          </a:xfrm>
-          <a:prstGeom prst="rect">
-            <a:avLst/>
-          </a:prstGeom>
-          <a:noFill/>
-          <a:ln/>
-        </p:spPr>
-        <p:txBody>
-          <a:bodyPr wrap="square" lIns="0" tIns="0" rIns="0" bIns="0" rtlCol="0" anchor="ctr"/>
-          <a:lstStyle/>
-          <a:p>
-            <a:pPr indent="0" marL="0">
-              <a:buNone/>
-            </a:pPr>
-            <a:r>
-              <a:rPr lang="en-US" sz="1800" dirty="0">
-                <a:solidFill>
-                  <a:srgbClr val="1D1D1F"/>
-                </a:solidFill>
-              </a:rPr>
-              <a:t>Eval</a:t>
-            </a:r>
-            <a:endParaRPr lang="en-US" sz="1800" dirty="0"/>
-          </a:p>
-        </p:txBody>
-      </p:sp>
-      <p:sp>
-        <p:nvSpPr>
-          <p:cNvPr id="29" name="Text 26"/>
-          <p:cNvSpPr txBox="1"/>
-          <p:nvPr/>
-        </p:nvSpPr>
-        <p:spPr>
-          <a:xfrm>
-            <a:off x="10451592" y="3154680"/>
-            <a:ext cx="1005840" cy="731520"/>
-          </a:xfrm>
-          <a:prstGeom prst="rect">
-            <a:avLst/>
-          </a:prstGeom>
-          <a:noFill/>
-          <a:ln/>
-        </p:spPr>
-        <p:txBody>
-          <a:bodyPr wrap="square" lIns="0" tIns="0" rIns="0" bIns="0" rtlCol="0" anchor="ctr"/>
-          <a:lstStyle/>
-          <a:p>
-            <a:pPr algn="r" indent="0" marL="0">
-              <a:buNone/>
-            </a:pPr>
-            <a:r>
-              <a:rPr lang="en-US" sz="1300" dirty="0">
-                <a:solidFill>
-                  <a:srgbClr val="55555B"/>
-                </a:solidFill>
-              </a:rPr>
-              <a:t>healthy</a:t>
-            </a:r>
-            <a:endParaRPr lang="en-US" sz="1300" dirty="0"/>
-          </a:p>
-        </p:txBody>
-      </p:sp>
-      <p:sp>
-        <p:nvSpPr>
-          <p:cNvPr id="30" name="Shape 27"/>
-          <p:cNvSpPr/>
-          <p:nvPr/>
-        </p:nvSpPr>
-        <p:spPr>
-          <a:xfrm>
-            <a:off x="548640" y="4160520"/>
-            <a:ext cx="11091672" cy="2011680"/>
-          </a:xfrm>
-          <a:prstGeom prst="roundRect">
-            <a:avLst>
-              <a:gd name="adj" fmla="val 4545"/>
-            </a:avLst>
-          </a:prstGeom>
-          <a:solidFill>
-            <a:srgbClr val="FFFFFF"/>
-          </a:solidFill>
-          <a:ln w="9525">
-            <a:solidFill>
-              <a:srgbClr val="D9D9DE"/>
-            </a:solidFill>
-            <a:prstDash val="solid"/>
-          </a:ln>
-          <a:effectLst>
-            <a:outerShdw sx="100000" sy="100000" kx="0" ky="0" algn="bl" rotWithShape="0" blurRad="76200" dist="12700" dir="5400000">
-              <a:srgbClr val="000000">
-                <a:alpha val="8000"/>
-              </a:srgbClr>
-            </a:outerShdw>
-          </a:effectLst>
-        </p:spPr>
-      </p:sp>
-      <p:sp>
-        <p:nvSpPr>
-          <p:cNvPr id="31" name="Text 28"/>
-          <p:cNvSpPr txBox="1"/>
-          <p:nvPr/>
-        </p:nvSpPr>
-        <p:spPr>
-          <a:xfrm>
-            <a:off x="731520" y="4297680"/>
-            <a:ext cx="10725912" cy="411480"/>
-          </a:xfrm>
-          <a:prstGeom prst="rect">
-            <a:avLst/>
-          </a:prstGeom>
-          <a:noFill/>
-          <a:ln/>
-        </p:spPr>
-        <p:txBody>
-          <a:bodyPr wrap="square" lIns="0" tIns="0" rIns="0" bIns="0" rtlCol="0" anchor="t"/>
-          <a:lstStyle/>
-          <a:p>
-            <a:pPr indent="0" marL="0">
-              <a:buNone/>
-            </a:pPr>
-            <a:r>
-              <a:rPr lang="en-US" sz="1800" b="1" dirty="0">
-                <a:solidFill>
-                  <a:srgbClr val="1D1D1F"/>
-                </a:solidFill>
-              </a:rPr>
-              <a:t>What to demo</a:t>
-            </a:r>
-            <a:endParaRPr lang="en-US" sz="1800" dirty="0"/>
-          </a:p>
-        </p:txBody>
-      </p:sp>
-      <p:sp>
-        <p:nvSpPr>
-          <p:cNvPr id="32" name="Text 29"/>
-          <p:cNvSpPr txBox="1"/>
-          <p:nvPr/>
-        </p:nvSpPr>
-        <p:spPr>
-          <a:xfrm>
-            <a:off x="731520" y="4709160"/>
-            <a:ext cx="10725912" cy="1353312"/>
-          </a:xfrm>
-          <a:prstGeom prst="rect">
-            <a:avLst/>
-          </a:prstGeom>
-          <a:noFill/>
-          <a:ln/>
-        </p:spPr>
-        <p:txBody>
-          <a:bodyPr wrap="square" lIns="0" tIns="0" rIns="0" bIns="0" rtlCol="0" anchor="t"/>
-          <a:lstStyle/>
-          <a:p>
-            <a:pPr indent="0" marL="0">
-              <a:buNone/>
-            </a:pPr>
-            <a:r>
-              <a:rPr lang="en-US" sz="1500" dirty="0">
-                <a:solidFill>
-                  <a:srgbClr val="1D1D1F"/>
-                </a:solidFill>
-              </a:rPr>
-              <a:t>Ask: "Why does itsdangerous keep SHA-1 as its default digest?" and show the cited answer and the evidence chain.</a:t>
-            </a:r>
-            <a:endParaRPr lang="en-US" sz="1500" dirty="0"/>
-          </a:p>
-          <a:p>
-            <a:pPr indent="0" marL="0">
-              <a:buNone/>
-            </a:pPr>
-            <a:r>
-              <a:rPr lang="en-US" sz="1500" dirty="0">
-                <a:solidFill>
-                  <a:srgbClr val="1D1D1F"/>
-                </a:solidFill>
-              </a:rPr>
-              <a:t>Evaluation page: the held-out run, per-mode leaderboard, and which model is best for what.</a:t>
-            </a:r>
-            <a:endParaRPr lang="en-US" sz="1500" dirty="0"/>
-          </a:p>
-          <a:p>
-            <a:pPr indent="0" marL="0">
-              <a:buNone/>
-            </a:pPr>
-            <a:r>
-              <a:rPr lang="en-US" sz="1500" dirty="0">
-                <a:solidFill>
-                  <a:srgbClr val="1D1D1F"/>
-                </a:solidFill>
-              </a:rPr>
-              <a:t>Repositories page: the three indexed repositories (demo, itsdangerous, Nexus).</a:t>
-            </a:r>
-            <a:endParaRPr lang="en-US" sz="1500" dirty="0"/>
-          </a:p>
-        </p:txBody>
-      </p:sp>
-      <p:sp>
-        <p:nvSpPr>
-          <p:cNvPr id="25" name="Slide Number Placeholder 0"/>
-          <p:cNvSpPr>
-            <a:spLocks noGrp="1"/>
-          </p:cNvSpPr>
-          <p:nvPr>
-            <p:ph type="sldNum" sz="quarter" idx="4294967295"/>
-          </p:nvPr>
-        </p:nvSpPr>
-        <p:spPr>
-          <a:xfrm>
-            <a:off x="10725912" y="6419088"/>
-            <a:ext cx="914400" cy="274320"/>
-          </a:xfrm>
-          <a:prstGeom prst="rect">
-            <a:avLst/>
-          </a:prstGeom>
-          <a:extLst>
-            <a:ext uri="{C572A759-6A51-4108-AA02-DFA0A04FC94B}">
-              <ma14:wrappingTextBoxFlag xmlns:ma14="http://schemas.microsoft.com/office/mac/drawingml/2011/main" val="0"/>
-            </a:ext>
-          </a:extLst>
-        </p:spPr>
-        <p:txBody>
-          <a:bodyPr/>
-          <a:lstStyle>
-            <a:lvl1pPr>
-              <a:defRPr sz="1100">
-                <a:solidFill>
-                  <a:srgbClr val="55555B"/>
-                </a:solidFill>
-                <a:latin typeface="Calibri"/>
-                <a:ea typeface="Calibri"/>
-                <a:cs typeface="Calibri"/>
-              </a:defRPr>
-            </a:lvl1pPr>
-          </a:lstStyle>
-          <a:p>
-            <a:pPr algn="r"/>
-            <a:fld id="{F7021451-1387-4CA6-816F-3879F97B5CBC}" type="slidenum">
-              <a:rPr b="0" lang="en-US"/>
               <a:t>13</a:t>
             </a:fld>
             <a:endParaRPr lang="en-US"/>
@@ -13004,8 +12780,8 @@
         </p:nvSpPr>
         <p:spPr>
           <a:xfrm>
-            <a:off x="548640" y="2194560"/>
-            <a:ext cx="11091672" cy="1188720"/>
+            <a:off x="548640" y="365760"/>
+            <a:ext cx="11091672" cy="274320"/>
           </a:xfrm>
           <a:prstGeom prst="rect">
             <a:avLst/>
@@ -13021,14 +12797,14 @@
               <a:buNone/>
             </a:pPr>
             <a:r>
-              <a:rPr lang="en-US" sz="6400" b="1" dirty="0">
-                <a:solidFill>
-                  <a:srgbClr val="1D1D1F"/>
+              <a:rPr lang="en-US" sz="1200" b="1" spc="200" kern="0" dirty="0">
+                <a:solidFill>
+                  <a:srgbClr val="0071E3"/>
                 </a:solidFill>
               </a:rPr>
-              <a:t>Questions?</a:t>
-            </a:r>
-            <a:endParaRPr lang="en-US" sz="6400" dirty="0"/>
+              <a:t>LIVE SYSTEM</a:t>
+            </a:r>
+            <a:endParaRPr lang="en-US" sz="1200" dirty="0"/>
           </a:p>
         </p:txBody>
       </p:sp>
@@ -13040,8 +12816,8 @@
         </p:nvSpPr>
         <p:spPr>
           <a:xfrm>
-            <a:off x="548640" y="3566160"/>
-            <a:ext cx="11091672" cy="457200"/>
+            <a:off x="548640" y="658368"/>
+            <a:ext cx="11091672" cy="731520"/>
           </a:xfrm>
           <a:prstGeom prst="rect">
             <a:avLst/>
@@ -13057,14 +12833,14 @@
               <a:buNone/>
             </a:pPr>
             <a:r>
-              <a:rPr lang="en-US" sz="2200" dirty="0">
-                <a:solidFill>
-                  <a:srgbClr val="55555B"/>
+              <a:rPr lang="en-US" sz="3600" b="1" dirty="0">
+                <a:solidFill>
+                  <a:srgbClr val="1D1D1F"/>
                 </a:solidFill>
               </a:rPr>
-              <a:t>github.com/IATESPAGHETTI/Code_Origin</a:t>
-            </a:r>
-            <a:endParaRPr lang="en-US" sz="2200" dirty="0"/>
+              <a:t>The running stack</a:t>
+            </a:r>
+            <a:endParaRPr lang="en-US" sz="3600" dirty="0"/>
           </a:p>
         </p:txBody>
       </p:sp>
@@ -13076,8 +12852,8 @@
         </p:nvSpPr>
         <p:spPr>
           <a:xfrm>
-            <a:off x="548640" y="4297680"/>
-            <a:ext cx="11091672" cy="457200"/>
+            <a:off x="548640" y="1371600"/>
+            <a:ext cx="11091672" cy="548640"/>
           </a:xfrm>
           <a:prstGeom prst="rect">
             <a:avLst/>
@@ -13086,21 +12862,899 @@
           <a:ln/>
         </p:spPr>
         <p:txBody>
-          <a:bodyPr wrap="square" lIns="0" tIns="0" rIns="0" bIns="0" rtlCol="0" anchor="ctr"/>
+          <a:bodyPr wrap="square" lIns="0" tIns="0" rIns="0" bIns="0" rtlCol="0" anchor="t"/>
           <a:lstStyle/>
           <a:p>
             <a:pPr indent="0" marL="0">
               <a:buNone/>
             </a:pPr>
             <a:r>
+              <a:rPr lang="en-US" sz="1600" dirty="0">
+                <a:solidFill>
+                  <a:srgbClr val="55555B"/>
+                </a:solidFill>
+              </a:rPr>
+              <a:t>Shown live from the website during the talk (health is checked through the gateway every few seconds).</a:t>
+            </a:r>
+            <a:endParaRPr lang="en-US" sz="1600" dirty="0"/>
+          </a:p>
+        </p:txBody>
+      </p:sp>
+      <p:sp>
+        <p:nvSpPr>
+          <p:cNvPr id="6" name="Shape 3"/>
+          <p:cNvSpPr/>
+          <p:nvPr/>
+        </p:nvSpPr>
+        <p:spPr>
+          <a:xfrm>
+            <a:off x="548640" y="2194560"/>
+            <a:ext cx="3514344" cy="731520"/>
+          </a:xfrm>
+          <a:prstGeom prst="roundRect">
+            <a:avLst>
+              <a:gd name="adj" fmla="val 12500"/>
+            </a:avLst>
+          </a:prstGeom>
+          <a:solidFill>
+            <a:srgbClr val="FFFFFF"/>
+          </a:solidFill>
+          <a:ln w="9525">
+            <a:solidFill>
+              <a:srgbClr val="D9D9DE"/>
+            </a:solidFill>
+            <a:prstDash val="solid"/>
+          </a:ln>
+        </p:spPr>
+      </p:sp>
+      <p:sp>
+        <p:nvSpPr>
+          <p:cNvPr id="7" name="Shape 4"/>
+          <p:cNvSpPr/>
+          <p:nvPr/>
+        </p:nvSpPr>
+        <p:spPr>
+          <a:xfrm>
+            <a:off x="777240" y="2441448"/>
+            <a:ext cx="237744" cy="237744"/>
+          </a:xfrm>
+          <a:prstGeom prst="ellipse">
+            <a:avLst/>
+          </a:prstGeom>
+          <a:solidFill>
+            <a:srgbClr val="1E9E6A"/>
+          </a:solidFill>
+          <a:ln w="12700">
+            <a:solidFill>
+              <a:srgbClr val="1E9E6A"/>
+            </a:solidFill>
+            <a:prstDash val="solid"/>
+          </a:ln>
+        </p:spPr>
+      </p:sp>
+      <p:sp>
+        <p:nvSpPr>
+          <p:cNvPr id="8" name="Text 5"/>
+          <p:cNvSpPr txBox="1"/>
+          <p:nvPr/>
+        </p:nvSpPr>
+        <p:spPr>
+          <a:xfrm>
+            <a:off x="1188720" y="2194560"/>
+            <a:ext cx="1685544" cy="731520"/>
+          </a:xfrm>
+          <a:prstGeom prst="rect">
+            <a:avLst/>
+          </a:prstGeom>
+          <a:noFill/>
+          <a:ln/>
+        </p:spPr>
+        <p:txBody>
+          <a:bodyPr wrap="square" lIns="0" tIns="0" rIns="0" bIns="0" rtlCol="0" anchor="ctr"/>
+          <a:lstStyle/>
+          <a:p>
+            <a:pPr indent="0" marL="0">
+              <a:buNone/>
+            </a:pPr>
+            <a:r>
               <a:rPr lang="en-US" sz="1800" dirty="0">
                 <a:solidFill>
-                  <a:srgbClr val="0071E3"/>
+                  <a:srgbClr val="1D1D1F"/>
                 </a:solidFill>
               </a:rPr>
-              <a:t>We claim: supported on one real repository for 7B models, not yet general.</a:t>
+              <a:t>Gateway</a:t>
             </a:r>
             <a:endParaRPr lang="en-US" sz="1800" dirty="0"/>
+          </a:p>
+        </p:txBody>
+      </p:sp>
+      <p:sp>
+        <p:nvSpPr>
+          <p:cNvPr id="9" name="Text 6"/>
+          <p:cNvSpPr txBox="1"/>
+          <p:nvPr/>
+        </p:nvSpPr>
+        <p:spPr>
+          <a:xfrm>
+            <a:off x="2874264" y="2194560"/>
+            <a:ext cx="1005840" cy="731520"/>
+          </a:xfrm>
+          <a:prstGeom prst="rect">
+            <a:avLst/>
+          </a:prstGeom>
+          <a:noFill/>
+          <a:ln/>
+        </p:spPr>
+        <p:txBody>
+          <a:bodyPr wrap="square" lIns="0" tIns="0" rIns="0" bIns="0" rtlCol="0" anchor="ctr"/>
+          <a:lstStyle/>
+          <a:p>
+            <a:pPr algn="r" indent="0" marL="0">
+              <a:buNone/>
+            </a:pPr>
+            <a:r>
+              <a:rPr lang="en-US" sz="1300" dirty="0">
+                <a:solidFill>
+                  <a:srgbClr val="55555B"/>
+                </a:solidFill>
+              </a:rPr>
+              <a:t>healthy</a:t>
+            </a:r>
+            <a:endParaRPr lang="en-US" sz="1300" dirty="0"/>
+          </a:p>
+        </p:txBody>
+      </p:sp>
+      <p:sp>
+        <p:nvSpPr>
+          <p:cNvPr id="10" name="Shape 7"/>
+          <p:cNvSpPr/>
+          <p:nvPr/>
+        </p:nvSpPr>
+        <p:spPr>
+          <a:xfrm>
+            <a:off x="4337304" y="2194560"/>
+            <a:ext cx="3514344" cy="731520"/>
+          </a:xfrm>
+          <a:prstGeom prst="roundRect">
+            <a:avLst>
+              <a:gd name="adj" fmla="val 12500"/>
+            </a:avLst>
+          </a:prstGeom>
+          <a:solidFill>
+            <a:srgbClr val="FFFFFF"/>
+          </a:solidFill>
+          <a:ln w="9525">
+            <a:solidFill>
+              <a:srgbClr val="D9D9DE"/>
+            </a:solidFill>
+            <a:prstDash val="solid"/>
+          </a:ln>
+        </p:spPr>
+      </p:sp>
+      <p:sp>
+        <p:nvSpPr>
+          <p:cNvPr id="11" name="Shape 8"/>
+          <p:cNvSpPr/>
+          <p:nvPr/>
+        </p:nvSpPr>
+        <p:spPr>
+          <a:xfrm>
+            <a:off x="4565904" y="2441448"/>
+            <a:ext cx="237744" cy="237744"/>
+          </a:xfrm>
+          <a:prstGeom prst="ellipse">
+            <a:avLst/>
+          </a:prstGeom>
+          <a:solidFill>
+            <a:srgbClr val="1E9E6A"/>
+          </a:solidFill>
+          <a:ln w="12700">
+            <a:solidFill>
+              <a:srgbClr val="1E9E6A"/>
+            </a:solidFill>
+            <a:prstDash val="solid"/>
+          </a:ln>
+        </p:spPr>
+      </p:sp>
+      <p:sp>
+        <p:nvSpPr>
+          <p:cNvPr id="12" name="Text 9"/>
+          <p:cNvSpPr txBox="1"/>
+          <p:nvPr/>
+        </p:nvSpPr>
+        <p:spPr>
+          <a:xfrm>
+            <a:off x="4977384" y="2194560"/>
+            <a:ext cx="1685544" cy="731520"/>
+          </a:xfrm>
+          <a:prstGeom prst="rect">
+            <a:avLst/>
+          </a:prstGeom>
+          <a:noFill/>
+          <a:ln/>
+        </p:spPr>
+        <p:txBody>
+          <a:bodyPr wrap="square" lIns="0" tIns="0" rIns="0" bIns="0" rtlCol="0" anchor="ctr"/>
+          <a:lstStyle/>
+          <a:p>
+            <a:pPr indent="0" marL="0">
+              <a:buNone/>
+            </a:pPr>
+            <a:r>
+              <a:rPr lang="en-US" sz="1800" dirty="0">
+                <a:solidFill>
+                  <a:srgbClr val="1D1D1F"/>
+                </a:solidFill>
+              </a:rPr>
+              <a:t>Ingest</a:t>
+            </a:r>
+            <a:endParaRPr lang="en-US" sz="1800" dirty="0"/>
+          </a:p>
+        </p:txBody>
+      </p:sp>
+      <p:sp>
+        <p:nvSpPr>
+          <p:cNvPr id="13" name="Text 10"/>
+          <p:cNvSpPr txBox="1"/>
+          <p:nvPr/>
+        </p:nvSpPr>
+        <p:spPr>
+          <a:xfrm>
+            <a:off x="6662928" y="2194560"/>
+            <a:ext cx="1005840" cy="731520"/>
+          </a:xfrm>
+          <a:prstGeom prst="rect">
+            <a:avLst/>
+          </a:prstGeom>
+          <a:noFill/>
+          <a:ln/>
+        </p:spPr>
+        <p:txBody>
+          <a:bodyPr wrap="square" lIns="0" tIns="0" rIns="0" bIns="0" rtlCol="0" anchor="ctr"/>
+          <a:lstStyle/>
+          <a:p>
+            <a:pPr algn="r" indent="0" marL="0">
+              <a:buNone/>
+            </a:pPr>
+            <a:r>
+              <a:rPr lang="en-US" sz="1300" dirty="0">
+                <a:solidFill>
+                  <a:srgbClr val="55555B"/>
+                </a:solidFill>
+              </a:rPr>
+              <a:t>healthy</a:t>
+            </a:r>
+            <a:endParaRPr lang="en-US" sz="1300" dirty="0"/>
+          </a:p>
+        </p:txBody>
+      </p:sp>
+      <p:sp>
+        <p:nvSpPr>
+          <p:cNvPr id="14" name="Shape 11"/>
+          <p:cNvSpPr/>
+          <p:nvPr/>
+        </p:nvSpPr>
+        <p:spPr>
+          <a:xfrm>
+            <a:off x="8125968" y="2194560"/>
+            <a:ext cx="3514344" cy="731520"/>
+          </a:xfrm>
+          <a:prstGeom prst="roundRect">
+            <a:avLst>
+              <a:gd name="adj" fmla="val 12500"/>
+            </a:avLst>
+          </a:prstGeom>
+          <a:solidFill>
+            <a:srgbClr val="FFFFFF"/>
+          </a:solidFill>
+          <a:ln w="9525">
+            <a:solidFill>
+              <a:srgbClr val="D9D9DE"/>
+            </a:solidFill>
+            <a:prstDash val="solid"/>
+          </a:ln>
+        </p:spPr>
+      </p:sp>
+      <p:sp>
+        <p:nvSpPr>
+          <p:cNvPr id="15" name="Shape 12"/>
+          <p:cNvSpPr/>
+          <p:nvPr/>
+        </p:nvSpPr>
+        <p:spPr>
+          <a:xfrm>
+            <a:off x="8354568" y="2441448"/>
+            <a:ext cx="237744" cy="237744"/>
+          </a:xfrm>
+          <a:prstGeom prst="ellipse">
+            <a:avLst/>
+          </a:prstGeom>
+          <a:solidFill>
+            <a:srgbClr val="1E9E6A"/>
+          </a:solidFill>
+          <a:ln w="12700">
+            <a:solidFill>
+              <a:srgbClr val="1E9E6A"/>
+            </a:solidFill>
+            <a:prstDash val="solid"/>
+          </a:ln>
+        </p:spPr>
+      </p:sp>
+      <p:sp>
+        <p:nvSpPr>
+          <p:cNvPr id="16" name="Text 13"/>
+          <p:cNvSpPr txBox="1"/>
+          <p:nvPr/>
+        </p:nvSpPr>
+        <p:spPr>
+          <a:xfrm>
+            <a:off x="8766048" y="2194560"/>
+            <a:ext cx="1685544" cy="731520"/>
+          </a:xfrm>
+          <a:prstGeom prst="rect">
+            <a:avLst/>
+          </a:prstGeom>
+          <a:noFill/>
+          <a:ln/>
+        </p:spPr>
+        <p:txBody>
+          <a:bodyPr wrap="square" lIns="0" tIns="0" rIns="0" bIns="0" rtlCol="0" anchor="ctr"/>
+          <a:lstStyle/>
+          <a:p>
+            <a:pPr indent="0" marL="0">
+              <a:buNone/>
+            </a:pPr>
+            <a:r>
+              <a:rPr lang="en-US" sz="1800" dirty="0">
+                <a:solidFill>
+                  <a:srgbClr val="1D1D1F"/>
+                </a:solidFill>
+              </a:rPr>
+              <a:t>Rag</a:t>
+            </a:r>
+            <a:endParaRPr lang="en-US" sz="1800" dirty="0"/>
+          </a:p>
+        </p:txBody>
+      </p:sp>
+      <p:sp>
+        <p:nvSpPr>
+          <p:cNvPr id="17" name="Text 14"/>
+          <p:cNvSpPr txBox="1"/>
+          <p:nvPr/>
+        </p:nvSpPr>
+        <p:spPr>
+          <a:xfrm>
+            <a:off x="10451592" y="2194560"/>
+            <a:ext cx="1005840" cy="731520"/>
+          </a:xfrm>
+          <a:prstGeom prst="rect">
+            <a:avLst/>
+          </a:prstGeom>
+          <a:noFill/>
+          <a:ln/>
+        </p:spPr>
+        <p:txBody>
+          <a:bodyPr wrap="square" lIns="0" tIns="0" rIns="0" bIns="0" rtlCol="0" anchor="ctr"/>
+          <a:lstStyle/>
+          <a:p>
+            <a:pPr algn="r" indent="0" marL="0">
+              <a:buNone/>
+            </a:pPr>
+            <a:r>
+              <a:rPr lang="en-US" sz="1300" dirty="0">
+                <a:solidFill>
+                  <a:srgbClr val="55555B"/>
+                </a:solidFill>
+              </a:rPr>
+              <a:t>healthy</a:t>
+            </a:r>
+            <a:endParaRPr lang="en-US" sz="1300" dirty="0"/>
+          </a:p>
+        </p:txBody>
+      </p:sp>
+      <p:sp>
+        <p:nvSpPr>
+          <p:cNvPr id="18" name="Shape 15"/>
+          <p:cNvSpPr/>
+          <p:nvPr/>
+        </p:nvSpPr>
+        <p:spPr>
+          <a:xfrm>
+            <a:off x="548640" y="3154680"/>
+            <a:ext cx="3514344" cy="731520"/>
+          </a:xfrm>
+          <a:prstGeom prst="roundRect">
+            <a:avLst>
+              <a:gd name="adj" fmla="val 12500"/>
+            </a:avLst>
+          </a:prstGeom>
+          <a:solidFill>
+            <a:srgbClr val="FFFFFF"/>
+          </a:solidFill>
+          <a:ln w="9525">
+            <a:solidFill>
+              <a:srgbClr val="D9D9DE"/>
+            </a:solidFill>
+            <a:prstDash val="solid"/>
+          </a:ln>
+        </p:spPr>
+      </p:sp>
+      <p:sp>
+        <p:nvSpPr>
+          <p:cNvPr id="19" name="Shape 16"/>
+          <p:cNvSpPr/>
+          <p:nvPr/>
+        </p:nvSpPr>
+        <p:spPr>
+          <a:xfrm>
+            <a:off x="777240" y="3401568"/>
+            <a:ext cx="237744" cy="237744"/>
+          </a:xfrm>
+          <a:prstGeom prst="ellipse">
+            <a:avLst/>
+          </a:prstGeom>
+          <a:solidFill>
+            <a:srgbClr val="1E9E6A"/>
+          </a:solidFill>
+          <a:ln w="12700">
+            <a:solidFill>
+              <a:srgbClr val="1E9E6A"/>
+            </a:solidFill>
+            <a:prstDash val="solid"/>
+          </a:ln>
+        </p:spPr>
+      </p:sp>
+      <p:sp>
+        <p:nvSpPr>
+          <p:cNvPr id="20" name="Text 17"/>
+          <p:cNvSpPr txBox="1"/>
+          <p:nvPr/>
+        </p:nvSpPr>
+        <p:spPr>
+          <a:xfrm>
+            <a:off x="1188720" y="3154680"/>
+            <a:ext cx="1685544" cy="731520"/>
+          </a:xfrm>
+          <a:prstGeom prst="rect">
+            <a:avLst/>
+          </a:prstGeom>
+          <a:noFill/>
+          <a:ln/>
+        </p:spPr>
+        <p:txBody>
+          <a:bodyPr wrap="square" lIns="0" tIns="0" rIns="0" bIns="0" rtlCol="0" anchor="ctr"/>
+          <a:lstStyle/>
+          <a:p>
+            <a:pPr indent="0" marL="0">
+              <a:buNone/>
+            </a:pPr>
+            <a:r>
+              <a:rPr lang="en-US" sz="1800" dirty="0">
+                <a:solidFill>
+                  <a:srgbClr val="1D1D1F"/>
+                </a:solidFill>
+              </a:rPr>
+              <a:t>Llm</a:t>
+            </a:r>
+            <a:endParaRPr lang="en-US" sz="1800" dirty="0"/>
+          </a:p>
+        </p:txBody>
+      </p:sp>
+      <p:sp>
+        <p:nvSpPr>
+          <p:cNvPr id="21" name="Text 18"/>
+          <p:cNvSpPr txBox="1"/>
+          <p:nvPr/>
+        </p:nvSpPr>
+        <p:spPr>
+          <a:xfrm>
+            <a:off x="2874264" y="3154680"/>
+            <a:ext cx="1005840" cy="731520"/>
+          </a:xfrm>
+          <a:prstGeom prst="rect">
+            <a:avLst/>
+          </a:prstGeom>
+          <a:noFill/>
+          <a:ln/>
+        </p:spPr>
+        <p:txBody>
+          <a:bodyPr wrap="square" lIns="0" tIns="0" rIns="0" bIns="0" rtlCol="0" anchor="ctr"/>
+          <a:lstStyle/>
+          <a:p>
+            <a:pPr algn="r" indent="0" marL="0">
+              <a:buNone/>
+            </a:pPr>
+            <a:r>
+              <a:rPr lang="en-US" sz="1300" dirty="0">
+                <a:solidFill>
+                  <a:srgbClr val="55555B"/>
+                </a:solidFill>
+              </a:rPr>
+              <a:t>healthy</a:t>
+            </a:r>
+            <a:endParaRPr lang="en-US" sz="1300" dirty="0"/>
+          </a:p>
+        </p:txBody>
+      </p:sp>
+      <p:sp>
+        <p:nvSpPr>
+          <p:cNvPr id="22" name="Shape 19"/>
+          <p:cNvSpPr/>
+          <p:nvPr/>
+        </p:nvSpPr>
+        <p:spPr>
+          <a:xfrm>
+            <a:off x="4337304" y="3154680"/>
+            <a:ext cx="3514344" cy="731520"/>
+          </a:xfrm>
+          <a:prstGeom prst="roundRect">
+            <a:avLst>
+              <a:gd name="adj" fmla="val 12500"/>
+            </a:avLst>
+          </a:prstGeom>
+          <a:solidFill>
+            <a:srgbClr val="FFFFFF"/>
+          </a:solidFill>
+          <a:ln w="9525">
+            <a:solidFill>
+              <a:srgbClr val="D9D9DE"/>
+            </a:solidFill>
+            <a:prstDash val="solid"/>
+          </a:ln>
+        </p:spPr>
+      </p:sp>
+      <p:sp>
+        <p:nvSpPr>
+          <p:cNvPr id="23" name="Shape 20"/>
+          <p:cNvSpPr/>
+          <p:nvPr/>
+        </p:nvSpPr>
+        <p:spPr>
+          <a:xfrm>
+            <a:off x="4565904" y="3401568"/>
+            <a:ext cx="237744" cy="237744"/>
+          </a:xfrm>
+          <a:prstGeom prst="ellipse">
+            <a:avLst/>
+          </a:prstGeom>
+          <a:solidFill>
+            <a:srgbClr val="1E9E6A"/>
+          </a:solidFill>
+          <a:ln w="12700">
+            <a:solidFill>
+              <a:srgbClr val="1E9E6A"/>
+            </a:solidFill>
+            <a:prstDash val="solid"/>
+          </a:ln>
+        </p:spPr>
+      </p:sp>
+      <p:sp>
+        <p:nvSpPr>
+          <p:cNvPr id="24" name="Text 21"/>
+          <p:cNvSpPr txBox="1"/>
+          <p:nvPr/>
+        </p:nvSpPr>
+        <p:spPr>
+          <a:xfrm>
+            <a:off x="4977384" y="3154680"/>
+            <a:ext cx="1685544" cy="731520"/>
+          </a:xfrm>
+          <a:prstGeom prst="rect">
+            <a:avLst/>
+          </a:prstGeom>
+          <a:noFill/>
+          <a:ln/>
+        </p:spPr>
+        <p:txBody>
+          <a:bodyPr wrap="square" lIns="0" tIns="0" rIns="0" bIns="0" rtlCol="0" anchor="ctr"/>
+          <a:lstStyle/>
+          <a:p>
+            <a:pPr indent="0" marL="0">
+              <a:buNone/>
+            </a:pPr>
+            <a:r>
+              <a:rPr lang="en-US" sz="1800" dirty="0">
+                <a:solidFill>
+                  <a:srgbClr val="1D1D1F"/>
+                </a:solidFill>
+              </a:rPr>
+              <a:t>Orchestrator</a:t>
+            </a:r>
+            <a:endParaRPr lang="en-US" sz="1800" dirty="0"/>
+          </a:p>
+        </p:txBody>
+      </p:sp>
+      <p:sp>
+        <p:nvSpPr>
+          <p:cNvPr id="25" name="Text 22"/>
+          <p:cNvSpPr txBox="1"/>
+          <p:nvPr/>
+        </p:nvSpPr>
+        <p:spPr>
+          <a:xfrm>
+            <a:off x="6662928" y="3154680"/>
+            <a:ext cx="1005840" cy="731520"/>
+          </a:xfrm>
+          <a:prstGeom prst="rect">
+            <a:avLst/>
+          </a:prstGeom>
+          <a:noFill/>
+          <a:ln/>
+        </p:spPr>
+        <p:txBody>
+          <a:bodyPr wrap="square" lIns="0" tIns="0" rIns="0" bIns="0" rtlCol="0" anchor="ctr"/>
+          <a:lstStyle/>
+          <a:p>
+            <a:pPr algn="r" indent="0" marL="0">
+              <a:buNone/>
+            </a:pPr>
+            <a:r>
+              <a:rPr lang="en-US" sz="1300" dirty="0">
+                <a:solidFill>
+                  <a:srgbClr val="55555B"/>
+                </a:solidFill>
+              </a:rPr>
+              <a:t>healthy</a:t>
+            </a:r>
+            <a:endParaRPr lang="en-US" sz="1300" dirty="0"/>
+          </a:p>
+        </p:txBody>
+      </p:sp>
+      <p:sp>
+        <p:nvSpPr>
+          <p:cNvPr id="26" name="Shape 23"/>
+          <p:cNvSpPr/>
+          <p:nvPr/>
+        </p:nvSpPr>
+        <p:spPr>
+          <a:xfrm>
+            <a:off x="8125968" y="3154680"/>
+            <a:ext cx="3514344" cy="731520"/>
+          </a:xfrm>
+          <a:prstGeom prst="roundRect">
+            <a:avLst>
+              <a:gd name="adj" fmla="val 12500"/>
+            </a:avLst>
+          </a:prstGeom>
+          <a:solidFill>
+            <a:srgbClr val="FFFFFF"/>
+          </a:solidFill>
+          <a:ln w="9525">
+            <a:solidFill>
+              <a:srgbClr val="D9D9DE"/>
+            </a:solidFill>
+            <a:prstDash val="solid"/>
+          </a:ln>
+        </p:spPr>
+      </p:sp>
+      <p:sp>
+        <p:nvSpPr>
+          <p:cNvPr id="27" name="Shape 24"/>
+          <p:cNvSpPr/>
+          <p:nvPr/>
+        </p:nvSpPr>
+        <p:spPr>
+          <a:xfrm>
+            <a:off x="8354568" y="3401568"/>
+            <a:ext cx="237744" cy="237744"/>
+          </a:xfrm>
+          <a:prstGeom prst="ellipse">
+            <a:avLst/>
+          </a:prstGeom>
+          <a:solidFill>
+            <a:srgbClr val="1E9E6A"/>
+          </a:solidFill>
+          <a:ln w="12700">
+            <a:solidFill>
+              <a:srgbClr val="1E9E6A"/>
+            </a:solidFill>
+            <a:prstDash val="solid"/>
+          </a:ln>
+        </p:spPr>
+      </p:sp>
+      <p:sp>
+        <p:nvSpPr>
+          <p:cNvPr id="28" name="Text 25"/>
+          <p:cNvSpPr txBox="1"/>
+          <p:nvPr/>
+        </p:nvSpPr>
+        <p:spPr>
+          <a:xfrm>
+            <a:off x="8766048" y="3154680"/>
+            <a:ext cx="1685544" cy="731520"/>
+          </a:xfrm>
+          <a:prstGeom prst="rect">
+            <a:avLst/>
+          </a:prstGeom>
+          <a:noFill/>
+          <a:ln/>
+        </p:spPr>
+        <p:txBody>
+          <a:bodyPr wrap="square" lIns="0" tIns="0" rIns="0" bIns="0" rtlCol="0" anchor="ctr"/>
+          <a:lstStyle/>
+          <a:p>
+            <a:pPr indent="0" marL="0">
+              <a:buNone/>
+            </a:pPr>
+            <a:r>
+              <a:rPr lang="en-US" sz="1800" dirty="0">
+                <a:solidFill>
+                  <a:srgbClr val="1D1D1F"/>
+                </a:solidFill>
+              </a:rPr>
+              <a:t>Eval</a:t>
+            </a:r>
+            <a:endParaRPr lang="en-US" sz="1800" dirty="0"/>
+          </a:p>
+        </p:txBody>
+      </p:sp>
+      <p:sp>
+        <p:nvSpPr>
+          <p:cNvPr id="29" name="Text 26"/>
+          <p:cNvSpPr txBox="1"/>
+          <p:nvPr/>
+        </p:nvSpPr>
+        <p:spPr>
+          <a:xfrm>
+            <a:off x="10451592" y="3154680"/>
+            <a:ext cx="1005840" cy="731520"/>
+          </a:xfrm>
+          <a:prstGeom prst="rect">
+            <a:avLst/>
+          </a:prstGeom>
+          <a:noFill/>
+          <a:ln/>
+        </p:spPr>
+        <p:txBody>
+          <a:bodyPr wrap="square" lIns="0" tIns="0" rIns="0" bIns="0" rtlCol="0" anchor="ctr"/>
+          <a:lstStyle/>
+          <a:p>
+            <a:pPr algn="r" indent="0" marL="0">
+              <a:buNone/>
+            </a:pPr>
+            <a:r>
+              <a:rPr lang="en-US" sz="1300" dirty="0">
+                <a:solidFill>
+                  <a:srgbClr val="55555B"/>
+                </a:solidFill>
+              </a:rPr>
+              <a:t>healthy</a:t>
+            </a:r>
+            <a:endParaRPr lang="en-US" sz="1300" dirty="0"/>
+          </a:p>
+        </p:txBody>
+      </p:sp>
+      <p:sp>
+        <p:nvSpPr>
+          <p:cNvPr id="30" name="Shape 27"/>
+          <p:cNvSpPr/>
+          <p:nvPr/>
+        </p:nvSpPr>
+        <p:spPr>
+          <a:xfrm>
+            <a:off x="548640" y="4160520"/>
+            <a:ext cx="11091672" cy="2011680"/>
+          </a:xfrm>
+          <a:prstGeom prst="roundRect">
+            <a:avLst>
+              <a:gd name="adj" fmla="val 4545"/>
+            </a:avLst>
+          </a:prstGeom>
+          <a:solidFill>
+            <a:srgbClr val="FFFFFF"/>
+          </a:solidFill>
+          <a:ln w="9525">
+            <a:solidFill>
+              <a:srgbClr val="D9D9DE"/>
+            </a:solidFill>
+            <a:prstDash val="solid"/>
+          </a:ln>
+          <a:effectLst>
+            <a:outerShdw sx="100000" sy="100000" kx="0" ky="0" algn="bl" rotWithShape="0" blurRad="76200" dist="12700" dir="5400000">
+              <a:srgbClr val="000000">
+                <a:alpha val="8000"/>
+              </a:srgbClr>
+            </a:outerShdw>
+          </a:effectLst>
+        </p:spPr>
+      </p:sp>
+      <p:sp>
+        <p:nvSpPr>
+          <p:cNvPr id="31" name="Text 28"/>
+          <p:cNvSpPr txBox="1"/>
+          <p:nvPr/>
+        </p:nvSpPr>
+        <p:spPr>
+          <a:xfrm>
+            <a:off x="731520" y="4297680"/>
+            <a:ext cx="10725912" cy="411480"/>
+          </a:xfrm>
+          <a:prstGeom prst="rect">
+            <a:avLst/>
+          </a:prstGeom>
+          <a:noFill/>
+          <a:ln/>
+        </p:spPr>
+        <p:txBody>
+          <a:bodyPr wrap="square" lIns="0" tIns="0" rIns="0" bIns="0" rtlCol="0" anchor="t"/>
+          <a:lstStyle/>
+          <a:p>
+            <a:pPr indent="0" marL="0">
+              <a:buNone/>
+            </a:pPr>
+            <a:r>
+              <a:rPr lang="en-US" sz="1800" b="1" dirty="0">
+                <a:solidFill>
+                  <a:srgbClr val="1D1D1F"/>
+                </a:solidFill>
+              </a:rPr>
+              <a:t>What to demo</a:t>
+            </a:r>
+            <a:endParaRPr lang="en-US" sz="1800" dirty="0"/>
+          </a:p>
+        </p:txBody>
+      </p:sp>
+      <p:sp>
+        <p:nvSpPr>
+          <p:cNvPr id="32" name="Text 29"/>
+          <p:cNvSpPr txBox="1"/>
+          <p:nvPr/>
+        </p:nvSpPr>
+        <p:spPr>
+          <a:xfrm>
+            <a:off x="731520" y="4709160"/>
+            <a:ext cx="10725912" cy="1353312"/>
+          </a:xfrm>
+          <a:prstGeom prst="rect">
+            <a:avLst/>
+          </a:prstGeom>
+          <a:noFill/>
+          <a:ln/>
+        </p:spPr>
+        <p:txBody>
+          <a:bodyPr wrap="square" lIns="0" tIns="0" rIns="0" bIns="0" rtlCol="0" anchor="t"/>
+          <a:lstStyle/>
+          <a:p>
+            <a:pPr indent="0" marL="0">
+              <a:buNone/>
+            </a:pPr>
+            <a:r>
+              <a:rPr lang="en-US" sz="1500" dirty="0">
+                <a:solidFill>
+                  <a:srgbClr val="1D1D1F"/>
+                </a:solidFill>
+              </a:rPr>
+              <a:t>Ask: "Why does itsdangerous keep SHA-1 as its default digest?" and show the cited answer and the evidence chain.</a:t>
+            </a:r>
+            <a:endParaRPr lang="en-US" sz="1500" dirty="0"/>
+          </a:p>
+          <a:p>
+            <a:pPr indent="0" marL="0">
+              <a:buNone/>
+            </a:pPr>
+            <a:r>
+              <a:rPr lang="en-US" sz="1500" dirty="0">
+                <a:solidFill>
+                  <a:srgbClr val="1D1D1F"/>
+                </a:solidFill>
+              </a:rPr>
+              <a:t>Evaluation page: the held-out run, per-mode leaderboard, and which model is best for what.</a:t>
+            </a:r>
+            <a:endParaRPr lang="en-US" sz="1500" dirty="0"/>
+          </a:p>
+          <a:p>
+            <a:pPr indent="0" marL="0">
+              <a:buNone/>
+            </a:pPr>
+            <a:r>
+              <a:rPr lang="en-US" sz="1500" dirty="0">
+                <a:solidFill>
+                  <a:srgbClr val="1D1D1F"/>
+                </a:solidFill>
+              </a:rPr>
+              <a:t>Repositories page: the three indexed repositories (demo, itsdangerous, Nexus).</a:t>
+            </a:r>
+            <a:endParaRPr lang="en-US" sz="1500" dirty="0"/>
           </a:p>
         </p:txBody>
       </p:sp>
@@ -13147,6 +13801,187 @@
             <a:fld id="{F7021451-1387-4CA6-816F-3879F97B5CBC}" type="slidenum">
               <a:rPr b="0" lang="en-US"/>
               <a:t>14</a:t>
+            </a:fld>
+            <a:endParaRPr lang="en-US"/>
+          </a:p>
+        </p:txBody>
+      </p:sp>
+    </p:spTree>
+  </p:cSld>
+  <p:clrMapOvr>
+    <a:masterClrMapping/>
+  </p:clrMapOvr>
+</p:sld>
+</file>
+
+<file path=ppt/slides/slide15.xml><?xml version="1.0" encoding="utf-8"?>
+<p:sld xmlns:a="http://schemas.openxmlformats.org/drawingml/2006/main" xmlns:r="http://schemas.openxmlformats.org/officeDocument/2006/relationships" xmlns:p="http://schemas.openxmlformats.org/presentationml/2006/main">
+  <p:cSld name="Slide 15">
+    <p:spTree>
+      <p:nvGrpSpPr>
+        <p:cNvPr id="1" name=""/>
+        <p:cNvGrpSpPr/>
+        <p:nvPr/>
+      </p:nvGrpSpPr>
+      <p:grpSpPr>
+        <a:xfrm>
+          <a:off x="0" y="0"/>
+          <a:ext cx="0" cy="0"/>
+          <a:chOff x="0" y="0"/>
+          <a:chExt cx="0" cy="0"/>
+        </a:xfrm>
+      </p:grpSpPr>
+      <p:sp>
+        <p:nvSpPr>
+          <p:cNvPr id="2" name="Text 0"/>
+          <p:cNvSpPr txBox="1"/>
+          <p:nvPr/>
+        </p:nvSpPr>
+        <p:spPr>
+          <a:xfrm>
+            <a:off x="548640" y="2194560"/>
+            <a:ext cx="11091672" cy="1188720"/>
+          </a:xfrm>
+          <a:prstGeom prst="rect">
+            <a:avLst/>
+          </a:prstGeom>
+          <a:noFill/>
+          <a:ln/>
+        </p:spPr>
+        <p:txBody>
+          <a:bodyPr wrap="square" lIns="0" tIns="0" rIns="0" bIns="0" rtlCol="0" anchor="ctr"/>
+          <a:lstStyle/>
+          <a:p>
+            <a:pPr indent="0" marL="0">
+              <a:buNone/>
+            </a:pPr>
+            <a:r>
+              <a:rPr lang="en-US" sz="6400" b="1" dirty="0">
+                <a:solidFill>
+                  <a:srgbClr val="1D1D1F"/>
+                </a:solidFill>
+              </a:rPr>
+              <a:t>Questions?</a:t>
+            </a:r>
+            <a:endParaRPr lang="en-US" sz="6400" dirty="0"/>
+          </a:p>
+        </p:txBody>
+      </p:sp>
+      <p:sp>
+        <p:nvSpPr>
+          <p:cNvPr id="3" name="Text 1"/>
+          <p:cNvSpPr txBox="1"/>
+          <p:nvPr/>
+        </p:nvSpPr>
+        <p:spPr>
+          <a:xfrm>
+            <a:off x="548640" y="3566160"/>
+            <a:ext cx="11091672" cy="457200"/>
+          </a:xfrm>
+          <a:prstGeom prst="rect">
+            <a:avLst/>
+          </a:prstGeom>
+          <a:noFill/>
+          <a:ln/>
+        </p:spPr>
+        <p:txBody>
+          <a:bodyPr wrap="square" lIns="0" tIns="0" rIns="0" bIns="0" rtlCol="0" anchor="ctr"/>
+          <a:lstStyle/>
+          <a:p>
+            <a:pPr indent="0" marL="0">
+              <a:buNone/>
+            </a:pPr>
+            <a:r>
+              <a:rPr lang="en-US" sz="2200" dirty="0">
+                <a:solidFill>
+                  <a:srgbClr val="55555B"/>
+                </a:solidFill>
+              </a:rPr>
+              <a:t>github.com/IATESPAGHETTI/Code_Origin</a:t>
+            </a:r>
+            <a:endParaRPr lang="en-US" sz="2200" dirty="0"/>
+          </a:p>
+        </p:txBody>
+      </p:sp>
+      <p:sp>
+        <p:nvSpPr>
+          <p:cNvPr id="4" name="Text 2"/>
+          <p:cNvSpPr txBox="1"/>
+          <p:nvPr/>
+        </p:nvSpPr>
+        <p:spPr>
+          <a:xfrm>
+            <a:off x="548640" y="4297680"/>
+            <a:ext cx="11091672" cy="457200"/>
+          </a:xfrm>
+          <a:prstGeom prst="rect">
+            <a:avLst/>
+          </a:prstGeom>
+          <a:noFill/>
+          <a:ln/>
+        </p:spPr>
+        <p:txBody>
+          <a:bodyPr wrap="square" lIns="0" tIns="0" rIns="0" bIns="0" rtlCol="0" anchor="ctr"/>
+          <a:lstStyle/>
+          <a:p>
+            <a:pPr indent="0" marL="0">
+              <a:buNone/>
+            </a:pPr>
+            <a:r>
+              <a:rPr lang="en-US" sz="1800" dirty="0">
+                <a:solidFill>
+                  <a:srgbClr val="0071E3"/>
+                </a:solidFill>
+              </a:rPr>
+              <a:t>We claim: supported on one real repository for 7B models, not yet general.</a:t>
+            </a:r>
+            <a:endParaRPr lang="en-US" sz="1800" dirty="0"/>
+          </a:p>
+        </p:txBody>
+      </p:sp>
+      <p:sp>
+        <p:nvSpPr>
+          <p:cNvPr id="25" name="Slide Number Placeholder 0"/>
+          <p:cNvSpPr>
+            <a:spLocks noGrp="1"/>
+          </p:cNvSpPr>
+          <p:nvPr>
+            <p:ph type="sldNum" sz="quarter" idx="4294967295"/>
+          </p:nvPr>
+        </p:nvSpPr>
+        <p:spPr>
+          <a:xfrm>
+            <a:off x="10725912" y="6419088"/>
+            <a:ext cx="914400" cy="274320"/>
+          </a:xfrm>
+          <a:prstGeom prst="rect">
+            <a:avLst/>
+          </a:prstGeom>
+          <a:extLst>
+            <a:ext uri="{C572A759-6A51-4108-AA02-DFA0A04FC94B}">
+              <ma14:wrappingTextBoxFlag xmlns:ma14="http://schemas.microsoft.com/office/mac/drawingml/2011/main" val="0"/>
+            </a:ext>
+          </a:extLst>
+        </p:spPr>
+        <p:txBody>
+          <a:bodyPr/>
+          <a:lstStyle>
+            <a:lvl1pPr>
+              <a:defRPr sz="1100">
+                <a:solidFill>
+                  <a:srgbClr val="55555B"/>
+                </a:solidFill>
+                <a:latin typeface="Calibri"/>
+                <a:ea typeface="Calibri"/>
+                <a:cs typeface="Calibri"/>
+              </a:defRPr>
+            </a:lvl1pPr>
+          </a:lstStyle>
+          <a:p>
+            <a:pPr algn="r"/>
+            <a:fld id="{F7021451-1387-4CA6-816F-3879F97B5CBC}" type="slidenum">
+              <a:rPr b="0" lang="en-US"/>
+              <a:t>15</a:t>
             </a:fld>
             <a:endParaRPr lang="en-US"/>
           </a:p>
@@ -18546,7 +19381,7 @@
                   <a:srgbClr val="55555B"/>
                 </a:solidFill>
               </a:rPr>
-              <a:t>Prometheus + Grafana + Loki, with alert rules and evaluation scores as metrics (optional profile)</a:t>
+              <a:t>Prometheus + Grafana + Loki run with the demo: live service metrics, alert rules, and evaluation scores and cost as dashboards</a:t>
             </a:r>
             <a:endParaRPr lang="en-US" sz="1500" dirty="0"/>
           </a:p>
@@ -19910,7 +20745,7 @@
                   <a:srgbClr val="0071E3"/>
                 </a:solidFill>
               </a:rPr>
-              <a:t>RESULTS: HELD-OUT RUN ON A REAL REPOSITORY</a:t>
+              <a:t>OBSERVABILITY</a:t>
             </a:r>
             <a:endParaRPr lang="en-US" sz="1200" dirty="0"/>
           </a:p>
@@ -19946,7 +20781,7 @@
                   <a:srgbClr val="1D1D1F"/>
                 </a:solidFill>
               </a:rPr>
-              <a:t>What the experiment shows</a:t>
+              <a:t>Monitoring with Prometheus and Grafana</a:t>
             </a:r>
             <a:endParaRPr lang="en-US" sz="3600" dirty="0"/>
           </a:p>
@@ -19982,78 +20817,26 @@
                   <a:srgbClr val="55555B"/>
                 </a:solidFill>
               </a:rPr>
-              <a:t>Run #8: pallets/itsdangerous, 35 questions, 399 answers, real local models. Overall correctness per mode.</a:t>
+              <a:t>Prometheus scrapes the gateway and the evaluation service every 30 seconds; Grafana shows them live, with no login.</a:t>
             </a:r>
             <a:endParaRPr lang="en-US" sz="1600" dirty="0"/>
           </a:p>
         </p:txBody>
       </p:sp>
-      <p:graphicFrame>
-        <p:nvGraphicFramePr>
-          <p:cNvPr id="6" name="Chart 0" descr=""/>
-          <p:cNvGraphicFramePr/>
-          <p:nvPr/>
-        </p:nvGraphicFramePr>
-        <p:xfrm>
-          <a:off x="548640" y="2011680"/>
-          <a:ext cx="6949440" cy="4206240"/>
-        </p:xfrm>
-        <a:graphic xmlns:a="http://schemas.openxmlformats.org/drawingml/2006/main">
-          <a:graphicData uri="http://schemas.openxmlformats.org/drawingml/2006/chart">
-            <c:chart xmlns:c="http://schemas.openxmlformats.org/drawingml/2006/chart" r:id="rId1"/>
-          </a:graphicData>
-        </a:graphic>
-      </p:graphicFrame>
-      <p:sp>
-        <p:nvSpPr>
-          <p:cNvPr id="7" name="Text 3"/>
-          <p:cNvSpPr txBox="1"/>
-          <p:nvPr/>
-        </p:nvSpPr>
-        <p:spPr>
-          <a:xfrm>
-            <a:off x="7772400" y="2011680"/>
-            <a:ext cx="3840480" cy="320040"/>
-          </a:xfrm>
-          <a:prstGeom prst="rect">
-            <a:avLst/>
-          </a:prstGeom>
-          <a:noFill/>
-          <a:ln/>
-        </p:spPr>
-        <p:txBody>
-          <a:bodyPr wrap="square" lIns="0" tIns="0" rIns="0" bIns="0" rtlCol="0" anchor="ctr"/>
-          <a:lstStyle/>
-          <a:p>
-            <a:pPr indent="0" marL="0">
-              <a:buNone/>
-            </a:pPr>
-            <a:r>
-              <a:rPr lang="en-US" sz="1400" b="1" dirty="0">
-                <a:solidFill>
-                  <a:srgbClr val="1D1D1F"/>
-                </a:solidFill>
-              </a:rPr>
-              <a:t>History vs code-only (24 history questions)</a:t>
-            </a:r>
-            <a:endParaRPr lang="en-US" sz="1400" dirty="0"/>
-          </a:p>
-        </p:txBody>
-      </p:sp>
-      <p:sp>
-        <p:nvSpPr>
-          <p:cNvPr id="8" name="Shape 4"/>
+      <p:sp>
+        <p:nvSpPr>
+          <p:cNvPr id="6" name="Shape 3"/>
           <p:cNvSpPr/>
           <p:nvPr/>
         </p:nvSpPr>
         <p:spPr>
           <a:xfrm>
-            <a:off x="7772400" y="2423160"/>
-            <a:ext cx="3867912" cy="1051560"/>
+            <a:off x="548640" y="2103120"/>
+            <a:ext cx="4114800" cy="1234440"/>
           </a:xfrm>
           <a:prstGeom prst="roundRect">
             <a:avLst>
-              <a:gd name="adj" fmla="val 8696"/>
+              <a:gd name="adj" fmla="val 7407"/>
             </a:avLst>
           </a:prstGeom>
           <a:solidFill>
@@ -20065,18 +20848,25 @@
             </a:solidFill>
             <a:prstDash val="solid"/>
           </a:ln>
-        </p:spPr>
-      </p:sp>
-      <p:sp>
-        <p:nvSpPr>
-          <p:cNvPr id="9" name="Text 5"/>
+          <a:effectLst>
+            <a:outerShdw sx="100000" sy="100000" kx="0" ky="0" algn="bl" rotWithShape="0" blurRad="76200" dist="12700" dir="5400000">
+              <a:srgbClr val="000000">
+                <a:alpha val="8000"/>
+              </a:srgbClr>
+            </a:outerShdw>
+          </a:effectLst>
+        </p:spPr>
+      </p:sp>
+      <p:sp>
+        <p:nvSpPr>
+          <p:cNvPr id="7" name="Text 4"/>
           <p:cNvSpPr txBox="1"/>
           <p:nvPr/>
         </p:nvSpPr>
         <p:spPr>
           <a:xfrm>
-            <a:off x="7955280" y="2514600"/>
-            <a:ext cx="2011680" cy="320040"/>
+            <a:off x="731520" y="2240280"/>
+            <a:ext cx="3749040" cy="292608"/>
           </a:xfrm>
           <a:prstGeom prst="rect">
             <a:avLst/>
@@ -20085,7 +20875,7 @@
           <a:ln/>
         </p:spPr>
         <p:txBody>
-          <a:bodyPr wrap="square" lIns="0" tIns="0" rIns="0" bIns="0" rtlCol="0" anchor="ctr"/>
+          <a:bodyPr wrap="square" lIns="0" tIns="0" rIns="0" bIns="0" rtlCol="0" anchor="t"/>
           <a:lstStyle/>
           <a:p>
             <a:pPr indent="0" marL="0">
@@ -20094,10 +20884,10 @@
             <a:r>
               <a:rPr lang="en-US" sz="1500" b="1" dirty="0">
                 <a:solidFill>
-                  <a:srgbClr val="1D1D1F"/>
+                  <a:srgbClr val="0071E3"/>
                 </a:solidFill>
               </a:rPr>
-              <a:t>llama2</a:t>
+              <a:t>Live service metrics</a:t>
             </a:r>
             <a:endParaRPr lang="en-US" sz="1500" dirty="0"/>
           </a:p>
@@ -20105,14 +20895,14 @@
       </p:sp>
       <p:sp>
         <p:nvSpPr>
-          <p:cNvPr id="10" name="Text 6"/>
+          <p:cNvPr id="8" name="Text 5"/>
           <p:cNvSpPr txBox="1"/>
           <p:nvPr/>
         </p:nvSpPr>
         <p:spPr>
           <a:xfrm>
-            <a:off x="9966960" y="2468880"/>
-            <a:ext cx="1554480" cy="457200"/>
+            <a:off x="731520" y="2532888"/>
+            <a:ext cx="3749040" cy="694944"/>
           </a:xfrm>
           <a:prstGeom prst="rect">
             <a:avLst/>
@@ -20121,43 +20911,7 @@
           <a:ln/>
         </p:spPr>
         <p:txBody>
-          <a:bodyPr wrap="square" lIns="0" tIns="0" rIns="0" bIns="0" rtlCol="0" anchor="ctr"/>
-          <a:lstStyle/>
-          <a:p>
-            <a:pPr algn="r" indent="0" marL="0">
-              <a:buNone/>
-            </a:pPr>
-            <a:r>
-              <a:rPr lang="en-US" sz="2400" b="1" dirty="0">
-                <a:solidFill>
-                  <a:srgbClr val="1E9E6A"/>
-                </a:solidFill>
-              </a:rPr>
-              <a:t>+0.32</a:t>
-            </a:r>
-            <a:endParaRPr lang="en-US" sz="2400" dirty="0"/>
-          </a:p>
-        </p:txBody>
-      </p:sp>
-      <p:sp>
-        <p:nvSpPr>
-          <p:cNvPr id="11" name="Text 7"/>
-          <p:cNvSpPr txBox="1"/>
-          <p:nvPr/>
-        </p:nvSpPr>
-        <p:spPr>
-          <a:xfrm>
-            <a:off x="7955280" y="2880360"/>
-            <a:ext cx="3566160" cy="274320"/>
-          </a:xfrm>
-          <a:prstGeom prst="rect">
-            <a:avLst/>
-          </a:prstGeom>
-          <a:noFill/>
-          <a:ln/>
-        </p:spPr>
-        <p:txBody>
-          <a:bodyPr wrap="square" lIns="0" tIns="0" rIns="0" bIns="0" rtlCol="0" anchor="ctr"/>
+          <a:bodyPr wrap="square" lIns="0" tIns="0" rIns="0" bIns="0" rtlCol="0" anchor="t"/>
           <a:lstStyle/>
           <a:p>
             <a:pPr indent="0" marL="0">
@@ -20169,7 +20923,7 @@
                   <a:srgbClr val="55555B"/>
                 </a:solidFill>
               </a:rPr>
-              <a:t>95% CI [+0.07, +0.55]</a:t>
+              <a:t>Requests per second, p95 latency, 5xx rate, guardrail triggers, LLM tokens, refusals, and service logs (Loki).</a:t>
             </a:r>
             <a:endParaRPr lang="en-US" sz="1200" dirty="0"/>
           </a:p>
@@ -20177,54 +20931,18 @@
       </p:sp>
       <p:sp>
         <p:nvSpPr>
-          <p:cNvPr id="12" name="Text 8"/>
-          <p:cNvSpPr txBox="1"/>
-          <p:nvPr/>
-        </p:nvSpPr>
-        <p:spPr>
-          <a:xfrm>
-            <a:off x="7955280" y="3136392"/>
-            <a:ext cx="3566160" cy="274320"/>
-          </a:xfrm>
-          <a:prstGeom prst="rect">
-            <a:avLst/>
-          </a:prstGeom>
-          <a:noFill/>
-          <a:ln/>
-        </p:spPr>
-        <p:txBody>
-          <a:bodyPr wrap="square" lIns="0" tIns="0" rIns="0" bIns="0" rtlCol="0" anchor="ctr"/>
-          <a:lstStyle/>
-          <a:p>
-            <a:pPr indent="0" marL="0">
-              <a:buNone/>
-            </a:pPr>
-            <a:r>
-              <a:rPr lang="en-US" sz="1300" b="1" dirty="0">
-                <a:solidFill>
-                  <a:srgbClr val="1E9E6A"/>
-                </a:solidFill>
-              </a:rPr>
-              <a:t>history is useful</a:t>
-            </a:r>
-            <a:endParaRPr lang="en-US" sz="1300" dirty="0"/>
-          </a:p>
-        </p:txBody>
-      </p:sp>
-      <p:sp>
-        <p:nvSpPr>
-          <p:cNvPr id="13" name="Shape 9"/>
+          <p:cNvPr id="9" name="Shape 6"/>
           <p:cNvSpPr/>
           <p:nvPr/>
         </p:nvSpPr>
         <p:spPr>
           <a:xfrm>
-            <a:off x="7772400" y="3611880"/>
-            <a:ext cx="3867912" cy="1051560"/>
+            <a:off x="548640" y="3474720"/>
+            <a:ext cx="4114800" cy="1234440"/>
           </a:xfrm>
           <a:prstGeom prst="roundRect">
             <a:avLst>
-              <a:gd name="adj" fmla="val 8696"/>
+              <a:gd name="adj" fmla="val 7407"/>
             </a:avLst>
           </a:prstGeom>
           <a:solidFill>
@@ -20236,18 +20954,25 @@
             </a:solidFill>
             <a:prstDash val="solid"/>
           </a:ln>
-        </p:spPr>
-      </p:sp>
-      <p:sp>
-        <p:nvSpPr>
-          <p:cNvPr id="14" name="Text 10"/>
+          <a:effectLst>
+            <a:outerShdw sx="100000" sy="100000" kx="0" ky="0" algn="bl" rotWithShape="0" blurRad="76200" dist="12700" dir="5400000">
+              <a:srgbClr val="000000">
+                <a:alpha val="8000"/>
+              </a:srgbClr>
+            </a:outerShdw>
+          </a:effectLst>
+        </p:spPr>
+      </p:sp>
+      <p:sp>
+        <p:nvSpPr>
+          <p:cNvPr id="10" name="Text 7"/>
           <p:cNvSpPr txBox="1"/>
           <p:nvPr/>
         </p:nvSpPr>
         <p:spPr>
           <a:xfrm>
-            <a:off x="7955280" y="3703320"/>
-            <a:ext cx="2011680" cy="320040"/>
+            <a:off x="731520" y="3611880"/>
+            <a:ext cx="3749040" cy="292608"/>
           </a:xfrm>
           <a:prstGeom prst="rect">
             <a:avLst/>
@@ -20256,7 +20981,7 @@
           <a:ln/>
         </p:spPr>
         <p:txBody>
-          <a:bodyPr wrap="square" lIns="0" tIns="0" rIns="0" bIns="0" rtlCol="0" anchor="ctr"/>
+          <a:bodyPr wrap="square" lIns="0" tIns="0" rIns="0" bIns="0" rtlCol="0" anchor="t"/>
           <a:lstStyle/>
           <a:p>
             <a:pPr indent="0" marL="0">
@@ -20265,10 +20990,10 @@
             <a:r>
               <a:rPr lang="en-US" sz="1500" b="1" dirty="0">
                 <a:solidFill>
-                  <a:srgbClr val="1D1D1F"/>
+                  <a:srgbClr val="0071E3"/>
                 </a:solidFill>
               </a:rPr>
-              <a:t>codellama:7b</a:t>
+              <a:t>Evaluation results as metrics</a:t>
             </a:r>
             <a:endParaRPr lang="en-US" sz="1500" dirty="0"/>
           </a:p>
@@ -20276,14 +21001,14 @@
       </p:sp>
       <p:sp>
         <p:nvSpPr>
-          <p:cNvPr id="15" name="Text 11"/>
+          <p:cNvPr id="11" name="Text 8"/>
           <p:cNvSpPr txBox="1"/>
           <p:nvPr/>
         </p:nvSpPr>
         <p:spPr>
           <a:xfrm>
-            <a:off x="9966960" y="3657600"/>
-            <a:ext cx="1554480" cy="457200"/>
+            <a:off x="731520" y="3904488"/>
+            <a:ext cx="3749040" cy="694944"/>
           </a:xfrm>
           <a:prstGeom prst="rect">
             <a:avLst/>
@@ -20292,43 +21017,7 @@
           <a:ln/>
         </p:spPr>
         <p:txBody>
-          <a:bodyPr wrap="square" lIns="0" tIns="0" rIns="0" bIns="0" rtlCol="0" anchor="ctr"/>
-          <a:lstStyle/>
-          <a:p>
-            <a:pPr algn="r" indent="0" marL="0">
-              <a:buNone/>
-            </a:pPr>
-            <a:r>
-              <a:rPr lang="en-US" sz="2400" b="1" dirty="0">
-                <a:solidFill>
-                  <a:srgbClr val="1E9E6A"/>
-                </a:solidFill>
-              </a:rPr>
-              <a:t>+0.28</a:t>
-            </a:r>
-            <a:endParaRPr lang="en-US" sz="2400" dirty="0"/>
-          </a:p>
-        </p:txBody>
-      </p:sp>
-      <p:sp>
-        <p:nvSpPr>
-          <p:cNvPr id="16" name="Text 12"/>
-          <p:cNvSpPr txBox="1"/>
-          <p:nvPr/>
-        </p:nvSpPr>
-        <p:spPr>
-          <a:xfrm>
-            <a:off x="7955280" y="4069080"/>
-            <a:ext cx="3566160" cy="274320"/>
-          </a:xfrm>
-          <a:prstGeom prst="rect">
-            <a:avLst/>
-          </a:prstGeom>
-          <a:noFill/>
-          <a:ln/>
-        </p:spPr>
-        <p:txBody>
-          <a:bodyPr wrap="square" lIns="0" tIns="0" rIns="0" bIns="0" rtlCol="0" anchor="ctr"/>
+          <a:bodyPr wrap="square" lIns="0" tIns="0" rIns="0" bIns="0" rtlCol="0" anchor="t"/>
           <a:lstStyle/>
           <a:p>
             <a:pPr indent="0" marL="0">
@@ -20340,7 +21029,7 @@
                   <a:srgbClr val="55555B"/>
                 </a:solidFill>
               </a:rPr>
-              <a:t>95% CI [+0.05, +0.49]</a:t>
+              <a:t>Correctness per model and mode, history effect with its 95% interval, the verdict, and the failure taxonomy, for any run.</a:t>
             </a:r>
             <a:endParaRPr lang="en-US" sz="1200" dirty="0"/>
           </a:p>
@@ -20348,54 +21037,18 @@
       </p:sp>
       <p:sp>
         <p:nvSpPr>
-          <p:cNvPr id="17" name="Text 13"/>
-          <p:cNvSpPr txBox="1"/>
-          <p:nvPr/>
-        </p:nvSpPr>
-        <p:spPr>
-          <a:xfrm>
-            <a:off x="7955280" y="4325112"/>
-            <a:ext cx="3566160" cy="274320"/>
-          </a:xfrm>
-          <a:prstGeom prst="rect">
-            <a:avLst/>
-          </a:prstGeom>
-          <a:noFill/>
-          <a:ln/>
-        </p:spPr>
-        <p:txBody>
-          <a:bodyPr wrap="square" lIns="0" tIns="0" rIns="0" bIns="0" rtlCol="0" anchor="ctr"/>
-          <a:lstStyle/>
-          <a:p>
-            <a:pPr indent="0" marL="0">
-              <a:buNone/>
-            </a:pPr>
-            <a:r>
-              <a:rPr lang="en-US" sz="1300" b="1" dirty="0">
-                <a:solidFill>
-                  <a:srgbClr val="1E9E6A"/>
-                </a:solidFill>
-              </a:rPr>
-              <a:t>history is useful</a:t>
-            </a:r>
-            <a:endParaRPr lang="en-US" sz="1300" dirty="0"/>
-          </a:p>
-        </p:txBody>
-      </p:sp>
-      <p:sp>
-        <p:nvSpPr>
-          <p:cNvPr id="18" name="Shape 14"/>
+          <p:cNvPr id="12" name="Shape 9"/>
           <p:cNvSpPr/>
           <p:nvPr/>
         </p:nvSpPr>
         <p:spPr>
           <a:xfrm>
-            <a:off x="7772400" y="4800600"/>
-            <a:ext cx="3867912" cy="1051560"/>
+            <a:off x="548640" y="4846320"/>
+            <a:ext cx="4114800" cy="1234440"/>
           </a:xfrm>
           <a:prstGeom prst="roundRect">
             <a:avLst>
-              <a:gd name="adj" fmla="val 8696"/>
+              <a:gd name="adj" fmla="val 7407"/>
             </a:avLst>
           </a:prstGeom>
           <a:solidFill>
@@ -20407,18 +21060,25 @@
             </a:solidFill>
             <a:prstDash val="solid"/>
           </a:ln>
-        </p:spPr>
-      </p:sp>
-      <p:sp>
-        <p:nvSpPr>
-          <p:cNvPr id="19" name="Text 15"/>
+          <a:effectLst>
+            <a:outerShdw sx="100000" sy="100000" kx="0" ky="0" algn="bl" rotWithShape="0" blurRad="76200" dist="12700" dir="5400000">
+              <a:srgbClr val="000000">
+                <a:alpha val="8000"/>
+              </a:srgbClr>
+            </a:outerShdw>
+          </a:effectLst>
+        </p:spPr>
+      </p:sp>
+      <p:sp>
+        <p:nvSpPr>
+          <p:cNvPr id="13" name="Text 10"/>
           <p:cNvSpPr txBox="1"/>
           <p:nvPr/>
         </p:nvSpPr>
         <p:spPr>
           <a:xfrm>
-            <a:off x="7955280" y="4892040"/>
-            <a:ext cx="2011680" cy="320040"/>
+            <a:off x="731520" y="4983480"/>
+            <a:ext cx="3749040" cy="292608"/>
           </a:xfrm>
           <a:prstGeom prst="rect">
             <a:avLst/>
@@ -20427,7 +21087,7 @@
           <a:ln/>
         </p:spPr>
         <p:txBody>
-          <a:bodyPr wrap="square" lIns="0" tIns="0" rIns="0" bIns="0" rtlCol="0" anchor="ctr"/>
+          <a:bodyPr wrap="square" lIns="0" tIns="0" rIns="0" bIns="0" rtlCol="0" anchor="t"/>
           <a:lstStyle/>
           <a:p>
             <a:pPr indent="0" marL="0">
@@ -20436,10 +21096,10 @@
             <a:r>
               <a:rPr lang="en-US" sz="1500" b="1" dirty="0">
                 <a:solidFill>
-                  <a:srgbClr val="1D1D1F"/>
+                  <a:srgbClr val="0071E3"/>
                 </a:solidFill>
               </a:rPr>
-              <a:t>starcoder2:3b</a:t>
+              <a:t>Quality and cost</a:t>
             </a:r>
             <a:endParaRPr lang="en-US" sz="1500" dirty="0"/>
           </a:p>
@@ -20447,14 +21107,14 @@
       </p:sp>
       <p:sp>
         <p:nvSpPr>
-          <p:cNvPr id="20" name="Text 16"/>
+          <p:cNvPr id="14" name="Text 11"/>
           <p:cNvSpPr txBox="1"/>
           <p:nvPr/>
         </p:nvSpPr>
         <p:spPr>
           <a:xfrm>
-            <a:off x="9966960" y="4846320"/>
-            <a:ext cx="1554480" cy="457200"/>
+            <a:off x="731520" y="5276088"/>
+            <a:ext cx="3749040" cy="694944"/>
           </a:xfrm>
           <a:prstGeom prst="rect">
             <a:avLst/>
@@ -20463,43 +21123,7 @@
           <a:ln/>
         </p:spPr>
         <p:txBody>
-          <a:bodyPr wrap="square" lIns="0" tIns="0" rIns="0" bIns="0" rtlCol="0" anchor="ctr"/>
-          <a:lstStyle/>
-          <a:p>
-            <a:pPr algn="r" indent="0" marL="0">
-              <a:buNone/>
-            </a:pPr>
-            <a:r>
-              <a:rPr lang="en-US" sz="2400" b="1" dirty="0">
-                <a:solidFill>
-                  <a:srgbClr val="55555B"/>
-                </a:solidFill>
-              </a:rPr>
-              <a:t>−0.02</a:t>
-            </a:r>
-            <a:endParaRPr lang="en-US" sz="2400" dirty="0"/>
-          </a:p>
-        </p:txBody>
-      </p:sp>
-      <p:sp>
-        <p:nvSpPr>
-          <p:cNvPr id="21" name="Text 17"/>
-          <p:cNvSpPr txBox="1"/>
-          <p:nvPr/>
-        </p:nvSpPr>
-        <p:spPr>
-          <a:xfrm>
-            <a:off x="7955280" y="5257800"/>
-            <a:ext cx="3566160" cy="274320"/>
-          </a:xfrm>
-          <a:prstGeom prst="rect">
-            <a:avLst/>
-          </a:prstGeom>
-          <a:noFill/>
-          <a:ln/>
-        </p:spPr>
-        <p:txBody>
-          <a:bodyPr wrap="square" lIns="0" tIns="0" rIns="0" bIns="0" rtlCol="0" anchor="ctr"/>
+          <a:bodyPr wrap="square" lIns="0" tIns="0" rIns="0" bIns="0" rtlCol="0" anchor="t"/>
           <a:lstStyle/>
           <a:p>
             <a:pPr indent="0" marL="0">
@@ -20511,7 +21135,7 @@
                   <a:srgbClr val="55555B"/>
                 </a:solidFill>
               </a:rPr>
-              <a:t>95% CI [−0.21, +0.17]</a:t>
+              <a:t>Hallucination rate 31% / 22% / 59%, retrieval recall 0.14 to 0.70 to 1.00, latency and tokens per model.</a:t>
             </a:r>
             <a:endParaRPr lang="en-US" sz="1200" dirty="0"/>
           </a:p>
@@ -20519,40 +21143,55 @@
       </p:sp>
       <p:sp>
         <p:nvSpPr>
-          <p:cNvPr id="22" name="Text 18"/>
-          <p:cNvSpPr txBox="1"/>
-          <p:nvPr/>
-        </p:nvSpPr>
-        <p:spPr>
-          <a:xfrm>
-            <a:off x="7955280" y="5513832"/>
-            <a:ext cx="3566160" cy="274320"/>
+          <p:cNvPr id="15" name="Shape 12"/>
+          <p:cNvSpPr/>
+          <p:nvPr/>
+        </p:nvSpPr>
+        <p:spPr>
+          <a:xfrm>
+            <a:off x="4937760" y="2103120"/>
+            <a:ext cx="6702552" cy="4160520"/>
+          </a:xfrm>
+          <a:prstGeom prst="roundRect">
+            <a:avLst>
+              <a:gd name="adj" fmla="val 1758"/>
+            </a:avLst>
+          </a:prstGeom>
+          <a:solidFill>
+            <a:srgbClr val="FFFFFF"/>
+          </a:solidFill>
+          <a:ln w="9525">
+            <a:solidFill>
+              <a:srgbClr val="D9D9DE"/>
+            </a:solidFill>
+            <a:prstDash val="solid"/>
+          </a:ln>
+        </p:spPr>
+      </p:sp>
+      <p:pic>
+        <p:nvPicPr>
+          <p:cNvPr id="16" name="Image 0" descr="Grafana panels: hallucination rate, retrieval quality, latency, tokens per answer">    </p:cNvPr>
+          <p:cNvPicPr>
+            <a:picLocks noChangeAspect="1"/>
+          </p:cNvPicPr>
+          <p:nvPr/>
+        </p:nvPicPr>
+        <p:blipFill>
+          <a:blip r:embed="rId1"/>
+          <a:stretch>
+            <a:fillRect/>
+          </a:stretch>
+        </p:blipFill>
+        <p:spPr>
+          <a:xfrm>
+            <a:off x="5029200" y="2194560"/>
+            <a:ext cx="6519672" cy="4074566"/>
           </a:xfrm>
           <a:prstGeom prst="rect">
             <a:avLst/>
           </a:prstGeom>
-          <a:noFill/>
-          <a:ln/>
-        </p:spPr>
-        <p:txBody>
-          <a:bodyPr wrap="square" lIns="0" tIns="0" rIns="0" bIns="0" rtlCol="0" anchor="ctr"/>
-          <a:lstStyle/>
-          <a:p>
-            <a:pPr indent="0" marL="0">
-              <a:buNone/>
-            </a:pPr>
-            <a:r>
-              <a:rPr lang="en-US" sz="1300" b="1" dirty="0">
-                <a:solidFill>
-                  <a:srgbClr val="55555B"/>
-                </a:solidFill>
-              </a:rPr>
-              <a:t>no effect detected</a:t>
-            </a:r>
-            <a:endParaRPr lang="en-US" sz="1300" dirty="0"/>
-          </a:p>
-        </p:txBody>
-      </p:sp>
+        </p:spPr>
+      </p:pic>
       <p:sp>
         <p:nvSpPr>
           <p:cNvPr id="25" name="Slide Number Placeholder 0"/>

--- a/docs/CodeOrigin_presentation.pptx
+++ b/docs/CodeOrigin_presentation.pptx
@@ -20,9 +20,15 @@
     <p:sldId id="268" r:id="rId14"/>
     <p:sldId id="269" r:id="rId15"/>
     <p:sldId id="270" r:id="rId16"/>
+    <p:sldId id="271" r:id="rId17"/>
+    <p:sldId id="272" r:id="rId18"/>
+    <p:sldId id="273" r:id="rId19"/>
+    <p:sldId id="274" r:id="rId20"/>
+    <p:sldId id="275" r:id="rId21"/>
+    <p:sldId id="276" r:id="rId22"/>
   </p:sldIdLst>
   <p:notesMasterIdLst>
-    <p:notesMasterId r:id="rId17"/>
+    <p:notesMasterId r:id="rId23"/>
   </p:notesMasterIdLst>
   <p:sldSz cx="12192000" cy="6858000"/>
   <p:notesSz cx="6858000" cy="12192000"/>
@@ -1061,7 +1067,7 @@
           <a:p>
             <a:r>
               <a:rPr lang="en-US" dirty="0"/>
-              <a:t>Overall correctness (all categories pooled) rises from no_context to code_only to code_history for both 7B models. The pre-registered test is the paired difference code_history minus code_only on the 24 history questions: llama2 +0.32, codellama +0.28, both with intervals excluding 0, so history is useful for them. starcoder2:3b shows no effect. Honest reading: automatic scoring, small samples, one repository.</a:t>
+              <a:t>Prometheus scrapes the gateway every 15 seconds and the evaluation service every 30 seconds, stores the time series for 15 days, and evaluates three alert rules. The gateway exports requests by route and status, a request-time histogram, guardrail triggers, LLM tokens and refusals. The evaluation service computes its numbers from stored runs at scrape time: correctness, history effect with its interval, verdict, failure taxonomy, jury score, run progress, and the quality and cost metrics. Grafana queries Prometheus (and Loki for logs). Alerts: GatewayDown, HighErrorRate over 5 percent, SlowAsk p95 over 60 seconds; all healthy, none firing.</a:t>
             </a:r>
             <a:endParaRPr lang="en-US" dirty="0"/>
           </a:p>
@@ -1149,7 +1155,7 @@
           <a:p>
             <a:r>
               <a:rPr lang="en-US" dirty="0"/>
-              <a:t>Top three rows are the held-out real repository. History effect is code_history minus code_only on the history questions, with a 95% bootstrap interval. It holds on a real repository: both 7B models pass the pre-registered rule, an independent LLM judge (DeepSeek) confirms it (+0.35 for both), and excluding two items an independent review flagged leaves the conclusions unchanged. starcoder2:3b gets no benefit on either repository: even with the gold evidence it mostly invents. One caution: on the 4 code-only control questions the judge hints history can hurt.</a:t>
+              <a:t>Three groups of findings. Evaluation (run 8): correctness rises from no context to code only to code with history for both 7B models; history effect plus 0.319 and plus 0.278, minus 0.021 for starcoder2; retrieval misses dominate code-only answers and fall with history; the gemma jury scored everything near 100 percent so it is not used. Quality and cost: hallucination 31, 22 and 59 percent; recall 0.14, 0.70, 1.00; mean latency 12.0, 14.5 and 2.3 seconds. Live metrics from five demo questions: all succeeded, p95 ask latency about 26 seconds, guardrails G1, G10 and G4 fired, no alerts.</a:t>
             </a:r>
             <a:endParaRPr lang="en-US" dirty="0"/>
           </a:p>
@@ -1237,7 +1243,7 @@
           <a:p>
             <a:r>
               <a:rPr lang="en-US" dirty="0"/>
-              <a:t>Each task maps to a question category on the real repository. Numbers are correctness in the RAG mode (code_history), automatic score then DeepSeek judge in brackets. With 2 to 10 questions per task a gap under 0.10 is a tie. Explanation, bug analysis and dependency links: llama2 and codellama tie, starcoder2 far behind. Code retrieval: codellama leads (4 questions). RAG overall: llama2 and codellama tie on accuracy; llama2 is faster at the median, codellama hallucinated less. Code generation and refactoring were not evaluated because the system answers questions and does not write code, so there is also no test-pass rate; do not invent numbers.</a:t>
+              <a:t>Run 8, the held-out run. Left: overall correctness per model and mode; the oracle bars are the ceiling. Right: the history effect, plus 0.319 for llama2, plus 0.278 for codellama, minus 0.021 for starcoder2.</a:t>
             </a:r>
             <a:endParaRPr lang="en-US" dirty="0"/>
           </a:p>
@@ -1325,7 +1331,7 @@
           <a:p>
             <a:r>
               <a:rPr lang="en-US" dirty="0"/>
-              <a:t>Each failure was found in real output and traced to a cause. (1) Retrieval missed an unusual phrasing: for "why was 1.0.0 removed from PyPI" it fetched unrelated issues and both models invented a reason. (2) History can distract on code-only questions: llama2 said the key derivation is hmac and cited an unrelated commit. (3) The refusal gate G2 did not fire for on-topic unanswerable questions; codellama invented a customer name. (4) Models rarely cite the gold source. (5) The automatic score is generous: DeepSeek rated 42 of 143 full-credit answers as only partly right or wrong; agreement kappa 0.75. Human check: I graded 18 factual rows by hand and agreed 18 of 18; the 16 technical rows are LLM-judged only.</a:t>
+              <a:t>Hallucination: llama2 31.2, codellama 21.9, starcoder2 59.4 percent. Retrieval: recall rises from 14 percent with code only to 70 percent with code and history to 100 percent with the oracle. Latency: starcoder2 is fastest at about 2.3 seconds but least reliable; the 7B models take 12 to 16 seconds.</a:t>
             </a:r>
             <a:endParaRPr lang="en-US" dirty="0"/>
           </a:p>
@@ -1413,7 +1419,7 @@
           <a:p>
             <a:r>
               <a:rPr lang="en-US" dirty="0"/>
-              <a:t>Open the website. Show: Ask (a real question with citations, the evidence chain and the guardrail trace), Repositories (the indexed repos), Evaluation (the held-out run and the which-model-for-what panel), and the slides. Suggested demo question on itsdangerous: "Why does itsdangerous keep SHA-1 as its default digest?"</a:t>
+              <a:t>Tokens written per answer: 126 for llama2, 173 for codellama, 147 for starcoder2. Unsupported-sentence ratio: 27.1, 26.1 and 36.7 percent. Refusal correctness is lowest with no context, because the model then answers questions it should refuse, and highest with retrieval.</a:t>
             </a:r>
             <a:endParaRPr lang="en-US" dirty="0"/>
           </a:p>
@@ -1501,7 +1507,7 @@
           <a:p>
             <a:r>
               <a:rPr lang="en-US" dirty="0"/>
-              <a:t>Be ready to explain: the research question, the four modes and why oracle exists, the decision rule, why starcoder2 is inconclusive (it cannot use evidence even when given it), what went wrong (retrieval misses, refusal gate, history distracting on code questions), and what is not validated (human grading covers factual rows only).</a:t>
+              <a:t>Live panels while five real questions were asked through the Ask API: p95 latency of the ask route about 26 seconds, guardrails G4, G1 and G10 fired, LLM tokens 6,635 in and 554 out for three answers, refusals off-topic and unsafe request, no 5xx errors.</a:t>
             </a:r>
             <a:endParaRPr lang="en-US" dirty="0"/>
           </a:p>
@@ -1525,6 +1531,358 @@
             <a:fld id="{F7021451-1387-4CA6-816F-3879F97B5CBC}" type="slidenum">
               <a:rPr lang="en-US"/>
               <a:t>15</a:t>
+            </a:fld>
+            <a:endParaRPr lang="en-US"/>
+          </a:p>
+        </p:txBody>
+      </p:sp>
+    </p:spTree>
+    <p:extLst>
+      <p:ext uri="{BB962C8B-B14F-4D97-AF65-F5344CB8AC3E}">
+        <p14:creationId xmlns:p14="http://schemas.microsoft.com/office/powerpoint/2010/main" val="1024086991"/>
+      </p:ext>
+    </p:extLst>
+  </p:cSld>
+  <p:clrMapOvr>
+    <a:masterClrMapping/>
+  </p:clrMapOvr>
+</p:notes>
+</file>
+
+<file path=ppt/notesSlides/notesSlide16.xml><?xml version="1.0" encoding="utf-8"?>
+<p:notes xmlns:a="http://schemas.openxmlformats.org/drawingml/2006/main" xmlns:r="http://schemas.openxmlformats.org/officeDocument/2006/relationships" xmlns:p="http://schemas.openxmlformats.org/presentationml/2006/main">
+  <p:cSld>
+    <p:spTree>
+      <p:nvGrpSpPr>
+        <p:cNvPr id="1" name=""/>
+        <p:cNvGrpSpPr/>
+        <p:nvPr/>
+      </p:nvGrpSpPr>
+      <p:grpSpPr>
+        <a:xfrm>
+          <a:off x="0" y="0"/>
+          <a:ext cx="0" cy="0"/>
+          <a:chOff x="0" y="0"/>
+          <a:chExt cx="0" cy="0"/>
+        </a:xfrm>
+      </p:grpSpPr>
+      <p:sp>
+        <p:nvSpPr>
+          <p:cNvPr id="2" name="Slide Image Placeholder 1"/>
+          <p:cNvSpPr>
+            <a:spLocks noGrp="1" noRot="1" noChangeAspect="1"/>
+          </p:cNvSpPr>
+          <p:nvPr>
+            <p:ph type="sldImg"/>
+          </p:nvPr>
+        </p:nvSpPr>
+        <p:spPr/>
+      </p:sp>
+      <p:sp>
+        <p:nvSpPr>
+          <p:cNvPr id="3" name="Notes Placeholder 2"/>
+          <p:cNvSpPr>
+            <a:spLocks noGrp="1"/>
+          </p:cNvSpPr>
+          <p:nvPr>
+            <p:ph type="body" idx="1"/>
+          </p:nvPr>
+        </p:nvSpPr>
+        <p:spPr/>
+        <p:txBody>
+          <a:bodyPr/>
+          <a:lstStyle/>
+          <a:p>
+            <a:r>
+              <a:rPr lang="en-US" dirty="0"/>
+              <a:t>Overall correctness (all categories pooled) rises from no_context to code_only to code_history for both 7B models. The pre-registered test is the paired difference code_history minus code_only on the 24 history questions: llama2 +0.32, codellama +0.28, both with intervals excluding 0, so history is useful for them. starcoder2:3b shows no effect. Honest reading: automatic scoring, small samples, one repository.</a:t>
+            </a:r>
+            <a:endParaRPr lang="en-US" dirty="0"/>
+          </a:p>
+        </p:txBody>
+      </p:sp>
+      <p:sp>
+        <p:nvSpPr>
+          <p:cNvPr id="4" name="Slide Number Placeholder 3"/>
+          <p:cNvSpPr>
+            <a:spLocks noGrp="1"/>
+          </p:cNvSpPr>
+          <p:nvPr>
+            <p:ph type="sldNum" sz="quarter" idx="10"/>
+          </p:nvPr>
+        </p:nvSpPr>
+        <p:spPr/>
+        <p:txBody>
+          <a:bodyPr/>
+          <a:lstStyle/>
+          <a:p>
+            <a:fld id="{F7021451-1387-4CA6-816F-3879F97B5CBC}" type="slidenum">
+              <a:rPr lang="en-US"/>
+              <a:t>16</a:t>
+            </a:fld>
+            <a:endParaRPr lang="en-US"/>
+          </a:p>
+        </p:txBody>
+      </p:sp>
+    </p:spTree>
+    <p:extLst>
+      <p:ext uri="{BB962C8B-B14F-4D97-AF65-F5344CB8AC3E}">
+        <p14:creationId xmlns:p14="http://schemas.microsoft.com/office/powerpoint/2010/main" val="1024086991"/>
+      </p:ext>
+    </p:extLst>
+  </p:cSld>
+  <p:clrMapOvr>
+    <a:masterClrMapping/>
+  </p:clrMapOvr>
+</p:notes>
+</file>
+
+<file path=ppt/notesSlides/notesSlide17.xml><?xml version="1.0" encoding="utf-8"?>
+<p:notes xmlns:a="http://schemas.openxmlformats.org/drawingml/2006/main" xmlns:r="http://schemas.openxmlformats.org/officeDocument/2006/relationships" xmlns:p="http://schemas.openxmlformats.org/presentationml/2006/main">
+  <p:cSld>
+    <p:spTree>
+      <p:nvGrpSpPr>
+        <p:cNvPr id="1" name=""/>
+        <p:cNvGrpSpPr/>
+        <p:nvPr/>
+      </p:nvGrpSpPr>
+      <p:grpSpPr>
+        <a:xfrm>
+          <a:off x="0" y="0"/>
+          <a:ext cx="0" cy="0"/>
+          <a:chOff x="0" y="0"/>
+          <a:chExt cx="0" cy="0"/>
+        </a:xfrm>
+      </p:grpSpPr>
+      <p:sp>
+        <p:nvSpPr>
+          <p:cNvPr id="2" name="Slide Image Placeholder 1"/>
+          <p:cNvSpPr>
+            <a:spLocks noGrp="1" noRot="1" noChangeAspect="1"/>
+          </p:cNvSpPr>
+          <p:nvPr>
+            <p:ph type="sldImg"/>
+          </p:nvPr>
+        </p:nvSpPr>
+        <p:spPr/>
+      </p:sp>
+      <p:sp>
+        <p:nvSpPr>
+          <p:cNvPr id="3" name="Notes Placeholder 2"/>
+          <p:cNvSpPr>
+            <a:spLocks noGrp="1"/>
+          </p:cNvSpPr>
+          <p:nvPr>
+            <p:ph type="body" idx="1"/>
+          </p:nvPr>
+        </p:nvSpPr>
+        <p:spPr/>
+        <p:txBody>
+          <a:bodyPr/>
+          <a:lstStyle/>
+          <a:p>
+            <a:r>
+              <a:rPr lang="en-US" dirty="0"/>
+              <a:t>Top three rows are the held-out real repository. History effect is code_history minus code_only on the history questions, with a 95% bootstrap interval. It holds on a real repository: both 7B models pass the pre-registered rule, an independent LLM judge (DeepSeek) confirms it (+0.35 for both), and excluding two items an independent review flagged leaves the conclusions unchanged. starcoder2:3b gets no benefit on either repository: even with the gold evidence it mostly invents. One caution: on the 4 code-only control questions the judge hints history can hurt.</a:t>
+            </a:r>
+            <a:endParaRPr lang="en-US" dirty="0"/>
+          </a:p>
+        </p:txBody>
+      </p:sp>
+      <p:sp>
+        <p:nvSpPr>
+          <p:cNvPr id="4" name="Slide Number Placeholder 3"/>
+          <p:cNvSpPr>
+            <a:spLocks noGrp="1"/>
+          </p:cNvSpPr>
+          <p:nvPr>
+            <p:ph type="sldNum" sz="quarter" idx="10"/>
+          </p:nvPr>
+        </p:nvSpPr>
+        <p:spPr/>
+        <p:txBody>
+          <a:bodyPr/>
+          <a:lstStyle/>
+          <a:p>
+            <a:fld id="{F7021451-1387-4CA6-816F-3879F97B5CBC}" type="slidenum">
+              <a:rPr lang="en-US"/>
+              <a:t>17</a:t>
+            </a:fld>
+            <a:endParaRPr lang="en-US"/>
+          </a:p>
+        </p:txBody>
+      </p:sp>
+    </p:spTree>
+    <p:extLst>
+      <p:ext uri="{BB962C8B-B14F-4D97-AF65-F5344CB8AC3E}">
+        <p14:creationId xmlns:p14="http://schemas.microsoft.com/office/powerpoint/2010/main" val="1024086991"/>
+      </p:ext>
+    </p:extLst>
+  </p:cSld>
+  <p:clrMapOvr>
+    <a:masterClrMapping/>
+  </p:clrMapOvr>
+</p:notes>
+</file>
+
+<file path=ppt/notesSlides/notesSlide18.xml><?xml version="1.0" encoding="utf-8"?>
+<p:notes xmlns:a="http://schemas.openxmlformats.org/drawingml/2006/main" xmlns:r="http://schemas.openxmlformats.org/officeDocument/2006/relationships" xmlns:p="http://schemas.openxmlformats.org/presentationml/2006/main">
+  <p:cSld>
+    <p:spTree>
+      <p:nvGrpSpPr>
+        <p:cNvPr id="1" name=""/>
+        <p:cNvGrpSpPr/>
+        <p:nvPr/>
+      </p:nvGrpSpPr>
+      <p:grpSpPr>
+        <a:xfrm>
+          <a:off x="0" y="0"/>
+          <a:ext cx="0" cy="0"/>
+          <a:chOff x="0" y="0"/>
+          <a:chExt cx="0" cy="0"/>
+        </a:xfrm>
+      </p:grpSpPr>
+      <p:sp>
+        <p:nvSpPr>
+          <p:cNvPr id="2" name="Slide Image Placeholder 1"/>
+          <p:cNvSpPr>
+            <a:spLocks noGrp="1" noRot="1" noChangeAspect="1"/>
+          </p:cNvSpPr>
+          <p:nvPr>
+            <p:ph type="sldImg"/>
+          </p:nvPr>
+        </p:nvSpPr>
+        <p:spPr/>
+      </p:sp>
+      <p:sp>
+        <p:nvSpPr>
+          <p:cNvPr id="3" name="Notes Placeholder 2"/>
+          <p:cNvSpPr>
+            <a:spLocks noGrp="1"/>
+          </p:cNvSpPr>
+          <p:nvPr>
+            <p:ph type="body" idx="1"/>
+          </p:nvPr>
+        </p:nvSpPr>
+        <p:spPr/>
+        <p:txBody>
+          <a:bodyPr/>
+          <a:lstStyle/>
+          <a:p>
+            <a:r>
+              <a:rPr lang="en-US" dirty="0"/>
+              <a:t>Each task maps to a question category on the real repository. Numbers are correctness in the RAG mode (code_history), automatic score then DeepSeek judge in brackets. With 2 to 10 questions per task a gap under 0.10 is a tie. Explanation, bug analysis and dependency links: llama2 and codellama tie, starcoder2 far behind. Code retrieval: codellama leads (4 questions). RAG overall: llama2 and codellama tie on accuracy; llama2 is faster at the median, codellama hallucinated less. Code generation and refactoring were not evaluated because the system answers questions and does not write code, so there is also no test-pass rate; do not invent numbers.</a:t>
+            </a:r>
+            <a:endParaRPr lang="en-US" dirty="0"/>
+          </a:p>
+        </p:txBody>
+      </p:sp>
+      <p:sp>
+        <p:nvSpPr>
+          <p:cNvPr id="4" name="Slide Number Placeholder 3"/>
+          <p:cNvSpPr>
+            <a:spLocks noGrp="1"/>
+          </p:cNvSpPr>
+          <p:nvPr>
+            <p:ph type="sldNum" sz="quarter" idx="10"/>
+          </p:nvPr>
+        </p:nvSpPr>
+        <p:spPr/>
+        <p:txBody>
+          <a:bodyPr/>
+          <a:lstStyle/>
+          <a:p>
+            <a:fld id="{F7021451-1387-4CA6-816F-3879F97B5CBC}" type="slidenum">
+              <a:rPr lang="en-US"/>
+              <a:t>18</a:t>
+            </a:fld>
+            <a:endParaRPr lang="en-US"/>
+          </a:p>
+        </p:txBody>
+      </p:sp>
+    </p:spTree>
+    <p:extLst>
+      <p:ext uri="{BB962C8B-B14F-4D97-AF65-F5344CB8AC3E}">
+        <p14:creationId xmlns:p14="http://schemas.microsoft.com/office/powerpoint/2010/main" val="1024086991"/>
+      </p:ext>
+    </p:extLst>
+  </p:cSld>
+  <p:clrMapOvr>
+    <a:masterClrMapping/>
+  </p:clrMapOvr>
+</p:notes>
+</file>
+
+<file path=ppt/notesSlides/notesSlide19.xml><?xml version="1.0" encoding="utf-8"?>
+<p:notes xmlns:a="http://schemas.openxmlformats.org/drawingml/2006/main" xmlns:r="http://schemas.openxmlformats.org/officeDocument/2006/relationships" xmlns:p="http://schemas.openxmlformats.org/presentationml/2006/main">
+  <p:cSld>
+    <p:spTree>
+      <p:nvGrpSpPr>
+        <p:cNvPr id="1" name=""/>
+        <p:cNvGrpSpPr/>
+        <p:nvPr/>
+      </p:nvGrpSpPr>
+      <p:grpSpPr>
+        <a:xfrm>
+          <a:off x="0" y="0"/>
+          <a:ext cx="0" cy="0"/>
+          <a:chOff x="0" y="0"/>
+          <a:chExt cx="0" cy="0"/>
+        </a:xfrm>
+      </p:grpSpPr>
+      <p:sp>
+        <p:nvSpPr>
+          <p:cNvPr id="2" name="Slide Image Placeholder 1"/>
+          <p:cNvSpPr>
+            <a:spLocks noGrp="1" noRot="1" noChangeAspect="1"/>
+          </p:cNvSpPr>
+          <p:nvPr>
+            <p:ph type="sldImg"/>
+          </p:nvPr>
+        </p:nvSpPr>
+        <p:spPr/>
+      </p:sp>
+      <p:sp>
+        <p:nvSpPr>
+          <p:cNvPr id="3" name="Notes Placeholder 2"/>
+          <p:cNvSpPr>
+            <a:spLocks noGrp="1"/>
+          </p:cNvSpPr>
+          <p:nvPr>
+            <p:ph type="body" idx="1"/>
+          </p:nvPr>
+        </p:nvSpPr>
+        <p:spPr/>
+        <p:txBody>
+          <a:bodyPr/>
+          <a:lstStyle/>
+          <a:p>
+            <a:r>
+              <a:rPr lang="en-US" dirty="0"/>
+              <a:t>Each failure was found in real output and traced to a cause. (1) Retrieval missed an unusual phrasing: for "why was 1.0.0 removed from PyPI" it fetched unrelated issues and both models invented a reason. (2) History can distract on code-only questions: llama2 said the key derivation is hmac and cited an unrelated commit. (3) The refusal gate G2 did not fire for on-topic unanswerable questions; codellama invented a customer name. (4) Models rarely cite the gold source. (5) The automatic score is generous: DeepSeek rated 42 of 143 full-credit answers as only partly right or wrong; agreement kappa 0.75. Human check: I graded 18 factual rows by hand and agreed 18 of 18; the 16 technical rows are LLM-judged only.</a:t>
+            </a:r>
+            <a:endParaRPr lang="en-US" dirty="0"/>
+          </a:p>
+        </p:txBody>
+      </p:sp>
+      <p:sp>
+        <p:nvSpPr>
+          <p:cNvPr id="4" name="Slide Number Placeholder 3"/>
+          <p:cNvSpPr>
+            <a:spLocks noGrp="1"/>
+          </p:cNvSpPr>
+          <p:nvPr>
+            <p:ph type="sldNum" sz="quarter" idx="10"/>
+          </p:nvPr>
+        </p:nvSpPr>
+        <p:spPr/>
+        <p:txBody>
+          <a:bodyPr/>
+          <a:lstStyle/>
+          <a:p>
+            <a:fld id="{F7021451-1387-4CA6-816F-3879F97B5CBC}" type="slidenum">
+              <a:rPr lang="en-US"/>
+              <a:t>19</a:t>
             </a:fld>
             <a:endParaRPr lang="en-US"/>
           </a:p>
@@ -1631,6 +1989,182 @@
 </p:notes>
 </file>
 
+<file path=ppt/notesSlides/notesSlide20.xml><?xml version="1.0" encoding="utf-8"?>
+<p:notes xmlns:a="http://schemas.openxmlformats.org/drawingml/2006/main" xmlns:r="http://schemas.openxmlformats.org/officeDocument/2006/relationships" xmlns:p="http://schemas.openxmlformats.org/presentationml/2006/main">
+  <p:cSld>
+    <p:spTree>
+      <p:nvGrpSpPr>
+        <p:cNvPr id="1" name=""/>
+        <p:cNvGrpSpPr/>
+        <p:nvPr/>
+      </p:nvGrpSpPr>
+      <p:grpSpPr>
+        <a:xfrm>
+          <a:off x="0" y="0"/>
+          <a:ext cx="0" cy="0"/>
+          <a:chOff x="0" y="0"/>
+          <a:chExt cx="0" cy="0"/>
+        </a:xfrm>
+      </p:grpSpPr>
+      <p:sp>
+        <p:nvSpPr>
+          <p:cNvPr id="2" name="Slide Image Placeholder 1"/>
+          <p:cNvSpPr>
+            <a:spLocks noGrp="1" noRot="1" noChangeAspect="1"/>
+          </p:cNvSpPr>
+          <p:nvPr>
+            <p:ph type="sldImg"/>
+          </p:nvPr>
+        </p:nvSpPr>
+        <p:spPr/>
+      </p:sp>
+      <p:sp>
+        <p:nvSpPr>
+          <p:cNvPr id="3" name="Notes Placeholder 2"/>
+          <p:cNvSpPr>
+            <a:spLocks noGrp="1"/>
+          </p:cNvSpPr>
+          <p:nvPr>
+            <p:ph type="body" idx="1"/>
+          </p:nvPr>
+        </p:nvSpPr>
+        <p:spPr/>
+        <p:txBody>
+          <a:bodyPr/>
+          <a:lstStyle/>
+          <a:p>
+            <a:r>
+              <a:rPr lang="en-US" dirty="0"/>
+              <a:t>Open the website. Show: Ask (a real question with citations, the evidence chain and the guardrail trace), Repositories (the indexed repos), Evaluation (the held-out run and the which-model-for-what panel), and the slides. Suggested demo question on itsdangerous: "Why does itsdangerous keep SHA-1 as its default digest?"</a:t>
+            </a:r>
+            <a:endParaRPr lang="en-US" dirty="0"/>
+          </a:p>
+        </p:txBody>
+      </p:sp>
+      <p:sp>
+        <p:nvSpPr>
+          <p:cNvPr id="4" name="Slide Number Placeholder 3"/>
+          <p:cNvSpPr>
+            <a:spLocks noGrp="1"/>
+          </p:cNvSpPr>
+          <p:nvPr>
+            <p:ph type="sldNum" sz="quarter" idx="10"/>
+          </p:nvPr>
+        </p:nvSpPr>
+        <p:spPr/>
+        <p:txBody>
+          <a:bodyPr/>
+          <a:lstStyle/>
+          <a:p>
+            <a:fld id="{F7021451-1387-4CA6-816F-3879F97B5CBC}" type="slidenum">
+              <a:rPr lang="en-US"/>
+              <a:t>20</a:t>
+            </a:fld>
+            <a:endParaRPr lang="en-US"/>
+          </a:p>
+        </p:txBody>
+      </p:sp>
+    </p:spTree>
+    <p:extLst>
+      <p:ext uri="{BB962C8B-B14F-4D97-AF65-F5344CB8AC3E}">
+        <p14:creationId xmlns:p14="http://schemas.microsoft.com/office/powerpoint/2010/main" val="1024086991"/>
+      </p:ext>
+    </p:extLst>
+  </p:cSld>
+  <p:clrMapOvr>
+    <a:masterClrMapping/>
+  </p:clrMapOvr>
+</p:notes>
+</file>
+
+<file path=ppt/notesSlides/notesSlide21.xml><?xml version="1.0" encoding="utf-8"?>
+<p:notes xmlns:a="http://schemas.openxmlformats.org/drawingml/2006/main" xmlns:r="http://schemas.openxmlformats.org/officeDocument/2006/relationships" xmlns:p="http://schemas.openxmlformats.org/presentationml/2006/main">
+  <p:cSld>
+    <p:spTree>
+      <p:nvGrpSpPr>
+        <p:cNvPr id="1" name=""/>
+        <p:cNvGrpSpPr/>
+        <p:nvPr/>
+      </p:nvGrpSpPr>
+      <p:grpSpPr>
+        <a:xfrm>
+          <a:off x="0" y="0"/>
+          <a:ext cx="0" cy="0"/>
+          <a:chOff x="0" y="0"/>
+          <a:chExt cx="0" cy="0"/>
+        </a:xfrm>
+      </p:grpSpPr>
+      <p:sp>
+        <p:nvSpPr>
+          <p:cNvPr id="2" name="Slide Image Placeholder 1"/>
+          <p:cNvSpPr>
+            <a:spLocks noGrp="1" noRot="1" noChangeAspect="1"/>
+          </p:cNvSpPr>
+          <p:nvPr>
+            <p:ph type="sldImg"/>
+          </p:nvPr>
+        </p:nvSpPr>
+        <p:spPr/>
+      </p:sp>
+      <p:sp>
+        <p:nvSpPr>
+          <p:cNvPr id="3" name="Notes Placeholder 2"/>
+          <p:cNvSpPr>
+            <a:spLocks noGrp="1"/>
+          </p:cNvSpPr>
+          <p:nvPr>
+            <p:ph type="body" idx="1"/>
+          </p:nvPr>
+        </p:nvSpPr>
+        <p:spPr/>
+        <p:txBody>
+          <a:bodyPr/>
+          <a:lstStyle/>
+          <a:p>
+            <a:r>
+              <a:rPr lang="en-US" dirty="0"/>
+              <a:t>Be ready to explain: the research question, the four modes and why oracle exists, the decision rule, why starcoder2 is inconclusive (it cannot use evidence even when given it), what went wrong (retrieval misses, refusal gate, history distracting on code questions), and what is not validated (human grading covers factual rows only).</a:t>
+            </a:r>
+            <a:endParaRPr lang="en-US" dirty="0"/>
+          </a:p>
+        </p:txBody>
+      </p:sp>
+      <p:sp>
+        <p:nvSpPr>
+          <p:cNvPr id="4" name="Slide Number Placeholder 3"/>
+          <p:cNvSpPr>
+            <a:spLocks noGrp="1"/>
+          </p:cNvSpPr>
+          <p:nvPr>
+            <p:ph type="sldNum" sz="quarter" idx="10"/>
+          </p:nvPr>
+        </p:nvSpPr>
+        <p:spPr/>
+        <p:txBody>
+          <a:bodyPr/>
+          <a:lstStyle/>
+          <a:p>
+            <a:fld id="{F7021451-1387-4CA6-816F-3879F97B5CBC}" type="slidenum">
+              <a:rPr lang="en-US"/>
+              <a:t>21</a:t>
+            </a:fld>
+            <a:endParaRPr lang="en-US"/>
+          </a:p>
+        </p:txBody>
+      </p:sp>
+    </p:spTree>
+    <p:extLst>
+      <p:ext uri="{BB962C8B-B14F-4D97-AF65-F5344CB8AC3E}">
+        <p14:creationId xmlns:p14="http://schemas.microsoft.com/office/powerpoint/2010/main" val="1024086991"/>
+      </p:ext>
+    </p:extLst>
+  </p:cSld>
+  <p:clrMapOvr>
+    <a:masterClrMapping/>
+  </p:clrMapOvr>
+</p:notes>
+</file>
+
 <file path=ppt/notesSlides/notesSlide3.xml><?xml version="1.0" encoding="utf-8"?>
 <p:notes xmlns:a="http://schemas.openxmlformats.org/drawingml/2006/main" xmlns:r="http://schemas.openxmlformats.org/officeDocument/2006/relationships" xmlns:p="http://schemas.openxmlformats.org/presentationml/2006/main">
   <p:cSld>
@@ -2205,7 +2739,7 @@
           <a:p>
             <a:r>
               <a:rPr lang="en-US" dirty="0"/>
-              <a:t>Show Grafana at localhost:3000 (dashboard CodeOrigin overview). Top: live service metrics from the gateway (requests per second, p95 latency, guardrail triggers, LLM tokens) and logs from Loki. Middle: the evaluation results of the selected run exported as metrics by the eval service. Bottom: quality and cost per model: hallucination rate, retrieval recall and precision by mode, latency, tokens. Pick the run in the Eval run selector. Ask a question on the Ask page first so the live panels move.</a:t>
+              <a:t>CI, continuous integration: on every push GitHub Actions builds the project and runs all checks automatically; a red run means the change broke something. CD, continuous delivery: when a version tag is pushed the release workflow builds, scans and publishes the 7 container images to GHCR and creates a release. CD is configured but has not run yet because no tag was pushed; say so. Run history: 22 runs on the Code_Origin repository, 14 CI passes, 1 failure (lint errors in a new script, fixed in the next commit), 6 cancelled because a newer push superseded them, 1 nightly evaluation run that passed. A CI run takes about 3 minutes and has 11 jobs.</a:t>
             </a:r>
             <a:endParaRPr lang="en-US" dirty="0"/>
           </a:p>
@@ -2986,7 +3520,7 @@
                   <a:srgbClr val="0071E3"/>
                 </a:solidFill>
               </a:rPr>
-              <a:t>RESULTS: HELD-OUT RUN ON A REAL REPOSITORY</a:t>
+              <a:t>PROMETHEUS</a:t>
             </a:r>
             <a:endParaRPr lang="en-US" sz="1200" dirty="0"/>
           </a:p>
@@ -3022,7 +3556,7 @@
                   <a:srgbClr val="1D1D1F"/>
                 </a:solidFill>
               </a:rPr>
-              <a:t>What the experiment shows</a:t>
+              <a:t>What Prometheus was used for</a:t>
             </a:r>
             <a:endParaRPr lang="en-US" sz="3600" dirty="0"/>
           </a:p>
@@ -3058,78 +3592,26 @@
                   <a:srgbClr val="55555B"/>
                 </a:solidFill>
               </a:rPr>
-              <a:t>Run #8: pallets/itsdangerous, 35 questions, 399 answers, real local models. Overall correctness per mode.</a:t>
+              <a:t>Prometheus is the metrics database behind the dashboard: it collects numbers from our services on a schedule and keeps them.</a:t>
             </a:r>
             <a:endParaRPr lang="en-US" sz="1600" dirty="0"/>
           </a:p>
         </p:txBody>
       </p:sp>
-      <p:graphicFrame>
-        <p:nvGraphicFramePr>
-          <p:cNvPr id="6" name="Chart 0" descr=""/>
-          <p:cNvGraphicFramePr/>
-          <p:nvPr/>
-        </p:nvGraphicFramePr>
-        <p:xfrm>
-          <a:off x="548640" y="2011680"/>
-          <a:ext cx="6949440" cy="4206240"/>
-        </p:xfrm>
-        <a:graphic xmlns:a="http://schemas.openxmlformats.org/drawingml/2006/main">
-          <a:graphicData uri="http://schemas.openxmlformats.org/drawingml/2006/chart">
-            <c:chart xmlns:c="http://schemas.openxmlformats.org/drawingml/2006/chart" r:id="rId1"/>
-          </a:graphicData>
-        </a:graphic>
-      </p:graphicFrame>
-      <p:sp>
-        <p:nvSpPr>
-          <p:cNvPr id="7" name="Text 3"/>
-          <p:cNvSpPr txBox="1"/>
-          <p:nvPr/>
-        </p:nvSpPr>
-        <p:spPr>
-          <a:xfrm>
-            <a:off x="7772400" y="2011680"/>
-            <a:ext cx="3840480" cy="320040"/>
-          </a:xfrm>
-          <a:prstGeom prst="rect">
-            <a:avLst/>
-          </a:prstGeom>
-          <a:noFill/>
-          <a:ln/>
-        </p:spPr>
-        <p:txBody>
-          <a:bodyPr wrap="square" lIns="0" tIns="0" rIns="0" bIns="0" rtlCol="0" anchor="ctr"/>
-          <a:lstStyle/>
-          <a:p>
-            <a:pPr indent="0" marL="0">
-              <a:buNone/>
-            </a:pPr>
-            <a:r>
-              <a:rPr lang="en-US" sz="1400" b="1" dirty="0">
-                <a:solidFill>
-                  <a:srgbClr val="1D1D1F"/>
-                </a:solidFill>
-              </a:rPr>
-              <a:t>History vs code-only (24 history questions)</a:t>
-            </a:r>
-            <a:endParaRPr lang="en-US" sz="1400" dirty="0"/>
-          </a:p>
-        </p:txBody>
-      </p:sp>
-      <p:sp>
-        <p:nvSpPr>
-          <p:cNvPr id="8" name="Shape 4"/>
+      <p:sp>
+        <p:nvSpPr>
+          <p:cNvPr id="6" name="Shape 3"/>
           <p:cNvSpPr/>
           <p:nvPr/>
         </p:nvSpPr>
         <p:spPr>
           <a:xfrm>
-            <a:off x="7772400" y="2423160"/>
-            <a:ext cx="3867912" cy="1051560"/>
+            <a:off x="548640" y="2148840"/>
+            <a:ext cx="2606040" cy="1325880"/>
           </a:xfrm>
           <a:prstGeom prst="roundRect">
             <a:avLst>
-              <a:gd name="adj" fmla="val 8696"/>
+              <a:gd name="adj" fmla="val 6897"/>
             </a:avLst>
           </a:prstGeom>
           <a:solidFill>
@@ -3145,14 +3627,14 @@
       </p:sp>
       <p:sp>
         <p:nvSpPr>
-          <p:cNvPr id="9" name="Text 5"/>
+          <p:cNvPr id="7" name="Text 4"/>
           <p:cNvSpPr txBox="1"/>
           <p:nvPr/>
         </p:nvSpPr>
         <p:spPr>
           <a:xfrm>
-            <a:off x="7955280" y="2514600"/>
-            <a:ext cx="2011680" cy="320040"/>
+            <a:off x="658368" y="2148840"/>
+            <a:ext cx="2386584" cy="1325880"/>
           </a:xfrm>
           <a:prstGeom prst="rect">
             <a:avLst/>
@@ -3173,68 +3655,10 @@
                   <a:srgbClr val="1D1D1F"/>
                 </a:solidFill>
               </a:rPr>
-              <a:t>llama2</a:t>
+              <a:t>Gateway /metrics</a:t>
             </a:r>
             <a:endParaRPr lang="en-US" sz="1500" dirty="0"/>
           </a:p>
-        </p:txBody>
-      </p:sp>
-      <p:sp>
-        <p:nvSpPr>
-          <p:cNvPr id="10" name="Text 6"/>
-          <p:cNvSpPr txBox="1"/>
-          <p:nvPr/>
-        </p:nvSpPr>
-        <p:spPr>
-          <a:xfrm>
-            <a:off x="9966960" y="2468880"/>
-            <a:ext cx="1554480" cy="457200"/>
-          </a:xfrm>
-          <a:prstGeom prst="rect">
-            <a:avLst/>
-          </a:prstGeom>
-          <a:noFill/>
-          <a:ln/>
-        </p:spPr>
-        <p:txBody>
-          <a:bodyPr wrap="square" lIns="0" tIns="0" rIns="0" bIns="0" rtlCol="0" anchor="ctr"/>
-          <a:lstStyle/>
-          <a:p>
-            <a:pPr algn="r" indent="0" marL="0">
-              <a:buNone/>
-            </a:pPr>
-            <a:r>
-              <a:rPr lang="en-US" sz="2400" b="1" dirty="0">
-                <a:solidFill>
-                  <a:srgbClr val="1E9E6A"/>
-                </a:solidFill>
-              </a:rPr>
-              <a:t>+0.32</a:t>
-            </a:r>
-            <a:endParaRPr lang="en-US" sz="2400" dirty="0"/>
-          </a:p>
-        </p:txBody>
-      </p:sp>
-      <p:sp>
-        <p:nvSpPr>
-          <p:cNvPr id="11" name="Text 7"/>
-          <p:cNvSpPr txBox="1"/>
-          <p:nvPr/>
-        </p:nvSpPr>
-        <p:spPr>
-          <a:xfrm>
-            <a:off x="7955280" y="2880360"/>
-            <a:ext cx="3566160" cy="274320"/>
-          </a:xfrm>
-          <a:prstGeom prst="rect">
-            <a:avLst/>
-          </a:prstGeom>
-          <a:noFill/>
-          <a:ln/>
-        </p:spPr>
-        <p:txBody>
-          <a:bodyPr wrap="square" lIns="0" tIns="0" rIns="0" bIns="0" rtlCol="0" anchor="ctr"/>
-          <a:lstStyle/>
           <a:p>
             <a:pPr indent="0" marL="0">
               <a:buNone/>
@@ -3245,62 +3669,26 @@
                   <a:srgbClr val="55555B"/>
                 </a:solidFill>
               </a:rPr>
-              <a:t>95% CI [+0.07, +0.55]</a:t>
-            </a:r>
-            <a:endParaRPr lang="en-US" sz="1200" dirty="0"/>
-          </a:p>
-        </p:txBody>
-      </p:sp>
-      <p:sp>
-        <p:nvSpPr>
-          <p:cNvPr id="12" name="Text 8"/>
-          <p:cNvSpPr txBox="1"/>
-          <p:nvPr/>
-        </p:nvSpPr>
-        <p:spPr>
-          <a:xfrm>
-            <a:off x="7955280" y="3136392"/>
-            <a:ext cx="3566160" cy="274320"/>
-          </a:xfrm>
-          <a:prstGeom prst="rect">
-            <a:avLst/>
-          </a:prstGeom>
-          <a:noFill/>
-          <a:ln/>
-        </p:spPr>
-        <p:txBody>
-          <a:bodyPr wrap="square" lIns="0" tIns="0" rIns="0" bIns="0" rtlCol="0" anchor="ctr"/>
-          <a:lstStyle/>
-          <a:p>
-            <a:pPr indent="0" marL="0">
-              <a:buNone/>
-            </a:pPr>
-            <a:r>
-              <a:rPr lang="en-US" sz="1300" b="1" dirty="0">
-                <a:solidFill>
-                  <a:srgbClr val="1E9E6A"/>
-                </a:solidFill>
-              </a:rPr>
-              <a:t>history is useful</a:t>
-            </a:r>
-            <a:endParaRPr lang="en-US" sz="1300" dirty="0"/>
-          </a:p>
-        </p:txBody>
-      </p:sp>
-      <p:sp>
-        <p:nvSpPr>
-          <p:cNvPr id="13" name="Shape 9"/>
+              <a:t>requests, latency, guardrails, tokens, refusals; every 15 s</a:t>
+            </a:r>
+            <a:endParaRPr lang="en-US" sz="1500" dirty="0"/>
+          </a:p>
+        </p:txBody>
+      </p:sp>
+      <p:sp>
+        <p:nvSpPr>
+          <p:cNvPr id="8" name="Shape 5"/>
           <p:cNvSpPr/>
           <p:nvPr/>
         </p:nvSpPr>
         <p:spPr>
           <a:xfrm>
-            <a:off x="7772400" y="3611880"/>
-            <a:ext cx="3867912" cy="1051560"/>
+            <a:off x="3376879" y="2148840"/>
+            <a:ext cx="2606040" cy="1325880"/>
           </a:xfrm>
           <a:prstGeom prst="roundRect">
             <a:avLst>
-              <a:gd name="adj" fmla="val 8696"/>
+              <a:gd name="adj" fmla="val 6897"/>
             </a:avLst>
           </a:prstGeom>
           <a:solidFill>
@@ -3316,14 +3704,14 @@
       </p:sp>
       <p:sp>
         <p:nvSpPr>
-          <p:cNvPr id="14" name="Text 10"/>
+          <p:cNvPr id="9" name="Text 6"/>
           <p:cNvSpPr txBox="1"/>
           <p:nvPr/>
         </p:nvSpPr>
         <p:spPr>
           <a:xfrm>
-            <a:off x="7955280" y="3703320"/>
-            <a:ext cx="2011680" cy="320040"/>
+            <a:off x="3486607" y="2148840"/>
+            <a:ext cx="2386584" cy="1325880"/>
           </a:xfrm>
           <a:prstGeom prst="rect">
             <a:avLst/>
@@ -3344,22 +3732,63 @@
                   <a:srgbClr val="1D1D1F"/>
                 </a:solidFill>
               </a:rPr>
-              <a:t>codellama:7b</a:t>
+              <a:t>Eval service /metrics</a:t>
             </a:r>
             <a:endParaRPr lang="en-US" sz="1500" dirty="0"/>
           </a:p>
-        </p:txBody>
-      </p:sp>
-      <p:sp>
-        <p:nvSpPr>
-          <p:cNvPr id="15" name="Text 11"/>
+          <a:p>
+            <a:pPr indent="0" marL="0">
+              <a:buNone/>
+            </a:pPr>
+            <a:r>
+              <a:rPr lang="en-US" sz="1200" dirty="0">
+                <a:solidFill>
+                  <a:srgbClr val="55555B"/>
+                </a:solidFill>
+              </a:rPr>
+              <a:t>evaluation scores from stored runs; every 30 s</a:t>
+            </a:r>
+            <a:endParaRPr lang="en-US" sz="1500" dirty="0"/>
+          </a:p>
+        </p:txBody>
+      </p:sp>
+      <p:sp>
+        <p:nvSpPr>
+          <p:cNvPr id="10" name="Shape 7"/>
+          <p:cNvSpPr/>
+          <p:nvPr/>
+        </p:nvSpPr>
+        <p:spPr>
+          <a:xfrm>
+            <a:off x="6205118" y="2148840"/>
+            <a:ext cx="2606040" cy="1325880"/>
+          </a:xfrm>
+          <a:prstGeom prst="roundRect">
+            <a:avLst>
+              <a:gd name="adj" fmla="val 6897"/>
+            </a:avLst>
+          </a:prstGeom>
+          <a:solidFill>
+            <a:srgbClr val="E6F0FC"/>
+          </a:solidFill>
+          <a:ln w="19050">
+            <a:solidFill>
+              <a:srgbClr val="0071E3"/>
+            </a:solidFill>
+            <a:prstDash val="solid"/>
+          </a:ln>
+        </p:spPr>
+      </p:sp>
+      <p:sp>
+        <p:nvSpPr>
+          <p:cNvPr id="11" name="Text 8"/>
           <p:cNvSpPr txBox="1"/>
           <p:nvPr/>
         </p:nvSpPr>
         <p:spPr>
           <a:xfrm>
-            <a:off x="9966960" y="3657600"/>
-            <a:ext cx="1554480" cy="457200"/>
+            <a:off x="6314846" y="2148840"/>
+            <a:ext cx="2386584" cy="1325880"/>
           </a:xfrm>
           <a:prstGeom prst="rect">
             <a:avLst/>
@@ -3371,107 +3800,49 @@
           <a:bodyPr wrap="square" lIns="0" tIns="0" rIns="0" bIns="0" rtlCol="0" anchor="ctr"/>
           <a:lstStyle/>
           <a:p>
-            <a:pPr algn="r" indent="0" marL="0">
-              <a:buNone/>
-            </a:pPr>
-            <a:r>
-              <a:rPr lang="en-US" sz="2400" b="1" dirty="0">
-                <a:solidFill>
-                  <a:srgbClr val="1E9E6A"/>
-                </a:solidFill>
-              </a:rPr>
-              <a:t>+0.28</a:t>
-            </a:r>
-            <a:endParaRPr lang="en-US" sz="2400" dirty="0"/>
-          </a:p>
-        </p:txBody>
-      </p:sp>
-      <p:sp>
-        <p:nvSpPr>
-          <p:cNvPr id="16" name="Text 12"/>
-          <p:cNvSpPr txBox="1"/>
-          <p:nvPr/>
-        </p:nvSpPr>
-        <p:spPr>
-          <a:xfrm>
-            <a:off x="7955280" y="4069080"/>
-            <a:ext cx="3566160" cy="274320"/>
-          </a:xfrm>
-          <a:prstGeom prst="rect">
-            <a:avLst/>
-          </a:prstGeom>
-          <a:noFill/>
-          <a:ln/>
-        </p:spPr>
-        <p:txBody>
-          <a:bodyPr wrap="square" lIns="0" tIns="0" rIns="0" bIns="0" rtlCol="0" anchor="ctr"/>
-          <a:lstStyle/>
-          <a:p>
             <a:pPr indent="0" marL="0">
               <a:buNone/>
             </a:pPr>
             <a:r>
+              <a:rPr lang="en-US" sz="1500" b="1" dirty="0">
+                <a:solidFill>
+                  <a:srgbClr val="1D1D1F"/>
+                </a:solidFill>
+              </a:rPr>
+              <a:t>Prometheus :9090</a:t>
+            </a:r>
+            <a:endParaRPr lang="en-US" sz="1500" dirty="0"/>
+          </a:p>
+          <a:p>
+            <a:pPr indent="0" marL="0">
+              <a:buNone/>
+            </a:pPr>
+            <a:r>
               <a:rPr lang="en-US" sz="1200" dirty="0">
                 <a:solidFill>
                   <a:srgbClr val="55555B"/>
                 </a:solidFill>
               </a:rPr>
-              <a:t>95% CI [+0.05, +0.49]</a:t>
-            </a:r>
-            <a:endParaRPr lang="en-US" sz="1200" dirty="0"/>
-          </a:p>
-        </p:txBody>
-      </p:sp>
-      <p:sp>
-        <p:nvSpPr>
-          <p:cNvPr id="17" name="Text 13"/>
-          <p:cNvSpPr txBox="1"/>
-          <p:nvPr/>
-        </p:nvSpPr>
-        <p:spPr>
-          <a:xfrm>
-            <a:off x="7955280" y="4325112"/>
-            <a:ext cx="3566160" cy="274320"/>
-          </a:xfrm>
-          <a:prstGeom prst="rect">
-            <a:avLst/>
-          </a:prstGeom>
-          <a:noFill/>
-          <a:ln/>
-        </p:spPr>
-        <p:txBody>
-          <a:bodyPr wrap="square" lIns="0" tIns="0" rIns="0" bIns="0" rtlCol="0" anchor="ctr"/>
-          <a:lstStyle/>
-          <a:p>
-            <a:pPr indent="0" marL="0">
-              <a:buNone/>
-            </a:pPr>
-            <a:r>
-              <a:rPr lang="en-US" sz="1300" b="1" dirty="0">
-                <a:solidFill>
-                  <a:srgbClr val="1E9E6A"/>
-                </a:solidFill>
-              </a:rPr>
-              <a:t>history is useful</a:t>
-            </a:r>
-            <a:endParaRPr lang="en-US" sz="1300" dirty="0"/>
-          </a:p>
-        </p:txBody>
-      </p:sp>
-      <p:sp>
-        <p:nvSpPr>
-          <p:cNvPr id="18" name="Shape 14"/>
+              <a:t>stores 15 days of time series; evaluates alert rules</a:t>
+            </a:r>
+            <a:endParaRPr lang="en-US" sz="1500" dirty="0"/>
+          </a:p>
+        </p:txBody>
+      </p:sp>
+      <p:sp>
+        <p:nvSpPr>
+          <p:cNvPr id="12" name="Shape 9"/>
           <p:cNvSpPr/>
           <p:nvPr/>
         </p:nvSpPr>
         <p:spPr>
           <a:xfrm>
-            <a:off x="7772400" y="4800600"/>
-            <a:ext cx="3867912" cy="1051560"/>
+            <a:off x="9033358" y="2148840"/>
+            <a:ext cx="2606040" cy="1325880"/>
           </a:xfrm>
           <a:prstGeom prst="roundRect">
             <a:avLst>
-              <a:gd name="adj" fmla="val 8696"/>
+              <a:gd name="adj" fmla="val 6897"/>
             </a:avLst>
           </a:prstGeom>
           <a:solidFill>
@@ -3487,14 +3858,14 @@
       </p:sp>
       <p:sp>
         <p:nvSpPr>
-          <p:cNvPr id="19" name="Text 15"/>
+          <p:cNvPr id="13" name="Text 10"/>
           <p:cNvSpPr txBox="1"/>
           <p:nvPr/>
         </p:nvSpPr>
         <p:spPr>
           <a:xfrm>
-            <a:off x="7955280" y="4892040"/>
-            <a:ext cx="2011680" cy="320040"/>
+            <a:off x="9143086" y="2148840"/>
+            <a:ext cx="2386584" cy="1325880"/>
           </a:xfrm>
           <a:prstGeom prst="rect">
             <a:avLst/>
@@ -3515,22 +3886,70 @@
                   <a:srgbClr val="1D1D1F"/>
                 </a:solidFill>
               </a:rPr>
-              <a:t>starcoder2:3b</a:t>
+              <a:t>Grafana :3000</a:t>
             </a:r>
             <a:endParaRPr lang="en-US" sz="1500" dirty="0"/>
           </a:p>
-        </p:txBody>
-      </p:sp>
-      <p:sp>
-        <p:nvSpPr>
-          <p:cNvPr id="20" name="Text 16"/>
+          <a:p>
+            <a:pPr indent="0" marL="0">
+              <a:buNone/>
+            </a:pPr>
+            <a:r>
+              <a:rPr lang="en-US" sz="1200" dirty="0">
+                <a:solidFill>
+                  <a:srgbClr val="55555B"/>
+                </a:solidFill>
+              </a:rPr>
+              <a:t>queries Prometheus and Loki and draws the dashboard</a:t>
+            </a:r>
+            <a:endParaRPr lang="en-US" sz="1500" dirty="0"/>
+          </a:p>
+        </p:txBody>
+      </p:sp>
+      <p:sp>
+        <p:nvSpPr>
+          <p:cNvPr id="14" name="Shape 11"/>
+          <p:cNvSpPr/>
+          <p:nvPr/>
+        </p:nvSpPr>
+        <p:spPr>
+          <a:xfrm>
+            <a:off x="548640" y="3703320"/>
+            <a:ext cx="5486400" cy="2514600"/>
+          </a:xfrm>
+          <a:prstGeom prst="roundRect">
+            <a:avLst>
+              <a:gd name="adj" fmla="val 3636"/>
+            </a:avLst>
+          </a:prstGeom>
+          <a:solidFill>
+            <a:srgbClr val="FFFFFF"/>
+          </a:solidFill>
+          <a:ln w="9525">
+            <a:solidFill>
+              <a:srgbClr val="D9D9DE"/>
+            </a:solidFill>
+            <a:prstDash val="solid"/>
+          </a:ln>
+          <a:effectLst>
+            <a:outerShdw sx="100000" sy="100000" kx="0" ky="0" algn="bl" rotWithShape="0" blurRad="76200" dist="12700" dir="5400000">
+              <a:srgbClr val="000000">
+                <a:alpha val="8000"/>
+              </a:srgbClr>
+            </a:outerShdw>
+          </a:effectLst>
+        </p:spPr>
+      </p:sp>
+      <p:sp>
+        <p:nvSpPr>
+          <p:cNvPr id="15" name="Text 12"/>
           <p:cNvSpPr txBox="1"/>
           <p:nvPr/>
         </p:nvSpPr>
         <p:spPr>
           <a:xfrm>
-            <a:off x="9966960" y="4846320"/>
-            <a:ext cx="1554480" cy="457200"/>
+            <a:off x="731520" y="3840480"/>
+            <a:ext cx="5120640" cy="310896"/>
           </a:xfrm>
           <a:prstGeom prst="rect">
             <a:avLst/>
@@ -3539,34 +3958,34 @@
           <a:ln/>
         </p:spPr>
         <p:txBody>
-          <a:bodyPr wrap="square" lIns="0" tIns="0" rIns="0" bIns="0" rtlCol="0" anchor="ctr"/>
-          <a:lstStyle/>
-          <a:p>
-            <a:pPr algn="r" indent="0" marL="0">
-              <a:buNone/>
-            </a:pPr>
-            <a:r>
-              <a:rPr lang="en-US" sz="2400" b="1" dirty="0">
-                <a:solidFill>
-                  <a:srgbClr val="55555B"/>
-                </a:solidFill>
-              </a:rPr>
-              <a:t>−0.02</a:t>
-            </a:r>
-            <a:endParaRPr lang="en-US" sz="2400" dirty="0"/>
-          </a:p>
-        </p:txBody>
-      </p:sp>
-      <p:sp>
-        <p:nvSpPr>
-          <p:cNvPr id="21" name="Text 17"/>
+          <a:bodyPr wrap="square" lIns="0" tIns="0" rIns="0" bIns="0" rtlCol="0" anchor="t"/>
+          <a:lstStyle/>
+          <a:p>
+            <a:pPr indent="0" marL="0">
+              <a:buNone/>
+            </a:pPr>
+            <a:r>
+              <a:rPr lang="en-US" sz="1500" b="1" dirty="0">
+                <a:solidFill>
+                  <a:srgbClr val="0071E3"/>
+                </a:solidFill>
+              </a:rPr>
+              <a:t>16 metric families collected</a:t>
+            </a:r>
+            <a:endParaRPr lang="en-US" sz="1500" dirty="0"/>
+          </a:p>
+        </p:txBody>
+      </p:sp>
+      <p:sp>
+        <p:nvSpPr>
+          <p:cNvPr id="16" name="Text 13"/>
           <p:cNvSpPr txBox="1"/>
           <p:nvPr/>
         </p:nvSpPr>
         <p:spPr>
           <a:xfrm>
-            <a:off x="7955280" y="5257800"/>
-            <a:ext cx="3566160" cy="274320"/>
+            <a:off x="731520" y="4151376"/>
+            <a:ext cx="5120640" cy="1956816"/>
           </a:xfrm>
           <a:prstGeom prst="rect">
             <a:avLst/>
@@ -3575,7 +3994,7 @@
           <a:ln/>
         </p:spPr>
         <p:txBody>
-          <a:bodyPr wrap="square" lIns="0" tIns="0" rIns="0" bIns="0" rtlCol="0" anchor="ctr"/>
+          <a:bodyPr wrap="square" lIns="0" tIns="0" rIns="0" bIns="0" rtlCol="0" anchor="t"/>
           <a:lstStyle/>
           <a:p>
             <a:pPr indent="0" marL="0">
@@ -3587,22 +4006,70 @@
                   <a:srgbClr val="55555B"/>
                 </a:solidFill>
               </a:rPr>
-              <a:t>95% CI [−0.21, +0.17]</a:t>
+              <a:t>Gateway (5): requests by route and status, request-time histogram, guardrail triggers G1 to G10, LLM tokens in and out, refusals by type.</a:t>
             </a:r>
             <a:endParaRPr lang="en-US" sz="1200" dirty="0"/>
           </a:p>
-        </p:txBody>
-      </p:sp>
-      <p:sp>
-        <p:nvSpPr>
-          <p:cNvPr id="22" name="Text 18"/>
+          <a:p>
+            <a:pPr indent="0" marL="0">
+              <a:buNone/>
+            </a:pPr>
+            <a:r>
+              <a:rPr lang="en-US" sz="1200" dirty="0">
+                <a:solidFill>
+                  <a:srgbClr val="55555B"/>
+                </a:solidFill>
+              </a:rPr>
+              <a:t>Evaluation (11): correctness (per category and overall, with CI), history effect, verdict, failure taxonomy, jury score, run progress, quality metrics, latency, tokens.</a:t>
+            </a:r>
+            <a:endParaRPr lang="en-US" sz="1200" dirty="0"/>
+          </a:p>
+        </p:txBody>
+      </p:sp>
+      <p:sp>
+        <p:nvSpPr>
+          <p:cNvPr id="17" name="Shape 14"/>
+          <p:cNvSpPr/>
+          <p:nvPr/>
+        </p:nvSpPr>
+        <p:spPr>
+          <a:xfrm>
+            <a:off x="6153912" y="3703320"/>
+            <a:ext cx="5486400" cy="2514600"/>
+          </a:xfrm>
+          <a:prstGeom prst="roundRect">
+            <a:avLst>
+              <a:gd name="adj" fmla="val 3636"/>
+            </a:avLst>
+          </a:prstGeom>
+          <a:solidFill>
+            <a:srgbClr val="FFFFFF"/>
+          </a:solidFill>
+          <a:ln w="9525">
+            <a:solidFill>
+              <a:srgbClr val="D9D9DE"/>
+            </a:solidFill>
+            <a:prstDash val="solid"/>
+          </a:ln>
+          <a:effectLst>
+            <a:outerShdw sx="100000" sy="100000" kx="0" ky="0" algn="bl" rotWithShape="0" blurRad="76200" dist="12700" dir="5400000">
+              <a:srgbClr val="000000">
+                <a:alpha val="8000"/>
+              </a:srgbClr>
+            </a:outerShdw>
+          </a:effectLst>
+        </p:spPr>
+      </p:sp>
+      <p:sp>
+        <p:nvSpPr>
+          <p:cNvPr id="18" name="Text 15"/>
           <p:cNvSpPr txBox="1"/>
           <p:nvPr/>
         </p:nvSpPr>
         <p:spPr>
           <a:xfrm>
-            <a:off x="7955280" y="5513832"/>
-            <a:ext cx="3566160" cy="274320"/>
+            <a:off x="6336792" y="3840480"/>
+            <a:ext cx="5120640" cy="310896"/>
           </a:xfrm>
           <a:prstGeom prst="rect">
             <a:avLst/>
@@ -3611,21 +4078,85 @@
           <a:ln/>
         </p:spPr>
         <p:txBody>
-          <a:bodyPr wrap="square" lIns="0" tIns="0" rIns="0" bIns="0" rtlCol="0" anchor="ctr"/>
+          <a:bodyPr wrap="square" lIns="0" tIns="0" rIns="0" bIns="0" rtlCol="0" anchor="t"/>
           <a:lstStyle/>
           <a:p>
             <a:pPr indent="0" marL="0">
               <a:buNone/>
             </a:pPr>
             <a:r>
-              <a:rPr lang="en-US" sz="1300" b="1" dirty="0">
+              <a:rPr lang="en-US" sz="1500" b="1" dirty="0">
+                <a:solidFill>
+                  <a:srgbClr val="0071E3"/>
+                </a:solidFill>
+              </a:rPr>
+              <a:t>3 alert rules (all healthy, none firing)</a:t>
+            </a:r>
+            <a:endParaRPr lang="en-US" sz="1500" dirty="0"/>
+          </a:p>
+        </p:txBody>
+      </p:sp>
+      <p:sp>
+        <p:nvSpPr>
+          <p:cNvPr id="19" name="Text 16"/>
+          <p:cNvSpPr txBox="1"/>
+          <p:nvPr/>
+        </p:nvSpPr>
+        <p:spPr>
+          <a:xfrm>
+            <a:off x="6336792" y="4151376"/>
+            <a:ext cx="5120640" cy="1956816"/>
+          </a:xfrm>
+          <a:prstGeom prst="rect">
+            <a:avLst/>
+          </a:prstGeom>
+          <a:noFill/>
+          <a:ln/>
+        </p:spPr>
+        <p:txBody>
+          <a:bodyPr wrap="square" lIns="0" tIns="0" rIns="0" bIns="0" rtlCol="0" anchor="t"/>
+          <a:lstStyle/>
+          <a:p>
+            <a:pPr indent="0" marL="0">
+              <a:buNone/>
+            </a:pPr>
+            <a:r>
+              <a:rPr lang="en-US" sz="1200" dirty="0">
                 <a:solidFill>
                   <a:srgbClr val="55555B"/>
                 </a:solidFill>
               </a:rPr>
-              <a:t>no effect detected</a:t>
-            </a:r>
-            <a:endParaRPr lang="en-US" sz="1300" dirty="0"/>
+              <a:t>GatewayDown: the gateway is unreachable for 1 minute.</a:t>
+            </a:r>
+            <a:endParaRPr lang="en-US" sz="1200" dirty="0"/>
+          </a:p>
+          <a:p>
+            <a:pPr indent="0" marL="0">
+              <a:buNone/>
+            </a:pPr>
+            <a:r>
+              <a:rPr lang="en-US" sz="1200" dirty="0">
+                <a:solidFill>
+                  <a:srgbClr val="55555B"/>
+                </a:solidFill>
+              </a:rPr>
+              <a:t>HighErrorRate: more than 5% of gateway requests fail (5xx) over 5 minutes.</a:t>
+            </a:r>
+            <a:endParaRPr lang="en-US" sz="1200" dirty="0"/>
+          </a:p>
+          <a:p>
+            <a:pPr indent="0" marL="0">
+              <a:buNone/>
+            </a:pPr>
+            <a:r>
+              <a:rPr lang="en-US" sz="1200" dirty="0">
+                <a:solidFill>
+                  <a:srgbClr val="55555B"/>
+                </a:solidFill>
+              </a:rPr>
+              <a:t>SlowAsk: p95 of /ask latency above 60 s for 10 minutes.</a:t>
+            </a:r>
+            <a:endParaRPr lang="en-US" sz="1200" dirty="0"/>
           </a:p>
         </p:txBody>
       </p:sp>
@@ -3732,7 +4263,7 @@
                   <a:srgbClr val="0071E3"/>
                 </a:solidFill>
               </a:rPr>
-              <a:t>RESULTS AND INTERPRETATION</a:t>
+              <a:t>GRAFANA</a:t>
             </a:r>
             <a:endParaRPr lang="en-US" sz="1200" dirty="0"/>
           </a:p>
@@ -3768,15 +4299,2370 @@
                   <a:srgbClr val="1D1D1F"/>
                 </a:solidFill>
               </a:rPr>
-              <a:t>What the numbers mean</a:t>
+              <a:t>What the Grafana dashboards showed</a:t>
             </a:r>
             <a:endParaRPr lang="en-US" sz="3600" dirty="0"/>
+          </a:p>
+        </p:txBody>
+      </p:sp>
+      <p:sp>
+        <p:nvSpPr>
+          <p:cNvPr id="4" name="Text 2"/>
+          <p:cNvSpPr txBox="1"/>
+          <p:nvPr/>
+        </p:nvSpPr>
+        <p:spPr>
+          <a:xfrm>
+            <a:off x="548640" y="1371600"/>
+            <a:ext cx="11091672" cy="548640"/>
+          </a:xfrm>
+          <a:prstGeom prst="rect">
+            <a:avLst/>
+          </a:prstGeom>
+          <a:noFill/>
+          <a:ln/>
+        </p:spPr>
+        <p:txBody>
+          <a:bodyPr wrap="square" lIns="0" tIns="0" rIns="0" bIns="0" rtlCol="0" anchor="t"/>
+          <a:lstStyle/>
+          <a:p>
+            <a:pPr indent="0" marL="0">
+              <a:buNone/>
+            </a:pPr>
+            <a:r>
+              <a:rPr lang="en-US" sz="1600" dirty="0">
+                <a:solidFill>
+                  <a:srgbClr val="55555B"/>
+                </a:solidFill>
+              </a:rPr>
+              <a:t>Everything the dashboard showed, with the numbers. Live figures come from a handful of demo questions, not a load test.</a:t>
+            </a:r>
+            <a:endParaRPr lang="en-US" sz="1600" dirty="0"/>
+          </a:p>
+        </p:txBody>
+      </p:sp>
+      <p:sp>
+        <p:nvSpPr>
+          <p:cNvPr id="6" name="Shape 3"/>
+          <p:cNvSpPr/>
+          <p:nvPr/>
+        </p:nvSpPr>
+        <p:spPr>
+          <a:xfrm>
+            <a:off x="548640" y="2057400"/>
+            <a:ext cx="3514344" cy="4160520"/>
+          </a:xfrm>
+          <a:prstGeom prst="roundRect">
+            <a:avLst>
+              <a:gd name="adj" fmla="val 2602"/>
+            </a:avLst>
+          </a:prstGeom>
+          <a:solidFill>
+            <a:srgbClr val="FFFFFF"/>
+          </a:solidFill>
+          <a:ln w="9525">
+            <a:solidFill>
+              <a:srgbClr val="D9D9DE"/>
+            </a:solidFill>
+            <a:prstDash val="solid"/>
+          </a:ln>
+          <a:effectLst>
+            <a:outerShdw sx="100000" sy="100000" kx="0" ky="0" algn="bl" rotWithShape="0" blurRad="76200" dist="12700" dir="5400000">
+              <a:srgbClr val="000000">
+                <a:alpha val="8000"/>
+              </a:srgbClr>
+            </a:outerShdw>
+          </a:effectLst>
+        </p:spPr>
+      </p:sp>
+      <p:sp>
+        <p:nvSpPr>
+          <p:cNvPr id="7" name="Text 4"/>
+          <p:cNvSpPr txBox="1"/>
+          <p:nvPr/>
+        </p:nvSpPr>
+        <p:spPr>
+          <a:xfrm>
+            <a:off x="731520" y="2194560"/>
+            <a:ext cx="3148584" cy="365760"/>
+          </a:xfrm>
+          <a:prstGeom prst="rect">
+            <a:avLst/>
+          </a:prstGeom>
+          <a:noFill/>
+          <a:ln/>
+        </p:spPr>
+        <p:txBody>
+          <a:bodyPr wrap="square" lIns="0" tIns="0" rIns="0" bIns="0" rtlCol="0" anchor="t"/>
+          <a:lstStyle/>
+          <a:p>
+            <a:pPr indent="0" marL="0">
+              <a:buNone/>
+            </a:pPr>
+            <a:r>
+              <a:rPr lang="en-US" sz="1500" b="1" dirty="0">
+                <a:solidFill>
+                  <a:srgbClr val="0071E3"/>
+                </a:solidFill>
+              </a:rPr>
+              <a:t>Evaluation results (run #8)</a:t>
+            </a:r>
+            <a:endParaRPr lang="en-US" sz="1500" dirty="0"/>
+          </a:p>
+        </p:txBody>
+      </p:sp>
+      <p:sp>
+        <p:nvSpPr>
+          <p:cNvPr id="8" name="Text 5"/>
+          <p:cNvSpPr txBox="1"/>
+          <p:nvPr/>
+        </p:nvSpPr>
+        <p:spPr>
+          <a:xfrm>
+            <a:off x="731520" y="2560320"/>
+            <a:ext cx="3148584" cy="3547872"/>
+          </a:xfrm>
+          <a:prstGeom prst="rect">
+            <a:avLst/>
+          </a:prstGeom>
+          <a:noFill/>
+          <a:ln/>
+        </p:spPr>
+        <p:txBody>
+          <a:bodyPr wrap="square" lIns="0" tIns="0" rIns="0" bIns="0" rtlCol="0" anchor="t"/>
+          <a:lstStyle/>
+          <a:p>
+            <a:pPr indent="0" marL="0">
+              <a:buNone/>
+            </a:pPr>
+            <a:r>
+              <a:rPr lang="en-US" sz="1200" dirty="0">
+                <a:solidFill>
+                  <a:srgbClr val="55555B"/>
+                </a:solidFill>
+              </a:rPr>
+              <a:t>Correctness no ctx / code only / code + history: llama2 20 / 54 / 82%, codellama 13 / 49 / 68%, starcoder2 14 / 29 / 24%.</a:t>
+            </a:r>
+            <a:endParaRPr lang="en-US" sz="1200" dirty="0"/>
+          </a:p>
+          <a:p>
+            <a:pPr indent="0" marL="0">
+              <a:buNone/>
+            </a:pPr>
+            <a:r>
+              <a:rPr lang="en-US" sz="1200" dirty="0">
+                <a:solidFill>
+                  <a:srgbClr val="55555B"/>
+                </a:solidFill>
+              </a:rPr>
+              <a:t>History effect: +0.319, +0.278, -0.021. Verdict: useful for the two 7B models, inconclusive for starcoder2.</a:t>
+            </a:r>
+            <a:endParaRPr lang="en-US" sz="1200" dirty="0"/>
+          </a:p>
+          <a:p>
+            <a:pPr indent="0" marL="0">
+              <a:buNone/>
+            </a:pPr>
+            <a:r>
+              <a:rPr lang="en-US" sz="1200" dirty="0">
+                <a:solidFill>
+                  <a:srgbClr val="55555B"/>
+                </a:solidFill>
+              </a:rPr>
+              <a:t>Retrieval misses: 11 / 10 / 16 with code only, 3 / 2 / 6 with history.</a:t>
+            </a:r>
+            <a:endParaRPr lang="en-US" sz="1200" dirty="0"/>
+          </a:p>
+          <a:p>
+            <a:pPr indent="0" marL="0">
+              <a:buNone/>
+            </a:pPr>
+            <a:r>
+              <a:rPr lang="en-US" sz="1200" dirty="0">
+                <a:solidFill>
+                  <a:srgbClr val="55555B"/>
+                </a:solidFill>
+              </a:rPr>
+              <a:t>The gemma:2b jury scored about 100%: too lenient.</a:t>
+            </a:r>
+            <a:endParaRPr lang="en-US" sz="1200" dirty="0"/>
+          </a:p>
+        </p:txBody>
+      </p:sp>
+      <p:sp>
+        <p:nvSpPr>
+          <p:cNvPr id="9" name="Shape 6"/>
+          <p:cNvSpPr/>
+          <p:nvPr/>
+        </p:nvSpPr>
+        <p:spPr>
+          <a:xfrm>
+            <a:off x="4337304" y="2057400"/>
+            <a:ext cx="3514344" cy="4160520"/>
+          </a:xfrm>
+          <a:prstGeom prst="roundRect">
+            <a:avLst>
+              <a:gd name="adj" fmla="val 2602"/>
+            </a:avLst>
+          </a:prstGeom>
+          <a:solidFill>
+            <a:srgbClr val="FFFFFF"/>
+          </a:solidFill>
+          <a:ln w="9525">
+            <a:solidFill>
+              <a:srgbClr val="D9D9DE"/>
+            </a:solidFill>
+            <a:prstDash val="solid"/>
+          </a:ln>
+          <a:effectLst>
+            <a:outerShdw sx="100000" sy="100000" kx="0" ky="0" algn="bl" rotWithShape="0" blurRad="76200" dist="12700" dir="5400000">
+              <a:srgbClr val="000000">
+                <a:alpha val="8000"/>
+              </a:srgbClr>
+            </a:outerShdw>
+          </a:effectLst>
+        </p:spPr>
+      </p:sp>
+      <p:sp>
+        <p:nvSpPr>
+          <p:cNvPr id="10" name="Text 7"/>
+          <p:cNvSpPr txBox="1"/>
+          <p:nvPr/>
+        </p:nvSpPr>
+        <p:spPr>
+          <a:xfrm>
+            <a:off x="4520184" y="2194560"/>
+            <a:ext cx="3148584" cy="365760"/>
+          </a:xfrm>
+          <a:prstGeom prst="rect">
+            <a:avLst/>
+          </a:prstGeom>
+          <a:noFill/>
+          <a:ln/>
+        </p:spPr>
+        <p:txBody>
+          <a:bodyPr wrap="square" lIns="0" tIns="0" rIns="0" bIns="0" rtlCol="0" anchor="t"/>
+          <a:lstStyle/>
+          <a:p>
+            <a:pPr indent="0" marL="0">
+              <a:buNone/>
+            </a:pPr>
+            <a:r>
+              <a:rPr lang="en-US" sz="1500" b="1" dirty="0">
+                <a:solidFill>
+                  <a:srgbClr val="0071E3"/>
+                </a:solidFill>
+              </a:rPr>
+              <a:t>Quality, retrieval and cost</a:t>
+            </a:r>
+            <a:endParaRPr lang="en-US" sz="1500" dirty="0"/>
+          </a:p>
+        </p:txBody>
+      </p:sp>
+      <p:sp>
+        <p:nvSpPr>
+          <p:cNvPr id="11" name="Text 8"/>
+          <p:cNvSpPr txBox="1"/>
+          <p:nvPr/>
+        </p:nvSpPr>
+        <p:spPr>
+          <a:xfrm>
+            <a:off x="4520184" y="2560320"/>
+            <a:ext cx="3148584" cy="3547872"/>
+          </a:xfrm>
+          <a:prstGeom prst="rect">
+            <a:avLst/>
+          </a:prstGeom>
+          <a:noFill/>
+          <a:ln/>
+        </p:spPr>
+        <p:txBody>
+          <a:bodyPr wrap="square" lIns="0" tIns="0" rIns="0" bIns="0" rtlCol="0" anchor="t"/>
+          <a:lstStyle/>
+          <a:p>
+            <a:pPr indent="0" marL="0">
+              <a:buNone/>
+            </a:pPr>
+            <a:r>
+              <a:rPr lang="en-US" sz="1200" dirty="0">
+                <a:solidFill>
+                  <a:srgbClr val="55555B"/>
+                </a:solidFill>
+              </a:rPr>
+              <a:t>Hallucination rate: 31%, 22%, 59%.</a:t>
+            </a:r>
+            <a:endParaRPr lang="en-US" sz="1200" dirty="0"/>
+          </a:p>
+          <a:p>
+            <a:pPr indent="0" marL="0">
+              <a:buNone/>
+            </a:pPr>
+            <a:r>
+              <a:rPr lang="en-US" sz="1200" dirty="0">
+                <a:solidFill>
+                  <a:srgbClr val="55555B"/>
+                </a:solidFill>
+              </a:rPr>
+              <a:t>Evidence recall 0.14, 0.70, 1.00; precision 0.05, 0.25, 1.00 (code only, code + history, oracle).</a:t>
+            </a:r>
+            <a:endParaRPr lang="en-US" sz="1200" dirty="0"/>
+          </a:p>
+          <a:p>
+            <a:pPr indent="0" marL="0">
+              <a:buNone/>
+            </a:pPr>
+            <a:r>
+              <a:rPr lang="en-US" sz="1200" dirty="0">
+                <a:solidFill>
+                  <a:srgbClr val="55555B"/>
+                </a:solidFill>
+              </a:rPr>
+              <a:t>Mean latency: 12.0 s, 14.5 s, 2.3 s. Tokens written: 126, 173, 147.</a:t>
+            </a:r>
+            <a:endParaRPr lang="en-US" sz="1200" dirty="0"/>
+          </a:p>
+          <a:p>
+            <a:pPr indent="0" marL="0">
+              <a:buNone/>
+            </a:pPr>
+            <a:r>
+              <a:rPr lang="en-US" sz="1200" dirty="0">
+                <a:solidFill>
+                  <a:srgbClr val="55555B"/>
+                </a:solidFill>
+              </a:rPr>
+              <a:t>Refusal correctness 0.83 with no context, 0.89 to 1.00 with retrieval.</a:t>
+            </a:r>
+            <a:endParaRPr lang="en-US" sz="1200" dirty="0"/>
+          </a:p>
+        </p:txBody>
+      </p:sp>
+      <p:sp>
+        <p:nvSpPr>
+          <p:cNvPr id="12" name="Shape 9"/>
+          <p:cNvSpPr/>
+          <p:nvPr/>
+        </p:nvSpPr>
+        <p:spPr>
+          <a:xfrm>
+            <a:off x="8125968" y="2057400"/>
+            <a:ext cx="3514344" cy="4160520"/>
+          </a:xfrm>
+          <a:prstGeom prst="roundRect">
+            <a:avLst>
+              <a:gd name="adj" fmla="val 2602"/>
+            </a:avLst>
+          </a:prstGeom>
+          <a:solidFill>
+            <a:srgbClr val="FFFFFF"/>
+          </a:solidFill>
+          <a:ln w="9525">
+            <a:solidFill>
+              <a:srgbClr val="D9D9DE"/>
+            </a:solidFill>
+            <a:prstDash val="solid"/>
+          </a:ln>
+          <a:effectLst>
+            <a:outerShdw sx="100000" sy="100000" kx="0" ky="0" algn="bl" rotWithShape="0" blurRad="76200" dist="12700" dir="5400000">
+              <a:srgbClr val="000000">
+                <a:alpha val="8000"/>
+              </a:srgbClr>
+            </a:outerShdw>
+          </a:effectLst>
+        </p:spPr>
+      </p:sp>
+      <p:sp>
+        <p:nvSpPr>
+          <p:cNvPr id="13" name="Text 10"/>
+          <p:cNvSpPr txBox="1"/>
+          <p:nvPr/>
+        </p:nvSpPr>
+        <p:spPr>
+          <a:xfrm>
+            <a:off x="8308848" y="2194560"/>
+            <a:ext cx="3148584" cy="365760"/>
+          </a:xfrm>
+          <a:prstGeom prst="rect">
+            <a:avLst/>
+          </a:prstGeom>
+          <a:noFill/>
+          <a:ln/>
+        </p:spPr>
+        <p:txBody>
+          <a:bodyPr wrap="square" lIns="0" tIns="0" rIns="0" bIns="0" rtlCol="0" anchor="t"/>
+          <a:lstStyle/>
+          <a:p>
+            <a:pPr indent="0" marL="0">
+              <a:buNone/>
+            </a:pPr>
+            <a:r>
+              <a:rPr lang="en-US" sz="1500" b="1" dirty="0">
+                <a:solidFill>
+                  <a:srgbClr val="0071E3"/>
+                </a:solidFill>
+              </a:rPr>
+              <a:t>Live metrics (demo traffic)</a:t>
+            </a:r>
+            <a:endParaRPr lang="en-US" sz="1500" dirty="0"/>
+          </a:p>
+        </p:txBody>
+      </p:sp>
+      <p:sp>
+        <p:nvSpPr>
+          <p:cNvPr id="14" name="Text 11"/>
+          <p:cNvSpPr txBox="1"/>
+          <p:nvPr/>
+        </p:nvSpPr>
+        <p:spPr>
+          <a:xfrm>
+            <a:off x="8308848" y="2560320"/>
+            <a:ext cx="3148584" cy="3547872"/>
+          </a:xfrm>
+          <a:prstGeom prst="rect">
+            <a:avLst/>
+          </a:prstGeom>
+          <a:noFill/>
+          <a:ln/>
+        </p:spPr>
+        <p:txBody>
+          <a:bodyPr wrap="square" lIns="0" tIns="0" rIns="0" bIns="0" rtlCol="0" anchor="t"/>
+          <a:lstStyle/>
+          <a:p>
+            <a:pPr indent="0" marL="0">
+              <a:buNone/>
+            </a:pPr>
+            <a:r>
+              <a:rPr lang="en-US" sz="1200" dirty="0">
+                <a:solidFill>
+                  <a:srgbClr val="55555B"/>
+                </a:solidFill>
+              </a:rPr>
+              <a:t>5 of 5 /api/ask requests succeeded; no 5xx errors.</a:t>
+            </a:r>
+            <a:endParaRPr lang="en-US" sz="1200" dirty="0"/>
+          </a:p>
+          <a:p>
+            <a:pPr indent="0" marL="0">
+              <a:buNone/>
+            </a:pPr>
+            <a:r>
+              <a:rPr lang="en-US" sz="1200" dirty="0">
+                <a:solidFill>
+                  <a:srgbClr val="55555B"/>
+                </a:solidFill>
+              </a:rPr>
+              <a:t>p95 /ask latency about 26 s.</a:t>
+            </a:r>
+            <a:endParaRPr lang="en-US" sz="1200" dirty="0"/>
+          </a:p>
+          <a:p>
+            <a:pPr indent="0" marL="0">
+              <a:buNone/>
+            </a:pPr>
+            <a:r>
+              <a:rPr lang="en-US" sz="1200" dirty="0">
+                <a:solidFill>
+                  <a:srgbClr val="55555B"/>
+                </a:solidFill>
+              </a:rPr>
+              <a:t>3 answers used 6,635 tokens in, 554 out.</a:t>
+            </a:r>
+            <a:endParaRPr lang="en-US" sz="1200" dirty="0"/>
+          </a:p>
+          <a:p>
+            <a:pPr indent="0" marL="0">
+              <a:buNone/>
+            </a:pPr>
+            <a:r>
+              <a:rPr lang="en-US" sz="1200" dirty="0">
+                <a:solidFill>
+                  <a:srgbClr val="55555B"/>
+                </a:solidFill>
+              </a:rPr>
+              <a:t>Guardrails fired: G1, G10, G4. Refusals: off_topic, unsafe_request.</a:t>
+            </a:r>
+            <a:endParaRPr lang="en-US" sz="1200" dirty="0"/>
+          </a:p>
+          <a:p>
+            <a:pPr indent="0" marL="0">
+              <a:buNone/>
+            </a:pPr>
+            <a:r>
+              <a:rPr lang="en-US" sz="1200" dirty="0">
+                <a:solidFill>
+                  <a:srgbClr val="55555B"/>
+                </a:solidFill>
+              </a:rPr>
+              <a:t>No alert firing; 3 rules healthy.</a:t>
+            </a:r>
+            <a:endParaRPr lang="en-US" sz="1200" dirty="0"/>
+          </a:p>
+        </p:txBody>
+      </p:sp>
+      <p:sp>
+        <p:nvSpPr>
+          <p:cNvPr id="25" name="Slide Number Placeholder 0"/>
+          <p:cNvSpPr>
+            <a:spLocks noGrp="1"/>
+          </p:cNvSpPr>
+          <p:nvPr>
+            <p:ph type="sldNum" sz="quarter" idx="4294967295"/>
+          </p:nvPr>
+        </p:nvSpPr>
+        <p:spPr>
+          <a:xfrm>
+            <a:off x="10725912" y="6419088"/>
+            <a:ext cx="914400" cy="274320"/>
+          </a:xfrm>
+          <a:prstGeom prst="rect">
+            <a:avLst/>
+          </a:prstGeom>
+          <a:extLst>
+            <a:ext uri="{C572A759-6A51-4108-AA02-DFA0A04FC94B}">
+              <ma14:wrappingTextBoxFlag xmlns:ma14="http://schemas.microsoft.com/office/mac/drawingml/2011/main" val="0"/>
+            </a:ext>
+          </a:extLst>
+        </p:spPr>
+        <p:txBody>
+          <a:bodyPr/>
+          <a:lstStyle>
+            <a:lvl1pPr>
+              <a:defRPr sz="1100">
+                <a:solidFill>
+                  <a:srgbClr val="55555B"/>
+                </a:solidFill>
+                <a:latin typeface="Calibri"/>
+                <a:ea typeface="Calibri"/>
+                <a:cs typeface="Calibri"/>
+              </a:defRPr>
+            </a:lvl1pPr>
+          </a:lstStyle>
+          <a:p>
+            <a:pPr algn="r"/>
+            <a:fld id="{F7021451-1387-4CA6-816F-3879F97B5CBC}" type="slidenum">
+              <a:rPr b="0" lang="en-US"/>
+              <a:t>11</a:t>
+            </a:fld>
+            <a:endParaRPr lang="en-US"/>
+          </a:p>
+        </p:txBody>
+      </p:sp>
+    </p:spTree>
+  </p:cSld>
+  <p:clrMapOvr>
+    <a:masterClrMapping/>
+  </p:clrMapOvr>
+</p:sld>
+</file>
+
+<file path=ppt/slides/slide12.xml><?xml version="1.0" encoding="utf-8"?>
+<p:sld xmlns:a="http://schemas.openxmlformats.org/drawingml/2006/main" xmlns:r="http://schemas.openxmlformats.org/officeDocument/2006/relationships" xmlns:p="http://schemas.openxmlformats.org/presentationml/2006/main">
+  <p:cSld name="Slide 12">
+    <p:spTree>
+      <p:nvGrpSpPr>
+        <p:cNvPr id="1" name=""/>
+        <p:cNvGrpSpPr/>
+        <p:nvPr/>
+      </p:nvGrpSpPr>
+      <p:grpSpPr>
+        <a:xfrm>
+          <a:off x="0" y="0"/>
+          <a:ext cx="0" cy="0"/>
+          <a:chOff x="0" y="0"/>
+          <a:chExt cx="0" cy="0"/>
+        </a:xfrm>
+      </p:grpSpPr>
+      <p:sp>
+        <p:nvSpPr>
+          <p:cNvPr id="2" name="Text 0"/>
+          <p:cNvSpPr txBox="1"/>
+          <p:nvPr/>
+        </p:nvSpPr>
+        <p:spPr>
+          <a:xfrm>
+            <a:off x="548640" y="365760"/>
+            <a:ext cx="11091672" cy="274320"/>
+          </a:xfrm>
+          <a:prstGeom prst="rect">
+            <a:avLst/>
+          </a:prstGeom>
+          <a:noFill/>
+          <a:ln/>
+        </p:spPr>
+        <p:txBody>
+          <a:bodyPr wrap="square" lIns="0" tIns="0" rIns="0" bIns="0" rtlCol="0" anchor="ctr"/>
+          <a:lstStyle/>
+          <a:p>
+            <a:pPr indent="0" marL="0">
+              <a:buNone/>
+            </a:pPr>
+            <a:r>
+              <a:rPr lang="en-US" sz="1200" b="1" spc="200" kern="0" dirty="0">
+                <a:solidFill>
+                  <a:srgbClr val="0071E3"/>
+                </a:solidFill>
+              </a:rPr>
+              <a:t>GRAFANA 1 OF 4</a:t>
+            </a:r>
+            <a:endParaRPr lang="en-US" sz="1200" dirty="0"/>
+          </a:p>
+        </p:txBody>
+      </p:sp>
+      <p:sp>
+        <p:nvSpPr>
+          <p:cNvPr id="3" name="Text 1"/>
+          <p:cNvSpPr txBox="1"/>
+          <p:nvPr/>
+        </p:nvSpPr>
+        <p:spPr>
+          <a:xfrm>
+            <a:off x="548640" y="658368"/>
+            <a:ext cx="11091672" cy="731520"/>
+          </a:xfrm>
+          <a:prstGeom prst="rect">
+            <a:avLst/>
+          </a:prstGeom>
+          <a:noFill/>
+          <a:ln/>
+        </p:spPr>
+        <p:txBody>
+          <a:bodyPr wrap="square" lIns="0" tIns="0" rIns="0" bIns="0" rtlCol="0" anchor="ctr"/>
+          <a:lstStyle/>
+          <a:p>
+            <a:pPr indent="0" marL="0">
+              <a:buNone/>
+            </a:pPr>
+            <a:r>
+              <a:rPr lang="en-US" sz="3600" b="1" dirty="0">
+                <a:solidFill>
+                  <a:srgbClr val="1D1D1F"/>
+                </a:solidFill>
+              </a:rPr>
+              <a:t>Evaluation results in Grafana</a:t>
+            </a:r>
+            <a:endParaRPr lang="en-US" sz="3600" dirty="0"/>
+          </a:p>
+        </p:txBody>
+      </p:sp>
+      <p:pic>
+        <p:nvPicPr>
+          <p:cNvPr id="5" name="Image 0" descr="Grafana: overall correctness by model and mode">    </p:cNvPr>
+          <p:cNvPicPr>
+            <a:picLocks noChangeAspect="1"/>
+          </p:cNvPicPr>
+          <p:nvPr/>
+        </p:nvPicPr>
+        <p:blipFill>
+          <a:blip r:embed="rId1"/>
+          <a:stretch>
+            <a:fillRect/>
+          </a:stretch>
+        </p:blipFill>
+        <p:spPr>
+          <a:xfrm>
+            <a:off x="548640" y="1463040"/>
+            <a:ext cx="5221224" cy="3749040"/>
+          </a:xfrm>
+          <a:prstGeom prst="rect">
+            <a:avLst/>
+          </a:prstGeom>
+        </p:spPr>
+      </p:pic>
+      <p:pic>
+        <p:nvPicPr>
+          <p:cNvPr id="6" name="Image 1" descr="Grafana: history effect per model">    </p:cNvPr>
+          <p:cNvPicPr>
+            <a:picLocks noChangeAspect="1"/>
+          </p:cNvPicPr>
+          <p:nvPr/>
+        </p:nvPicPr>
+        <p:blipFill>
+          <a:blip r:embed="rId2"/>
+          <a:stretch>
+            <a:fillRect/>
+          </a:stretch>
+        </p:blipFill>
+        <p:spPr>
+          <a:xfrm>
+            <a:off x="5989320" y="1463040"/>
+            <a:ext cx="5477256" cy="3749040"/>
+          </a:xfrm>
+          <a:prstGeom prst="rect">
+            <a:avLst/>
+          </a:prstGeom>
+        </p:spPr>
+      </p:pic>
+      <p:sp>
+        <p:nvSpPr>
+          <p:cNvPr id="7" name="Text 2"/>
+          <p:cNvSpPr txBox="1"/>
+          <p:nvPr/>
+        </p:nvSpPr>
+        <p:spPr>
+          <a:xfrm>
+            <a:off x="548640" y="5394960"/>
+            <a:ext cx="11091672" cy="731520"/>
+          </a:xfrm>
+          <a:prstGeom prst="rect">
+            <a:avLst/>
+          </a:prstGeom>
+          <a:noFill/>
+          <a:ln/>
+        </p:spPr>
+        <p:txBody>
+          <a:bodyPr wrap="square" lIns="0" tIns="0" rIns="0" bIns="0" rtlCol="0" anchor="t"/>
+          <a:lstStyle/>
+          <a:p>
+            <a:pPr indent="0" marL="0">
+              <a:buNone/>
+            </a:pPr>
+            <a:r>
+              <a:rPr lang="en-US" sz="1400" dirty="0">
+                <a:solidFill>
+                  <a:srgbClr val="55555B"/>
+                </a:solidFill>
+              </a:rPr>
+              <a:t>Left: correctness for no context, code only, code + history, oracle. Right: history effect +0.319 (llama2), +0.278 (codellama), -0.021 (starcoder2).</a:t>
+            </a:r>
+            <a:endParaRPr lang="en-US" sz="1400" dirty="0"/>
+          </a:p>
+        </p:txBody>
+      </p:sp>
+      <p:sp>
+        <p:nvSpPr>
+          <p:cNvPr id="25" name="Slide Number Placeholder 0"/>
+          <p:cNvSpPr>
+            <a:spLocks noGrp="1"/>
+          </p:cNvSpPr>
+          <p:nvPr>
+            <p:ph type="sldNum" sz="quarter" idx="4294967295"/>
+          </p:nvPr>
+        </p:nvSpPr>
+        <p:spPr>
+          <a:xfrm>
+            <a:off x="10725912" y="6419088"/>
+            <a:ext cx="914400" cy="274320"/>
+          </a:xfrm>
+          <a:prstGeom prst="rect">
+            <a:avLst/>
+          </a:prstGeom>
+          <a:extLst>
+            <a:ext uri="{C572A759-6A51-4108-AA02-DFA0A04FC94B}">
+              <ma14:wrappingTextBoxFlag xmlns:ma14="http://schemas.microsoft.com/office/mac/drawingml/2011/main" val="0"/>
+            </a:ext>
+          </a:extLst>
+        </p:spPr>
+        <p:txBody>
+          <a:bodyPr/>
+          <a:lstStyle>
+            <a:lvl1pPr>
+              <a:defRPr sz="1100">
+                <a:solidFill>
+                  <a:srgbClr val="55555B"/>
+                </a:solidFill>
+                <a:latin typeface="Calibri"/>
+                <a:ea typeface="Calibri"/>
+                <a:cs typeface="Calibri"/>
+              </a:defRPr>
+            </a:lvl1pPr>
+          </a:lstStyle>
+          <a:p>
+            <a:pPr algn="r"/>
+            <a:fld id="{F7021451-1387-4CA6-816F-3879F97B5CBC}" type="slidenum">
+              <a:rPr b="0" lang="en-US"/>
+              <a:t>12</a:t>
+            </a:fld>
+            <a:endParaRPr lang="en-US"/>
+          </a:p>
+        </p:txBody>
+      </p:sp>
+    </p:spTree>
+  </p:cSld>
+  <p:clrMapOvr>
+    <a:masterClrMapping/>
+  </p:clrMapOvr>
+</p:sld>
+</file>
+
+<file path=ppt/slides/slide13.xml><?xml version="1.0" encoding="utf-8"?>
+<p:sld xmlns:a="http://schemas.openxmlformats.org/drawingml/2006/main" xmlns:r="http://schemas.openxmlformats.org/officeDocument/2006/relationships" xmlns:p="http://schemas.openxmlformats.org/presentationml/2006/main">
+  <p:cSld name="Slide 13">
+    <p:spTree>
+      <p:nvGrpSpPr>
+        <p:cNvPr id="1" name=""/>
+        <p:cNvGrpSpPr/>
+        <p:nvPr/>
+      </p:nvGrpSpPr>
+      <p:grpSpPr>
+        <a:xfrm>
+          <a:off x="0" y="0"/>
+          <a:ext cx="0" cy="0"/>
+          <a:chOff x="0" y="0"/>
+          <a:chExt cx="0" cy="0"/>
+        </a:xfrm>
+      </p:grpSpPr>
+      <p:sp>
+        <p:nvSpPr>
+          <p:cNvPr id="2" name="Text 0"/>
+          <p:cNvSpPr txBox="1"/>
+          <p:nvPr/>
+        </p:nvSpPr>
+        <p:spPr>
+          <a:xfrm>
+            <a:off x="548640" y="365760"/>
+            <a:ext cx="11091672" cy="274320"/>
+          </a:xfrm>
+          <a:prstGeom prst="rect">
+            <a:avLst/>
+          </a:prstGeom>
+          <a:noFill/>
+          <a:ln/>
+        </p:spPr>
+        <p:txBody>
+          <a:bodyPr wrap="square" lIns="0" tIns="0" rIns="0" bIns="0" rtlCol="0" anchor="ctr"/>
+          <a:lstStyle/>
+          <a:p>
+            <a:pPr indent="0" marL="0">
+              <a:buNone/>
+            </a:pPr>
+            <a:r>
+              <a:rPr lang="en-US" sz="1200" b="1" spc="200" kern="0" dirty="0">
+                <a:solidFill>
+                  <a:srgbClr val="0071E3"/>
+                </a:solidFill>
+              </a:rPr>
+              <a:t>GRAFANA 2 OF 4</a:t>
+            </a:r>
+            <a:endParaRPr lang="en-US" sz="1200" dirty="0"/>
+          </a:p>
+        </p:txBody>
+      </p:sp>
+      <p:sp>
+        <p:nvSpPr>
+          <p:cNvPr id="3" name="Text 1"/>
+          <p:cNvSpPr txBox="1"/>
+          <p:nvPr/>
+        </p:nvSpPr>
+        <p:spPr>
+          <a:xfrm>
+            <a:off x="548640" y="658368"/>
+            <a:ext cx="11091672" cy="731520"/>
+          </a:xfrm>
+          <a:prstGeom prst="rect">
+            <a:avLst/>
+          </a:prstGeom>
+          <a:noFill/>
+          <a:ln/>
+        </p:spPr>
+        <p:txBody>
+          <a:bodyPr wrap="square" lIns="0" tIns="0" rIns="0" bIns="0" rtlCol="0" anchor="ctr"/>
+          <a:lstStyle/>
+          <a:p>
+            <a:pPr indent="0" marL="0">
+              <a:buNone/>
+            </a:pPr>
+            <a:r>
+              <a:rPr lang="en-US" sz="3600" b="1" dirty="0">
+                <a:solidFill>
+                  <a:srgbClr val="1D1D1F"/>
+                </a:solidFill>
+              </a:rPr>
+              <a:t>Quality, retrieval and cost</a:t>
+            </a:r>
+            <a:endParaRPr lang="en-US" sz="3600" dirty="0"/>
+          </a:p>
+        </p:txBody>
+      </p:sp>
+      <p:pic>
+        <p:nvPicPr>
+          <p:cNvPr id="5" name="Image 0" descr="Grafana: hallucination rate, retrieval quality, latency">    </p:cNvPr>
+          <p:cNvPicPr>
+            <a:picLocks noChangeAspect="1"/>
+          </p:cNvPicPr>
+          <p:nvPr/>
+        </p:nvPicPr>
+        <p:blipFill>
+          <a:blip r:embed="rId1"/>
+          <a:stretch>
+            <a:fillRect/>
+          </a:stretch>
+        </p:blipFill>
+        <p:spPr>
+          <a:xfrm>
+            <a:off x="548640" y="1463040"/>
+            <a:ext cx="11091672" cy="3281286"/>
+          </a:xfrm>
+          <a:prstGeom prst="rect">
+            <a:avLst/>
+          </a:prstGeom>
+        </p:spPr>
+      </p:pic>
+      <p:sp>
+        <p:nvSpPr>
+          <p:cNvPr id="6" name="Text 2"/>
+          <p:cNvSpPr txBox="1"/>
+          <p:nvPr/>
+        </p:nvSpPr>
+        <p:spPr>
+          <a:xfrm>
+            <a:off x="548640" y="4892040"/>
+            <a:ext cx="11091672" cy="1097280"/>
+          </a:xfrm>
+          <a:prstGeom prst="rect">
+            <a:avLst/>
+          </a:prstGeom>
+          <a:noFill/>
+          <a:ln/>
+        </p:spPr>
+        <p:txBody>
+          <a:bodyPr wrap="square" lIns="0" tIns="0" rIns="0" bIns="0" rtlCol="0" anchor="t"/>
+          <a:lstStyle/>
+          <a:p>
+            <a:pPr indent="0" marL="0">
+              <a:buNone/>
+            </a:pPr>
+            <a:r>
+              <a:rPr lang="en-US" sz="1500" dirty="0">
+                <a:solidFill>
+                  <a:srgbClr val="1D1D1F"/>
+                </a:solidFill>
+              </a:rPr>
+              <a:t>Hallucination: llama2 31.2%, codellama 21.9%, starcoder2 59.4%. Retrieval: recall 14% (code only), 70% (code + history), 100% (oracle). Latency: starcoder2 fastest (2.3 s) but least reliable; the 7B models take 12 to 16 s.</a:t>
+            </a:r>
+            <a:endParaRPr lang="en-US" sz="1500" dirty="0"/>
+          </a:p>
+        </p:txBody>
+      </p:sp>
+      <p:sp>
+        <p:nvSpPr>
+          <p:cNvPr id="25" name="Slide Number Placeholder 0"/>
+          <p:cNvSpPr>
+            <a:spLocks noGrp="1"/>
+          </p:cNvSpPr>
+          <p:nvPr>
+            <p:ph type="sldNum" sz="quarter" idx="4294967295"/>
+          </p:nvPr>
+        </p:nvSpPr>
+        <p:spPr>
+          <a:xfrm>
+            <a:off x="10725912" y="6419088"/>
+            <a:ext cx="914400" cy="274320"/>
+          </a:xfrm>
+          <a:prstGeom prst="rect">
+            <a:avLst/>
+          </a:prstGeom>
+          <a:extLst>
+            <a:ext uri="{C572A759-6A51-4108-AA02-DFA0A04FC94B}">
+              <ma14:wrappingTextBoxFlag xmlns:ma14="http://schemas.microsoft.com/office/mac/drawingml/2011/main" val="0"/>
+            </a:ext>
+          </a:extLst>
+        </p:spPr>
+        <p:txBody>
+          <a:bodyPr/>
+          <a:lstStyle>
+            <a:lvl1pPr>
+              <a:defRPr sz="1100">
+                <a:solidFill>
+                  <a:srgbClr val="55555B"/>
+                </a:solidFill>
+                <a:latin typeface="Calibri"/>
+                <a:ea typeface="Calibri"/>
+                <a:cs typeface="Calibri"/>
+              </a:defRPr>
+            </a:lvl1pPr>
+          </a:lstStyle>
+          <a:p>
+            <a:pPr algn="r"/>
+            <a:fld id="{F7021451-1387-4CA6-816F-3879F97B5CBC}" type="slidenum">
+              <a:rPr b="0" lang="en-US"/>
+              <a:t>13</a:t>
+            </a:fld>
+            <a:endParaRPr lang="en-US"/>
+          </a:p>
+        </p:txBody>
+      </p:sp>
+    </p:spTree>
+  </p:cSld>
+  <p:clrMapOvr>
+    <a:masterClrMapping/>
+  </p:clrMapOvr>
+</p:sld>
+</file>
+
+<file path=ppt/slides/slide14.xml><?xml version="1.0" encoding="utf-8"?>
+<p:sld xmlns:a="http://schemas.openxmlformats.org/drawingml/2006/main" xmlns:r="http://schemas.openxmlformats.org/officeDocument/2006/relationships" xmlns:p="http://schemas.openxmlformats.org/presentationml/2006/main">
+  <p:cSld name="Slide 14">
+    <p:spTree>
+      <p:nvGrpSpPr>
+        <p:cNvPr id="1" name=""/>
+        <p:cNvGrpSpPr/>
+        <p:nvPr/>
+      </p:nvGrpSpPr>
+      <p:grpSpPr>
+        <a:xfrm>
+          <a:off x="0" y="0"/>
+          <a:ext cx="0" cy="0"/>
+          <a:chOff x="0" y="0"/>
+          <a:chExt cx="0" cy="0"/>
+        </a:xfrm>
+      </p:grpSpPr>
+      <p:sp>
+        <p:nvSpPr>
+          <p:cNvPr id="2" name="Text 0"/>
+          <p:cNvSpPr txBox="1"/>
+          <p:nvPr/>
+        </p:nvSpPr>
+        <p:spPr>
+          <a:xfrm>
+            <a:off x="548640" y="365760"/>
+            <a:ext cx="11091672" cy="274320"/>
+          </a:xfrm>
+          <a:prstGeom prst="rect">
+            <a:avLst/>
+          </a:prstGeom>
+          <a:noFill/>
+          <a:ln/>
+        </p:spPr>
+        <p:txBody>
+          <a:bodyPr wrap="square" lIns="0" tIns="0" rIns="0" bIns="0" rtlCol="0" anchor="ctr"/>
+          <a:lstStyle/>
+          <a:p>
+            <a:pPr indent="0" marL="0">
+              <a:buNone/>
+            </a:pPr>
+            <a:r>
+              <a:rPr lang="en-US" sz="1200" b="1" spc="200" kern="0" dirty="0">
+                <a:solidFill>
+                  <a:srgbClr val="0071E3"/>
+                </a:solidFill>
+              </a:rPr>
+              <a:t>GRAFANA 3 OF 4</a:t>
+            </a:r>
+            <a:endParaRPr lang="en-US" sz="1200" dirty="0"/>
+          </a:p>
+        </p:txBody>
+      </p:sp>
+      <p:sp>
+        <p:nvSpPr>
+          <p:cNvPr id="3" name="Text 1"/>
+          <p:cNvSpPr txBox="1"/>
+          <p:nvPr/>
+        </p:nvSpPr>
+        <p:spPr>
+          <a:xfrm>
+            <a:off x="548640" y="658368"/>
+            <a:ext cx="11091672" cy="731520"/>
+          </a:xfrm>
+          <a:prstGeom prst="rect">
+            <a:avLst/>
+          </a:prstGeom>
+          <a:noFill/>
+          <a:ln/>
+        </p:spPr>
+        <p:txBody>
+          <a:bodyPr wrap="square" lIns="0" tIns="0" rIns="0" bIns="0" rtlCol="0" anchor="ctr"/>
+          <a:lstStyle/>
+          <a:p>
+            <a:pPr indent="0" marL="0">
+              <a:buNone/>
+            </a:pPr>
+            <a:r>
+              <a:rPr lang="en-US" sz="3600" b="1" dirty="0">
+                <a:solidFill>
+                  <a:srgbClr val="1D1D1F"/>
+                </a:solidFill>
+              </a:rPr>
+              <a:t>Tokens, grounding and refusals</a:t>
+            </a:r>
+            <a:endParaRPr lang="en-US" sz="3600" dirty="0"/>
+          </a:p>
+        </p:txBody>
+      </p:sp>
+      <p:pic>
+        <p:nvPicPr>
+          <p:cNvPr id="5" name="Image 0" descr="Grafana: tokens per answer, unsupported-sentence ratio, refusal correctness">    </p:cNvPr>
+          <p:cNvPicPr>
+            <a:picLocks noChangeAspect="1"/>
+          </p:cNvPicPr>
+          <p:nvPr/>
+        </p:nvPicPr>
+        <p:blipFill>
+          <a:blip r:embed="rId1"/>
+          <a:stretch>
+            <a:fillRect/>
+          </a:stretch>
+        </p:blipFill>
+        <p:spPr>
+          <a:xfrm>
+            <a:off x="548640" y="1463040"/>
+            <a:ext cx="11091672" cy="3285908"/>
+          </a:xfrm>
+          <a:prstGeom prst="rect">
+            <a:avLst/>
+          </a:prstGeom>
+        </p:spPr>
+      </p:pic>
+      <p:sp>
+        <p:nvSpPr>
+          <p:cNvPr id="6" name="Text 2"/>
+          <p:cNvSpPr txBox="1"/>
+          <p:nvPr/>
+        </p:nvSpPr>
+        <p:spPr>
+          <a:xfrm>
+            <a:off x="548640" y="4892040"/>
+            <a:ext cx="11091672" cy="1097280"/>
+          </a:xfrm>
+          <a:prstGeom prst="rect">
+            <a:avLst/>
+          </a:prstGeom>
+          <a:noFill/>
+          <a:ln/>
+        </p:spPr>
+        <p:txBody>
+          <a:bodyPr wrap="square" lIns="0" tIns="0" rIns="0" bIns="0" rtlCol="0" anchor="t"/>
+          <a:lstStyle/>
+          <a:p>
+            <a:pPr indent="0" marL="0">
+              <a:buNone/>
+            </a:pPr>
+            <a:r>
+              <a:rPr lang="en-US" sz="1500" dirty="0">
+                <a:solidFill>
+                  <a:srgbClr val="1D1D1F"/>
+                </a:solidFill>
+              </a:rPr>
+              <a:t>Tokens written: 126 (llama2), 173 (codellama), 147 (starcoder2). Unsupported-sentence ratio: 27.1%, 26.1%, 36.7%. Refusal correctness is lowest with no context (the model answers questions it should refuse) and highest with retrieval.</a:t>
+            </a:r>
+            <a:endParaRPr lang="en-US" sz="1500" dirty="0"/>
+          </a:p>
+        </p:txBody>
+      </p:sp>
+      <p:sp>
+        <p:nvSpPr>
+          <p:cNvPr id="25" name="Slide Number Placeholder 0"/>
+          <p:cNvSpPr>
+            <a:spLocks noGrp="1"/>
+          </p:cNvSpPr>
+          <p:nvPr>
+            <p:ph type="sldNum" sz="quarter" idx="4294967295"/>
+          </p:nvPr>
+        </p:nvSpPr>
+        <p:spPr>
+          <a:xfrm>
+            <a:off x="10725912" y="6419088"/>
+            <a:ext cx="914400" cy="274320"/>
+          </a:xfrm>
+          <a:prstGeom prst="rect">
+            <a:avLst/>
+          </a:prstGeom>
+          <a:extLst>
+            <a:ext uri="{C572A759-6A51-4108-AA02-DFA0A04FC94B}">
+              <ma14:wrappingTextBoxFlag xmlns:ma14="http://schemas.microsoft.com/office/mac/drawingml/2011/main" val="0"/>
+            </a:ext>
+          </a:extLst>
+        </p:spPr>
+        <p:txBody>
+          <a:bodyPr/>
+          <a:lstStyle>
+            <a:lvl1pPr>
+              <a:defRPr sz="1100">
+                <a:solidFill>
+                  <a:srgbClr val="55555B"/>
+                </a:solidFill>
+                <a:latin typeface="Calibri"/>
+                <a:ea typeface="Calibri"/>
+                <a:cs typeface="Calibri"/>
+              </a:defRPr>
+            </a:lvl1pPr>
+          </a:lstStyle>
+          <a:p>
+            <a:pPr algn="r"/>
+            <a:fld id="{F7021451-1387-4CA6-816F-3879F97B5CBC}" type="slidenum">
+              <a:rPr b="0" lang="en-US"/>
+              <a:t>14</a:t>
+            </a:fld>
+            <a:endParaRPr lang="en-US"/>
+          </a:p>
+        </p:txBody>
+      </p:sp>
+    </p:spTree>
+  </p:cSld>
+  <p:clrMapOvr>
+    <a:masterClrMapping/>
+  </p:clrMapOvr>
+</p:sld>
+</file>
+
+<file path=ppt/slides/slide15.xml><?xml version="1.0" encoding="utf-8"?>
+<p:sld xmlns:a="http://schemas.openxmlformats.org/drawingml/2006/main" xmlns:r="http://schemas.openxmlformats.org/officeDocument/2006/relationships" xmlns:p="http://schemas.openxmlformats.org/presentationml/2006/main">
+  <p:cSld name="Slide 15">
+    <p:spTree>
+      <p:nvGrpSpPr>
+        <p:cNvPr id="1" name=""/>
+        <p:cNvGrpSpPr/>
+        <p:nvPr/>
+      </p:nvGrpSpPr>
+      <p:grpSpPr>
+        <a:xfrm>
+          <a:off x="0" y="0"/>
+          <a:ext cx="0" cy="0"/>
+          <a:chOff x="0" y="0"/>
+          <a:chExt cx="0" cy="0"/>
+        </a:xfrm>
+      </p:grpSpPr>
+      <p:sp>
+        <p:nvSpPr>
+          <p:cNvPr id="2" name="Text 0"/>
+          <p:cNvSpPr txBox="1"/>
+          <p:nvPr/>
+        </p:nvSpPr>
+        <p:spPr>
+          <a:xfrm>
+            <a:off x="548640" y="365760"/>
+            <a:ext cx="11091672" cy="274320"/>
+          </a:xfrm>
+          <a:prstGeom prst="rect">
+            <a:avLst/>
+          </a:prstGeom>
+          <a:noFill/>
+          <a:ln/>
+        </p:spPr>
+        <p:txBody>
+          <a:bodyPr wrap="square" lIns="0" tIns="0" rIns="0" bIns="0" rtlCol="0" anchor="ctr"/>
+          <a:lstStyle/>
+          <a:p>
+            <a:pPr indent="0" marL="0">
+              <a:buNone/>
+            </a:pPr>
+            <a:r>
+              <a:rPr lang="en-US" sz="1200" b="1" spc="200" kern="0" dirty="0">
+                <a:solidFill>
+                  <a:srgbClr val="0071E3"/>
+                </a:solidFill>
+              </a:rPr>
+              <a:t>GRAFANA 4 OF 4</a:t>
+            </a:r>
+            <a:endParaRPr lang="en-US" sz="1200" dirty="0"/>
+          </a:p>
+        </p:txBody>
+      </p:sp>
+      <p:sp>
+        <p:nvSpPr>
+          <p:cNvPr id="3" name="Text 1"/>
+          <p:cNvSpPr txBox="1"/>
+          <p:nvPr/>
+        </p:nvSpPr>
+        <p:spPr>
+          <a:xfrm>
+            <a:off x="548640" y="658368"/>
+            <a:ext cx="11091672" cy="731520"/>
+          </a:xfrm>
+          <a:prstGeom prst="rect">
+            <a:avLst/>
+          </a:prstGeom>
+          <a:noFill/>
+          <a:ln/>
+        </p:spPr>
+        <p:txBody>
+          <a:bodyPr wrap="square" lIns="0" tIns="0" rIns="0" bIns="0" rtlCol="0" anchor="ctr"/>
+          <a:lstStyle/>
+          <a:p>
+            <a:pPr indent="0" marL="0">
+              <a:buNone/>
+            </a:pPr>
+            <a:r>
+              <a:rPr lang="en-US" sz="3600" b="1" dirty="0">
+                <a:solidFill>
+                  <a:srgbClr val="1D1D1F"/>
+                </a:solidFill>
+              </a:rPr>
+              <a:t>Live service metrics</a:t>
+            </a:r>
+            <a:endParaRPr lang="en-US" sz="3600" dirty="0"/>
+          </a:p>
+        </p:txBody>
+      </p:sp>
+      <p:pic>
+        <p:nvPicPr>
+          <p:cNvPr id="5" name="Image 0" descr="Grafana: p95 latency, guardrail triggers, LLM tokens, refusals">    </p:cNvPr>
+          <p:cNvPicPr>
+            <a:picLocks noChangeAspect="1"/>
+          </p:cNvPicPr>
+          <p:nvPr/>
+        </p:nvPicPr>
+        <p:blipFill>
+          <a:blip r:embed="rId1"/>
+          <a:stretch>
+            <a:fillRect/>
+          </a:stretch>
+        </p:blipFill>
+        <p:spPr>
+          <a:xfrm>
+            <a:off x="548640" y="1463040"/>
+            <a:ext cx="7589520" cy="4553712"/>
+          </a:xfrm>
+          <a:prstGeom prst="rect">
+            <a:avLst/>
+          </a:prstGeom>
+        </p:spPr>
+      </p:pic>
+      <p:sp>
+        <p:nvSpPr>
+          <p:cNvPr id="6" name="Shape 2"/>
+          <p:cNvSpPr/>
+          <p:nvPr/>
+        </p:nvSpPr>
+        <p:spPr>
+          <a:xfrm>
+            <a:off x="8366760" y="1463040"/>
+            <a:ext cx="3273552" cy="4553712"/>
+          </a:xfrm>
+          <a:prstGeom prst="roundRect">
+            <a:avLst>
+              <a:gd name="adj" fmla="val 2793"/>
+            </a:avLst>
+          </a:prstGeom>
+          <a:solidFill>
+            <a:srgbClr val="FFFFFF"/>
+          </a:solidFill>
+          <a:ln w="9525">
+            <a:solidFill>
+              <a:srgbClr val="D9D9DE"/>
+            </a:solidFill>
+            <a:prstDash val="solid"/>
+          </a:ln>
+          <a:effectLst>
+            <a:outerShdw sx="100000" sy="100000" kx="0" ky="0" algn="bl" rotWithShape="0" blurRad="76200" dist="12700" dir="5400000">
+              <a:srgbClr val="000000">
+                <a:alpha val="8000"/>
+              </a:srgbClr>
+            </a:outerShdw>
+          </a:effectLst>
+        </p:spPr>
+      </p:sp>
+      <p:sp>
+        <p:nvSpPr>
+          <p:cNvPr id="7" name="Text 3"/>
+          <p:cNvSpPr txBox="1"/>
+          <p:nvPr/>
+        </p:nvSpPr>
+        <p:spPr>
+          <a:xfrm>
+            <a:off x="8549640" y="1600200"/>
+            <a:ext cx="2907792" cy="365760"/>
+          </a:xfrm>
+          <a:prstGeom prst="rect">
+            <a:avLst/>
+          </a:prstGeom>
+          <a:noFill/>
+          <a:ln/>
+        </p:spPr>
+        <p:txBody>
+          <a:bodyPr wrap="square" lIns="0" tIns="0" rIns="0" bIns="0" rtlCol="0" anchor="t"/>
+          <a:lstStyle/>
+          <a:p>
+            <a:pPr indent="0" marL="0">
+              <a:buNone/>
+            </a:pPr>
+            <a:r>
+              <a:rPr lang="en-US" sz="1500" b="1" dirty="0">
+                <a:solidFill>
+                  <a:srgbClr val="0071E3"/>
+                </a:solidFill>
+              </a:rPr>
+              <a:t>What it shows</a:t>
+            </a:r>
+            <a:endParaRPr lang="en-US" sz="1500" dirty="0"/>
+          </a:p>
+        </p:txBody>
+      </p:sp>
+      <p:sp>
+        <p:nvSpPr>
+          <p:cNvPr id="8" name="Text 4"/>
+          <p:cNvSpPr txBox="1"/>
+          <p:nvPr/>
+        </p:nvSpPr>
+        <p:spPr>
+          <a:xfrm>
+            <a:off x="8549640" y="1965960"/>
+            <a:ext cx="2907792" cy="3941064"/>
+          </a:xfrm>
+          <a:prstGeom prst="rect">
+            <a:avLst/>
+          </a:prstGeom>
+          <a:noFill/>
+          <a:ln/>
+        </p:spPr>
+        <p:txBody>
+          <a:bodyPr wrap="square" lIns="0" tIns="0" rIns="0" bIns="0" rtlCol="0" anchor="t"/>
+          <a:lstStyle/>
+          <a:p>
+            <a:pPr indent="0" marL="0">
+              <a:buNone/>
+            </a:pPr>
+            <a:r>
+              <a:rPr lang="en-US" sz="1300" dirty="0">
+                <a:solidFill>
+                  <a:srgbClr val="55555B"/>
+                </a:solidFill>
+              </a:rPr>
+              <a:t>p95 latency of /api/ask about 26 s.</a:t>
+            </a:r>
+            <a:endParaRPr lang="en-US" sz="1300" dirty="0"/>
+          </a:p>
+          <a:p>
+            <a:pPr indent="0" marL="0">
+              <a:buNone/>
+            </a:pPr>
+            <a:r>
+              <a:rPr lang="en-US" sz="1300" dirty="0">
+                <a:solidFill>
+                  <a:srgbClr val="55555B"/>
+                </a:solidFill>
+              </a:rPr>
+              <a:t>Guardrails fired: G4 (grounding flag), G1 (off-topic refusal), G10 (unsafe request refused).</a:t>
+            </a:r>
+            <a:endParaRPr lang="en-US" sz="1300" dirty="0"/>
+          </a:p>
+          <a:p>
+            <a:pPr indent="0" marL="0">
+              <a:buNone/>
+            </a:pPr>
+            <a:r>
+              <a:rPr lang="en-US" sz="1300" dirty="0">
+                <a:solidFill>
+                  <a:srgbClr val="55555B"/>
+                </a:solidFill>
+              </a:rPr>
+              <a:t>LLM tokens: 6,635 in, 554 out for 3 answers.</a:t>
+            </a:r>
+            <a:endParaRPr lang="en-US" sz="1300" dirty="0"/>
+          </a:p>
+          <a:p>
+            <a:pPr indent="0" marL="0">
+              <a:buNone/>
+            </a:pPr>
+            <a:r>
+              <a:rPr lang="en-US" sz="1300" dirty="0">
+                <a:solidFill>
+                  <a:srgbClr val="55555B"/>
+                </a:solidFill>
+              </a:rPr>
+              <a:t>Refusals: off_topic, unsafe_request.</a:t>
+            </a:r>
+            <a:endParaRPr lang="en-US" sz="1300" dirty="0"/>
+          </a:p>
+          <a:p>
+            <a:pPr indent="0" marL="0">
+              <a:buNone/>
+            </a:pPr>
+            <a:r>
+              <a:rPr lang="en-US" sz="1300" dirty="0">
+                <a:solidFill>
+                  <a:srgbClr val="55555B"/>
+                </a:solidFill>
+              </a:rPr>
+              <a:t>No 5xx errors; no alerts firing.</a:t>
+            </a:r>
+            <a:endParaRPr lang="en-US" sz="1300" dirty="0"/>
+          </a:p>
+        </p:txBody>
+      </p:sp>
+      <p:sp>
+        <p:nvSpPr>
+          <p:cNvPr id="25" name="Slide Number Placeholder 0"/>
+          <p:cNvSpPr>
+            <a:spLocks noGrp="1"/>
+          </p:cNvSpPr>
+          <p:nvPr>
+            <p:ph type="sldNum" sz="quarter" idx="4294967295"/>
+          </p:nvPr>
+        </p:nvSpPr>
+        <p:spPr>
+          <a:xfrm>
+            <a:off x="10725912" y="6419088"/>
+            <a:ext cx="914400" cy="274320"/>
+          </a:xfrm>
+          <a:prstGeom prst="rect">
+            <a:avLst/>
+          </a:prstGeom>
+          <a:extLst>
+            <a:ext uri="{C572A759-6A51-4108-AA02-DFA0A04FC94B}">
+              <ma14:wrappingTextBoxFlag xmlns:ma14="http://schemas.microsoft.com/office/mac/drawingml/2011/main" val="0"/>
+            </a:ext>
+          </a:extLst>
+        </p:spPr>
+        <p:txBody>
+          <a:bodyPr/>
+          <a:lstStyle>
+            <a:lvl1pPr>
+              <a:defRPr sz="1100">
+                <a:solidFill>
+                  <a:srgbClr val="55555B"/>
+                </a:solidFill>
+                <a:latin typeface="Calibri"/>
+                <a:ea typeface="Calibri"/>
+                <a:cs typeface="Calibri"/>
+              </a:defRPr>
+            </a:lvl1pPr>
+          </a:lstStyle>
+          <a:p>
+            <a:pPr algn="r"/>
+            <a:fld id="{F7021451-1387-4CA6-816F-3879F97B5CBC}" type="slidenum">
+              <a:rPr b="0" lang="en-US"/>
+              <a:t>15</a:t>
+            </a:fld>
+            <a:endParaRPr lang="en-US"/>
+          </a:p>
+        </p:txBody>
+      </p:sp>
+    </p:spTree>
+  </p:cSld>
+  <p:clrMapOvr>
+    <a:masterClrMapping/>
+  </p:clrMapOvr>
+</p:sld>
+</file>
+
+<file path=ppt/slides/slide16.xml><?xml version="1.0" encoding="utf-8"?>
+<p:sld xmlns:a="http://schemas.openxmlformats.org/drawingml/2006/main" xmlns:r="http://schemas.openxmlformats.org/officeDocument/2006/relationships" xmlns:p="http://schemas.openxmlformats.org/presentationml/2006/main">
+  <p:cSld name="Slide 16">
+    <p:spTree>
+      <p:nvGrpSpPr>
+        <p:cNvPr id="1" name=""/>
+        <p:cNvGrpSpPr/>
+        <p:nvPr/>
+      </p:nvGrpSpPr>
+      <p:grpSpPr>
+        <a:xfrm>
+          <a:off x="0" y="0"/>
+          <a:ext cx="0" cy="0"/>
+          <a:chOff x="0" y="0"/>
+          <a:chExt cx="0" cy="0"/>
+        </a:xfrm>
+      </p:grpSpPr>
+      <p:sp>
+        <p:nvSpPr>
+          <p:cNvPr id="2" name="Text 0"/>
+          <p:cNvSpPr txBox="1"/>
+          <p:nvPr/>
+        </p:nvSpPr>
+        <p:spPr>
+          <a:xfrm>
+            <a:off x="548640" y="365760"/>
+            <a:ext cx="11091672" cy="274320"/>
+          </a:xfrm>
+          <a:prstGeom prst="rect">
+            <a:avLst/>
+          </a:prstGeom>
+          <a:noFill/>
+          <a:ln/>
+        </p:spPr>
+        <p:txBody>
+          <a:bodyPr wrap="square" lIns="0" tIns="0" rIns="0" bIns="0" rtlCol="0" anchor="ctr"/>
+          <a:lstStyle/>
+          <a:p>
+            <a:pPr indent="0" marL="0">
+              <a:buNone/>
+            </a:pPr>
+            <a:r>
+              <a:rPr lang="en-US" sz="1200" b="1" spc="200" kern="0" dirty="0">
+                <a:solidFill>
+                  <a:srgbClr val="0071E3"/>
+                </a:solidFill>
+              </a:rPr>
+              <a:t>RESULTS: HELD-OUT RUN ON A REAL REPOSITORY</a:t>
+            </a:r>
+            <a:endParaRPr lang="en-US" sz="1200" dirty="0"/>
+          </a:p>
+        </p:txBody>
+      </p:sp>
+      <p:sp>
+        <p:nvSpPr>
+          <p:cNvPr id="3" name="Text 1"/>
+          <p:cNvSpPr txBox="1"/>
+          <p:nvPr/>
+        </p:nvSpPr>
+        <p:spPr>
+          <a:xfrm>
+            <a:off x="548640" y="658368"/>
+            <a:ext cx="11091672" cy="731520"/>
+          </a:xfrm>
+          <a:prstGeom prst="rect">
+            <a:avLst/>
+          </a:prstGeom>
+          <a:noFill/>
+          <a:ln/>
+        </p:spPr>
+        <p:txBody>
+          <a:bodyPr wrap="square" lIns="0" tIns="0" rIns="0" bIns="0" rtlCol="0" anchor="ctr"/>
+          <a:lstStyle/>
+          <a:p>
+            <a:pPr indent="0" marL="0">
+              <a:buNone/>
+            </a:pPr>
+            <a:r>
+              <a:rPr lang="en-US" sz="3600" b="1" dirty="0">
+                <a:solidFill>
+                  <a:srgbClr val="1D1D1F"/>
+                </a:solidFill>
+              </a:rPr>
+              <a:t>What the experiment shows</a:t>
+            </a:r>
+            <a:endParaRPr lang="en-US" sz="3600" dirty="0"/>
+          </a:p>
+        </p:txBody>
+      </p:sp>
+      <p:sp>
+        <p:nvSpPr>
+          <p:cNvPr id="4" name="Text 2"/>
+          <p:cNvSpPr txBox="1"/>
+          <p:nvPr/>
+        </p:nvSpPr>
+        <p:spPr>
+          <a:xfrm>
+            <a:off x="548640" y="1371600"/>
+            <a:ext cx="11091672" cy="548640"/>
+          </a:xfrm>
+          <a:prstGeom prst="rect">
+            <a:avLst/>
+          </a:prstGeom>
+          <a:noFill/>
+          <a:ln/>
+        </p:spPr>
+        <p:txBody>
+          <a:bodyPr wrap="square" lIns="0" tIns="0" rIns="0" bIns="0" rtlCol="0" anchor="t"/>
+          <a:lstStyle/>
+          <a:p>
+            <a:pPr indent="0" marL="0">
+              <a:buNone/>
+            </a:pPr>
+            <a:r>
+              <a:rPr lang="en-US" sz="1600" dirty="0">
+                <a:solidFill>
+                  <a:srgbClr val="55555B"/>
+                </a:solidFill>
+              </a:rPr>
+              <a:t>Run #8: pallets/itsdangerous, 35 questions, 399 answers, real local models. Overall correctness per mode.</a:t>
+            </a:r>
+            <a:endParaRPr lang="en-US" sz="1600" dirty="0"/>
           </a:p>
         </p:txBody>
       </p:sp>
       <p:graphicFrame>
         <p:nvGraphicFramePr>
-          <p:cNvPr id="12" name="Table 0"/>
+          <p:cNvPr id="6" name="Chart 0" descr=""/>
+          <p:cNvGraphicFramePr/>
+          <p:nvPr/>
+        </p:nvGraphicFramePr>
+        <p:xfrm>
+          <a:off x="548640" y="2011680"/>
+          <a:ext cx="6949440" cy="4206240"/>
+        </p:xfrm>
+        <a:graphic xmlns:a="http://schemas.openxmlformats.org/drawingml/2006/main">
+          <a:graphicData uri="http://schemas.openxmlformats.org/drawingml/2006/chart">
+            <c:chart xmlns:c="http://schemas.openxmlformats.org/drawingml/2006/chart" r:id="rId1"/>
+          </a:graphicData>
+        </a:graphic>
+      </p:graphicFrame>
+      <p:sp>
+        <p:nvSpPr>
+          <p:cNvPr id="7" name="Text 3"/>
+          <p:cNvSpPr txBox="1"/>
+          <p:nvPr/>
+        </p:nvSpPr>
+        <p:spPr>
+          <a:xfrm>
+            <a:off x="7772400" y="2011680"/>
+            <a:ext cx="3840480" cy="320040"/>
+          </a:xfrm>
+          <a:prstGeom prst="rect">
+            <a:avLst/>
+          </a:prstGeom>
+          <a:noFill/>
+          <a:ln/>
+        </p:spPr>
+        <p:txBody>
+          <a:bodyPr wrap="square" lIns="0" tIns="0" rIns="0" bIns="0" rtlCol="0" anchor="ctr"/>
+          <a:lstStyle/>
+          <a:p>
+            <a:pPr indent="0" marL="0">
+              <a:buNone/>
+            </a:pPr>
+            <a:r>
+              <a:rPr lang="en-US" sz="1400" b="1" dirty="0">
+                <a:solidFill>
+                  <a:srgbClr val="1D1D1F"/>
+                </a:solidFill>
+              </a:rPr>
+              <a:t>History vs code-only (24 history questions)</a:t>
+            </a:r>
+            <a:endParaRPr lang="en-US" sz="1400" dirty="0"/>
+          </a:p>
+        </p:txBody>
+      </p:sp>
+      <p:sp>
+        <p:nvSpPr>
+          <p:cNvPr id="8" name="Shape 4"/>
+          <p:cNvSpPr/>
+          <p:nvPr/>
+        </p:nvSpPr>
+        <p:spPr>
+          <a:xfrm>
+            <a:off x="7772400" y="2423160"/>
+            <a:ext cx="3867912" cy="1051560"/>
+          </a:xfrm>
+          <a:prstGeom prst="roundRect">
+            <a:avLst>
+              <a:gd name="adj" fmla="val 8696"/>
+            </a:avLst>
+          </a:prstGeom>
+          <a:solidFill>
+            <a:srgbClr val="FFFFFF"/>
+          </a:solidFill>
+          <a:ln w="9525">
+            <a:solidFill>
+              <a:srgbClr val="D9D9DE"/>
+            </a:solidFill>
+            <a:prstDash val="solid"/>
+          </a:ln>
+        </p:spPr>
+      </p:sp>
+      <p:sp>
+        <p:nvSpPr>
+          <p:cNvPr id="9" name="Text 5"/>
+          <p:cNvSpPr txBox="1"/>
+          <p:nvPr/>
+        </p:nvSpPr>
+        <p:spPr>
+          <a:xfrm>
+            <a:off x="7955280" y="2514600"/>
+            <a:ext cx="2011680" cy="320040"/>
+          </a:xfrm>
+          <a:prstGeom prst="rect">
+            <a:avLst/>
+          </a:prstGeom>
+          <a:noFill/>
+          <a:ln/>
+        </p:spPr>
+        <p:txBody>
+          <a:bodyPr wrap="square" lIns="0" tIns="0" rIns="0" bIns="0" rtlCol="0" anchor="ctr"/>
+          <a:lstStyle/>
+          <a:p>
+            <a:pPr indent="0" marL="0">
+              <a:buNone/>
+            </a:pPr>
+            <a:r>
+              <a:rPr lang="en-US" sz="1500" b="1" dirty="0">
+                <a:solidFill>
+                  <a:srgbClr val="1D1D1F"/>
+                </a:solidFill>
+              </a:rPr>
+              <a:t>llama2</a:t>
+            </a:r>
+            <a:endParaRPr lang="en-US" sz="1500" dirty="0"/>
+          </a:p>
+        </p:txBody>
+      </p:sp>
+      <p:sp>
+        <p:nvSpPr>
+          <p:cNvPr id="10" name="Text 6"/>
+          <p:cNvSpPr txBox="1"/>
+          <p:nvPr/>
+        </p:nvSpPr>
+        <p:spPr>
+          <a:xfrm>
+            <a:off x="9966960" y="2468880"/>
+            <a:ext cx="1554480" cy="457200"/>
+          </a:xfrm>
+          <a:prstGeom prst="rect">
+            <a:avLst/>
+          </a:prstGeom>
+          <a:noFill/>
+          <a:ln/>
+        </p:spPr>
+        <p:txBody>
+          <a:bodyPr wrap="square" lIns="0" tIns="0" rIns="0" bIns="0" rtlCol="0" anchor="ctr"/>
+          <a:lstStyle/>
+          <a:p>
+            <a:pPr algn="r" indent="0" marL="0">
+              <a:buNone/>
+            </a:pPr>
+            <a:r>
+              <a:rPr lang="en-US" sz="2400" b="1" dirty="0">
+                <a:solidFill>
+                  <a:srgbClr val="1E9E6A"/>
+                </a:solidFill>
+              </a:rPr>
+              <a:t>+0.32</a:t>
+            </a:r>
+            <a:endParaRPr lang="en-US" sz="2400" dirty="0"/>
+          </a:p>
+        </p:txBody>
+      </p:sp>
+      <p:sp>
+        <p:nvSpPr>
+          <p:cNvPr id="11" name="Text 7"/>
+          <p:cNvSpPr txBox="1"/>
+          <p:nvPr/>
+        </p:nvSpPr>
+        <p:spPr>
+          <a:xfrm>
+            <a:off x="7955280" y="2880360"/>
+            <a:ext cx="3566160" cy="274320"/>
+          </a:xfrm>
+          <a:prstGeom prst="rect">
+            <a:avLst/>
+          </a:prstGeom>
+          <a:noFill/>
+          <a:ln/>
+        </p:spPr>
+        <p:txBody>
+          <a:bodyPr wrap="square" lIns="0" tIns="0" rIns="0" bIns="0" rtlCol="0" anchor="ctr"/>
+          <a:lstStyle/>
+          <a:p>
+            <a:pPr indent="0" marL="0">
+              <a:buNone/>
+            </a:pPr>
+            <a:r>
+              <a:rPr lang="en-US" sz="1200" dirty="0">
+                <a:solidFill>
+                  <a:srgbClr val="55555B"/>
+                </a:solidFill>
+              </a:rPr>
+              <a:t>95% CI [+0.07, +0.55]</a:t>
+            </a:r>
+            <a:endParaRPr lang="en-US" sz="1200" dirty="0"/>
+          </a:p>
+        </p:txBody>
+      </p:sp>
+      <p:sp>
+        <p:nvSpPr>
+          <p:cNvPr id="12" name="Text 8"/>
+          <p:cNvSpPr txBox="1"/>
+          <p:nvPr/>
+        </p:nvSpPr>
+        <p:spPr>
+          <a:xfrm>
+            <a:off x="7955280" y="3136392"/>
+            <a:ext cx="3566160" cy="274320"/>
+          </a:xfrm>
+          <a:prstGeom prst="rect">
+            <a:avLst/>
+          </a:prstGeom>
+          <a:noFill/>
+          <a:ln/>
+        </p:spPr>
+        <p:txBody>
+          <a:bodyPr wrap="square" lIns="0" tIns="0" rIns="0" bIns="0" rtlCol="0" anchor="ctr"/>
+          <a:lstStyle/>
+          <a:p>
+            <a:pPr indent="0" marL="0">
+              <a:buNone/>
+            </a:pPr>
+            <a:r>
+              <a:rPr lang="en-US" sz="1300" b="1" dirty="0">
+                <a:solidFill>
+                  <a:srgbClr val="1E9E6A"/>
+                </a:solidFill>
+              </a:rPr>
+              <a:t>history is useful</a:t>
+            </a:r>
+            <a:endParaRPr lang="en-US" sz="1300" dirty="0"/>
+          </a:p>
+        </p:txBody>
+      </p:sp>
+      <p:sp>
+        <p:nvSpPr>
+          <p:cNvPr id="13" name="Shape 9"/>
+          <p:cNvSpPr/>
+          <p:nvPr/>
+        </p:nvSpPr>
+        <p:spPr>
+          <a:xfrm>
+            <a:off x="7772400" y="3611880"/>
+            <a:ext cx="3867912" cy="1051560"/>
+          </a:xfrm>
+          <a:prstGeom prst="roundRect">
+            <a:avLst>
+              <a:gd name="adj" fmla="val 8696"/>
+            </a:avLst>
+          </a:prstGeom>
+          <a:solidFill>
+            <a:srgbClr val="FFFFFF"/>
+          </a:solidFill>
+          <a:ln w="9525">
+            <a:solidFill>
+              <a:srgbClr val="D9D9DE"/>
+            </a:solidFill>
+            <a:prstDash val="solid"/>
+          </a:ln>
+        </p:spPr>
+      </p:sp>
+      <p:sp>
+        <p:nvSpPr>
+          <p:cNvPr id="14" name="Text 10"/>
+          <p:cNvSpPr txBox="1"/>
+          <p:nvPr/>
+        </p:nvSpPr>
+        <p:spPr>
+          <a:xfrm>
+            <a:off x="7955280" y="3703320"/>
+            <a:ext cx="2011680" cy="320040"/>
+          </a:xfrm>
+          <a:prstGeom prst="rect">
+            <a:avLst/>
+          </a:prstGeom>
+          <a:noFill/>
+          <a:ln/>
+        </p:spPr>
+        <p:txBody>
+          <a:bodyPr wrap="square" lIns="0" tIns="0" rIns="0" bIns="0" rtlCol="0" anchor="ctr"/>
+          <a:lstStyle/>
+          <a:p>
+            <a:pPr indent="0" marL="0">
+              <a:buNone/>
+            </a:pPr>
+            <a:r>
+              <a:rPr lang="en-US" sz="1500" b="1" dirty="0">
+                <a:solidFill>
+                  <a:srgbClr val="1D1D1F"/>
+                </a:solidFill>
+              </a:rPr>
+              <a:t>codellama:7b</a:t>
+            </a:r>
+            <a:endParaRPr lang="en-US" sz="1500" dirty="0"/>
+          </a:p>
+        </p:txBody>
+      </p:sp>
+      <p:sp>
+        <p:nvSpPr>
+          <p:cNvPr id="15" name="Text 11"/>
+          <p:cNvSpPr txBox="1"/>
+          <p:nvPr/>
+        </p:nvSpPr>
+        <p:spPr>
+          <a:xfrm>
+            <a:off x="9966960" y="3657600"/>
+            <a:ext cx="1554480" cy="457200"/>
+          </a:xfrm>
+          <a:prstGeom prst="rect">
+            <a:avLst/>
+          </a:prstGeom>
+          <a:noFill/>
+          <a:ln/>
+        </p:spPr>
+        <p:txBody>
+          <a:bodyPr wrap="square" lIns="0" tIns="0" rIns="0" bIns="0" rtlCol="0" anchor="ctr"/>
+          <a:lstStyle/>
+          <a:p>
+            <a:pPr algn="r" indent="0" marL="0">
+              <a:buNone/>
+            </a:pPr>
+            <a:r>
+              <a:rPr lang="en-US" sz="2400" b="1" dirty="0">
+                <a:solidFill>
+                  <a:srgbClr val="1E9E6A"/>
+                </a:solidFill>
+              </a:rPr>
+              <a:t>+0.28</a:t>
+            </a:r>
+            <a:endParaRPr lang="en-US" sz="2400" dirty="0"/>
+          </a:p>
+        </p:txBody>
+      </p:sp>
+      <p:sp>
+        <p:nvSpPr>
+          <p:cNvPr id="16" name="Text 12"/>
+          <p:cNvSpPr txBox="1"/>
+          <p:nvPr/>
+        </p:nvSpPr>
+        <p:spPr>
+          <a:xfrm>
+            <a:off x="7955280" y="4069080"/>
+            <a:ext cx="3566160" cy="274320"/>
+          </a:xfrm>
+          <a:prstGeom prst="rect">
+            <a:avLst/>
+          </a:prstGeom>
+          <a:noFill/>
+          <a:ln/>
+        </p:spPr>
+        <p:txBody>
+          <a:bodyPr wrap="square" lIns="0" tIns="0" rIns="0" bIns="0" rtlCol="0" anchor="ctr"/>
+          <a:lstStyle/>
+          <a:p>
+            <a:pPr indent="0" marL="0">
+              <a:buNone/>
+            </a:pPr>
+            <a:r>
+              <a:rPr lang="en-US" sz="1200" dirty="0">
+                <a:solidFill>
+                  <a:srgbClr val="55555B"/>
+                </a:solidFill>
+              </a:rPr>
+              <a:t>95% CI [+0.05, +0.49]</a:t>
+            </a:r>
+            <a:endParaRPr lang="en-US" sz="1200" dirty="0"/>
+          </a:p>
+        </p:txBody>
+      </p:sp>
+      <p:sp>
+        <p:nvSpPr>
+          <p:cNvPr id="17" name="Text 13"/>
+          <p:cNvSpPr txBox="1"/>
+          <p:nvPr/>
+        </p:nvSpPr>
+        <p:spPr>
+          <a:xfrm>
+            <a:off x="7955280" y="4325112"/>
+            <a:ext cx="3566160" cy="274320"/>
+          </a:xfrm>
+          <a:prstGeom prst="rect">
+            <a:avLst/>
+          </a:prstGeom>
+          <a:noFill/>
+          <a:ln/>
+        </p:spPr>
+        <p:txBody>
+          <a:bodyPr wrap="square" lIns="0" tIns="0" rIns="0" bIns="0" rtlCol="0" anchor="ctr"/>
+          <a:lstStyle/>
+          <a:p>
+            <a:pPr indent="0" marL="0">
+              <a:buNone/>
+            </a:pPr>
+            <a:r>
+              <a:rPr lang="en-US" sz="1300" b="1" dirty="0">
+                <a:solidFill>
+                  <a:srgbClr val="1E9E6A"/>
+                </a:solidFill>
+              </a:rPr>
+              <a:t>history is useful</a:t>
+            </a:r>
+            <a:endParaRPr lang="en-US" sz="1300" dirty="0"/>
+          </a:p>
+        </p:txBody>
+      </p:sp>
+      <p:sp>
+        <p:nvSpPr>
+          <p:cNvPr id="18" name="Shape 14"/>
+          <p:cNvSpPr/>
+          <p:nvPr/>
+        </p:nvSpPr>
+        <p:spPr>
+          <a:xfrm>
+            <a:off x="7772400" y="4800600"/>
+            <a:ext cx="3867912" cy="1051560"/>
+          </a:xfrm>
+          <a:prstGeom prst="roundRect">
+            <a:avLst>
+              <a:gd name="adj" fmla="val 8696"/>
+            </a:avLst>
+          </a:prstGeom>
+          <a:solidFill>
+            <a:srgbClr val="FFFFFF"/>
+          </a:solidFill>
+          <a:ln w="9525">
+            <a:solidFill>
+              <a:srgbClr val="D9D9DE"/>
+            </a:solidFill>
+            <a:prstDash val="solid"/>
+          </a:ln>
+        </p:spPr>
+      </p:sp>
+      <p:sp>
+        <p:nvSpPr>
+          <p:cNvPr id="19" name="Text 15"/>
+          <p:cNvSpPr txBox="1"/>
+          <p:nvPr/>
+        </p:nvSpPr>
+        <p:spPr>
+          <a:xfrm>
+            <a:off x="7955280" y="4892040"/>
+            <a:ext cx="2011680" cy="320040"/>
+          </a:xfrm>
+          <a:prstGeom prst="rect">
+            <a:avLst/>
+          </a:prstGeom>
+          <a:noFill/>
+          <a:ln/>
+        </p:spPr>
+        <p:txBody>
+          <a:bodyPr wrap="square" lIns="0" tIns="0" rIns="0" bIns="0" rtlCol="0" anchor="ctr"/>
+          <a:lstStyle/>
+          <a:p>
+            <a:pPr indent="0" marL="0">
+              <a:buNone/>
+            </a:pPr>
+            <a:r>
+              <a:rPr lang="en-US" sz="1500" b="1" dirty="0">
+                <a:solidFill>
+                  <a:srgbClr val="1D1D1F"/>
+                </a:solidFill>
+              </a:rPr>
+              <a:t>starcoder2:3b</a:t>
+            </a:r>
+            <a:endParaRPr lang="en-US" sz="1500" dirty="0"/>
+          </a:p>
+        </p:txBody>
+      </p:sp>
+      <p:sp>
+        <p:nvSpPr>
+          <p:cNvPr id="20" name="Text 16"/>
+          <p:cNvSpPr txBox="1"/>
+          <p:nvPr/>
+        </p:nvSpPr>
+        <p:spPr>
+          <a:xfrm>
+            <a:off x="9966960" y="4846320"/>
+            <a:ext cx="1554480" cy="457200"/>
+          </a:xfrm>
+          <a:prstGeom prst="rect">
+            <a:avLst/>
+          </a:prstGeom>
+          <a:noFill/>
+          <a:ln/>
+        </p:spPr>
+        <p:txBody>
+          <a:bodyPr wrap="square" lIns="0" tIns="0" rIns="0" bIns="0" rtlCol="0" anchor="ctr"/>
+          <a:lstStyle/>
+          <a:p>
+            <a:pPr algn="r" indent="0" marL="0">
+              <a:buNone/>
+            </a:pPr>
+            <a:r>
+              <a:rPr lang="en-US" sz="2400" b="1" dirty="0">
+                <a:solidFill>
+                  <a:srgbClr val="55555B"/>
+                </a:solidFill>
+              </a:rPr>
+              <a:t>−0.02</a:t>
+            </a:r>
+            <a:endParaRPr lang="en-US" sz="2400" dirty="0"/>
+          </a:p>
+        </p:txBody>
+      </p:sp>
+      <p:sp>
+        <p:nvSpPr>
+          <p:cNvPr id="21" name="Text 17"/>
+          <p:cNvSpPr txBox="1"/>
+          <p:nvPr/>
+        </p:nvSpPr>
+        <p:spPr>
+          <a:xfrm>
+            <a:off x="7955280" y="5257800"/>
+            <a:ext cx="3566160" cy="274320"/>
+          </a:xfrm>
+          <a:prstGeom prst="rect">
+            <a:avLst/>
+          </a:prstGeom>
+          <a:noFill/>
+          <a:ln/>
+        </p:spPr>
+        <p:txBody>
+          <a:bodyPr wrap="square" lIns="0" tIns="0" rIns="0" bIns="0" rtlCol="0" anchor="ctr"/>
+          <a:lstStyle/>
+          <a:p>
+            <a:pPr indent="0" marL="0">
+              <a:buNone/>
+            </a:pPr>
+            <a:r>
+              <a:rPr lang="en-US" sz="1200" dirty="0">
+                <a:solidFill>
+                  <a:srgbClr val="55555B"/>
+                </a:solidFill>
+              </a:rPr>
+              <a:t>95% CI [−0.21, +0.17]</a:t>
+            </a:r>
+            <a:endParaRPr lang="en-US" sz="1200" dirty="0"/>
+          </a:p>
+        </p:txBody>
+      </p:sp>
+      <p:sp>
+        <p:nvSpPr>
+          <p:cNvPr id="22" name="Text 18"/>
+          <p:cNvSpPr txBox="1"/>
+          <p:nvPr/>
+        </p:nvSpPr>
+        <p:spPr>
+          <a:xfrm>
+            <a:off x="7955280" y="5513832"/>
+            <a:ext cx="3566160" cy="274320"/>
+          </a:xfrm>
+          <a:prstGeom prst="rect">
+            <a:avLst/>
+          </a:prstGeom>
+          <a:noFill/>
+          <a:ln/>
+        </p:spPr>
+        <p:txBody>
+          <a:bodyPr wrap="square" lIns="0" tIns="0" rIns="0" bIns="0" rtlCol="0" anchor="ctr"/>
+          <a:lstStyle/>
+          <a:p>
+            <a:pPr indent="0" marL="0">
+              <a:buNone/>
+            </a:pPr>
+            <a:r>
+              <a:rPr lang="en-US" sz="1300" b="1" dirty="0">
+                <a:solidFill>
+                  <a:srgbClr val="55555B"/>
+                </a:solidFill>
+              </a:rPr>
+              <a:t>no effect detected</a:t>
+            </a:r>
+            <a:endParaRPr lang="en-US" sz="1300" dirty="0"/>
+          </a:p>
+        </p:txBody>
+      </p:sp>
+      <p:sp>
+        <p:nvSpPr>
+          <p:cNvPr id="25" name="Slide Number Placeholder 0"/>
+          <p:cNvSpPr>
+            <a:spLocks noGrp="1"/>
+          </p:cNvSpPr>
+          <p:nvPr>
+            <p:ph type="sldNum" sz="quarter" idx="4294967295"/>
+          </p:nvPr>
+        </p:nvSpPr>
+        <p:spPr>
+          <a:xfrm>
+            <a:off x="10725912" y="6419088"/>
+            <a:ext cx="914400" cy="274320"/>
+          </a:xfrm>
+          <a:prstGeom prst="rect">
+            <a:avLst/>
+          </a:prstGeom>
+          <a:extLst>
+            <a:ext uri="{C572A759-6A51-4108-AA02-DFA0A04FC94B}">
+              <ma14:wrappingTextBoxFlag xmlns:ma14="http://schemas.microsoft.com/office/mac/drawingml/2011/main" val="0"/>
+            </a:ext>
+          </a:extLst>
+        </p:spPr>
+        <p:txBody>
+          <a:bodyPr/>
+          <a:lstStyle>
+            <a:lvl1pPr>
+              <a:defRPr sz="1100">
+                <a:solidFill>
+                  <a:srgbClr val="55555B"/>
+                </a:solidFill>
+                <a:latin typeface="Calibri"/>
+                <a:ea typeface="Calibri"/>
+                <a:cs typeface="Calibri"/>
+              </a:defRPr>
+            </a:lvl1pPr>
+          </a:lstStyle>
+          <a:p>
+            <a:pPr algn="r"/>
+            <a:fld id="{F7021451-1387-4CA6-816F-3879F97B5CBC}" type="slidenum">
+              <a:rPr b="0" lang="en-US"/>
+              <a:t>16</a:t>
+            </a:fld>
+            <a:endParaRPr lang="en-US"/>
+          </a:p>
+        </p:txBody>
+      </p:sp>
+    </p:spTree>
+  </p:cSld>
+  <p:clrMapOvr>
+    <a:masterClrMapping/>
+  </p:clrMapOvr>
+</p:sld>
+</file>
+
+<file path=ppt/slides/slide17.xml><?xml version="1.0" encoding="utf-8"?>
+<p:sld xmlns:a="http://schemas.openxmlformats.org/drawingml/2006/main" xmlns:r="http://schemas.openxmlformats.org/officeDocument/2006/relationships" xmlns:p="http://schemas.openxmlformats.org/presentationml/2006/main">
+  <p:cSld name="Slide 17">
+    <p:spTree>
+      <p:nvGrpSpPr>
+        <p:cNvPr id="1" name=""/>
+        <p:cNvGrpSpPr/>
+        <p:nvPr/>
+      </p:nvGrpSpPr>
+      <p:grpSpPr>
+        <a:xfrm>
+          <a:off x="0" y="0"/>
+          <a:ext cx="0" cy="0"/>
+          <a:chOff x="0" y="0"/>
+          <a:chExt cx="0" cy="0"/>
+        </a:xfrm>
+      </p:grpSpPr>
+      <p:sp>
+        <p:nvSpPr>
+          <p:cNvPr id="2" name="Text 0"/>
+          <p:cNvSpPr txBox="1"/>
+          <p:nvPr/>
+        </p:nvSpPr>
+        <p:spPr>
+          <a:xfrm>
+            <a:off x="548640" y="365760"/>
+            <a:ext cx="11091672" cy="274320"/>
+          </a:xfrm>
+          <a:prstGeom prst="rect">
+            <a:avLst/>
+          </a:prstGeom>
+          <a:noFill/>
+          <a:ln/>
+        </p:spPr>
+        <p:txBody>
+          <a:bodyPr wrap="square" lIns="0" tIns="0" rIns="0" bIns="0" rtlCol="0" anchor="ctr"/>
+          <a:lstStyle/>
+          <a:p>
+            <a:pPr indent="0" marL="0">
+              <a:buNone/>
+            </a:pPr>
+            <a:r>
+              <a:rPr lang="en-US" sz="1200" b="1" spc="200" kern="0" dirty="0">
+                <a:solidFill>
+                  <a:srgbClr val="0071E3"/>
+                </a:solidFill>
+              </a:rPr>
+              <a:t>RESULTS AND INTERPRETATION</a:t>
+            </a:r>
+            <a:endParaRPr lang="en-US" sz="1200" dirty="0"/>
+          </a:p>
+        </p:txBody>
+      </p:sp>
+      <p:sp>
+        <p:nvSpPr>
+          <p:cNvPr id="3" name="Text 1"/>
+          <p:cNvSpPr txBox="1"/>
+          <p:nvPr/>
+        </p:nvSpPr>
+        <p:spPr>
+          <a:xfrm>
+            <a:off x="548640" y="658368"/>
+            <a:ext cx="11091672" cy="731520"/>
+          </a:xfrm>
+          <a:prstGeom prst="rect">
+            <a:avLst/>
+          </a:prstGeom>
+          <a:noFill/>
+          <a:ln/>
+        </p:spPr>
+        <p:txBody>
+          <a:bodyPr wrap="square" lIns="0" tIns="0" rIns="0" bIns="0" rtlCol="0" anchor="ctr"/>
+          <a:lstStyle/>
+          <a:p>
+            <a:pPr indent="0" marL="0">
+              <a:buNone/>
+            </a:pPr>
+            <a:r>
+              <a:rPr lang="en-US" sz="3600" b="1" dirty="0">
+                <a:solidFill>
+                  <a:srgbClr val="1D1D1F"/>
+                </a:solidFill>
+              </a:rPr>
+              <a:t>What the numbers mean</a:t>
+            </a:r>
+            <a:endParaRPr lang="en-US" sz="3600" dirty="0"/>
+          </a:p>
+        </p:txBody>
+      </p:sp>
+      <p:graphicFrame>
+        <p:nvGraphicFramePr>
+          <p:cNvPr id="18" name="Table 0"/>
           <p:cNvGraphicFramePr>
             <a:graphicFrameLocks noGrp="1"/>
           </p:cNvGraphicFramePr>
@@ -7452,7 +10338,7 @@
             <a:pPr algn="r"/>
             <a:fld id="{F7021451-1387-4CA6-816F-3879F97B5CBC}" type="slidenum">
               <a:rPr b="0" lang="en-US"/>
-              <a:t>11</a:t>
+              <a:t>17</a:t>
             </a:fld>
             <a:endParaRPr lang="en-US"/>
           </a:p>
@@ -7466,9 +10352,9 @@
 </p:sld>
 </file>
 
-<file path=ppt/slides/slide12.xml><?xml version="1.0" encoding="utf-8"?>
+<file path=ppt/slides/slide18.xml><?xml version="1.0" encoding="utf-8"?>
 <p:sld xmlns:a="http://schemas.openxmlformats.org/drawingml/2006/main" xmlns:r="http://schemas.openxmlformats.org/officeDocument/2006/relationships" xmlns:p="http://schemas.openxmlformats.org/presentationml/2006/main">
-  <p:cSld name="Slide 12">
+  <p:cSld name="Slide 18">
     <p:spTree>
       <p:nvGrpSpPr>
         <p:cNvPr id="1" name=""/>
@@ -7557,7 +10443,7 @@
       </p:sp>
       <p:graphicFrame>
         <p:nvGraphicFramePr>
-          <p:cNvPr id="13" name="Table 0"/>
+          <p:cNvPr id="19" name="Table 0"/>
           <p:cNvGraphicFramePr>
             <a:graphicFrameLocks noGrp="1"/>
           </p:cNvGraphicFramePr>
@@ -11123,7 +14009,7 @@
             <a:pPr algn="r"/>
             <a:fld id="{F7021451-1387-4CA6-816F-3879F97B5CBC}" type="slidenum">
               <a:rPr b="0" lang="en-US"/>
-              <a:t>12</a:t>
+              <a:t>18</a:t>
             </a:fld>
             <a:endParaRPr lang="en-US"/>
           </a:p>
@@ -11137,9 +14023,9 @@
 </p:sld>
 </file>
 
-<file path=ppt/slides/slide13.xml><?xml version="1.0" encoding="utf-8"?>
+<file path=ppt/slides/slide19.xml><?xml version="1.0" encoding="utf-8"?>
 <p:sld xmlns:a="http://schemas.openxmlformats.org/drawingml/2006/main" xmlns:r="http://schemas.openxmlformats.org/officeDocument/2006/relationships" xmlns:p="http://schemas.openxmlformats.org/presentationml/2006/main">
-  <p:cSld name="Slide 13">
+  <p:cSld name="Slide 19">
     <p:spTree>
       <p:nvGrpSpPr>
         <p:cNvPr id="1" name=""/>
@@ -11228,7 +14114,7 @@
       </p:sp>
       <p:graphicFrame>
         <p:nvGraphicFramePr>
-          <p:cNvPr id="14" name="Table 0"/>
+          <p:cNvPr id="20" name="Table 0"/>
           <p:cNvGraphicFramePr>
             <a:graphicFrameLocks noGrp="1"/>
           </p:cNvGraphicFramePr>
@@ -12741,1247 +15627,7 @@
             <a:pPr algn="r"/>
             <a:fld id="{F7021451-1387-4CA6-816F-3879F97B5CBC}" type="slidenum">
               <a:rPr b="0" lang="en-US"/>
-              <a:t>13</a:t>
-            </a:fld>
-            <a:endParaRPr lang="en-US"/>
-          </a:p>
-        </p:txBody>
-      </p:sp>
-    </p:spTree>
-  </p:cSld>
-  <p:clrMapOvr>
-    <a:masterClrMapping/>
-  </p:clrMapOvr>
-</p:sld>
-</file>
-
-<file path=ppt/slides/slide14.xml><?xml version="1.0" encoding="utf-8"?>
-<p:sld xmlns:a="http://schemas.openxmlformats.org/drawingml/2006/main" xmlns:r="http://schemas.openxmlformats.org/officeDocument/2006/relationships" xmlns:p="http://schemas.openxmlformats.org/presentationml/2006/main">
-  <p:cSld name="Slide 14">
-    <p:spTree>
-      <p:nvGrpSpPr>
-        <p:cNvPr id="1" name=""/>
-        <p:cNvGrpSpPr/>
-        <p:nvPr/>
-      </p:nvGrpSpPr>
-      <p:grpSpPr>
-        <a:xfrm>
-          <a:off x="0" y="0"/>
-          <a:ext cx="0" cy="0"/>
-          <a:chOff x="0" y="0"/>
-          <a:chExt cx="0" cy="0"/>
-        </a:xfrm>
-      </p:grpSpPr>
-      <p:sp>
-        <p:nvSpPr>
-          <p:cNvPr id="2" name="Text 0"/>
-          <p:cNvSpPr txBox="1"/>
-          <p:nvPr/>
-        </p:nvSpPr>
-        <p:spPr>
-          <a:xfrm>
-            <a:off x="548640" y="365760"/>
-            <a:ext cx="11091672" cy="274320"/>
-          </a:xfrm>
-          <a:prstGeom prst="rect">
-            <a:avLst/>
-          </a:prstGeom>
-          <a:noFill/>
-          <a:ln/>
-        </p:spPr>
-        <p:txBody>
-          <a:bodyPr wrap="square" lIns="0" tIns="0" rIns="0" bIns="0" rtlCol="0" anchor="ctr"/>
-          <a:lstStyle/>
-          <a:p>
-            <a:pPr indent="0" marL="0">
-              <a:buNone/>
-            </a:pPr>
-            <a:r>
-              <a:rPr lang="en-US" sz="1200" b="1" spc="200" kern="0" dirty="0">
-                <a:solidFill>
-                  <a:srgbClr val="0071E3"/>
-                </a:solidFill>
-              </a:rPr>
-              <a:t>LIVE SYSTEM</a:t>
-            </a:r>
-            <a:endParaRPr lang="en-US" sz="1200" dirty="0"/>
-          </a:p>
-        </p:txBody>
-      </p:sp>
-      <p:sp>
-        <p:nvSpPr>
-          <p:cNvPr id="3" name="Text 1"/>
-          <p:cNvSpPr txBox="1"/>
-          <p:nvPr/>
-        </p:nvSpPr>
-        <p:spPr>
-          <a:xfrm>
-            <a:off x="548640" y="658368"/>
-            <a:ext cx="11091672" cy="731520"/>
-          </a:xfrm>
-          <a:prstGeom prst="rect">
-            <a:avLst/>
-          </a:prstGeom>
-          <a:noFill/>
-          <a:ln/>
-        </p:spPr>
-        <p:txBody>
-          <a:bodyPr wrap="square" lIns="0" tIns="0" rIns="0" bIns="0" rtlCol="0" anchor="ctr"/>
-          <a:lstStyle/>
-          <a:p>
-            <a:pPr indent="0" marL="0">
-              <a:buNone/>
-            </a:pPr>
-            <a:r>
-              <a:rPr lang="en-US" sz="3600" b="1" dirty="0">
-                <a:solidFill>
-                  <a:srgbClr val="1D1D1F"/>
-                </a:solidFill>
-              </a:rPr>
-              <a:t>The running stack</a:t>
-            </a:r>
-            <a:endParaRPr lang="en-US" sz="3600" dirty="0"/>
-          </a:p>
-        </p:txBody>
-      </p:sp>
-      <p:sp>
-        <p:nvSpPr>
-          <p:cNvPr id="4" name="Text 2"/>
-          <p:cNvSpPr txBox="1"/>
-          <p:nvPr/>
-        </p:nvSpPr>
-        <p:spPr>
-          <a:xfrm>
-            <a:off x="548640" y="1371600"/>
-            <a:ext cx="11091672" cy="548640"/>
-          </a:xfrm>
-          <a:prstGeom prst="rect">
-            <a:avLst/>
-          </a:prstGeom>
-          <a:noFill/>
-          <a:ln/>
-        </p:spPr>
-        <p:txBody>
-          <a:bodyPr wrap="square" lIns="0" tIns="0" rIns="0" bIns="0" rtlCol="0" anchor="t"/>
-          <a:lstStyle/>
-          <a:p>
-            <a:pPr indent="0" marL="0">
-              <a:buNone/>
-            </a:pPr>
-            <a:r>
-              <a:rPr lang="en-US" sz="1600" dirty="0">
-                <a:solidFill>
-                  <a:srgbClr val="55555B"/>
-                </a:solidFill>
-              </a:rPr>
-              <a:t>Shown live from the website during the talk (health is checked through the gateway every few seconds).</a:t>
-            </a:r>
-            <a:endParaRPr lang="en-US" sz="1600" dirty="0"/>
-          </a:p>
-        </p:txBody>
-      </p:sp>
-      <p:sp>
-        <p:nvSpPr>
-          <p:cNvPr id="6" name="Shape 3"/>
-          <p:cNvSpPr/>
-          <p:nvPr/>
-        </p:nvSpPr>
-        <p:spPr>
-          <a:xfrm>
-            <a:off x="548640" y="2194560"/>
-            <a:ext cx="3514344" cy="731520"/>
-          </a:xfrm>
-          <a:prstGeom prst="roundRect">
-            <a:avLst>
-              <a:gd name="adj" fmla="val 12500"/>
-            </a:avLst>
-          </a:prstGeom>
-          <a:solidFill>
-            <a:srgbClr val="FFFFFF"/>
-          </a:solidFill>
-          <a:ln w="9525">
-            <a:solidFill>
-              <a:srgbClr val="D9D9DE"/>
-            </a:solidFill>
-            <a:prstDash val="solid"/>
-          </a:ln>
-        </p:spPr>
-      </p:sp>
-      <p:sp>
-        <p:nvSpPr>
-          <p:cNvPr id="7" name="Shape 4"/>
-          <p:cNvSpPr/>
-          <p:nvPr/>
-        </p:nvSpPr>
-        <p:spPr>
-          <a:xfrm>
-            <a:off x="777240" y="2441448"/>
-            <a:ext cx="237744" cy="237744"/>
-          </a:xfrm>
-          <a:prstGeom prst="ellipse">
-            <a:avLst/>
-          </a:prstGeom>
-          <a:solidFill>
-            <a:srgbClr val="1E9E6A"/>
-          </a:solidFill>
-          <a:ln w="12700">
-            <a:solidFill>
-              <a:srgbClr val="1E9E6A"/>
-            </a:solidFill>
-            <a:prstDash val="solid"/>
-          </a:ln>
-        </p:spPr>
-      </p:sp>
-      <p:sp>
-        <p:nvSpPr>
-          <p:cNvPr id="8" name="Text 5"/>
-          <p:cNvSpPr txBox="1"/>
-          <p:nvPr/>
-        </p:nvSpPr>
-        <p:spPr>
-          <a:xfrm>
-            <a:off x="1188720" y="2194560"/>
-            <a:ext cx="1685544" cy="731520"/>
-          </a:xfrm>
-          <a:prstGeom prst="rect">
-            <a:avLst/>
-          </a:prstGeom>
-          <a:noFill/>
-          <a:ln/>
-        </p:spPr>
-        <p:txBody>
-          <a:bodyPr wrap="square" lIns="0" tIns="0" rIns="0" bIns="0" rtlCol="0" anchor="ctr"/>
-          <a:lstStyle/>
-          <a:p>
-            <a:pPr indent="0" marL="0">
-              <a:buNone/>
-            </a:pPr>
-            <a:r>
-              <a:rPr lang="en-US" sz="1800" dirty="0">
-                <a:solidFill>
-                  <a:srgbClr val="1D1D1F"/>
-                </a:solidFill>
-              </a:rPr>
-              <a:t>Gateway</a:t>
-            </a:r>
-            <a:endParaRPr lang="en-US" sz="1800" dirty="0"/>
-          </a:p>
-        </p:txBody>
-      </p:sp>
-      <p:sp>
-        <p:nvSpPr>
-          <p:cNvPr id="9" name="Text 6"/>
-          <p:cNvSpPr txBox="1"/>
-          <p:nvPr/>
-        </p:nvSpPr>
-        <p:spPr>
-          <a:xfrm>
-            <a:off x="2874264" y="2194560"/>
-            <a:ext cx="1005840" cy="731520"/>
-          </a:xfrm>
-          <a:prstGeom prst="rect">
-            <a:avLst/>
-          </a:prstGeom>
-          <a:noFill/>
-          <a:ln/>
-        </p:spPr>
-        <p:txBody>
-          <a:bodyPr wrap="square" lIns="0" tIns="0" rIns="0" bIns="0" rtlCol="0" anchor="ctr"/>
-          <a:lstStyle/>
-          <a:p>
-            <a:pPr algn="r" indent="0" marL="0">
-              <a:buNone/>
-            </a:pPr>
-            <a:r>
-              <a:rPr lang="en-US" sz="1300" dirty="0">
-                <a:solidFill>
-                  <a:srgbClr val="55555B"/>
-                </a:solidFill>
-              </a:rPr>
-              <a:t>healthy</a:t>
-            </a:r>
-            <a:endParaRPr lang="en-US" sz="1300" dirty="0"/>
-          </a:p>
-        </p:txBody>
-      </p:sp>
-      <p:sp>
-        <p:nvSpPr>
-          <p:cNvPr id="10" name="Shape 7"/>
-          <p:cNvSpPr/>
-          <p:nvPr/>
-        </p:nvSpPr>
-        <p:spPr>
-          <a:xfrm>
-            <a:off x="4337304" y="2194560"/>
-            <a:ext cx="3514344" cy="731520"/>
-          </a:xfrm>
-          <a:prstGeom prst="roundRect">
-            <a:avLst>
-              <a:gd name="adj" fmla="val 12500"/>
-            </a:avLst>
-          </a:prstGeom>
-          <a:solidFill>
-            <a:srgbClr val="FFFFFF"/>
-          </a:solidFill>
-          <a:ln w="9525">
-            <a:solidFill>
-              <a:srgbClr val="D9D9DE"/>
-            </a:solidFill>
-            <a:prstDash val="solid"/>
-          </a:ln>
-        </p:spPr>
-      </p:sp>
-      <p:sp>
-        <p:nvSpPr>
-          <p:cNvPr id="11" name="Shape 8"/>
-          <p:cNvSpPr/>
-          <p:nvPr/>
-        </p:nvSpPr>
-        <p:spPr>
-          <a:xfrm>
-            <a:off x="4565904" y="2441448"/>
-            <a:ext cx="237744" cy="237744"/>
-          </a:xfrm>
-          <a:prstGeom prst="ellipse">
-            <a:avLst/>
-          </a:prstGeom>
-          <a:solidFill>
-            <a:srgbClr val="1E9E6A"/>
-          </a:solidFill>
-          <a:ln w="12700">
-            <a:solidFill>
-              <a:srgbClr val="1E9E6A"/>
-            </a:solidFill>
-            <a:prstDash val="solid"/>
-          </a:ln>
-        </p:spPr>
-      </p:sp>
-      <p:sp>
-        <p:nvSpPr>
-          <p:cNvPr id="12" name="Text 9"/>
-          <p:cNvSpPr txBox="1"/>
-          <p:nvPr/>
-        </p:nvSpPr>
-        <p:spPr>
-          <a:xfrm>
-            <a:off x="4977384" y="2194560"/>
-            <a:ext cx="1685544" cy="731520"/>
-          </a:xfrm>
-          <a:prstGeom prst="rect">
-            <a:avLst/>
-          </a:prstGeom>
-          <a:noFill/>
-          <a:ln/>
-        </p:spPr>
-        <p:txBody>
-          <a:bodyPr wrap="square" lIns="0" tIns="0" rIns="0" bIns="0" rtlCol="0" anchor="ctr"/>
-          <a:lstStyle/>
-          <a:p>
-            <a:pPr indent="0" marL="0">
-              <a:buNone/>
-            </a:pPr>
-            <a:r>
-              <a:rPr lang="en-US" sz="1800" dirty="0">
-                <a:solidFill>
-                  <a:srgbClr val="1D1D1F"/>
-                </a:solidFill>
-              </a:rPr>
-              <a:t>Ingest</a:t>
-            </a:r>
-            <a:endParaRPr lang="en-US" sz="1800" dirty="0"/>
-          </a:p>
-        </p:txBody>
-      </p:sp>
-      <p:sp>
-        <p:nvSpPr>
-          <p:cNvPr id="13" name="Text 10"/>
-          <p:cNvSpPr txBox="1"/>
-          <p:nvPr/>
-        </p:nvSpPr>
-        <p:spPr>
-          <a:xfrm>
-            <a:off x="6662928" y="2194560"/>
-            <a:ext cx="1005840" cy="731520"/>
-          </a:xfrm>
-          <a:prstGeom prst="rect">
-            <a:avLst/>
-          </a:prstGeom>
-          <a:noFill/>
-          <a:ln/>
-        </p:spPr>
-        <p:txBody>
-          <a:bodyPr wrap="square" lIns="0" tIns="0" rIns="0" bIns="0" rtlCol="0" anchor="ctr"/>
-          <a:lstStyle/>
-          <a:p>
-            <a:pPr algn="r" indent="0" marL="0">
-              <a:buNone/>
-            </a:pPr>
-            <a:r>
-              <a:rPr lang="en-US" sz="1300" dirty="0">
-                <a:solidFill>
-                  <a:srgbClr val="55555B"/>
-                </a:solidFill>
-              </a:rPr>
-              <a:t>healthy</a:t>
-            </a:r>
-            <a:endParaRPr lang="en-US" sz="1300" dirty="0"/>
-          </a:p>
-        </p:txBody>
-      </p:sp>
-      <p:sp>
-        <p:nvSpPr>
-          <p:cNvPr id="14" name="Shape 11"/>
-          <p:cNvSpPr/>
-          <p:nvPr/>
-        </p:nvSpPr>
-        <p:spPr>
-          <a:xfrm>
-            <a:off x="8125968" y="2194560"/>
-            <a:ext cx="3514344" cy="731520"/>
-          </a:xfrm>
-          <a:prstGeom prst="roundRect">
-            <a:avLst>
-              <a:gd name="adj" fmla="val 12500"/>
-            </a:avLst>
-          </a:prstGeom>
-          <a:solidFill>
-            <a:srgbClr val="FFFFFF"/>
-          </a:solidFill>
-          <a:ln w="9525">
-            <a:solidFill>
-              <a:srgbClr val="D9D9DE"/>
-            </a:solidFill>
-            <a:prstDash val="solid"/>
-          </a:ln>
-        </p:spPr>
-      </p:sp>
-      <p:sp>
-        <p:nvSpPr>
-          <p:cNvPr id="15" name="Shape 12"/>
-          <p:cNvSpPr/>
-          <p:nvPr/>
-        </p:nvSpPr>
-        <p:spPr>
-          <a:xfrm>
-            <a:off x="8354568" y="2441448"/>
-            <a:ext cx="237744" cy="237744"/>
-          </a:xfrm>
-          <a:prstGeom prst="ellipse">
-            <a:avLst/>
-          </a:prstGeom>
-          <a:solidFill>
-            <a:srgbClr val="1E9E6A"/>
-          </a:solidFill>
-          <a:ln w="12700">
-            <a:solidFill>
-              <a:srgbClr val="1E9E6A"/>
-            </a:solidFill>
-            <a:prstDash val="solid"/>
-          </a:ln>
-        </p:spPr>
-      </p:sp>
-      <p:sp>
-        <p:nvSpPr>
-          <p:cNvPr id="16" name="Text 13"/>
-          <p:cNvSpPr txBox="1"/>
-          <p:nvPr/>
-        </p:nvSpPr>
-        <p:spPr>
-          <a:xfrm>
-            <a:off x="8766048" y="2194560"/>
-            <a:ext cx="1685544" cy="731520"/>
-          </a:xfrm>
-          <a:prstGeom prst="rect">
-            <a:avLst/>
-          </a:prstGeom>
-          <a:noFill/>
-          <a:ln/>
-        </p:spPr>
-        <p:txBody>
-          <a:bodyPr wrap="square" lIns="0" tIns="0" rIns="0" bIns="0" rtlCol="0" anchor="ctr"/>
-          <a:lstStyle/>
-          <a:p>
-            <a:pPr indent="0" marL="0">
-              <a:buNone/>
-            </a:pPr>
-            <a:r>
-              <a:rPr lang="en-US" sz="1800" dirty="0">
-                <a:solidFill>
-                  <a:srgbClr val="1D1D1F"/>
-                </a:solidFill>
-              </a:rPr>
-              <a:t>Rag</a:t>
-            </a:r>
-            <a:endParaRPr lang="en-US" sz="1800" dirty="0"/>
-          </a:p>
-        </p:txBody>
-      </p:sp>
-      <p:sp>
-        <p:nvSpPr>
-          <p:cNvPr id="17" name="Text 14"/>
-          <p:cNvSpPr txBox="1"/>
-          <p:nvPr/>
-        </p:nvSpPr>
-        <p:spPr>
-          <a:xfrm>
-            <a:off x="10451592" y="2194560"/>
-            <a:ext cx="1005840" cy="731520"/>
-          </a:xfrm>
-          <a:prstGeom prst="rect">
-            <a:avLst/>
-          </a:prstGeom>
-          <a:noFill/>
-          <a:ln/>
-        </p:spPr>
-        <p:txBody>
-          <a:bodyPr wrap="square" lIns="0" tIns="0" rIns="0" bIns="0" rtlCol="0" anchor="ctr"/>
-          <a:lstStyle/>
-          <a:p>
-            <a:pPr algn="r" indent="0" marL="0">
-              <a:buNone/>
-            </a:pPr>
-            <a:r>
-              <a:rPr lang="en-US" sz="1300" dirty="0">
-                <a:solidFill>
-                  <a:srgbClr val="55555B"/>
-                </a:solidFill>
-              </a:rPr>
-              <a:t>healthy</a:t>
-            </a:r>
-            <a:endParaRPr lang="en-US" sz="1300" dirty="0"/>
-          </a:p>
-        </p:txBody>
-      </p:sp>
-      <p:sp>
-        <p:nvSpPr>
-          <p:cNvPr id="18" name="Shape 15"/>
-          <p:cNvSpPr/>
-          <p:nvPr/>
-        </p:nvSpPr>
-        <p:spPr>
-          <a:xfrm>
-            <a:off x="548640" y="3154680"/>
-            <a:ext cx="3514344" cy="731520"/>
-          </a:xfrm>
-          <a:prstGeom prst="roundRect">
-            <a:avLst>
-              <a:gd name="adj" fmla="val 12500"/>
-            </a:avLst>
-          </a:prstGeom>
-          <a:solidFill>
-            <a:srgbClr val="FFFFFF"/>
-          </a:solidFill>
-          <a:ln w="9525">
-            <a:solidFill>
-              <a:srgbClr val="D9D9DE"/>
-            </a:solidFill>
-            <a:prstDash val="solid"/>
-          </a:ln>
-        </p:spPr>
-      </p:sp>
-      <p:sp>
-        <p:nvSpPr>
-          <p:cNvPr id="19" name="Shape 16"/>
-          <p:cNvSpPr/>
-          <p:nvPr/>
-        </p:nvSpPr>
-        <p:spPr>
-          <a:xfrm>
-            <a:off x="777240" y="3401568"/>
-            <a:ext cx="237744" cy="237744"/>
-          </a:xfrm>
-          <a:prstGeom prst="ellipse">
-            <a:avLst/>
-          </a:prstGeom>
-          <a:solidFill>
-            <a:srgbClr val="1E9E6A"/>
-          </a:solidFill>
-          <a:ln w="12700">
-            <a:solidFill>
-              <a:srgbClr val="1E9E6A"/>
-            </a:solidFill>
-            <a:prstDash val="solid"/>
-          </a:ln>
-        </p:spPr>
-      </p:sp>
-      <p:sp>
-        <p:nvSpPr>
-          <p:cNvPr id="20" name="Text 17"/>
-          <p:cNvSpPr txBox="1"/>
-          <p:nvPr/>
-        </p:nvSpPr>
-        <p:spPr>
-          <a:xfrm>
-            <a:off x="1188720" y="3154680"/>
-            <a:ext cx="1685544" cy="731520"/>
-          </a:xfrm>
-          <a:prstGeom prst="rect">
-            <a:avLst/>
-          </a:prstGeom>
-          <a:noFill/>
-          <a:ln/>
-        </p:spPr>
-        <p:txBody>
-          <a:bodyPr wrap="square" lIns="0" tIns="0" rIns="0" bIns="0" rtlCol="0" anchor="ctr"/>
-          <a:lstStyle/>
-          <a:p>
-            <a:pPr indent="0" marL="0">
-              <a:buNone/>
-            </a:pPr>
-            <a:r>
-              <a:rPr lang="en-US" sz="1800" dirty="0">
-                <a:solidFill>
-                  <a:srgbClr val="1D1D1F"/>
-                </a:solidFill>
-              </a:rPr>
-              <a:t>Llm</a:t>
-            </a:r>
-            <a:endParaRPr lang="en-US" sz="1800" dirty="0"/>
-          </a:p>
-        </p:txBody>
-      </p:sp>
-      <p:sp>
-        <p:nvSpPr>
-          <p:cNvPr id="21" name="Text 18"/>
-          <p:cNvSpPr txBox="1"/>
-          <p:nvPr/>
-        </p:nvSpPr>
-        <p:spPr>
-          <a:xfrm>
-            <a:off x="2874264" y="3154680"/>
-            <a:ext cx="1005840" cy="731520"/>
-          </a:xfrm>
-          <a:prstGeom prst="rect">
-            <a:avLst/>
-          </a:prstGeom>
-          <a:noFill/>
-          <a:ln/>
-        </p:spPr>
-        <p:txBody>
-          <a:bodyPr wrap="square" lIns="0" tIns="0" rIns="0" bIns="0" rtlCol="0" anchor="ctr"/>
-          <a:lstStyle/>
-          <a:p>
-            <a:pPr algn="r" indent="0" marL="0">
-              <a:buNone/>
-            </a:pPr>
-            <a:r>
-              <a:rPr lang="en-US" sz="1300" dirty="0">
-                <a:solidFill>
-                  <a:srgbClr val="55555B"/>
-                </a:solidFill>
-              </a:rPr>
-              <a:t>healthy</a:t>
-            </a:r>
-            <a:endParaRPr lang="en-US" sz="1300" dirty="0"/>
-          </a:p>
-        </p:txBody>
-      </p:sp>
-      <p:sp>
-        <p:nvSpPr>
-          <p:cNvPr id="22" name="Shape 19"/>
-          <p:cNvSpPr/>
-          <p:nvPr/>
-        </p:nvSpPr>
-        <p:spPr>
-          <a:xfrm>
-            <a:off x="4337304" y="3154680"/>
-            <a:ext cx="3514344" cy="731520"/>
-          </a:xfrm>
-          <a:prstGeom prst="roundRect">
-            <a:avLst>
-              <a:gd name="adj" fmla="val 12500"/>
-            </a:avLst>
-          </a:prstGeom>
-          <a:solidFill>
-            <a:srgbClr val="FFFFFF"/>
-          </a:solidFill>
-          <a:ln w="9525">
-            <a:solidFill>
-              <a:srgbClr val="D9D9DE"/>
-            </a:solidFill>
-            <a:prstDash val="solid"/>
-          </a:ln>
-        </p:spPr>
-      </p:sp>
-      <p:sp>
-        <p:nvSpPr>
-          <p:cNvPr id="23" name="Shape 20"/>
-          <p:cNvSpPr/>
-          <p:nvPr/>
-        </p:nvSpPr>
-        <p:spPr>
-          <a:xfrm>
-            <a:off x="4565904" y="3401568"/>
-            <a:ext cx="237744" cy="237744"/>
-          </a:xfrm>
-          <a:prstGeom prst="ellipse">
-            <a:avLst/>
-          </a:prstGeom>
-          <a:solidFill>
-            <a:srgbClr val="1E9E6A"/>
-          </a:solidFill>
-          <a:ln w="12700">
-            <a:solidFill>
-              <a:srgbClr val="1E9E6A"/>
-            </a:solidFill>
-            <a:prstDash val="solid"/>
-          </a:ln>
-        </p:spPr>
-      </p:sp>
-      <p:sp>
-        <p:nvSpPr>
-          <p:cNvPr id="24" name="Text 21"/>
-          <p:cNvSpPr txBox="1"/>
-          <p:nvPr/>
-        </p:nvSpPr>
-        <p:spPr>
-          <a:xfrm>
-            <a:off x="4977384" y="3154680"/>
-            <a:ext cx="1685544" cy="731520"/>
-          </a:xfrm>
-          <a:prstGeom prst="rect">
-            <a:avLst/>
-          </a:prstGeom>
-          <a:noFill/>
-          <a:ln/>
-        </p:spPr>
-        <p:txBody>
-          <a:bodyPr wrap="square" lIns="0" tIns="0" rIns="0" bIns="0" rtlCol="0" anchor="ctr"/>
-          <a:lstStyle/>
-          <a:p>
-            <a:pPr indent="0" marL="0">
-              <a:buNone/>
-            </a:pPr>
-            <a:r>
-              <a:rPr lang="en-US" sz="1800" dirty="0">
-                <a:solidFill>
-                  <a:srgbClr val="1D1D1F"/>
-                </a:solidFill>
-              </a:rPr>
-              <a:t>Orchestrator</a:t>
-            </a:r>
-            <a:endParaRPr lang="en-US" sz="1800" dirty="0"/>
-          </a:p>
-        </p:txBody>
-      </p:sp>
-      <p:sp>
-        <p:nvSpPr>
-          <p:cNvPr id="25" name="Text 22"/>
-          <p:cNvSpPr txBox="1"/>
-          <p:nvPr/>
-        </p:nvSpPr>
-        <p:spPr>
-          <a:xfrm>
-            <a:off x="6662928" y="3154680"/>
-            <a:ext cx="1005840" cy="731520"/>
-          </a:xfrm>
-          <a:prstGeom prst="rect">
-            <a:avLst/>
-          </a:prstGeom>
-          <a:noFill/>
-          <a:ln/>
-        </p:spPr>
-        <p:txBody>
-          <a:bodyPr wrap="square" lIns="0" tIns="0" rIns="0" bIns="0" rtlCol="0" anchor="ctr"/>
-          <a:lstStyle/>
-          <a:p>
-            <a:pPr algn="r" indent="0" marL="0">
-              <a:buNone/>
-            </a:pPr>
-            <a:r>
-              <a:rPr lang="en-US" sz="1300" dirty="0">
-                <a:solidFill>
-                  <a:srgbClr val="55555B"/>
-                </a:solidFill>
-              </a:rPr>
-              <a:t>healthy</a:t>
-            </a:r>
-            <a:endParaRPr lang="en-US" sz="1300" dirty="0"/>
-          </a:p>
-        </p:txBody>
-      </p:sp>
-      <p:sp>
-        <p:nvSpPr>
-          <p:cNvPr id="26" name="Shape 23"/>
-          <p:cNvSpPr/>
-          <p:nvPr/>
-        </p:nvSpPr>
-        <p:spPr>
-          <a:xfrm>
-            <a:off x="8125968" y="3154680"/>
-            <a:ext cx="3514344" cy="731520"/>
-          </a:xfrm>
-          <a:prstGeom prst="roundRect">
-            <a:avLst>
-              <a:gd name="adj" fmla="val 12500"/>
-            </a:avLst>
-          </a:prstGeom>
-          <a:solidFill>
-            <a:srgbClr val="FFFFFF"/>
-          </a:solidFill>
-          <a:ln w="9525">
-            <a:solidFill>
-              <a:srgbClr val="D9D9DE"/>
-            </a:solidFill>
-            <a:prstDash val="solid"/>
-          </a:ln>
-        </p:spPr>
-      </p:sp>
-      <p:sp>
-        <p:nvSpPr>
-          <p:cNvPr id="27" name="Shape 24"/>
-          <p:cNvSpPr/>
-          <p:nvPr/>
-        </p:nvSpPr>
-        <p:spPr>
-          <a:xfrm>
-            <a:off x="8354568" y="3401568"/>
-            <a:ext cx="237744" cy="237744"/>
-          </a:xfrm>
-          <a:prstGeom prst="ellipse">
-            <a:avLst/>
-          </a:prstGeom>
-          <a:solidFill>
-            <a:srgbClr val="1E9E6A"/>
-          </a:solidFill>
-          <a:ln w="12700">
-            <a:solidFill>
-              <a:srgbClr val="1E9E6A"/>
-            </a:solidFill>
-            <a:prstDash val="solid"/>
-          </a:ln>
-        </p:spPr>
-      </p:sp>
-      <p:sp>
-        <p:nvSpPr>
-          <p:cNvPr id="28" name="Text 25"/>
-          <p:cNvSpPr txBox="1"/>
-          <p:nvPr/>
-        </p:nvSpPr>
-        <p:spPr>
-          <a:xfrm>
-            <a:off x="8766048" y="3154680"/>
-            <a:ext cx="1685544" cy="731520"/>
-          </a:xfrm>
-          <a:prstGeom prst="rect">
-            <a:avLst/>
-          </a:prstGeom>
-          <a:noFill/>
-          <a:ln/>
-        </p:spPr>
-        <p:txBody>
-          <a:bodyPr wrap="square" lIns="0" tIns="0" rIns="0" bIns="0" rtlCol="0" anchor="ctr"/>
-          <a:lstStyle/>
-          <a:p>
-            <a:pPr indent="0" marL="0">
-              <a:buNone/>
-            </a:pPr>
-            <a:r>
-              <a:rPr lang="en-US" sz="1800" dirty="0">
-                <a:solidFill>
-                  <a:srgbClr val="1D1D1F"/>
-                </a:solidFill>
-              </a:rPr>
-              <a:t>Eval</a:t>
-            </a:r>
-            <a:endParaRPr lang="en-US" sz="1800" dirty="0"/>
-          </a:p>
-        </p:txBody>
-      </p:sp>
-      <p:sp>
-        <p:nvSpPr>
-          <p:cNvPr id="29" name="Text 26"/>
-          <p:cNvSpPr txBox="1"/>
-          <p:nvPr/>
-        </p:nvSpPr>
-        <p:spPr>
-          <a:xfrm>
-            <a:off x="10451592" y="3154680"/>
-            <a:ext cx="1005840" cy="731520"/>
-          </a:xfrm>
-          <a:prstGeom prst="rect">
-            <a:avLst/>
-          </a:prstGeom>
-          <a:noFill/>
-          <a:ln/>
-        </p:spPr>
-        <p:txBody>
-          <a:bodyPr wrap="square" lIns="0" tIns="0" rIns="0" bIns="0" rtlCol="0" anchor="ctr"/>
-          <a:lstStyle/>
-          <a:p>
-            <a:pPr algn="r" indent="0" marL="0">
-              <a:buNone/>
-            </a:pPr>
-            <a:r>
-              <a:rPr lang="en-US" sz="1300" dirty="0">
-                <a:solidFill>
-                  <a:srgbClr val="55555B"/>
-                </a:solidFill>
-              </a:rPr>
-              <a:t>healthy</a:t>
-            </a:r>
-            <a:endParaRPr lang="en-US" sz="1300" dirty="0"/>
-          </a:p>
-        </p:txBody>
-      </p:sp>
-      <p:sp>
-        <p:nvSpPr>
-          <p:cNvPr id="30" name="Shape 27"/>
-          <p:cNvSpPr/>
-          <p:nvPr/>
-        </p:nvSpPr>
-        <p:spPr>
-          <a:xfrm>
-            <a:off x="548640" y="4160520"/>
-            <a:ext cx="11091672" cy="2011680"/>
-          </a:xfrm>
-          <a:prstGeom prst="roundRect">
-            <a:avLst>
-              <a:gd name="adj" fmla="val 4545"/>
-            </a:avLst>
-          </a:prstGeom>
-          <a:solidFill>
-            <a:srgbClr val="FFFFFF"/>
-          </a:solidFill>
-          <a:ln w="9525">
-            <a:solidFill>
-              <a:srgbClr val="D9D9DE"/>
-            </a:solidFill>
-            <a:prstDash val="solid"/>
-          </a:ln>
-          <a:effectLst>
-            <a:outerShdw sx="100000" sy="100000" kx="0" ky="0" algn="bl" rotWithShape="0" blurRad="76200" dist="12700" dir="5400000">
-              <a:srgbClr val="000000">
-                <a:alpha val="8000"/>
-              </a:srgbClr>
-            </a:outerShdw>
-          </a:effectLst>
-        </p:spPr>
-      </p:sp>
-      <p:sp>
-        <p:nvSpPr>
-          <p:cNvPr id="31" name="Text 28"/>
-          <p:cNvSpPr txBox="1"/>
-          <p:nvPr/>
-        </p:nvSpPr>
-        <p:spPr>
-          <a:xfrm>
-            <a:off x="731520" y="4297680"/>
-            <a:ext cx="10725912" cy="411480"/>
-          </a:xfrm>
-          <a:prstGeom prst="rect">
-            <a:avLst/>
-          </a:prstGeom>
-          <a:noFill/>
-          <a:ln/>
-        </p:spPr>
-        <p:txBody>
-          <a:bodyPr wrap="square" lIns="0" tIns="0" rIns="0" bIns="0" rtlCol="0" anchor="t"/>
-          <a:lstStyle/>
-          <a:p>
-            <a:pPr indent="0" marL="0">
-              <a:buNone/>
-            </a:pPr>
-            <a:r>
-              <a:rPr lang="en-US" sz="1800" b="1" dirty="0">
-                <a:solidFill>
-                  <a:srgbClr val="1D1D1F"/>
-                </a:solidFill>
-              </a:rPr>
-              <a:t>What to demo</a:t>
-            </a:r>
-            <a:endParaRPr lang="en-US" sz="1800" dirty="0"/>
-          </a:p>
-        </p:txBody>
-      </p:sp>
-      <p:sp>
-        <p:nvSpPr>
-          <p:cNvPr id="32" name="Text 29"/>
-          <p:cNvSpPr txBox="1"/>
-          <p:nvPr/>
-        </p:nvSpPr>
-        <p:spPr>
-          <a:xfrm>
-            <a:off x="731520" y="4709160"/>
-            <a:ext cx="10725912" cy="1353312"/>
-          </a:xfrm>
-          <a:prstGeom prst="rect">
-            <a:avLst/>
-          </a:prstGeom>
-          <a:noFill/>
-          <a:ln/>
-        </p:spPr>
-        <p:txBody>
-          <a:bodyPr wrap="square" lIns="0" tIns="0" rIns="0" bIns="0" rtlCol="0" anchor="t"/>
-          <a:lstStyle/>
-          <a:p>
-            <a:pPr indent="0" marL="0">
-              <a:buNone/>
-            </a:pPr>
-            <a:r>
-              <a:rPr lang="en-US" sz="1500" dirty="0">
-                <a:solidFill>
-                  <a:srgbClr val="1D1D1F"/>
-                </a:solidFill>
-              </a:rPr>
-              <a:t>Ask: "Why does itsdangerous keep SHA-1 as its default digest?" and show the cited answer and the evidence chain.</a:t>
-            </a:r>
-            <a:endParaRPr lang="en-US" sz="1500" dirty="0"/>
-          </a:p>
-          <a:p>
-            <a:pPr indent="0" marL="0">
-              <a:buNone/>
-            </a:pPr>
-            <a:r>
-              <a:rPr lang="en-US" sz="1500" dirty="0">
-                <a:solidFill>
-                  <a:srgbClr val="1D1D1F"/>
-                </a:solidFill>
-              </a:rPr>
-              <a:t>Evaluation page: the held-out run, per-mode leaderboard, and which model is best for what.</a:t>
-            </a:r>
-            <a:endParaRPr lang="en-US" sz="1500" dirty="0"/>
-          </a:p>
-          <a:p>
-            <a:pPr indent="0" marL="0">
-              <a:buNone/>
-            </a:pPr>
-            <a:r>
-              <a:rPr lang="en-US" sz="1500" dirty="0">
-                <a:solidFill>
-                  <a:srgbClr val="1D1D1F"/>
-                </a:solidFill>
-              </a:rPr>
-              <a:t>Repositories page: the three indexed repositories (demo, itsdangerous, Nexus).</a:t>
-            </a:r>
-            <a:endParaRPr lang="en-US" sz="1500" dirty="0"/>
-          </a:p>
-        </p:txBody>
-      </p:sp>
-      <p:sp>
-        <p:nvSpPr>
-          <p:cNvPr id="25" name="Slide Number Placeholder 0"/>
-          <p:cNvSpPr>
-            <a:spLocks noGrp="1"/>
-          </p:cNvSpPr>
-          <p:nvPr>
-            <p:ph type="sldNum" sz="quarter" idx="4294967295"/>
-          </p:nvPr>
-        </p:nvSpPr>
-        <p:spPr>
-          <a:xfrm>
-            <a:off x="10725912" y="6419088"/>
-            <a:ext cx="914400" cy="274320"/>
-          </a:xfrm>
-          <a:prstGeom prst="rect">
-            <a:avLst/>
-          </a:prstGeom>
-          <a:extLst>
-            <a:ext uri="{C572A759-6A51-4108-AA02-DFA0A04FC94B}">
-              <ma14:wrappingTextBoxFlag xmlns:ma14="http://schemas.microsoft.com/office/mac/drawingml/2011/main" val="0"/>
-            </a:ext>
-          </a:extLst>
-        </p:spPr>
-        <p:txBody>
-          <a:bodyPr/>
-          <a:lstStyle>
-            <a:lvl1pPr>
-              <a:defRPr sz="1100">
-                <a:solidFill>
-                  <a:srgbClr val="55555B"/>
-                </a:solidFill>
-                <a:latin typeface="Calibri"/>
-                <a:ea typeface="Calibri"/>
-                <a:cs typeface="Calibri"/>
-              </a:defRPr>
-            </a:lvl1pPr>
-          </a:lstStyle>
-          <a:p>
-            <a:pPr algn="r"/>
-            <a:fld id="{F7021451-1387-4CA6-816F-3879F97B5CBC}" type="slidenum">
-              <a:rPr b="0" lang="en-US"/>
-              <a:t>14</a:t>
-            </a:fld>
-            <a:endParaRPr lang="en-US"/>
-          </a:p>
-        </p:txBody>
-      </p:sp>
-    </p:spTree>
-  </p:cSld>
-  <p:clrMapOvr>
-    <a:masterClrMapping/>
-  </p:clrMapOvr>
-</p:sld>
-</file>
-
-<file path=ppt/slides/slide15.xml><?xml version="1.0" encoding="utf-8"?>
-<p:sld xmlns:a="http://schemas.openxmlformats.org/drawingml/2006/main" xmlns:r="http://schemas.openxmlformats.org/officeDocument/2006/relationships" xmlns:p="http://schemas.openxmlformats.org/presentationml/2006/main">
-  <p:cSld name="Slide 15">
-    <p:spTree>
-      <p:nvGrpSpPr>
-        <p:cNvPr id="1" name=""/>
-        <p:cNvGrpSpPr/>
-        <p:nvPr/>
-      </p:nvGrpSpPr>
-      <p:grpSpPr>
-        <a:xfrm>
-          <a:off x="0" y="0"/>
-          <a:ext cx="0" cy="0"/>
-          <a:chOff x="0" y="0"/>
-          <a:chExt cx="0" cy="0"/>
-        </a:xfrm>
-      </p:grpSpPr>
-      <p:sp>
-        <p:nvSpPr>
-          <p:cNvPr id="2" name="Text 0"/>
-          <p:cNvSpPr txBox="1"/>
-          <p:nvPr/>
-        </p:nvSpPr>
-        <p:spPr>
-          <a:xfrm>
-            <a:off x="548640" y="2194560"/>
-            <a:ext cx="11091672" cy="1188720"/>
-          </a:xfrm>
-          <a:prstGeom prst="rect">
-            <a:avLst/>
-          </a:prstGeom>
-          <a:noFill/>
-          <a:ln/>
-        </p:spPr>
-        <p:txBody>
-          <a:bodyPr wrap="square" lIns="0" tIns="0" rIns="0" bIns="0" rtlCol="0" anchor="ctr"/>
-          <a:lstStyle/>
-          <a:p>
-            <a:pPr indent="0" marL="0">
-              <a:buNone/>
-            </a:pPr>
-            <a:r>
-              <a:rPr lang="en-US" sz="6400" b="1" dirty="0">
-                <a:solidFill>
-                  <a:srgbClr val="1D1D1F"/>
-                </a:solidFill>
-              </a:rPr>
-              <a:t>Questions?</a:t>
-            </a:r>
-            <a:endParaRPr lang="en-US" sz="6400" dirty="0"/>
-          </a:p>
-        </p:txBody>
-      </p:sp>
-      <p:sp>
-        <p:nvSpPr>
-          <p:cNvPr id="3" name="Text 1"/>
-          <p:cNvSpPr txBox="1"/>
-          <p:nvPr/>
-        </p:nvSpPr>
-        <p:spPr>
-          <a:xfrm>
-            <a:off x="548640" y="3566160"/>
-            <a:ext cx="11091672" cy="457200"/>
-          </a:xfrm>
-          <a:prstGeom prst="rect">
-            <a:avLst/>
-          </a:prstGeom>
-          <a:noFill/>
-          <a:ln/>
-        </p:spPr>
-        <p:txBody>
-          <a:bodyPr wrap="square" lIns="0" tIns="0" rIns="0" bIns="0" rtlCol="0" anchor="ctr"/>
-          <a:lstStyle/>
-          <a:p>
-            <a:pPr indent="0" marL="0">
-              <a:buNone/>
-            </a:pPr>
-            <a:r>
-              <a:rPr lang="en-US" sz="2200" dirty="0">
-                <a:solidFill>
-                  <a:srgbClr val="55555B"/>
-                </a:solidFill>
-              </a:rPr>
-              <a:t>github.com/IATESPAGHETTI/Code_Origin</a:t>
-            </a:r>
-            <a:endParaRPr lang="en-US" sz="2200" dirty="0"/>
-          </a:p>
-        </p:txBody>
-      </p:sp>
-      <p:sp>
-        <p:nvSpPr>
-          <p:cNvPr id="4" name="Text 2"/>
-          <p:cNvSpPr txBox="1"/>
-          <p:nvPr/>
-        </p:nvSpPr>
-        <p:spPr>
-          <a:xfrm>
-            <a:off x="548640" y="4297680"/>
-            <a:ext cx="11091672" cy="457200"/>
-          </a:xfrm>
-          <a:prstGeom prst="rect">
-            <a:avLst/>
-          </a:prstGeom>
-          <a:noFill/>
-          <a:ln/>
-        </p:spPr>
-        <p:txBody>
-          <a:bodyPr wrap="square" lIns="0" tIns="0" rIns="0" bIns="0" rtlCol="0" anchor="ctr"/>
-          <a:lstStyle/>
-          <a:p>
-            <a:pPr indent="0" marL="0">
-              <a:buNone/>
-            </a:pPr>
-            <a:r>
-              <a:rPr lang="en-US" sz="1800" dirty="0">
-                <a:solidFill>
-                  <a:srgbClr val="0071E3"/>
-                </a:solidFill>
-              </a:rPr>
-              <a:t>We claim: supported on one real repository for 7B models, not yet general.</a:t>
-            </a:r>
-            <a:endParaRPr lang="en-US" sz="1800" dirty="0"/>
-          </a:p>
-        </p:txBody>
-      </p:sp>
-      <p:sp>
-        <p:nvSpPr>
-          <p:cNvPr id="25" name="Slide Number Placeholder 0"/>
-          <p:cNvSpPr>
-            <a:spLocks noGrp="1"/>
-          </p:cNvSpPr>
-          <p:nvPr>
-            <p:ph type="sldNum" sz="quarter" idx="4294967295"/>
-          </p:nvPr>
-        </p:nvSpPr>
-        <p:spPr>
-          <a:xfrm>
-            <a:off x="10725912" y="6419088"/>
-            <a:ext cx="914400" cy="274320"/>
-          </a:xfrm>
-          <a:prstGeom prst="rect">
-            <a:avLst/>
-          </a:prstGeom>
-          <a:extLst>
-            <a:ext uri="{C572A759-6A51-4108-AA02-DFA0A04FC94B}">
-              <ma14:wrappingTextBoxFlag xmlns:ma14="http://schemas.microsoft.com/office/mac/drawingml/2011/main" val="0"/>
-            </a:ext>
-          </a:extLst>
-        </p:spPr>
-        <p:txBody>
-          <a:bodyPr/>
-          <a:lstStyle>
-            <a:lvl1pPr>
-              <a:defRPr sz="1100">
-                <a:solidFill>
-                  <a:srgbClr val="55555B"/>
-                </a:solidFill>
-                <a:latin typeface="Calibri"/>
-                <a:ea typeface="Calibri"/>
-                <a:cs typeface="Calibri"/>
-              </a:defRPr>
-            </a:lvl1pPr>
-          </a:lstStyle>
-          <a:p>
-            <a:pPr algn="r"/>
-            <a:fld id="{F7021451-1387-4CA6-816F-3879F97B5CBC}" type="slidenum">
-              <a:rPr b="0" lang="en-US"/>
-              <a:t>15</a:t>
+              <a:t>19</a:t>
             </a:fld>
             <a:endParaRPr lang="en-US"/>
           </a:p>
@@ -15023,6 +16669,1246 @@
 </p:sld>
 </file>
 
+<file path=ppt/slides/slide20.xml><?xml version="1.0" encoding="utf-8"?>
+<p:sld xmlns:a="http://schemas.openxmlformats.org/drawingml/2006/main" xmlns:r="http://schemas.openxmlformats.org/officeDocument/2006/relationships" xmlns:p="http://schemas.openxmlformats.org/presentationml/2006/main">
+  <p:cSld name="Slide 20">
+    <p:spTree>
+      <p:nvGrpSpPr>
+        <p:cNvPr id="1" name=""/>
+        <p:cNvGrpSpPr/>
+        <p:nvPr/>
+      </p:nvGrpSpPr>
+      <p:grpSpPr>
+        <a:xfrm>
+          <a:off x="0" y="0"/>
+          <a:ext cx="0" cy="0"/>
+          <a:chOff x="0" y="0"/>
+          <a:chExt cx="0" cy="0"/>
+        </a:xfrm>
+      </p:grpSpPr>
+      <p:sp>
+        <p:nvSpPr>
+          <p:cNvPr id="2" name="Text 0"/>
+          <p:cNvSpPr txBox="1"/>
+          <p:nvPr/>
+        </p:nvSpPr>
+        <p:spPr>
+          <a:xfrm>
+            <a:off x="548640" y="365760"/>
+            <a:ext cx="11091672" cy="274320"/>
+          </a:xfrm>
+          <a:prstGeom prst="rect">
+            <a:avLst/>
+          </a:prstGeom>
+          <a:noFill/>
+          <a:ln/>
+        </p:spPr>
+        <p:txBody>
+          <a:bodyPr wrap="square" lIns="0" tIns="0" rIns="0" bIns="0" rtlCol="0" anchor="ctr"/>
+          <a:lstStyle/>
+          <a:p>
+            <a:pPr indent="0" marL="0">
+              <a:buNone/>
+            </a:pPr>
+            <a:r>
+              <a:rPr lang="en-US" sz="1200" b="1" spc="200" kern="0" dirty="0">
+                <a:solidFill>
+                  <a:srgbClr val="0071E3"/>
+                </a:solidFill>
+              </a:rPr>
+              <a:t>LIVE SYSTEM</a:t>
+            </a:r>
+            <a:endParaRPr lang="en-US" sz="1200" dirty="0"/>
+          </a:p>
+        </p:txBody>
+      </p:sp>
+      <p:sp>
+        <p:nvSpPr>
+          <p:cNvPr id="3" name="Text 1"/>
+          <p:cNvSpPr txBox="1"/>
+          <p:nvPr/>
+        </p:nvSpPr>
+        <p:spPr>
+          <a:xfrm>
+            <a:off x="548640" y="658368"/>
+            <a:ext cx="11091672" cy="731520"/>
+          </a:xfrm>
+          <a:prstGeom prst="rect">
+            <a:avLst/>
+          </a:prstGeom>
+          <a:noFill/>
+          <a:ln/>
+        </p:spPr>
+        <p:txBody>
+          <a:bodyPr wrap="square" lIns="0" tIns="0" rIns="0" bIns="0" rtlCol="0" anchor="ctr"/>
+          <a:lstStyle/>
+          <a:p>
+            <a:pPr indent="0" marL="0">
+              <a:buNone/>
+            </a:pPr>
+            <a:r>
+              <a:rPr lang="en-US" sz="3600" b="1" dirty="0">
+                <a:solidFill>
+                  <a:srgbClr val="1D1D1F"/>
+                </a:solidFill>
+              </a:rPr>
+              <a:t>The running stack</a:t>
+            </a:r>
+            <a:endParaRPr lang="en-US" sz="3600" dirty="0"/>
+          </a:p>
+        </p:txBody>
+      </p:sp>
+      <p:sp>
+        <p:nvSpPr>
+          <p:cNvPr id="4" name="Text 2"/>
+          <p:cNvSpPr txBox="1"/>
+          <p:nvPr/>
+        </p:nvSpPr>
+        <p:spPr>
+          <a:xfrm>
+            <a:off x="548640" y="1371600"/>
+            <a:ext cx="11091672" cy="548640"/>
+          </a:xfrm>
+          <a:prstGeom prst="rect">
+            <a:avLst/>
+          </a:prstGeom>
+          <a:noFill/>
+          <a:ln/>
+        </p:spPr>
+        <p:txBody>
+          <a:bodyPr wrap="square" lIns="0" tIns="0" rIns="0" bIns="0" rtlCol="0" anchor="t"/>
+          <a:lstStyle/>
+          <a:p>
+            <a:pPr indent="0" marL="0">
+              <a:buNone/>
+            </a:pPr>
+            <a:r>
+              <a:rPr lang="en-US" sz="1600" dirty="0">
+                <a:solidFill>
+                  <a:srgbClr val="55555B"/>
+                </a:solidFill>
+              </a:rPr>
+              <a:t>Shown live from the website during the talk (health is checked through the gateway every few seconds).</a:t>
+            </a:r>
+            <a:endParaRPr lang="en-US" sz="1600" dirty="0"/>
+          </a:p>
+        </p:txBody>
+      </p:sp>
+      <p:sp>
+        <p:nvSpPr>
+          <p:cNvPr id="6" name="Shape 3"/>
+          <p:cNvSpPr/>
+          <p:nvPr/>
+        </p:nvSpPr>
+        <p:spPr>
+          <a:xfrm>
+            <a:off x="548640" y="2194560"/>
+            <a:ext cx="3514344" cy="731520"/>
+          </a:xfrm>
+          <a:prstGeom prst="roundRect">
+            <a:avLst>
+              <a:gd name="adj" fmla="val 12500"/>
+            </a:avLst>
+          </a:prstGeom>
+          <a:solidFill>
+            <a:srgbClr val="FFFFFF"/>
+          </a:solidFill>
+          <a:ln w="9525">
+            <a:solidFill>
+              <a:srgbClr val="D9D9DE"/>
+            </a:solidFill>
+            <a:prstDash val="solid"/>
+          </a:ln>
+        </p:spPr>
+      </p:sp>
+      <p:sp>
+        <p:nvSpPr>
+          <p:cNvPr id="7" name="Shape 4"/>
+          <p:cNvSpPr/>
+          <p:nvPr/>
+        </p:nvSpPr>
+        <p:spPr>
+          <a:xfrm>
+            <a:off x="777240" y="2441448"/>
+            <a:ext cx="237744" cy="237744"/>
+          </a:xfrm>
+          <a:prstGeom prst="ellipse">
+            <a:avLst/>
+          </a:prstGeom>
+          <a:solidFill>
+            <a:srgbClr val="1E9E6A"/>
+          </a:solidFill>
+          <a:ln w="12700">
+            <a:solidFill>
+              <a:srgbClr val="1E9E6A"/>
+            </a:solidFill>
+            <a:prstDash val="solid"/>
+          </a:ln>
+        </p:spPr>
+      </p:sp>
+      <p:sp>
+        <p:nvSpPr>
+          <p:cNvPr id="8" name="Text 5"/>
+          <p:cNvSpPr txBox="1"/>
+          <p:nvPr/>
+        </p:nvSpPr>
+        <p:spPr>
+          <a:xfrm>
+            <a:off x="1188720" y="2194560"/>
+            <a:ext cx="1685544" cy="731520"/>
+          </a:xfrm>
+          <a:prstGeom prst="rect">
+            <a:avLst/>
+          </a:prstGeom>
+          <a:noFill/>
+          <a:ln/>
+        </p:spPr>
+        <p:txBody>
+          <a:bodyPr wrap="square" lIns="0" tIns="0" rIns="0" bIns="0" rtlCol="0" anchor="ctr"/>
+          <a:lstStyle/>
+          <a:p>
+            <a:pPr indent="0" marL="0">
+              <a:buNone/>
+            </a:pPr>
+            <a:r>
+              <a:rPr lang="en-US" sz="1800" dirty="0">
+                <a:solidFill>
+                  <a:srgbClr val="1D1D1F"/>
+                </a:solidFill>
+              </a:rPr>
+              <a:t>Gateway</a:t>
+            </a:r>
+            <a:endParaRPr lang="en-US" sz="1800" dirty="0"/>
+          </a:p>
+        </p:txBody>
+      </p:sp>
+      <p:sp>
+        <p:nvSpPr>
+          <p:cNvPr id="9" name="Text 6"/>
+          <p:cNvSpPr txBox="1"/>
+          <p:nvPr/>
+        </p:nvSpPr>
+        <p:spPr>
+          <a:xfrm>
+            <a:off x="2874264" y="2194560"/>
+            <a:ext cx="1005840" cy="731520"/>
+          </a:xfrm>
+          <a:prstGeom prst="rect">
+            <a:avLst/>
+          </a:prstGeom>
+          <a:noFill/>
+          <a:ln/>
+        </p:spPr>
+        <p:txBody>
+          <a:bodyPr wrap="square" lIns="0" tIns="0" rIns="0" bIns="0" rtlCol="0" anchor="ctr"/>
+          <a:lstStyle/>
+          <a:p>
+            <a:pPr algn="r" indent="0" marL="0">
+              <a:buNone/>
+            </a:pPr>
+            <a:r>
+              <a:rPr lang="en-US" sz="1300" dirty="0">
+                <a:solidFill>
+                  <a:srgbClr val="55555B"/>
+                </a:solidFill>
+              </a:rPr>
+              <a:t>healthy</a:t>
+            </a:r>
+            <a:endParaRPr lang="en-US" sz="1300" dirty="0"/>
+          </a:p>
+        </p:txBody>
+      </p:sp>
+      <p:sp>
+        <p:nvSpPr>
+          <p:cNvPr id="10" name="Shape 7"/>
+          <p:cNvSpPr/>
+          <p:nvPr/>
+        </p:nvSpPr>
+        <p:spPr>
+          <a:xfrm>
+            <a:off x="4337304" y="2194560"/>
+            <a:ext cx="3514344" cy="731520"/>
+          </a:xfrm>
+          <a:prstGeom prst="roundRect">
+            <a:avLst>
+              <a:gd name="adj" fmla="val 12500"/>
+            </a:avLst>
+          </a:prstGeom>
+          <a:solidFill>
+            <a:srgbClr val="FFFFFF"/>
+          </a:solidFill>
+          <a:ln w="9525">
+            <a:solidFill>
+              <a:srgbClr val="D9D9DE"/>
+            </a:solidFill>
+            <a:prstDash val="solid"/>
+          </a:ln>
+        </p:spPr>
+      </p:sp>
+      <p:sp>
+        <p:nvSpPr>
+          <p:cNvPr id="11" name="Shape 8"/>
+          <p:cNvSpPr/>
+          <p:nvPr/>
+        </p:nvSpPr>
+        <p:spPr>
+          <a:xfrm>
+            <a:off x="4565904" y="2441448"/>
+            <a:ext cx="237744" cy="237744"/>
+          </a:xfrm>
+          <a:prstGeom prst="ellipse">
+            <a:avLst/>
+          </a:prstGeom>
+          <a:solidFill>
+            <a:srgbClr val="1E9E6A"/>
+          </a:solidFill>
+          <a:ln w="12700">
+            <a:solidFill>
+              <a:srgbClr val="1E9E6A"/>
+            </a:solidFill>
+            <a:prstDash val="solid"/>
+          </a:ln>
+        </p:spPr>
+      </p:sp>
+      <p:sp>
+        <p:nvSpPr>
+          <p:cNvPr id="12" name="Text 9"/>
+          <p:cNvSpPr txBox="1"/>
+          <p:nvPr/>
+        </p:nvSpPr>
+        <p:spPr>
+          <a:xfrm>
+            <a:off x="4977384" y="2194560"/>
+            <a:ext cx="1685544" cy="731520"/>
+          </a:xfrm>
+          <a:prstGeom prst="rect">
+            <a:avLst/>
+          </a:prstGeom>
+          <a:noFill/>
+          <a:ln/>
+        </p:spPr>
+        <p:txBody>
+          <a:bodyPr wrap="square" lIns="0" tIns="0" rIns="0" bIns="0" rtlCol="0" anchor="ctr"/>
+          <a:lstStyle/>
+          <a:p>
+            <a:pPr indent="0" marL="0">
+              <a:buNone/>
+            </a:pPr>
+            <a:r>
+              <a:rPr lang="en-US" sz="1800" dirty="0">
+                <a:solidFill>
+                  <a:srgbClr val="1D1D1F"/>
+                </a:solidFill>
+              </a:rPr>
+              <a:t>Ingest</a:t>
+            </a:r>
+            <a:endParaRPr lang="en-US" sz="1800" dirty="0"/>
+          </a:p>
+        </p:txBody>
+      </p:sp>
+      <p:sp>
+        <p:nvSpPr>
+          <p:cNvPr id="13" name="Text 10"/>
+          <p:cNvSpPr txBox="1"/>
+          <p:nvPr/>
+        </p:nvSpPr>
+        <p:spPr>
+          <a:xfrm>
+            <a:off x="6662928" y="2194560"/>
+            <a:ext cx="1005840" cy="731520"/>
+          </a:xfrm>
+          <a:prstGeom prst="rect">
+            <a:avLst/>
+          </a:prstGeom>
+          <a:noFill/>
+          <a:ln/>
+        </p:spPr>
+        <p:txBody>
+          <a:bodyPr wrap="square" lIns="0" tIns="0" rIns="0" bIns="0" rtlCol="0" anchor="ctr"/>
+          <a:lstStyle/>
+          <a:p>
+            <a:pPr algn="r" indent="0" marL="0">
+              <a:buNone/>
+            </a:pPr>
+            <a:r>
+              <a:rPr lang="en-US" sz="1300" dirty="0">
+                <a:solidFill>
+                  <a:srgbClr val="55555B"/>
+                </a:solidFill>
+              </a:rPr>
+              <a:t>healthy</a:t>
+            </a:r>
+            <a:endParaRPr lang="en-US" sz="1300" dirty="0"/>
+          </a:p>
+        </p:txBody>
+      </p:sp>
+      <p:sp>
+        <p:nvSpPr>
+          <p:cNvPr id="14" name="Shape 11"/>
+          <p:cNvSpPr/>
+          <p:nvPr/>
+        </p:nvSpPr>
+        <p:spPr>
+          <a:xfrm>
+            <a:off x="8125968" y="2194560"/>
+            <a:ext cx="3514344" cy="731520"/>
+          </a:xfrm>
+          <a:prstGeom prst="roundRect">
+            <a:avLst>
+              <a:gd name="adj" fmla="val 12500"/>
+            </a:avLst>
+          </a:prstGeom>
+          <a:solidFill>
+            <a:srgbClr val="FFFFFF"/>
+          </a:solidFill>
+          <a:ln w="9525">
+            <a:solidFill>
+              <a:srgbClr val="D9D9DE"/>
+            </a:solidFill>
+            <a:prstDash val="solid"/>
+          </a:ln>
+        </p:spPr>
+      </p:sp>
+      <p:sp>
+        <p:nvSpPr>
+          <p:cNvPr id="15" name="Shape 12"/>
+          <p:cNvSpPr/>
+          <p:nvPr/>
+        </p:nvSpPr>
+        <p:spPr>
+          <a:xfrm>
+            <a:off x="8354568" y="2441448"/>
+            <a:ext cx="237744" cy="237744"/>
+          </a:xfrm>
+          <a:prstGeom prst="ellipse">
+            <a:avLst/>
+          </a:prstGeom>
+          <a:solidFill>
+            <a:srgbClr val="1E9E6A"/>
+          </a:solidFill>
+          <a:ln w="12700">
+            <a:solidFill>
+              <a:srgbClr val="1E9E6A"/>
+            </a:solidFill>
+            <a:prstDash val="solid"/>
+          </a:ln>
+        </p:spPr>
+      </p:sp>
+      <p:sp>
+        <p:nvSpPr>
+          <p:cNvPr id="16" name="Text 13"/>
+          <p:cNvSpPr txBox="1"/>
+          <p:nvPr/>
+        </p:nvSpPr>
+        <p:spPr>
+          <a:xfrm>
+            <a:off x="8766048" y="2194560"/>
+            <a:ext cx="1685544" cy="731520"/>
+          </a:xfrm>
+          <a:prstGeom prst="rect">
+            <a:avLst/>
+          </a:prstGeom>
+          <a:noFill/>
+          <a:ln/>
+        </p:spPr>
+        <p:txBody>
+          <a:bodyPr wrap="square" lIns="0" tIns="0" rIns="0" bIns="0" rtlCol="0" anchor="ctr"/>
+          <a:lstStyle/>
+          <a:p>
+            <a:pPr indent="0" marL="0">
+              <a:buNone/>
+            </a:pPr>
+            <a:r>
+              <a:rPr lang="en-US" sz="1800" dirty="0">
+                <a:solidFill>
+                  <a:srgbClr val="1D1D1F"/>
+                </a:solidFill>
+              </a:rPr>
+              <a:t>Rag</a:t>
+            </a:r>
+            <a:endParaRPr lang="en-US" sz="1800" dirty="0"/>
+          </a:p>
+        </p:txBody>
+      </p:sp>
+      <p:sp>
+        <p:nvSpPr>
+          <p:cNvPr id="17" name="Text 14"/>
+          <p:cNvSpPr txBox="1"/>
+          <p:nvPr/>
+        </p:nvSpPr>
+        <p:spPr>
+          <a:xfrm>
+            <a:off x="10451592" y="2194560"/>
+            <a:ext cx="1005840" cy="731520"/>
+          </a:xfrm>
+          <a:prstGeom prst="rect">
+            <a:avLst/>
+          </a:prstGeom>
+          <a:noFill/>
+          <a:ln/>
+        </p:spPr>
+        <p:txBody>
+          <a:bodyPr wrap="square" lIns="0" tIns="0" rIns="0" bIns="0" rtlCol="0" anchor="ctr"/>
+          <a:lstStyle/>
+          <a:p>
+            <a:pPr algn="r" indent="0" marL="0">
+              <a:buNone/>
+            </a:pPr>
+            <a:r>
+              <a:rPr lang="en-US" sz="1300" dirty="0">
+                <a:solidFill>
+                  <a:srgbClr val="55555B"/>
+                </a:solidFill>
+              </a:rPr>
+              <a:t>healthy</a:t>
+            </a:r>
+            <a:endParaRPr lang="en-US" sz="1300" dirty="0"/>
+          </a:p>
+        </p:txBody>
+      </p:sp>
+      <p:sp>
+        <p:nvSpPr>
+          <p:cNvPr id="18" name="Shape 15"/>
+          <p:cNvSpPr/>
+          <p:nvPr/>
+        </p:nvSpPr>
+        <p:spPr>
+          <a:xfrm>
+            <a:off x="548640" y="3154680"/>
+            <a:ext cx="3514344" cy="731520"/>
+          </a:xfrm>
+          <a:prstGeom prst="roundRect">
+            <a:avLst>
+              <a:gd name="adj" fmla="val 12500"/>
+            </a:avLst>
+          </a:prstGeom>
+          <a:solidFill>
+            <a:srgbClr val="FFFFFF"/>
+          </a:solidFill>
+          <a:ln w="9525">
+            <a:solidFill>
+              <a:srgbClr val="D9D9DE"/>
+            </a:solidFill>
+            <a:prstDash val="solid"/>
+          </a:ln>
+        </p:spPr>
+      </p:sp>
+      <p:sp>
+        <p:nvSpPr>
+          <p:cNvPr id="19" name="Shape 16"/>
+          <p:cNvSpPr/>
+          <p:nvPr/>
+        </p:nvSpPr>
+        <p:spPr>
+          <a:xfrm>
+            <a:off x="777240" y="3401568"/>
+            <a:ext cx="237744" cy="237744"/>
+          </a:xfrm>
+          <a:prstGeom prst="ellipse">
+            <a:avLst/>
+          </a:prstGeom>
+          <a:solidFill>
+            <a:srgbClr val="1E9E6A"/>
+          </a:solidFill>
+          <a:ln w="12700">
+            <a:solidFill>
+              <a:srgbClr val="1E9E6A"/>
+            </a:solidFill>
+            <a:prstDash val="solid"/>
+          </a:ln>
+        </p:spPr>
+      </p:sp>
+      <p:sp>
+        <p:nvSpPr>
+          <p:cNvPr id="20" name="Text 17"/>
+          <p:cNvSpPr txBox="1"/>
+          <p:nvPr/>
+        </p:nvSpPr>
+        <p:spPr>
+          <a:xfrm>
+            <a:off x="1188720" y="3154680"/>
+            <a:ext cx="1685544" cy="731520"/>
+          </a:xfrm>
+          <a:prstGeom prst="rect">
+            <a:avLst/>
+          </a:prstGeom>
+          <a:noFill/>
+          <a:ln/>
+        </p:spPr>
+        <p:txBody>
+          <a:bodyPr wrap="square" lIns="0" tIns="0" rIns="0" bIns="0" rtlCol="0" anchor="ctr"/>
+          <a:lstStyle/>
+          <a:p>
+            <a:pPr indent="0" marL="0">
+              <a:buNone/>
+            </a:pPr>
+            <a:r>
+              <a:rPr lang="en-US" sz="1800" dirty="0">
+                <a:solidFill>
+                  <a:srgbClr val="1D1D1F"/>
+                </a:solidFill>
+              </a:rPr>
+              <a:t>Llm</a:t>
+            </a:r>
+            <a:endParaRPr lang="en-US" sz="1800" dirty="0"/>
+          </a:p>
+        </p:txBody>
+      </p:sp>
+      <p:sp>
+        <p:nvSpPr>
+          <p:cNvPr id="21" name="Text 18"/>
+          <p:cNvSpPr txBox="1"/>
+          <p:nvPr/>
+        </p:nvSpPr>
+        <p:spPr>
+          <a:xfrm>
+            <a:off x="2874264" y="3154680"/>
+            <a:ext cx="1005840" cy="731520"/>
+          </a:xfrm>
+          <a:prstGeom prst="rect">
+            <a:avLst/>
+          </a:prstGeom>
+          <a:noFill/>
+          <a:ln/>
+        </p:spPr>
+        <p:txBody>
+          <a:bodyPr wrap="square" lIns="0" tIns="0" rIns="0" bIns="0" rtlCol="0" anchor="ctr"/>
+          <a:lstStyle/>
+          <a:p>
+            <a:pPr algn="r" indent="0" marL="0">
+              <a:buNone/>
+            </a:pPr>
+            <a:r>
+              <a:rPr lang="en-US" sz="1300" dirty="0">
+                <a:solidFill>
+                  <a:srgbClr val="55555B"/>
+                </a:solidFill>
+              </a:rPr>
+              <a:t>healthy</a:t>
+            </a:r>
+            <a:endParaRPr lang="en-US" sz="1300" dirty="0"/>
+          </a:p>
+        </p:txBody>
+      </p:sp>
+      <p:sp>
+        <p:nvSpPr>
+          <p:cNvPr id="22" name="Shape 19"/>
+          <p:cNvSpPr/>
+          <p:nvPr/>
+        </p:nvSpPr>
+        <p:spPr>
+          <a:xfrm>
+            <a:off x="4337304" y="3154680"/>
+            <a:ext cx="3514344" cy="731520"/>
+          </a:xfrm>
+          <a:prstGeom prst="roundRect">
+            <a:avLst>
+              <a:gd name="adj" fmla="val 12500"/>
+            </a:avLst>
+          </a:prstGeom>
+          <a:solidFill>
+            <a:srgbClr val="FFFFFF"/>
+          </a:solidFill>
+          <a:ln w="9525">
+            <a:solidFill>
+              <a:srgbClr val="D9D9DE"/>
+            </a:solidFill>
+            <a:prstDash val="solid"/>
+          </a:ln>
+        </p:spPr>
+      </p:sp>
+      <p:sp>
+        <p:nvSpPr>
+          <p:cNvPr id="23" name="Shape 20"/>
+          <p:cNvSpPr/>
+          <p:nvPr/>
+        </p:nvSpPr>
+        <p:spPr>
+          <a:xfrm>
+            <a:off x="4565904" y="3401568"/>
+            <a:ext cx="237744" cy="237744"/>
+          </a:xfrm>
+          <a:prstGeom prst="ellipse">
+            <a:avLst/>
+          </a:prstGeom>
+          <a:solidFill>
+            <a:srgbClr val="1E9E6A"/>
+          </a:solidFill>
+          <a:ln w="12700">
+            <a:solidFill>
+              <a:srgbClr val="1E9E6A"/>
+            </a:solidFill>
+            <a:prstDash val="solid"/>
+          </a:ln>
+        </p:spPr>
+      </p:sp>
+      <p:sp>
+        <p:nvSpPr>
+          <p:cNvPr id="24" name="Text 21"/>
+          <p:cNvSpPr txBox="1"/>
+          <p:nvPr/>
+        </p:nvSpPr>
+        <p:spPr>
+          <a:xfrm>
+            <a:off x="4977384" y="3154680"/>
+            <a:ext cx="1685544" cy="731520"/>
+          </a:xfrm>
+          <a:prstGeom prst="rect">
+            <a:avLst/>
+          </a:prstGeom>
+          <a:noFill/>
+          <a:ln/>
+        </p:spPr>
+        <p:txBody>
+          <a:bodyPr wrap="square" lIns="0" tIns="0" rIns="0" bIns="0" rtlCol="0" anchor="ctr"/>
+          <a:lstStyle/>
+          <a:p>
+            <a:pPr indent="0" marL="0">
+              <a:buNone/>
+            </a:pPr>
+            <a:r>
+              <a:rPr lang="en-US" sz="1800" dirty="0">
+                <a:solidFill>
+                  <a:srgbClr val="1D1D1F"/>
+                </a:solidFill>
+              </a:rPr>
+              <a:t>Orchestrator</a:t>
+            </a:r>
+            <a:endParaRPr lang="en-US" sz="1800" dirty="0"/>
+          </a:p>
+        </p:txBody>
+      </p:sp>
+      <p:sp>
+        <p:nvSpPr>
+          <p:cNvPr id="25" name="Text 22"/>
+          <p:cNvSpPr txBox="1"/>
+          <p:nvPr/>
+        </p:nvSpPr>
+        <p:spPr>
+          <a:xfrm>
+            <a:off x="6662928" y="3154680"/>
+            <a:ext cx="1005840" cy="731520"/>
+          </a:xfrm>
+          <a:prstGeom prst="rect">
+            <a:avLst/>
+          </a:prstGeom>
+          <a:noFill/>
+          <a:ln/>
+        </p:spPr>
+        <p:txBody>
+          <a:bodyPr wrap="square" lIns="0" tIns="0" rIns="0" bIns="0" rtlCol="0" anchor="ctr"/>
+          <a:lstStyle/>
+          <a:p>
+            <a:pPr algn="r" indent="0" marL="0">
+              <a:buNone/>
+            </a:pPr>
+            <a:r>
+              <a:rPr lang="en-US" sz="1300" dirty="0">
+                <a:solidFill>
+                  <a:srgbClr val="55555B"/>
+                </a:solidFill>
+              </a:rPr>
+              <a:t>healthy</a:t>
+            </a:r>
+            <a:endParaRPr lang="en-US" sz="1300" dirty="0"/>
+          </a:p>
+        </p:txBody>
+      </p:sp>
+      <p:sp>
+        <p:nvSpPr>
+          <p:cNvPr id="26" name="Shape 23"/>
+          <p:cNvSpPr/>
+          <p:nvPr/>
+        </p:nvSpPr>
+        <p:spPr>
+          <a:xfrm>
+            <a:off x="8125968" y="3154680"/>
+            <a:ext cx="3514344" cy="731520"/>
+          </a:xfrm>
+          <a:prstGeom prst="roundRect">
+            <a:avLst>
+              <a:gd name="adj" fmla="val 12500"/>
+            </a:avLst>
+          </a:prstGeom>
+          <a:solidFill>
+            <a:srgbClr val="FFFFFF"/>
+          </a:solidFill>
+          <a:ln w="9525">
+            <a:solidFill>
+              <a:srgbClr val="D9D9DE"/>
+            </a:solidFill>
+            <a:prstDash val="solid"/>
+          </a:ln>
+        </p:spPr>
+      </p:sp>
+      <p:sp>
+        <p:nvSpPr>
+          <p:cNvPr id="27" name="Shape 24"/>
+          <p:cNvSpPr/>
+          <p:nvPr/>
+        </p:nvSpPr>
+        <p:spPr>
+          <a:xfrm>
+            <a:off x="8354568" y="3401568"/>
+            <a:ext cx="237744" cy="237744"/>
+          </a:xfrm>
+          <a:prstGeom prst="ellipse">
+            <a:avLst/>
+          </a:prstGeom>
+          <a:solidFill>
+            <a:srgbClr val="1E9E6A"/>
+          </a:solidFill>
+          <a:ln w="12700">
+            <a:solidFill>
+              <a:srgbClr val="1E9E6A"/>
+            </a:solidFill>
+            <a:prstDash val="solid"/>
+          </a:ln>
+        </p:spPr>
+      </p:sp>
+      <p:sp>
+        <p:nvSpPr>
+          <p:cNvPr id="28" name="Text 25"/>
+          <p:cNvSpPr txBox="1"/>
+          <p:nvPr/>
+        </p:nvSpPr>
+        <p:spPr>
+          <a:xfrm>
+            <a:off x="8766048" y="3154680"/>
+            <a:ext cx="1685544" cy="731520"/>
+          </a:xfrm>
+          <a:prstGeom prst="rect">
+            <a:avLst/>
+          </a:prstGeom>
+          <a:noFill/>
+          <a:ln/>
+        </p:spPr>
+        <p:txBody>
+          <a:bodyPr wrap="square" lIns="0" tIns="0" rIns="0" bIns="0" rtlCol="0" anchor="ctr"/>
+          <a:lstStyle/>
+          <a:p>
+            <a:pPr indent="0" marL="0">
+              <a:buNone/>
+            </a:pPr>
+            <a:r>
+              <a:rPr lang="en-US" sz="1800" dirty="0">
+                <a:solidFill>
+                  <a:srgbClr val="1D1D1F"/>
+                </a:solidFill>
+              </a:rPr>
+              <a:t>Eval</a:t>
+            </a:r>
+            <a:endParaRPr lang="en-US" sz="1800" dirty="0"/>
+          </a:p>
+        </p:txBody>
+      </p:sp>
+      <p:sp>
+        <p:nvSpPr>
+          <p:cNvPr id="29" name="Text 26"/>
+          <p:cNvSpPr txBox="1"/>
+          <p:nvPr/>
+        </p:nvSpPr>
+        <p:spPr>
+          <a:xfrm>
+            <a:off x="10451592" y="3154680"/>
+            <a:ext cx="1005840" cy="731520"/>
+          </a:xfrm>
+          <a:prstGeom prst="rect">
+            <a:avLst/>
+          </a:prstGeom>
+          <a:noFill/>
+          <a:ln/>
+        </p:spPr>
+        <p:txBody>
+          <a:bodyPr wrap="square" lIns="0" tIns="0" rIns="0" bIns="0" rtlCol="0" anchor="ctr"/>
+          <a:lstStyle/>
+          <a:p>
+            <a:pPr algn="r" indent="0" marL="0">
+              <a:buNone/>
+            </a:pPr>
+            <a:r>
+              <a:rPr lang="en-US" sz="1300" dirty="0">
+                <a:solidFill>
+                  <a:srgbClr val="55555B"/>
+                </a:solidFill>
+              </a:rPr>
+              <a:t>healthy</a:t>
+            </a:r>
+            <a:endParaRPr lang="en-US" sz="1300" dirty="0"/>
+          </a:p>
+        </p:txBody>
+      </p:sp>
+      <p:sp>
+        <p:nvSpPr>
+          <p:cNvPr id="30" name="Shape 27"/>
+          <p:cNvSpPr/>
+          <p:nvPr/>
+        </p:nvSpPr>
+        <p:spPr>
+          <a:xfrm>
+            <a:off x="548640" y="4160520"/>
+            <a:ext cx="11091672" cy="2011680"/>
+          </a:xfrm>
+          <a:prstGeom prst="roundRect">
+            <a:avLst>
+              <a:gd name="adj" fmla="val 4545"/>
+            </a:avLst>
+          </a:prstGeom>
+          <a:solidFill>
+            <a:srgbClr val="FFFFFF"/>
+          </a:solidFill>
+          <a:ln w="9525">
+            <a:solidFill>
+              <a:srgbClr val="D9D9DE"/>
+            </a:solidFill>
+            <a:prstDash val="solid"/>
+          </a:ln>
+          <a:effectLst>
+            <a:outerShdw sx="100000" sy="100000" kx="0" ky="0" algn="bl" rotWithShape="0" blurRad="76200" dist="12700" dir="5400000">
+              <a:srgbClr val="000000">
+                <a:alpha val="8000"/>
+              </a:srgbClr>
+            </a:outerShdw>
+          </a:effectLst>
+        </p:spPr>
+      </p:sp>
+      <p:sp>
+        <p:nvSpPr>
+          <p:cNvPr id="31" name="Text 28"/>
+          <p:cNvSpPr txBox="1"/>
+          <p:nvPr/>
+        </p:nvSpPr>
+        <p:spPr>
+          <a:xfrm>
+            <a:off x="731520" y="4297680"/>
+            <a:ext cx="10725912" cy="411480"/>
+          </a:xfrm>
+          <a:prstGeom prst="rect">
+            <a:avLst/>
+          </a:prstGeom>
+          <a:noFill/>
+          <a:ln/>
+        </p:spPr>
+        <p:txBody>
+          <a:bodyPr wrap="square" lIns="0" tIns="0" rIns="0" bIns="0" rtlCol="0" anchor="t"/>
+          <a:lstStyle/>
+          <a:p>
+            <a:pPr indent="0" marL="0">
+              <a:buNone/>
+            </a:pPr>
+            <a:r>
+              <a:rPr lang="en-US" sz="1800" b="1" dirty="0">
+                <a:solidFill>
+                  <a:srgbClr val="1D1D1F"/>
+                </a:solidFill>
+              </a:rPr>
+              <a:t>What to demo</a:t>
+            </a:r>
+            <a:endParaRPr lang="en-US" sz="1800" dirty="0"/>
+          </a:p>
+        </p:txBody>
+      </p:sp>
+      <p:sp>
+        <p:nvSpPr>
+          <p:cNvPr id="32" name="Text 29"/>
+          <p:cNvSpPr txBox="1"/>
+          <p:nvPr/>
+        </p:nvSpPr>
+        <p:spPr>
+          <a:xfrm>
+            <a:off x="731520" y="4709160"/>
+            <a:ext cx="10725912" cy="1353312"/>
+          </a:xfrm>
+          <a:prstGeom prst="rect">
+            <a:avLst/>
+          </a:prstGeom>
+          <a:noFill/>
+          <a:ln/>
+        </p:spPr>
+        <p:txBody>
+          <a:bodyPr wrap="square" lIns="0" tIns="0" rIns="0" bIns="0" rtlCol="0" anchor="t"/>
+          <a:lstStyle/>
+          <a:p>
+            <a:pPr indent="0" marL="0">
+              <a:buNone/>
+            </a:pPr>
+            <a:r>
+              <a:rPr lang="en-US" sz="1500" dirty="0">
+                <a:solidFill>
+                  <a:srgbClr val="1D1D1F"/>
+                </a:solidFill>
+              </a:rPr>
+              <a:t>Ask: "Why does itsdangerous keep SHA-1 as its default digest?" and show the cited answer and the evidence chain.</a:t>
+            </a:r>
+            <a:endParaRPr lang="en-US" sz="1500" dirty="0"/>
+          </a:p>
+          <a:p>
+            <a:pPr indent="0" marL="0">
+              <a:buNone/>
+            </a:pPr>
+            <a:r>
+              <a:rPr lang="en-US" sz="1500" dirty="0">
+                <a:solidFill>
+                  <a:srgbClr val="1D1D1F"/>
+                </a:solidFill>
+              </a:rPr>
+              <a:t>Evaluation page: the held-out run, per-mode leaderboard, and which model is best for what.</a:t>
+            </a:r>
+            <a:endParaRPr lang="en-US" sz="1500" dirty="0"/>
+          </a:p>
+          <a:p>
+            <a:pPr indent="0" marL="0">
+              <a:buNone/>
+            </a:pPr>
+            <a:r>
+              <a:rPr lang="en-US" sz="1500" dirty="0">
+                <a:solidFill>
+                  <a:srgbClr val="1D1D1F"/>
+                </a:solidFill>
+              </a:rPr>
+              <a:t>Repositories page: the three indexed repositories (demo, itsdangerous, Nexus).</a:t>
+            </a:r>
+            <a:endParaRPr lang="en-US" sz="1500" dirty="0"/>
+          </a:p>
+        </p:txBody>
+      </p:sp>
+      <p:sp>
+        <p:nvSpPr>
+          <p:cNvPr id="25" name="Slide Number Placeholder 0"/>
+          <p:cNvSpPr>
+            <a:spLocks noGrp="1"/>
+          </p:cNvSpPr>
+          <p:nvPr>
+            <p:ph type="sldNum" sz="quarter" idx="4294967295"/>
+          </p:nvPr>
+        </p:nvSpPr>
+        <p:spPr>
+          <a:xfrm>
+            <a:off x="10725912" y="6419088"/>
+            <a:ext cx="914400" cy="274320"/>
+          </a:xfrm>
+          <a:prstGeom prst="rect">
+            <a:avLst/>
+          </a:prstGeom>
+          <a:extLst>
+            <a:ext uri="{C572A759-6A51-4108-AA02-DFA0A04FC94B}">
+              <ma14:wrappingTextBoxFlag xmlns:ma14="http://schemas.microsoft.com/office/mac/drawingml/2011/main" val="0"/>
+            </a:ext>
+          </a:extLst>
+        </p:spPr>
+        <p:txBody>
+          <a:bodyPr/>
+          <a:lstStyle>
+            <a:lvl1pPr>
+              <a:defRPr sz="1100">
+                <a:solidFill>
+                  <a:srgbClr val="55555B"/>
+                </a:solidFill>
+                <a:latin typeface="Calibri"/>
+                <a:ea typeface="Calibri"/>
+                <a:cs typeface="Calibri"/>
+              </a:defRPr>
+            </a:lvl1pPr>
+          </a:lstStyle>
+          <a:p>
+            <a:pPr algn="r"/>
+            <a:fld id="{F7021451-1387-4CA6-816F-3879F97B5CBC}" type="slidenum">
+              <a:rPr b="0" lang="en-US"/>
+              <a:t>20</a:t>
+            </a:fld>
+            <a:endParaRPr lang="en-US"/>
+          </a:p>
+        </p:txBody>
+      </p:sp>
+    </p:spTree>
+  </p:cSld>
+  <p:clrMapOvr>
+    <a:masterClrMapping/>
+  </p:clrMapOvr>
+</p:sld>
+</file>
+
+<file path=ppt/slides/slide21.xml><?xml version="1.0" encoding="utf-8"?>
+<p:sld xmlns:a="http://schemas.openxmlformats.org/drawingml/2006/main" xmlns:r="http://schemas.openxmlformats.org/officeDocument/2006/relationships" xmlns:p="http://schemas.openxmlformats.org/presentationml/2006/main">
+  <p:cSld name="Slide 21">
+    <p:spTree>
+      <p:nvGrpSpPr>
+        <p:cNvPr id="1" name=""/>
+        <p:cNvGrpSpPr/>
+        <p:nvPr/>
+      </p:nvGrpSpPr>
+      <p:grpSpPr>
+        <a:xfrm>
+          <a:off x="0" y="0"/>
+          <a:ext cx="0" cy="0"/>
+          <a:chOff x="0" y="0"/>
+          <a:chExt cx="0" cy="0"/>
+        </a:xfrm>
+      </p:grpSpPr>
+      <p:sp>
+        <p:nvSpPr>
+          <p:cNvPr id="2" name="Text 0"/>
+          <p:cNvSpPr txBox="1"/>
+          <p:nvPr/>
+        </p:nvSpPr>
+        <p:spPr>
+          <a:xfrm>
+            <a:off x="548640" y="2194560"/>
+            <a:ext cx="11091672" cy="1188720"/>
+          </a:xfrm>
+          <a:prstGeom prst="rect">
+            <a:avLst/>
+          </a:prstGeom>
+          <a:noFill/>
+          <a:ln/>
+        </p:spPr>
+        <p:txBody>
+          <a:bodyPr wrap="square" lIns="0" tIns="0" rIns="0" bIns="0" rtlCol="0" anchor="ctr"/>
+          <a:lstStyle/>
+          <a:p>
+            <a:pPr indent="0" marL="0">
+              <a:buNone/>
+            </a:pPr>
+            <a:r>
+              <a:rPr lang="en-US" sz="6400" b="1" dirty="0">
+                <a:solidFill>
+                  <a:srgbClr val="1D1D1F"/>
+                </a:solidFill>
+              </a:rPr>
+              <a:t>Questions?</a:t>
+            </a:r>
+            <a:endParaRPr lang="en-US" sz="6400" dirty="0"/>
+          </a:p>
+        </p:txBody>
+      </p:sp>
+      <p:sp>
+        <p:nvSpPr>
+          <p:cNvPr id="3" name="Text 1"/>
+          <p:cNvSpPr txBox="1"/>
+          <p:nvPr/>
+        </p:nvSpPr>
+        <p:spPr>
+          <a:xfrm>
+            <a:off x="548640" y="3566160"/>
+            <a:ext cx="11091672" cy="457200"/>
+          </a:xfrm>
+          <a:prstGeom prst="rect">
+            <a:avLst/>
+          </a:prstGeom>
+          <a:noFill/>
+          <a:ln/>
+        </p:spPr>
+        <p:txBody>
+          <a:bodyPr wrap="square" lIns="0" tIns="0" rIns="0" bIns="0" rtlCol="0" anchor="ctr"/>
+          <a:lstStyle/>
+          <a:p>
+            <a:pPr indent="0" marL="0">
+              <a:buNone/>
+            </a:pPr>
+            <a:r>
+              <a:rPr lang="en-US" sz="2200" dirty="0">
+                <a:solidFill>
+                  <a:srgbClr val="55555B"/>
+                </a:solidFill>
+              </a:rPr>
+              <a:t>github.com/IATESPAGHETTI/Code_Origin</a:t>
+            </a:r>
+            <a:endParaRPr lang="en-US" sz="2200" dirty="0"/>
+          </a:p>
+        </p:txBody>
+      </p:sp>
+      <p:sp>
+        <p:nvSpPr>
+          <p:cNvPr id="4" name="Text 2"/>
+          <p:cNvSpPr txBox="1"/>
+          <p:nvPr/>
+        </p:nvSpPr>
+        <p:spPr>
+          <a:xfrm>
+            <a:off x="548640" y="4297680"/>
+            <a:ext cx="11091672" cy="457200"/>
+          </a:xfrm>
+          <a:prstGeom prst="rect">
+            <a:avLst/>
+          </a:prstGeom>
+          <a:noFill/>
+          <a:ln/>
+        </p:spPr>
+        <p:txBody>
+          <a:bodyPr wrap="square" lIns="0" tIns="0" rIns="0" bIns="0" rtlCol="0" anchor="ctr"/>
+          <a:lstStyle/>
+          <a:p>
+            <a:pPr indent="0" marL="0">
+              <a:buNone/>
+            </a:pPr>
+            <a:r>
+              <a:rPr lang="en-US" sz="1800" dirty="0">
+                <a:solidFill>
+                  <a:srgbClr val="0071E3"/>
+                </a:solidFill>
+              </a:rPr>
+              <a:t>We claim: supported on one real repository for 7B models, not yet general.</a:t>
+            </a:r>
+            <a:endParaRPr lang="en-US" sz="1800" dirty="0"/>
+          </a:p>
+        </p:txBody>
+      </p:sp>
+      <p:sp>
+        <p:nvSpPr>
+          <p:cNvPr id="25" name="Slide Number Placeholder 0"/>
+          <p:cNvSpPr>
+            <a:spLocks noGrp="1"/>
+          </p:cNvSpPr>
+          <p:nvPr>
+            <p:ph type="sldNum" sz="quarter" idx="4294967295"/>
+          </p:nvPr>
+        </p:nvSpPr>
+        <p:spPr>
+          <a:xfrm>
+            <a:off x="10725912" y="6419088"/>
+            <a:ext cx="914400" cy="274320"/>
+          </a:xfrm>
+          <a:prstGeom prst="rect">
+            <a:avLst/>
+          </a:prstGeom>
+          <a:extLst>
+            <a:ext uri="{C572A759-6A51-4108-AA02-DFA0A04FC94B}">
+              <ma14:wrappingTextBoxFlag xmlns:ma14="http://schemas.microsoft.com/office/mac/drawingml/2011/main" val="0"/>
+            </a:ext>
+          </a:extLst>
+        </p:spPr>
+        <p:txBody>
+          <a:bodyPr/>
+          <a:lstStyle>
+            <a:lvl1pPr>
+              <a:defRPr sz="1100">
+                <a:solidFill>
+                  <a:srgbClr val="55555B"/>
+                </a:solidFill>
+                <a:latin typeface="Calibri"/>
+                <a:ea typeface="Calibri"/>
+                <a:cs typeface="Calibri"/>
+              </a:defRPr>
+            </a:lvl1pPr>
+          </a:lstStyle>
+          <a:p>
+            <a:pPr algn="r"/>
+            <a:fld id="{F7021451-1387-4CA6-816F-3879F97B5CBC}" type="slidenum">
+              <a:rPr b="0" lang="en-US"/>
+              <a:t>21</a:t>
+            </a:fld>
+            <a:endParaRPr lang="en-US"/>
+          </a:p>
+        </p:txBody>
+      </p:sp>
+    </p:spTree>
+  </p:cSld>
+  <p:clrMapOvr>
+    <a:masterClrMapping/>
+  </p:clrMapOvr>
+</p:sld>
+</file>
+
 <file path=ppt/slides/slide3.xml><?xml version="1.0" encoding="utf-8"?>
 <p:sld xmlns:a="http://schemas.openxmlformats.org/drawingml/2006/main" xmlns:r="http://schemas.openxmlformats.org/officeDocument/2006/relationships" xmlns:p="http://schemas.openxmlformats.org/presentationml/2006/main">
   <p:cSld name="Slide 3">
@@ -20745,7 +23631,7 @@
                   <a:srgbClr val="0071E3"/>
                 </a:solidFill>
               </a:rPr>
-              <a:t>OBSERVABILITY</a:t>
+              <a:t>CI AND CD</a:t>
             </a:r>
             <a:endParaRPr lang="en-US" sz="1200" dirty="0"/>
           </a:p>
@@ -20781,7 +23667,7 @@
                   <a:srgbClr val="1D1D1F"/>
                 </a:solidFill>
               </a:rPr>
-              <a:t>Monitoring with Prometheus and Grafana</a:t>
+              <a:t>What CI and CD runs are, and what they did</a:t>
             </a:r>
             <a:endParaRPr lang="en-US" sz="3600" dirty="0"/>
           </a:p>
@@ -20789,54 +23675,18 @@
       </p:sp>
       <p:sp>
         <p:nvSpPr>
-          <p:cNvPr id="4" name="Text 2"/>
-          <p:cNvSpPr txBox="1"/>
-          <p:nvPr/>
-        </p:nvSpPr>
-        <p:spPr>
-          <a:xfrm>
-            <a:off x="548640" y="1371600"/>
-            <a:ext cx="11091672" cy="548640"/>
-          </a:xfrm>
-          <a:prstGeom prst="rect">
-            <a:avLst/>
-          </a:prstGeom>
-          <a:noFill/>
-          <a:ln/>
-        </p:spPr>
-        <p:txBody>
-          <a:bodyPr wrap="square" lIns="0" tIns="0" rIns="0" bIns="0" rtlCol="0" anchor="t"/>
-          <a:lstStyle/>
-          <a:p>
-            <a:pPr indent="0" marL="0">
-              <a:buNone/>
-            </a:pPr>
-            <a:r>
-              <a:rPr lang="en-US" sz="1600" dirty="0">
-                <a:solidFill>
-                  <a:srgbClr val="55555B"/>
-                </a:solidFill>
-              </a:rPr>
-              <a:t>Prometheus scrapes the gateway and the evaluation service every 30 seconds; Grafana shows them live, with no login.</a:t>
-            </a:r>
-            <a:endParaRPr lang="en-US" sz="1600" dirty="0"/>
-          </a:p>
-        </p:txBody>
-      </p:sp>
-      <p:sp>
-        <p:nvSpPr>
-          <p:cNvPr id="6" name="Shape 3"/>
+          <p:cNvPr id="5" name="Shape 2"/>
           <p:cNvSpPr/>
           <p:nvPr/>
         </p:nvSpPr>
         <p:spPr>
           <a:xfrm>
-            <a:off x="548640" y="2103120"/>
-            <a:ext cx="4114800" cy="1234440"/>
+            <a:off x="548640" y="1463040"/>
+            <a:ext cx="5760720" cy="1600200"/>
           </a:xfrm>
           <a:prstGeom prst="roundRect">
             <a:avLst>
-              <a:gd name="adj" fmla="val 7407"/>
+              <a:gd name="adj" fmla="val 5714"/>
             </a:avLst>
           </a:prstGeom>
           <a:solidFill>
@@ -20859,14 +23709,50 @@
       </p:sp>
       <p:sp>
         <p:nvSpPr>
+          <p:cNvPr id="6" name="Text 3"/>
+          <p:cNvSpPr txBox="1"/>
+          <p:nvPr/>
+        </p:nvSpPr>
+        <p:spPr>
+          <a:xfrm>
+            <a:off x="731520" y="1600200"/>
+            <a:ext cx="5394960" cy="310896"/>
+          </a:xfrm>
+          <a:prstGeom prst="rect">
+            <a:avLst/>
+          </a:prstGeom>
+          <a:noFill/>
+          <a:ln/>
+        </p:spPr>
+        <p:txBody>
+          <a:bodyPr wrap="square" lIns="0" tIns="0" rIns="0" bIns="0" rtlCol="0" anchor="t"/>
+          <a:lstStyle/>
+          <a:p>
+            <a:pPr indent="0" marL="0">
+              <a:buNone/>
+            </a:pPr>
+            <a:r>
+              <a:rPr lang="en-US" sz="1600" b="1" dirty="0">
+                <a:solidFill>
+                  <a:srgbClr val="0071E3"/>
+                </a:solidFill>
+              </a:rPr>
+              <a:t>CI: continuous integration</a:t>
+            </a:r>
+            <a:endParaRPr lang="en-US" sz="1600" dirty="0"/>
+          </a:p>
+        </p:txBody>
+      </p:sp>
+      <p:sp>
+        <p:nvSpPr>
           <p:cNvPr id="7" name="Text 4"/>
           <p:cNvSpPr txBox="1"/>
           <p:nvPr/>
         </p:nvSpPr>
         <p:spPr>
           <a:xfrm>
-            <a:off x="731520" y="2240280"/>
-            <a:ext cx="3749040" cy="292608"/>
+            <a:off x="731520" y="1911096"/>
+            <a:ext cx="5394960" cy="1042416"/>
           </a:xfrm>
           <a:prstGeom prst="rect">
             <a:avLst/>
@@ -20882,48 +23768,12 @@
               <a:buNone/>
             </a:pPr>
             <a:r>
-              <a:rPr lang="en-US" sz="1500" b="1" dirty="0">
-                <a:solidFill>
-                  <a:srgbClr val="0071E3"/>
-                </a:solidFill>
-              </a:rPr>
-              <a:t>Live service metrics</a:t>
-            </a:r>
-            <a:endParaRPr lang="en-US" sz="1500" dirty="0"/>
-          </a:p>
-        </p:txBody>
-      </p:sp>
-      <p:sp>
-        <p:nvSpPr>
-          <p:cNvPr id="8" name="Text 5"/>
-          <p:cNvSpPr txBox="1"/>
-          <p:nvPr/>
-        </p:nvSpPr>
-        <p:spPr>
-          <a:xfrm>
-            <a:off x="731520" y="2532888"/>
-            <a:ext cx="3749040" cy="694944"/>
-          </a:xfrm>
-          <a:prstGeom prst="rect">
-            <a:avLst/>
-          </a:prstGeom>
-          <a:noFill/>
-          <a:ln/>
-        </p:spPr>
-        <p:txBody>
-          <a:bodyPr wrap="square" lIns="0" tIns="0" rIns="0" bIns="0" rtlCol="0" anchor="t"/>
-          <a:lstStyle/>
-          <a:p>
-            <a:pPr indent="0" marL="0">
-              <a:buNone/>
-            </a:pPr>
-            <a:r>
               <a:rPr lang="en-US" sz="1200" dirty="0">
                 <a:solidFill>
                   <a:srgbClr val="55555B"/>
                 </a:solidFill>
               </a:rPr>
-              <a:t>Requests per second, p95 latency, 5xx rate, guardrail triggers, LLM tokens, refusals, and service logs (Loki).</a:t>
+              <a:t>On every push GitHub builds the project and runs all checks automatically: lint and drift checks, 6 test jobs, frontend build, secret and vulnerability scan, compose smoke test, evaluation gate. A red run means the change broke something.</a:t>
             </a:r>
             <a:endParaRPr lang="en-US" sz="1200" dirty="0"/>
           </a:p>
@@ -20931,18 +23781,18 @@
       </p:sp>
       <p:sp>
         <p:nvSpPr>
-          <p:cNvPr id="9" name="Shape 6"/>
+          <p:cNvPr id="8" name="Shape 5"/>
           <p:cNvSpPr/>
           <p:nvPr/>
         </p:nvSpPr>
         <p:spPr>
           <a:xfrm>
-            <a:off x="548640" y="3474720"/>
-            <a:ext cx="4114800" cy="1234440"/>
+            <a:off x="548640" y="3200400"/>
+            <a:ext cx="5760720" cy="1508760"/>
           </a:xfrm>
           <a:prstGeom prst="roundRect">
             <a:avLst>
-              <a:gd name="adj" fmla="val 7407"/>
+              <a:gd name="adj" fmla="val 6061"/>
             </a:avLst>
           </a:prstGeom>
           <a:solidFill>
@@ -20965,14 +23815,50 @@
       </p:sp>
       <p:sp>
         <p:nvSpPr>
+          <p:cNvPr id="9" name="Text 6"/>
+          <p:cNvSpPr txBox="1"/>
+          <p:nvPr/>
+        </p:nvSpPr>
+        <p:spPr>
+          <a:xfrm>
+            <a:off x="731520" y="3337560"/>
+            <a:ext cx="5394960" cy="310896"/>
+          </a:xfrm>
+          <a:prstGeom prst="rect">
+            <a:avLst/>
+          </a:prstGeom>
+          <a:noFill/>
+          <a:ln/>
+        </p:spPr>
+        <p:txBody>
+          <a:bodyPr wrap="square" lIns="0" tIns="0" rIns="0" bIns="0" rtlCol="0" anchor="t"/>
+          <a:lstStyle/>
+          <a:p>
+            <a:pPr indent="0" marL="0">
+              <a:buNone/>
+            </a:pPr>
+            <a:r>
+              <a:rPr lang="en-US" sz="1600" b="1" dirty="0">
+                <a:solidFill>
+                  <a:srgbClr val="0071E3"/>
+                </a:solidFill>
+              </a:rPr>
+              <a:t>CD: continuous delivery</a:t>
+            </a:r>
+            <a:endParaRPr lang="en-US" sz="1600" dirty="0"/>
+          </a:p>
+        </p:txBody>
+      </p:sp>
+      <p:sp>
+        <p:nvSpPr>
           <p:cNvPr id="10" name="Text 7"/>
           <p:cNvSpPr txBox="1"/>
           <p:nvPr/>
         </p:nvSpPr>
         <p:spPr>
           <a:xfrm>
-            <a:off x="731520" y="3611880"/>
-            <a:ext cx="3749040" cy="292608"/>
+            <a:off x="731520" y="3648456"/>
+            <a:ext cx="5394960" cy="950976"/>
           </a:xfrm>
           <a:prstGeom prst="rect">
             <a:avLst/>
@@ -20988,48 +23874,12 @@
               <a:buNone/>
             </a:pPr>
             <a:r>
-              <a:rPr lang="en-US" sz="1500" b="1" dirty="0">
-                <a:solidFill>
-                  <a:srgbClr val="0071E3"/>
-                </a:solidFill>
-              </a:rPr>
-              <a:t>Evaluation results as metrics</a:t>
-            </a:r>
-            <a:endParaRPr lang="en-US" sz="1500" dirty="0"/>
-          </a:p>
-        </p:txBody>
-      </p:sp>
-      <p:sp>
-        <p:nvSpPr>
-          <p:cNvPr id="11" name="Text 8"/>
-          <p:cNvSpPr txBox="1"/>
-          <p:nvPr/>
-        </p:nvSpPr>
-        <p:spPr>
-          <a:xfrm>
-            <a:off x="731520" y="3904488"/>
-            <a:ext cx="3749040" cy="694944"/>
-          </a:xfrm>
-          <a:prstGeom prst="rect">
-            <a:avLst/>
-          </a:prstGeom>
-          <a:noFill/>
-          <a:ln/>
-        </p:spPr>
-        <p:txBody>
-          <a:bodyPr wrap="square" lIns="0" tIns="0" rIns="0" bIns="0" rtlCol="0" anchor="t"/>
-          <a:lstStyle/>
-          <a:p>
-            <a:pPr indent="0" marL="0">
-              <a:buNone/>
-            </a:pPr>
-            <a:r>
               <a:rPr lang="en-US" sz="1200" dirty="0">
                 <a:solidFill>
                   <a:srgbClr val="55555B"/>
                 </a:solidFill>
               </a:rPr>
-              <a:t>Correctness per model and mode, history effect with its 95% interval, the verdict, and the failure taxonomy, for any run.</a:t>
+              <a:t>On a version tag (v*) the release workflow builds, scans and publishes the 7 images to GHCR and cuts a release. Configured but not run yet: no tag was pushed, so nothing was published.</a:t>
             </a:r>
             <a:endParaRPr lang="en-US" sz="1200" dirty="0"/>
           </a:p>
@@ -21037,18 +23887,18 @@
       </p:sp>
       <p:sp>
         <p:nvSpPr>
-          <p:cNvPr id="12" name="Shape 9"/>
+          <p:cNvPr id="11" name="Shape 8"/>
           <p:cNvSpPr/>
           <p:nvPr/>
         </p:nvSpPr>
         <p:spPr>
           <a:xfrm>
             <a:off x="548640" y="4846320"/>
-            <a:ext cx="4114800" cy="1234440"/>
+            <a:ext cx="5760720" cy="1417320"/>
           </a:xfrm>
           <a:prstGeom prst="roundRect">
             <a:avLst>
-              <a:gd name="adj" fmla="val 7407"/>
+              <a:gd name="adj" fmla="val 6452"/>
             </a:avLst>
           </a:prstGeom>
           <a:solidFill>
@@ -21071,14 +23921,50 @@
       </p:sp>
       <p:sp>
         <p:nvSpPr>
+          <p:cNvPr id="12" name="Text 9"/>
+          <p:cNvSpPr txBox="1"/>
+          <p:nvPr/>
+        </p:nvSpPr>
+        <p:spPr>
+          <a:xfrm>
+            <a:off x="731520" y="4983480"/>
+            <a:ext cx="5394960" cy="310896"/>
+          </a:xfrm>
+          <a:prstGeom prst="rect">
+            <a:avLst/>
+          </a:prstGeom>
+          <a:noFill/>
+          <a:ln/>
+        </p:spPr>
+        <p:txBody>
+          <a:bodyPr wrap="square" lIns="0" tIns="0" rIns="0" bIns="0" rtlCol="0" anchor="t"/>
+          <a:lstStyle/>
+          <a:p>
+            <a:pPr indent="0" marL="0">
+              <a:buNone/>
+            </a:pPr>
+            <a:r>
+              <a:rPr lang="en-US" sz="1600" b="1" dirty="0">
+                <a:solidFill>
+                  <a:srgbClr val="0071E3"/>
+                </a:solidFill>
+              </a:rPr>
+              <a:t>Problems the runs caught</a:t>
+            </a:r>
+            <a:endParaRPr lang="en-US" sz="1600" dirty="0"/>
+          </a:p>
+        </p:txBody>
+      </p:sp>
+      <p:sp>
+        <p:nvSpPr>
           <p:cNvPr id="13" name="Text 10"/>
           <p:cNvSpPr txBox="1"/>
           <p:nvPr/>
         </p:nvSpPr>
         <p:spPr>
           <a:xfrm>
-            <a:off x="731520" y="4983480"/>
-            <a:ext cx="3749040" cy="292608"/>
+            <a:off x="731520" y="5294376"/>
+            <a:ext cx="5394960" cy="859536"/>
           </a:xfrm>
           <a:prstGeom prst="rect">
             <a:avLst/>
@@ -21094,48 +23980,12 @@
               <a:buNone/>
             </a:pPr>
             <a:r>
-              <a:rPr lang="en-US" sz="1500" b="1" dirty="0">
-                <a:solidFill>
-                  <a:srgbClr val="0071E3"/>
-                </a:solidFill>
-              </a:rPr>
-              <a:t>Quality and cost</a:t>
-            </a:r>
-            <a:endParaRPr lang="en-US" sz="1500" dirty="0"/>
-          </a:p>
-        </p:txBody>
-      </p:sp>
-      <p:sp>
-        <p:nvSpPr>
-          <p:cNvPr id="14" name="Text 11"/>
-          <p:cNvSpPr txBox="1"/>
-          <p:nvPr/>
-        </p:nvSpPr>
-        <p:spPr>
-          <a:xfrm>
-            <a:off x="731520" y="5276088"/>
-            <a:ext cx="3749040" cy="694944"/>
-          </a:xfrm>
-          <a:prstGeom prst="rect">
-            <a:avLst/>
-          </a:prstGeom>
-          <a:noFill/>
-          <a:ln/>
-        </p:spPr>
-        <p:txBody>
-          <a:bodyPr wrap="square" lIns="0" tIns="0" rIns="0" bIns="0" rtlCol="0" anchor="t"/>
-          <a:lstStyle/>
-          <a:p>
-            <a:pPr indent="0" marL="0">
-              <a:buNone/>
-            </a:pPr>
-            <a:r>
               <a:rPr lang="en-US" sz="1200" dirty="0">
                 <a:solidFill>
                   <a:srgbClr val="55555B"/>
                 </a:solidFill>
               </a:rPr>
-              <a:t>Hallucination rate 31% / 22% / 59%, retrieval recall 0.14 to 0.70 to 1.00, latency and tokens per model.</a:t>
+              <a:t>HIGH dependency vulnerability, Dockerfiles running as root, linter drift, wrong script argument, wrong scanner version, and two lint errors in a new script today.</a:t>
             </a:r>
             <a:endParaRPr lang="en-US" sz="1200" dirty="0"/>
           </a:p>
@@ -21143,18 +23993,18 @@
       </p:sp>
       <p:sp>
         <p:nvSpPr>
-          <p:cNvPr id="15" name="Shape 12"/>
+          <p:cNvPr id="14" name="Shape 11"/>
           <p:cNvSpPr/>
           <p:nvPr/>
         </p:nvSpPr>
         <p:spPr>
           <a:xfrm>
-            <a:off x="4937760" y="2103120"/>
-            <a:ext cx="6702552" cy="4160520"/>
+            <a:off x="6583680" y="1463040"/>
+            <a:ext cx="2423160" cy="1417320"/>
           </a:xfrm>
           <a:prstGeom prst="roundRect">
             <a:avLst>
-              <a:gd name="adj" fmla="val 1758"/>
+              <a:gd name="adj" fmla="val 6452"/>
             </a:avLst>
           </a:prstGeom>
           <a:solidFill>
@@ -21168,30 +24018,573 @@
           </a:ln>
         </p:spPr>
       </p:sp>
-      <p:pic>
-        <p:nvPicPr>
-          <p:cNvPr id="16" name="Image 0" descr="Grafana panels: hallucination rate, retrieval quality, latency, tokens per answer">    </p:cNvPr>
-          <p:cNvPicPr>
-            <a:picLocks noChangeAspect="1"/>
-          </p:cNvPicPr>
-          <p:nvPr/>
-        </p:nvPicPr>
-        <p:blipFill>
-          <a:blip r:embed="rId1"/>
-          <a:stretch>
-            <a:fillRect/>
-          </a:stretch>
-        </p:blipFill>
-        <p:spPr>
-          <a:xfrm>
-            <a:off x="5029200" y="2194560"/>
-            <a:ext cx="6519672" cy="4074566"/>
+      <p:sp>
+        <p:nvSpPr>
+          <p:cNvPr id="15" name="Text 12"/>
+          <p:cNvSpPr txBox="1"/>
+          <p:nvPr/>
+        </p:nvSpPr>
+        <p:spPr>
+          <a:xfrm>
+            <a:off x="6720840" y="1572768"/>
+            <a:ext cx="2148840" cy="640080"/>
           </a:xfrm>
           <a:prstGeom prst="rect">
             <a:avLst/>
           </a:prstGeom>
-        </p:spPr>
-      </p:pic>
+          <a:noFill/>
+          <a:ln/>
+        </p:spPr>
+        <p:txBody>
+          <a:bodyPr wrap="square" lIns="0" tIns="0" rIns="0" bIns="0" rtlCol="0" anchor="ctr"/>
+          <a:lstStyle/>
+          <a:p>
+            <a:pPr indent="0" marL="0">
+              <a:buNone/>
+            </a:pPr>
+            <a:r>
+              <a:rPr lang="en-US" sz="3000" b="1" dirty="0">
+                <a:solidFill>
+                  <a:srgbClr val="0071E3"/>
+                </a:solidFill>
+              </a:rPr>
+              <a:t>22</a:t>
+            </a:r>
+            <a:endParaRPr lang="en-US" sz="3000" dirty="0"/>
+          </a:p>
+        </p:txBody>
+      </p:sp>
+      <p:sp>
+        <p:nvSpPr>
+          <p:cNvPr id="16" name="Text 13"/>
+          <p:cNvSpPr txBox="1"/>
+          <p:nvPr/>
+        </p:nvSpPr>
+        <p:spPr>
+          <a:xfrm>
+            <a:off x="6720840" y="2212848"/>
+            <a:ext cx="2148840" cy="594360"/>
+          </a:xfrm>
+          <a:prstGeom prst="rect">
+            <a:avLst/>
+          </a:prstGeom>
+          <a:noFill/>
+          <a:ln/>
+        </p:spPr>
+        <p:txBody>
+          <a:bodyPr wrap="square" lIns="0" tIns="0" rIns="0" bIns="0" rtlCol="0" anchor="t"/>
+          <a:lstStyle/>
+          <a:p>
+            <a:pPr indent="0" marL="0">
+              <a:buNone/>
+            </a:pPr>
+            <a:r>
+              <a:rPr lang="en-US" sz="1200" dirty="0">
+                <a:solidFill>
+                  <a:srgbClr val="55555B"/>
+                </a:solidFill>
+              </a:rPr>
+              <a:t>workflow runs so far</a:t>
+            </a:r>
+            <a:endParaRPr lang="en-US" sz="1200" dirty="0"/>
+          </a:p>
+        </p:txBody>
+      </p:sp>
+      <p:sp>
+        <p:nvSpPr>
+          <p:cNvPr id="17" name="Shape 14"/>
+          <p:cNvSpPr/>
+          <p:nvPr/>
+        </p:nvSpPr>
+        <p:spPr>
+          <a:xfrm>
+            <a:off x="9144000" y="1463040"/>
+            <a:ext cx="2423160" cy="1417320"/>
+          </a:xfrm>
+          <a:prstGeom prst="roundRect">
+            <a:avLst>
+              <a:gd name="adj" fmla="val 6452"/>
+            </a:avLst>
+          </a:prstGeom>
+          <a:solidFill>
+            <a:srgbClr val="FFFFFF"/>
+          </a:solidFill>
+          <a:ln w="9525">
+            <a:solidFill>
+              <a:srgbClr val="D9D9DE"/>
+            </a:solidFill>
+            <a:prstDash val="solid"/>
+          </a:ln>
+        </p:spPr>
+      </p:sp>
+      <p:sp>
+        <p:nvSpPr>
+          <p:cNvPr id="18" name="Text 15"/>
+          <p:cNvSpPr txBox="1"/>
+          <p:nvPr/>
+        </p:nvSpPr>
+        <p:spPr>
+          <a:xfrm>
+            <a:off x="9281160" y="1572768"/>
+            <a:ext cx="2148840" cy="640080"/>
+          </a:xfrm>
+          <a:prstGeom prst="rect">
+            <a:avLst/>
+          </a:prstGeom>
+          <a:noFill/>
+          <a:ln/>
+        </p:spPr>
+        <p:txBody>
+          <a:bodyPr wrap="square" lIns="0" tIns="0" rIns="0" bIns="0" rtlCol="0" anchor="ctr"/>
+          <a:lstStyle/>
+          <a:p>
+            <a:pPr indent="0" marL="0">
+              <a:buNone/>
+            </a:pPr>
+            <a:r>
+              <a:rPr lang="en-US" sz="3000" b="1" dirty="0">
+                <a:solidFill>
+                  <a:srgbClr val="0071E3"/>
+                </a:solidFill>
+              </a:rPr>
+              <a:t>14</a:t>
+            </a:r>
+            <a:endParaRPr lang="en-US" sz="3000" dirty="0"/>
+          </a:p>
+        </p:txBody>
+      </p:sp>
+      <p:sp>
+        <p:nvSpPr>
+          <p:cNvPr id="19" name="Text 16"/>
+          <p:cNvSpPr txBox="1"/>
+          <p:nvPr/>
+        </p:nvSpPr>
+        <p:spPr>
+          <a:xfrm>
+            <a:off x="9281160" y="2212848"/>
+            <a:ext cx="2148840" cy="594360"/>
+          </a:xfrm>
+          <a:prstGeom prst="rect">
+            <a:avLst/>
+          </a:prstGeom>
+          <a:noFill/>
+          <a:ln/>
+        </p:spPr>
+        <p:txBody>
+          <a:bodyPr wrap="square" lIns="0" tIns="0" rIns="0" bIns="0" rtlCol="0" anchor="t"/>
+          <a:lstStyle/>
+          <a:p>
+            <a:pPr indent="0" marL="0">
+              <a:buNone/>
+            </a:pPr>
+            <a:r>
+              <a:rPr lang="en-US" sz="1200" dirty="0">
+                <a:solidFill>
+                  <a:srgbClr val="55555B"/>
+                </a:solidFill>
+              </a:rPr>
+              <a:t>CI runs passed</a:t>
+            </a:r>
+            <a:endParaRPr lang="en-US" sz="1200" dirty="0"/>
+          </a:p>
+        </p:txBody>
+      </p:sp>
+      <p:sp>
+        <p:nvSpPr>
+          <p:cNvPr id="20" name="Shape 17"/>
+          <p:cNvSpPr/>
+          <p:nvPr/>
+        </p:nvSpPr>
+        <p:spPr>
+          <a:xfrm>
+            <a:off x="6583680" y="3063240"/>
+            <a:ext cx="2423160" cy="1417320"/>
+          </a:xfrm>
+          <a:prstGeom prst="roundRect">
+            <a:avLst>
+              <a:gd name="adj" fmla="val 6452"/>
+            </a:avLst>
+          </a:prstGeom>
+          <a:solidFill>
+            <a:srgbClr val="FFFFFF"/>
+          </a:solidFill>
+          <a:ln w="9525">
+            <a:solidFill>
+              <a:srgbClr val="D9D9DE"/>
+            </a:solidFill>
+            <a:prstDash val="solid"/>
+          </a:ln>
+        </p:spPr>
+      </p:sp>
+      <p:sp>
+        <p:nvSpPr>
+          <p:cNvPr id="21" name="Text 18"/>
+          <p:cNvSpPr txBox="1"/>
+          <p:nvPr/>
+        </p:nvSpPr>
+        <p:spPr>
+          <a:xfrm>
+            <a:off x="6720840" y="3172968"/>
+            <a:ext cx="2148840" cy="640080"/>
+          </a:xfrm>
+          <a:prstGeom prst="rect">
+            <a:avLst/>
+          </a:prstGeom>
+          <a:noFill/>
+          <a:ln/>
+        </p:spPr>
+        <p:txBody>
+          <a:bodyPr wrap="square" lIns="0" tIns="0" rIns="0" bIns="0" rtlCol="0" anchor="ctr"/>
+          <a:lstStyle/>
+          <a:p>
+            <a:pPr indent="0" marL="0">
+              <a:buNone/>
+            </a:pPr>
+            <a:r>
+              <a:rPr lang="en-US" sz="3000" b="1" dirty="0">
+                <a:solidFill>
+                  <a:srgbClr val="0071E3"/>
+                </a:solidFill>
+              </a:rPr>
+              <a:t>1</a:t>
+            </a:r>
+            <a:endParaRPr lang="en-US" sz="3000" dirty="0"/>
+          </a:p>
+        </p:txBody>
+      </p:sp>
+      <p:sp>
+        <p:nvSpPr>
+          <p:cNvPr id="22" name="Text 19"/>
+          <p:cNvSpPr txBox="1"/>
+          <p:nvPr/>
+        </p:nvSpPr>
+        <p:spPr>
+          <a:xfrm>
+            <a:off x="6720840" y="3813048"/>
+            <a:ext cx="2148840" cy="594360"/>
+          </a:xfrm>
+          <a:prstGeom prst="rect">
+            <a:avLst/>
+          </a:prstGeom>
+          <a:noFill/>
+          <a:ln/>
+        </p:spPr>
+        <p:txBody>
+          <a:bodyPr wrap="square" lIns="0" tIns="0" rIns="0" bIns="0" rtlCol="0" anchor="t"/>
+          <a:lstStyle/>
+          <a:p>
+            <a:pPr indent="0" marL="0">
+              <a:buNone/>
+            </a:pPr>
+            <a:r>
+              <a:rPr lang="en-US" sz="1200" dirty="0">
+                <a:solidFill>
+                  <a:srgbClr val="55555B"/>
+                </a:solidFill>
+              </a:rPr>
+              <a:t>failed (lint, fixed next commit)</a:t>
+            </a:r>
+            <a:endParaRPr lang="en-US" sz="1200" dirty="0"/>
+          </a:p>
+        </p:txBody>
+      </p:sp>
+      <p:sp>
+        <p:nvSpPr>
+          <p:cNvPr id="23" name="Shape 20"/>
+          <p:cNvSpPr/>
+          <p:nvPr/>
+        </p:nvSpPr>
+        <p:spPr>
+          <a:xfrm>
+            <a:off x="9144000" y="3063240"/>
+            <a:ext cx="2423160" cy="1417320"/>
+          </a:xfrm>
+          <a:prstGeom prst="roundRect">
+            <a:avLst>
+              <a:gd name="adj" fmla="val 6452"/>
+            </a:avLst>
+          </a:prstGeom>
+          <a:solidFill>
+            <a:srgbClr val="FFFFFF"/>
+          </a:solidFill>
+          <a:ln w="9525">
+            <a:solidFill>
+              <a:srgbClr val="D9D9DE"/>
+            </a:solidFill>
+            <a:prstDash val="solid"/>
+          </a:ln>
+        </p:spPr>
+      </p:sp>
+      <p:sp>
+        <p:nvSpPr>
+          <p:cNvPr id="24" name="Text 21"/>
+          <p:cNvSpPr txBox="1"/>
+          <p:nvPr/>
+        </p:nvSpPr>
+        <p:spPr>
+          <a:xfrm>
+            <a:off x="9281160" y="3172968"/>
+            <a:ext cx="2148840" cy="640080"/>
+          </a:xfrm>
+          <a:prstGeom prst="rect">
+            <a:avLst/>
+          </a:prstGeom>
+          <a:noFill/>
+          <a:ln/>
+        </p:spPr>
+        <p:txBody>
+          <a:bodyPr wrap="square" lIns="0" tIns="0" rIns="0" bIns="0" rtlCol="0" anchor="ctr"/>
+          <a:lstStyle/>
+          <a:p>
+            <a:pPr indent="0" marL="0">
+              <a:buNone/>
+            </a:pPr>
+            <a:r>
+              <a:rPr lang="en-US" sz="3000" b="1" dirty="0">
+                <a:solidFill>
+                  <a:srgbClr val="0071E3"/>
+                </a:solidFill>
+              </a:rPr>
+              <a:t>6</a:t>
+            </a:r>
+            <a:endParaRPr lang="en-US" sz="3000" dirty="0"/>
+          </a:p>
+        </p:txBody>
+      </p:sp>
+      <p:sp>
+        <p:nvSpPr>
+          <p:cNvPr id="25" name="Text 22"/>
+          <p:cNvSpPr txBox="1"/>
+          <p:nvPr/>
+        </p:nvSpPr>
+        <p:spPr>
+          <a:xfrm>
+            <a:off x="9281160" y="3813048"/>
+            <a:ext cx="2148840" cy="594360"/>
+          </a:xfrm>
+          <a:prstGeom prst="rect">
+            <a:avLst/>
+          </a:prstGeom>
+          <a:noFill/>
+          <a:ln/>
+        </p:spPr>
+        <p:txBody>
+          <a:bodyPr wrap="square" lIns="0" tIns="0" rIns="0" bIns="0" rtlCol="0" anchor="t"/>
+          <a:lstStyle/>
+          <a:p>
+            <a:pPr indent="0" marL="0">
+              <a:buNone/>
+            </a:pPr>
+            <a:r>
+              <a:rPr lang="en-US" sz="1200" dirty="0">
+                <a:solidFill>
+                  <a:srgbClr val="55555B"/>
+                </a:solidFill>
+              </a:rPr>
+              <a:t>cancelled, superseded by a newer push</a:t>
+            </a:r>
+            <a:endParaRPr lang="en-US" sz="1200" dirty="0"/>
+          </a:p>
+        </p:txBody>
+      </p:sp>
+      <p:sp>
+        <p:nvSpPr>
+          <p:cNvPr id="26" name="Shape 23"/>
+          <p:cNvSpPr/>
+          <p:nvPr/>
+        </p:nvSpPr>
+        <p:spPr>
+          <a:xfrm>
+            <a:off x="6583680" y="4663440"/>
+            <a:ext cx="2423160" cy="1417320"/>
+          </a:xfrm>
+          <a:prstGeom prst="roundRect">
+            <a:avLst>
+              <a:gd name="adj" fmla="val 6452"/>
+            </a:avLst>
+          </a:prstGeom>
+          <a:solidFill>
+            <a:srgbClr val="FFFFFF"/>
+          </a:solidFill>
+          <a:ln w="9525">
+            <a:solidFill>
+              <a:srgbClr val="D9D9DE"/>
+            </a:solidFill>
+            <a:prstDash val="solid"/>
+          </a:ln>
+        </p:spPr>
+      </p:sp>
+      <p:sp>
+        <p:nvSpPr>
+          <p:cNvPr id="27" name="Text 24"/>
+          <p:cNvSpPr txBox="1"/>
+          <p:nvPr/>
+        </p:nvSpPr>
+        <p:spPr>
+          <a:xfrm>
+            <a:off x="6720840" y="4773168"/>
+            <a:ext cx="2148840" cy="640080"/>
+          </a:xfrm>
+          <a:prstGeom prst="rect">
+            <a:avLst/>
+          </a:prstGeom>
+          <a:noFill/>
+          <a:ln/>
+        </p:spPr>
+        <p:txBody>
+          <a:bodyPr wrap="square" lIns="0" tIns="0" rIns="0" bIns="0" rtlCol="0" anchor="ctr"/>
+          <a:lstStyle/>
+          <a:p>
+            <a:pPr indent="0" marL="0">
+              <a:buNone/>
+            </a:pPr>
+            <a:r>
+              <a:rPr lang="en-US" sz="3000" b="1" dirty="0">
+                <a:solidFill>
+                  <a:srgbClr val="0071E3"/>
+                </a:solidFill>
+              </a:rPr>
+              <a:t>3.1 min</a:t>
+            </a:r>
+            <a:endParaRPr lang="en-US" sz="3000" dirty="0"/>
+          </a:p>
+        </p:txBody>
+      </p:sp>
+      <p:sp>
+        <p:nvSpPr>
+          <p:cNvPr id="28" name="Text 25"/>
+          <p:cNvSpPr txBox="1"/>
+          <p:nvPr/>
+        </p:nvSpPr>
+        <p:spPr>
+          <a:xfrm>
+            <a:off x="6720840" y="5413248"/>
+            <a:ext cx="2148840" cy="594360"/>
+          </a:xfrm>
+          <a:prstGeom prst="rect">
+            <a:avLst/>
+          </a:prstGeom>
+          <a:noFill/>
+          <a:ln/>
+        </p:spPr>
+        <p:txBody>
+          <a:bodyPr wrap="square" lIns="0" tIns="0" rIns="0" bIns="0" rtlCol="0" anchor="t"/>
+          <a:lstStyle/>
+          <a:p>
+            <a:pPr indent="0" marL="0">
+              <a:buNone/>
+            </a:pPr>
+            <a:r>
+              <a:rPr lang="en-US" sz="1200" dirty="0">
+                <a:solidFill>
+                  <a:srgbClr val="55555B"/>
+                </a:solidFill>
+              </a:rPr>
+              <a:t>median CI run, 11 jobs</a:t>
+            </a:r>
+            <a:endParaRPr lang="en-US" sz="1200" dirty="0"/>
+          </a:p>
+        </p:txBody>
+      </p:sp>
+      <p:sp>
+        <p:nvSpPr>
+          <p:cNvPr id="29" name="Shape 26"/>
+          <p:cNvSpPr/>
+          <p:nvPr/>
+        </p:nvSpPr>
+        <p:spPr>
+          <a:xfrm>
+            <a:off x="9144000" y="4663440"/>
+            <a:ext cx="2423160" cy="1417320"/>
+          </a:xfrm>
+          <a:prstGeom prst="roundRect">
+            <a:avLst>
+              <a:gd name="adj" fmla="val 6452"/>
+            </a:avLst>
+          </a:prstGeom>
+          <a:solidFill>
+            <a:srgbClr val="FFFFFF"/>
+          </a:solidFill>
+          <a:ln w="9525">
+            <a:solidFill>
+              <a:srgbClr val="D9D9DE"/>
+            </a:solidFill>
+            <a:prstDash val="solid"/>
+          </a:ln>
+        </p:spPr>
+      </p:sp>
+      <p:sp>
+        <p:nvSpPr>
+          <p:cNvPr id="30" name="Text 27"/>
+          <p:cNvSpPr txBox="1"/>
+          <p:nvPr/>
+        </p:nvSpPr>
+        <p:spPr>
+          <a:xfrm>
+            <a:off x="9281160" y="4773168"/>
+            <a:ext cx="2148840" cy="640080"/>
+          </a:xfrm>
+          <a:prstGeom prst="rect">
+            <a:avLst/>
+          </a:prstGeom>
+          <a:noFill/>
+          <a:ln/>
+        </p:spPr>
+        <p:txBody>
+          <a:bodyPr wrap="square" lIns="0" tIns="0" rIns="0" bIns="0" rtlCol="0" anchor="ctr"/>
+          <a:lstStyle/>
+          <a:p>
+            <a:pPr indent="0" marL="0">
+              <a:buNone/>
+            </a:pPr>
+            <a:r>
+              <a:rPr lang="en-US" sz="3000" b="1" dirty="0">
+                <a:solidFill>
+                  <a:srgbClr val="0071E3"/>
+                </a:solidFill>
+              </a:rPr>
+              <a:t>1</a:t>
+            </a:r>
+            <a:endParaRPr lang="en-US" sz="3000" dirty="0"/>
+          </a:p>
+        </p:txBody>
+      </p:sp>
+      <p:sp>
+        <p:nvSpPr>
+          <p:cNvPr id="31" name="Text 28"/>
+          <p:cNvSpPr txBox="1"/>
+          <p:nvPr/>
+        </p:nvSpPr>
+        <p:spPr>
+          <a:xfrm>
+            <a:off x="9281160" y="5413248"/>
+            <a:ext cx="2148840" cy="594360"/>
+          </a:xfrm>
+          <a:prstGeom prst="rect">
+            <a:avLst/>
+          </a:prstGeom>
+          <a:noFill/>
+          <a:ln/>
+        </p:spPr>
+        <p:txBody>
+          <a:bodyPr wrap="square" lIns="0" tIns="0" rIns="0" bIns="0" rtlCol="0" anchor="t"/>
+          <a:lstStyle/>
+          <a:p>
+            <a:pPr indent="0" marL="0">
+              <a:buNone/>
+            </a:pPr>
+            <a:r>
+              <a:rPr lang="en-US" sz="1200" dirty="0">
+                <a:solidFill>
+                  <a:srgbClr val="55555B"/>
+                </a:solidFill>
+              </a:rPr>
+              <a:t>nightly evaluation run, passed</a:t>
+            </a:r>
+            <a:endParaRPr lang="en-US" sz="1200" dirty="0"/>
+          </a:p>
+        </p:txBody>
+      </p:sp>
       <p:sp>
         <p:nvSpPr>
           <p:cNvPr id="25" name="Slide Number Placeholder 0"/>
